--- a/Day 5/Guerrilla AI - Day 5 - Slides.pptx
+++ b/Day 5/Guerrilla AI - Day 5 - Slides.pptx
@@ -1,34 +1,133 @@
 
 <file path=ppt/presentation.xml><?xml version="1.0" encoding="utf-8"?>
-<p:presentation xmlns:p="http://schemas.openxmlformats.org/presentationml/2006/main">
+<p:presentation xmlns:a="http://schemas.openxmlformats.org/drawingml/2006/main" xmlns:r="http://schemas.openxmlformats.org/officeDocument/2006/relationships" xmlns:p="http://schemas.openxmlformats.org/presentationml/2006/main">
   <p:sldMasterIdLst>
-    <p:sldMasterId xmlns:r="http://schemas.openxmlformats.org/officeDocument/2006/relationships" id="2147483648" r:id="R48ab34a450684667"/>
+    <p:sldMasterId id="2147483648" r:id="rId1"/>
   </p:sldMasterIdLst>
   <p:notesMasterIdLst>
-    <p:notesMasterId xmlns:r="http://schemas.openxmlformats.org/officeDocument/2006/relationships" r:id="R3e2b876308454703"/>
+    <p:notesMasterId r:id="rId10"/>
   </p:notesMasterIdLst>
   <p:sldIdLst>
-    <p:sldId xmlns:r="http://schemas.openxmlformats.org/officeDocument/2006/relationships" id="256" r:id="R183b4edfc1664971"/>
-    <p:sldId xmlns:r="http://schemas.openxmlformats.org/officeDocument/2006/relationships" id="257" r:id="R792557a2ea724868"/>
-    <p:sldId xmlns:r="http://schemas.openxmlformats.org/officeDocument/2006/relationships" id="258" r:id="R01cdde5febdf4a5a"/>
-    <p:sldId xmlns:r="http://schemas.openxmlformats.org/officeDocument/2006/relationships" id="259" r:id="R25d3556dcc4340a7"/>
-    <p:sldId xmlns:r="http://schemas.openxmlformats.org/officeDocument/2006/relationships" id="260" r:id="Rc698a215650642e4"/>
-    <p:sldId xmlns:r="http://schemas.openxmlformats.org/officeDocument/2006/relationships" id="261" r:id="R51877d1992d94fad"/>
-    <p:sldId xmlns:r="http://schemas.openxmlformats.org/officeDocument/2006/relationships" id="262" r:id="Rf4e91b2eb09f4cc1"/>
-    <p:sldId xmlns:r="http://schemas.openxmlformats.org/officeDocument/2006/relationships" id="263" r:id="R8b858562995546c7"/>
-    <p:sldId xmlns:r="http://schemas.openxmlformats.org/officeDocument/2006/relationships" id="264" r:id="R1d99fcaccb044f53"/>
+    <p:sldId id="256" r:id="rId2"/>
+    <p:sldId id="257" r:id="rId3"/>
+    <p:sldId id="258" r:id="rId4"/>
+    <p:sldId id="259" r:id="rId5"/>
+    <p:sldId id="261" r:id="rId6"/>
+    <p:sldId id="262" r:id="rId7"/>
+    <p:sldId id="263" r:id="rId8"/>
+    <p:sldId id="264" r:id="rId9"/>
   </p:sldIdLst>
-  <p:sldSz cx="12191695" cy="6858000"/>
+  <p:sldSz cx="12192000" cy="6858000"/>
   <p:notesSz cx="6858000" cy="9144000"/>
+  <p:defaultTextStyle>
+    <a:defPPr>
+      <a:defRPr lang="en-US"/>
+    </a:defPPr>
+    <a:lvl1pPr marL="0" algn="l" defTabSz="914400" rtl="0" eaLnBrk="1" latinLnBrk="0" hangingPunct="1">
+      <a:defRPr sz="1800" kern="1200">
+        <a:solidFill>
+          <a:schemeClr val="tx1"/>
+        </a:solidFill>
+        <a:latin typeface="+mn-lt"/>
+        <a:ea typeface="+mn-ea"/>
+        <a:cs typeface="+mn-cs"/>
+      </a:defRPr>
+    </a:lvl1pPr>
+    <a:lvl2pPr marL="457200" algn="l" defTabSz="914400" rtl="0" eaLnBrk="1" latinLnBrk="0" hangingPunct="1">
+      <a:defRPr sz="1800" kern="1200">
+        <a:solidFill>
+          <a:schemeClr val="tx1"/>
+        </a:solidFill>
+        <a:latin typeface="+mn-lt"/>
+        <a:ea typeface="+mn-ea"/>
+        <a:cs typeface="+mn-cs"/>
+      </a:defRPr>
+    </a:lvl2pPr>
+    <a:lvl3pPr marL="914400" algn="l" defTabSz="914400" rtl="0" eaLnBrk="1" latinLnBrk="0" hangingPunct="1">
+      <a:defRPr sz="1800" kern="1200">
+        <a:solidFill>
+          <a:schemeClr val="tx1"/>
+        </a:solidFill>
+        <a:latin typeface="+mn-lt"/>
+        <a:ea typeface="+mn-ea"/>
+        <a:cs typeface="+mn-cs"/>
+      </a:defRPr>
+    </a:lvl3pPr>
+    <a:lvl4pPr marL="1371600" algn="l" defTabSz="914400" rtl="0" eaLnBrk="1" latinLnBrk="0" hangingPunct="1">
+      <a:defRPr sz="1800" kern="1200">
+        <a:solidFill>
+          <a:schemeClr val="tx1"/>
+        </a:solidFill>
+        <a:latin typeface="+mn-lt"/>
+        <a:ea typeface="+mn-ea"/>
+        <a:cs typeface="+mn-cs"/>
+      </a:defRPr>
+    </a:lvl4pPr>
+    <a:lvl5pPr marL="1828800" algn="l" defTabSz="914400" rtl="0" eaLnBrk="1" latinLnBrk="0" hangingPunct="1">
+      <a:defRPr sz="1800" kern="1200">
+        <a:solidFill>
+          <a:schemeClr val="tx1"/>
+        </a:solidFill>
+        <a:latin typeface="+mn-lt"/>
+        <a:ea typeface="+mn-ea"/>
+        <a:cs typeface="+mn-cs"/>
+      </a:defRPr>
+    </a:lvl5pPr>
+    <a:lvl6pPr marL="2286000" algn="l" defTabSz="914400" rtl="0" eaLnBrk="1" latinLnBrk="0" hangingPunct="1">
+      <a:defRPr sz="1800" kern="1200">
+        <a:solidFill>
+          <a:schemeClr val="tx1"/>
+        </a:solidFill>
+        <a:latin typeface="+mn-lt"/>
+        <a:ea typeface="+mn-ea"/>
+        <a:cs typeface="+mn-cs"/>
+      </a:defRPr>
+    </a:lvl6pPr>
+    <a:lvl7pPr marL="2743200" algn="l" defTabSz="914400" rtl="0" eaLnBrk="1" latinLnBrk="0" hangingPunct="1">
+      <a:defRPr sz="1800" kern="1200">
+        <a:solidFill>
+          <a:schemeClr val="tx1"/>
+        </a:solidFill>
+        <a:latin typeface="+mn-lt"/>
+        <a:ea typeface="+mn-ea"/>
+        <a:cs typeface="+mn-cs"/>
+      </a:defRPr>
+    </a:lvl7pPr>
+    <a:lvl8pPr marL="3200400" algn="l" defTabSz="914400" rtl="0" eaLnBrk="1" latinLnBrk="0" hangingPunct="1">
+      <a:defRPr sz="1800" kern="1200">
+        <a:solidFill>
+          <a:schemeClr val="tx1"/>
+        </a:solidFill>
+        <a:latin typeface="+mn-lt"/>
+        <a:ea typeface="+mn-ea"/>
+        <a:cs typeface="+mn-cs"/>
+      </a:defRPr>
+    </a:lvl8pPr>
+    <a:lvl9pPr marL="3657600" algn="l" defTabSz="914400" rtl="0" eaLnBrk="1" latinLnBrk="0" hangingPunct="1">
+      <a:defRPr sz="1800" kern="1200">
+        <a:solidFill>
+          <a:schemeClr val="tx1"/>
+        </a:solidFill>
+        <a:latin typeface="+mn-lt"/>
+        <a:ea typeface="+mn-ea"/>
+        <a:cs typeface="+mn-cs"/>
+      </a:defRPr>
+    </a:lvl9pPr>
+  </p:defaultTextStyle>
+  <p:extLst>
+    <p:ext uri="{EFAFB233-063F-42B5-8137-9DF3F51BA10A}">
+      <p15:sldGuideLst xmlns:p15="http://schemas.microsoft.com/office/powerpoint/2012/main"/>
+    </p:ext>
+  </p:extLst>
 </p:presentation>
 </file>
 
 <file path=ppt/notesMasters/notesMaster1.xml><?xml version="1.0" encoding="utf-8"?>
-<p:notesMaster xmlns:p="http://schemas.openxmlformats.org/presentationml/2006/main">
+<p:notesMaster xmlns:a="http://schemas.openxmlformats.org/drawingml/2006/main" xmlns:r="http://schemas.openxmlformats.org/officeDocument/2006/relationships" xmlns:p="http://schemas.openxmlformats.org/presentationml/2006/main">
   <p:cSld>
     <p:bg>
       <p:bgRef idx="1001">
-        <a:schemeClr xmlns:a="http://schemas.openxmlformats.org/drawingml/2006/main" val="bg1"/>
+        <a:schemeClr val="bg1"/>
       </p:bgRef>
     </p:bg>
     <p:spTree>
@@ -38,403 +137,164 @@
         <p:nvPr/>
       </p:nvGrpSpPr>
       <p:grpSpPr>
-        <a:xfrm xmlns:a="http://schemas.openxmlformats.org/drawingml/2006/main"/>
+        <a:xfrm>
+          <a:off x="0" y="0"/>
+          <a:ext cx="0" cy="0"/>
+          <a:chOff x="0" y="0"/>
+          <a:chExt cx="0" cy="0"/>
+        </a:xfrm>
       </p:grpSpPr>
       <p:sp>
         <p:nvSpPr>
           <p:cNvPr id="2" name="Header Placeholder"/>
-          <p:cNvSpPr/>
+          <p:cNvSpPr>
+            <a:spLocks noGrp="1"/>
+          </p:cNvSpPr>
           <p:nvPr>
             <p:ph type="hdr" sz="quarter"/>
           </p:nvPr>
         </p:nvSpPr>
         <p:spPr>
-          <a:prstGeom xmlns:a="http://schemas.openxmlformats.org/drawingml/2006/main" prst="rect">
+          <a:prstGeom prst="rect">
             <a:avLst/>
           </a:prstGeom>
         </p:spPr>
         <p:txBody>
-          <a:bodyPr xmlns:a="http://schemas.openxmlformats.org/drawingml/2006/main"/>
-          <a:lstStyle xmlns:a="http://schemas.openxmlformats.org/drawingml/2006/main"/>
-          <a:p xmlns:a="http://schemas.openxmlformats.org/drawingml/2006/main"/>
+          <a:bodyPr/>
+          <a:lstStyle/>
+          <a:p>
+            <a:endParaRPr/>
+          </a:p>
         </p:txBody>
       </p:sp>
       <p:sp>
         <p:nvSpPr>
           <p:cNvPr id="3" name="Date Placeholder"/>
-          <p:cNvSpPr/>
+          <p:cNvSpPr>
+            <a:spLocks noGrp="1"/>
+          </p:cNvSpPr>
           <p:nvPr>
             <p:ph type="dt" sz="quarter" idx="1"/>
           </p:nvPr>
         </p:nvSpPr>
         <p:spPr>
-          <a:prstGeom xmlns:a="http://schemas.openxmlformats.org/drawingml/2006/main" prst="rect">
+          <a:prstGeom prst="rect">
             <a:avLst/>
           </a:prstGeom>
         </p:spPr>
         <p:txBody>
-          <a:bodyPr xmlns:a="http://schemas.openxmlformats.org/drawingml/2006/main"/>
-          <a:lstStyle xmlns:a="http://schemas.openxmlformats.org/drawingml/2006/main"/>
-          <a:p xmlns:a="http://schemas.openxmlformats.org/drawingml/2006/main"/>
+          <a:bodyPr/>
+          <a:lstStyle/>
+          <a:p>
+            <a:endParaRPr/>
+          </a:p>
         </p:txBody>
       </p:sp>
       <p:sp>
         <p:nvSpPr>
           <p:cNvPr id="4" name="Slide Image Placeholder"/>
-          <p:cNvSpPr/>
+          <p:cNvSpPr>
+            <a:spLocks noGrp="1" noRot="1" noChangeAspect="1"/>
+          </p:cNvSpPr>
           <p:nvPr>
             <p:ph type="sldImg" idx="2"/>
           </p:nvPr>
         </p:nvSpPr>
         <p:spPr>
-          <a:prstGeom xmlns:a="http://schemas.openxmlformats.org/drawingml/2006/main" prst="rect">
+          <a:prstGeom prst="rect">
             <a:avLst/>
           </a:prstGeom>
         </p:spPr>
         <p:txBody>
-          <a:bodyPr xmlns:a="http://schemas.openxmlformats.org/drawingml/2006/main"/>
-          <a:lstStyle xmlns:a="http://schemas.openxmlformats.org/drawingml/2006/main"/>
-          <a:p xmlns:a="http://schemas.openxmlformats.org/drawingml/2006/main"/>
+          <a:bodyPr/>
+          <a:lstStyle/>
+          <a:p>
+            <a:endParaRPr/>
+          </a:p>
         </p:txBody>
       </p:sp>
       <p:sp>
         <p:nvSpPr>
           <p:cNvPr id="5" name="Notes Placeholder"/>
-          <p:cNvSpPr/>
+          <p:cNvSpPr>
+            <a:spLocks noGrp="1"/>
+          </p:cNvSpPr>
           <p:nvPr>
             <p:ph type="body" sz="quarter" idx="3"/>
           </p:nvPr>
         </p:nvSpPr>
         <p:spPr>
-          <a:prstGeom xmlns:a="http://schemas.openxmlformats.org/drawingml/2006/main" prst="rect">
+          <a:prstGeom prst="rect">
             <a:avLst/>
           </a:prstGeom>
         </p:spPr>
         <p:txBody>
-          <a:bodyPr xmlns:a="http://schemas.openxmlformats.org/drawingml/2006/main"/>
-          <a:lstStyle xmlns:a="http://schemas.openxmlformats.org/drawingml/2006/main"/>
-          <a:p xmlns:a="http://schemas.openxmlformats.org/drawingml/2006/main"/>
+          <a:bodyPr/>
+          <a:lstStyle/>
+          <a:p>
+            <a:endParaRPr/>
+          </a:p>
         </p:txBody>
       </p:sp>
       <p:sp>
         <p:nvSpPr>
           <p:cNvPr id="6" name="Footer Placeholder"/>
-          <p:cNvSpPr/>
+          <p:cNvSpPr>
+            <a:spLocks noGrp="1"/>
+          </p:cNvSpPr>
           <p:nvPr>
             <p:ph type="ftr" sz="quarter" idx="4"/>
           </p:nvPr>
         </p:nvSpPr>
         <p:spPr>
-          <a:prstGeom xmlns:a="http://schemas.openxmlformats.org/drawingml/2006/main" prst="rect">
+          <a:prstGeom prst="rect">
             <a:avLst/>
           </a:prstGeom>
         </p:spPr>
         <p:txBody>
-          <a:bodyPr xmlns:a="http://schemas.openxmlformats.org/drawingml/2006/main"/>
-          <a:lstStyle xmlns:a="http://schemas.openxmlformats.org/drawingml/2006/main"/>
-          <a:p xmlns:a="http://schemas.openxmlformats.org/drawingml/2006/main"/>
+          <a:bodyPr/>
+          <a:lstStyle/>
+          <a:p>
+            <a:endParaRPr/>
+          </a:p>
         </p:txBody>
       </p:sp>
       <p:sp>
         <p:nvSpPr>
           <p:cNvPr id="7" name="Slide Number Placeholder"/>
-          <p:cNvSpPr/>
+          <p:cNvSpPr>
+            <a:spLocks noGrp="1"/>
+          </p:cNvSpPr>
           <p:nvPr>
             <p:ph type="sldNum" sz="quarter" idx="5"/>
           </p:nvPr>
         </p:nvSpPr>
         <p:spPr>
-          <a:prstGeom xmlns:a="http://schemas.openxmlformats.org/drawingml/2006/main" prst="rect">
+          <a:prstGeom prst="rect">
             <a:avLst/>
           </a:prstGeom>
         </p:spPr>
         <p:txBody>
-          <a:bodyPr xmlns:a="http://schemas.openxmlformats.org/drawingml/2006/main"/>
-          <a:lstStyle xmlns:a="http://schemas.openxmlformats.org/drawingml/2006/main"/>
-          <a:p xmlns:a="http://schemas.openxmlformats.org/drawingml/2006/main"/>
+          <a:bodyPr/>
+          <a:lstStyle/>
+          <a:p>
+            <a:endParaRPr/>
+          </a:p>
         </p:txBody>
       </p:sp>
     </p:spTree>
   </p:cSld>
   <p:clrMap bg1="lt1" tx1="dk1" bg2="lt2" tx2="dk2" accent1="accent1" accent2="accent2" accent3="accent3" accent4="accent4" accent5="accent5" accent6="accent6" hlink="hlink" folHlink="folHlink"/>
   <p:notesStyle>
-    <a:lvl1pPr xmlns:a="http://schemas.openxmlformats.org/drawingml/2006/main" marL="0" algn="l" defTabSz="914400" rtl="0" eaLnBrk="1" latinLnBrk="0" hangingPunct="1">
+    <a:lvl1pPr marL="0" algn="l" defTabSz="914400" rtl="0" eaLnBrk="1" latinLnBrk="0" hangingPunct="1">
       <a:defRPr sz="1200" kern="1200"/>
     </a:lvl1pPr>
   </p:notesStyle>
 </p:notesMaster>
 </file>
 
-<file path=ppt/notesMasters/theme/theme3.xml><?xml version="1.0" encoding="utf-8"?>
-<a:theme xmlns:a="http://schemas.openxmlformats.org/drawingml/2006/main" name="Office Theme">
-  <a:themeElements>
-    <a:clrScheme name="Office">
-      <a:dk1>
-        <a:sysClr val="windowText" lastClr="000000"/>
-      </a:dk1>
-      <a:lt1>
-        <a:sysClr val="window" lastClr="FFFFFF"/>
-      </a:lt1>
-      <a:dk2>
-        <a:srgbClr val="1F497D"/>
-      </a:dk2>
-      <a:lt2>
-        <a:srgbClr val="EEECE1"/>
-      </a:lt2>
-      <a:accent1>
-        <a:srgbClr val="4F81BD"/>
-      </a:accent1>
-      <a:accent2>
-        <a:srgbClr val="C0504D"/>
-      </a:accent2>
-      <a:accent3>
-        <a:srgbClr val="9BBB59"/>
-      </a:accent3>
-      <a:accent4>
-        <a:srgbClr val="8064A2"/>
-      </a:accent4>
-      <a:accent5>
-        <a:srgbClr val="4BACC6"/>
-      </a:accent5>
-      <a:accent6>
-        <a:srgbClr val="F79646"/>
-      </a:accent6>
-      <a:hlink>
-        <a:srgbClr val="0000FF"/>
-      </a:hlink>
-      <a:folHlink>
-        <a:srgbClr val="800080"/>
-      </a:folHlink>
-    </a:clrScheme>
-    <a:fontScheme name="Office">
-      <a:majorFont>
-        <a:latin typeface="Calibri"/>
-        <a:ea typeface=""/>
-        <a:cs typeface=""/>
-        <a:font script="Jpan" typeface="ＭＳ Ｐゴシック"/>
-        <a:font script="Hang" typeface="맑은 고딕"/>
-        <a:font script="Hans" typeface="宋体"/>
-        <a:font script="Hant" typeface="新細明體"/>
-        <a:font script="Arab" typeface="Times New Roman"/>
-        <a:font script="Hebr" typeface="Times New Roman"/>
-        <a:font script="Thai" typeface="Angsana New"/>
-        <a:font script="Ethi" typeface="Nyala"/>
-        <a:font script="Beng" typeface="Vrinda"/>
-        <a:font script="Gujr" typeface="Shruti"/>
-        <a:font script="Khmr" typeface="MoolBoran"/>
-        <a:font script="Knda" typeface="Tunga"/>
-        <a:font script="Guru" typeface="Raavi"/>
-        <a:font script="Cans" typeface="Euphemia"/>
-        <a:font script="Cher" typeface="Plantagenet Cherokee"/>
-        <a:font script="Yiii" typeface="Microsoft Yi Baiti"/>
-        <a:font script="Tibt" typeface="Microsoft Himalaya"/>
-        <a:font script="Thaa" typeface="MV Boli"/>
-        <a:font script="Deva" typeface="Mangal"/>
-        <a:font script="Telu" typeface="Gautami"/>
-        <a:font script="Taml" typeface="Latha"/>
-        <a:font script="Syrc" typeface="Estrangelo Edessa"/>
-        <a:font script="Orya" typeface="Kalinga"/>
-        <a:font script="Mlym" typeface="Kartika"/>
-        <a:font script="Laoo" typeface="DokChampa"/>
-        <a:font script="Sinh" typeface="Iskoola Pota"/>
-        <a:font script="Mong" typeface="Mongolian Baiti"/>
-        <a:font script="Viet" typeface="Times New Roman"/>
-        <a:font script="Uigh" typeface="Microsoft Uighur"/>
-        <a:font script="Geor" typeface="Sylfaen"/>
-      </a:majorFont>
-      <a:minorFont>
-        <a:latin typeface="Calibri"/>
-        <a:ea typeface=""/>
-        <a:cs typeface=""/>
-        <a:font script="Jpan" typeface="ＭＳ Ｐゴシック"/>
-        <a:font script="Hang" typeface="맑은 고딕"/>
-        <a:font script="Hans" typeface="宋体"/>
-        <a:font script="Hant" typeface="新細明體"/>
-        <a:font script="Arab" typeface="Arial"/>
-        <a:font script="Hebr" typeface="Arial"/>
-        <a:font script="Thai" typeface="Cordia New"/>
-        <a:font script="Ethi" typeface="Nyala"/>
-        <a:font script="Beng" typeface="Vrinda"/>
-        <a:font script="Gujr" typeface="Shruti"/>
-        <a:font script="Khmr" typeface="DaunPenh"/>
-        <a:font script="Knda" typeface="Tunga"/>
-        <a:font script="Guru" typeface="Raavi"/>
-        <a:font script="Cans" typeface="Euphemia"/>
-        <a:font script="Cher" typeface="Plantagenet Cherokee"/>
-        <a:font script="Yiii" typeface="Microsoft Yi Baiti"/>
-        <a:font script="Tibt" typeface="Microsoft Himalaya"/>
-        <a:font script="Thaa" typeface="MV Boli"/>
-        <a:font script="Deva" typeface="Mangal"/>
-        <a:font script="Telu" typeface="Gautami"/>
-        <a:font script="Taml" typeface="Latha"/>
-        <a:font script="Syrc" typeface="Estrangelo Edessa"/>
-        <a:font script="Orya" typeface="Kalinga"/>
-        <a:font script="Mlym" typeface="Kartika"/>
-        <a:font script="Laoo" typeface="DokChampa"/>
-        <a:font script="Sinh" typeface="Iskoola Pota"/>
-        <a:font script="Mong" typeface="Mongolian Baiti"/>
-        <a:font script="Viet" typeface="Arial"/>
-        <a:font script="Uigh" typeface="Microsoft Uighur"/>
-        <a:font script="Geor" typeface="Sylfaen"/>
-      </a:minorFont>
-    </a:fontScheme>
-    <a:fmtScheme name="Office">
-      <a:fillStyleLst>
-        <a:solidFill>
-          <a:schemeClr val="phClr"/>
-        </a:solidFill>
-        <a:gradFill rotWithShape="1">
-          <a:gsLst>
-            <a:gs pos="0">
-              <a:schemeClr val="phClr">
-                <a:tint val="50000"/>
-                <a:satMod val="300000"/>
-              </a:schemeClr>
-            </a:gs>
-            <a:gs pos="35000">
-              <a:schemeClr val="phClr">
-                <a:tint val="37000"/>
-                <a:satMod val="300000"/>
-              </a:schemeClr>
-            </a:gs>
-            <a:gs pos="100000">
-              <a:schemeClr val="phClr">
-                <a:tint val="15000"/>
-                <a:satMod val="350000"/>
-              </a:schemeClr>
-            </a:gs>
-          </a:gsLst>
-          <a:lin ang="16200000" scaled="1"/>
-        </a:gradFill>
-        <a:gradFill rotWithShape="1">
-          <a:gsLst>
-            <a:gs pos="0">
-              <a:schemeClr val="phClr">
-                <a:tint val="100000"/>
-                <a:shade val="100000"/>
-                <a:satMod val="130000"/>
-              </a:schemeClr>
-            </a:gs>
-            <a:gs pos="100000">
-              <a:schemeClr val="phClr">
-                <a:tint val="50000"/>
-                <a:shade val="100000"/>
-                <a:satMod val="350000"/>
-              </a:schemeClr>
-            </a:gs>
-          </a:gsLst>
-          <a:lin ang="16200000" scaled="0"/>
-        </a:gradFill>
-      </a:fillStyleLst>
-      <a:lnStyleLst>
-        <a:ln w="9525">
-          <a:solidFill>
-            <a:schemeClr val="phClr">
-              <a:shade val="95000"/>
-              <a:satMod val="105000"/>
-            </a:schemeClr>
-          </a:solidFill>
-          <a:prstDash val="solid"/>
-        </a:ln>
-        <a:ln w="25400">
-          <a:solidFill>
-            <a:schemeClr val="phClr"/>
-          </a:solidFill>
-          <a:prstDash val="solid"/>
-        </a:ln>
-        <a:ln w="38100">
-          <a:solidFill>
-            <a:schemeClr val="phClr"/>
-          </a:solidFill>
-          <a:prstDash val="solid"/>
-        </a:ln>
-      </a:lnStyleLst>
-      <a:effectStyleLst>
-        <a:effectStyle>
-          <a:effectLst>
-            <a:outerShdw blurRad="40000" dist="20000" dir="5400000" rotWithShape="0">
-              <a:srgbClr val="000000">
-                <a:alpha val="38000"/>
-              </a:srgbClr>
-            </a:outerShdw>
-          </a:effectLst>
-        </a:effectStyle>
-        <a:effectStyle>
-          <a:effectLst>
-            <a:outerShdw blurRad="40000" dist="23000" dir="5400000" rotWithShape="0">
-              <a:srgbClr val="000000">
-                <a:alpha val="35000"/>
-              </a:srgbClr>
-            </a:outerShdw>
-          </a:effectLst>
-        </a:effectStyle>
-        <a:effectStyle>
-          <a:effectLst>
-            <a:outerShdw blurRad="40000" dist="23000" dir="5400000" rotWithShape="0">
-              <a:srgbClr val="000000">
-                <a:alpha val="35000"/>
-              </a:srgbClr>
-            </a:outerShdw>
-          </a:effectLst>
-        </a:effectStyle>
-      </a:effectStyleLst>
-      <a:bgFillStyleLst>
-        <a:solidFill>
-          <a:schemeClr val="phClr"/>
-        </a:solidFill>
-        <a:gradFill rotWithShape="1">
-          <a:gsLst>
-            <a:gs pos="0">
-              <a:schemeClr val="phClr">
-                <a:tint val="40000"/>
-                <a:satMod val="350000"/>
-              </a:schemeClr>
-            </a:gs>
-            <a:gs pos="40000">
-              <a:schemeClr val="phClr">
-                <a:tint val="45000"/>
-                <a:shade val="99000"/>
-                <a:satMod val="350000"/>
-              </a:schemeClr>
-            </a:gs>
-            <a:gs pos="100000">
-              <a:schemeClr val="phClr">
-                <a:shade val="20000"/>
-                <a:satMod val="255000"/>
-              </a:schemeClr>
-            </a:gs>
-          </a:gsLst>
-          <a:path path="circle">
-            <a:fillToRect l="50000" t="-80000" r="50000" b="180000"/>
-          </a:path>
-        </a:gradFill>
-        <a:gradFill rotWithShape="1">
-          <a:gsLst>
-            <a:gs pos="0">
-              <a:schemeClr val="phClr">
-                <a:tint val="80000"/>
-                <a:satMod val="300000"/>
-              </a:schemeClr>
-            </a:gs>
-            <a:gs pos="100000">
-              <a:schemeClr val="phClr">
-                <a:shade val="30000"/>
-                <a:satMod val="200000"/>
-              </a:schemeClr>
-            </a:gs>
-          </a:gsLst>
-          <a:path path="circle">
-            <a:fillToRect l="50000" t="50000" r="50000" b="50000"/>
-          </a:path>
-        </a:gradFill>
-      </a:bgFillStyleLst>
-    </a:fmtScheme>
-  </a:themeElements>
-</a:theme>
-</file>
-
 <file path=ppt/notesSlides/notesSlide1.xml><?xml version="1.0" encoding="utf-8"?>
-<p:notes xmlns:p="http://schemas.openxmlformats.org/presentationml/2006/main">
+<p:notes xmlns:a="http://schemas.openxmlformats.org/drawingml/2006/main" xmlns:r="http://schemas.openxmlformats.org/officeDocument/2006/relationships" xmlns:p="http://schemas.openxmlformats.org/presentationml/2006/main">
   <p:cSld>
     <p:spTree>
       <p:nvGrpSpPr>
@@ -443,16 +303,21 @@
         <p:nvPr/>
       </p:nvGrpSpPr>
       <p:grpSpPr>
-        <a:xfrm xmlns:a="http://schemas.openxmlformats.org/drawingml/2006/main"/>
+        <a:xfrm>
+          <a:off x="0" y="0"/>
+          <a:ext cx="0" cy="0"/>
+          <a:chOff x="0" y="0"/>
+          <a:chExt cx="0" cy="0"/>
+        </a:xfrm>
       </p:grpSpPr>
       <p:sp>
         <p:nvSpPr>
           <p:cNvPr id="2" name="Slide Image Placeholder 1"/>
           <p:cNvSpPr>
-            <a:spLocks xmlns:a="http://schemas.openxmlformats.org/drawingml/2006/main" noGrp="1"/>
-          </p:cNvSpPr>
-          <p:nvPr>
-            <p:ph type="sldImg" idx="0"/>
+            <a:spLocks noGrp="1" noRot="1" noChangeAspect="1"/>
+          </p:cNvSpPr>
+          <p:nvPr>
+            <p:ph type="sldImg"/>
           </p:nvPr>
         </p:nvSpPr>
         <p:spPr/>
@@ -461,7 +326,7 @@
         <p:nvSpPr>
           <p:cNvPr id="3" name="Notes Placeholder 2"/>
           <p:cNvSpPr>
-            <a:spLocks xmlns:a="http://schemas.openxmlformats.org/drawingml/2006/main" noGrp="1"/>
+            <a:spLocks noGrp="1"/>
           </p:cNvSpPr>
           <p:nvPr>
             <p:ph type="body" idx="1"/>
@@ -469,54 +334,50 @@
         </p:nvSpPr>
         <p:spPr/>
         <p:txBody>
-          <a:bodyPr xmlns:a="http://schemas.openxmlformats.org/drawingml/2006/main"/>
-          <a:lstStyle xmlns:a="http://schemas.openxmlformats.org/drawingml/2006/main"/>
-          <a:p xmlns:a="http://schemas.openxmlformats.org/drawingml/2006/main">
+          <a:bodyPr/>
+          <a:lstStyle/>
+          <a:p>
             <a:r>
               <a:t>Welcome to our final session. Today we make an AI request easier to read, then bring a small table back into Excel. Markdown means plain text with headings and simple formatting. You already know enough to make the choices in today's demo.</a:t>
             </a:r>
           </a:p>
-          <a:p xmlns:a="http://schemas.openxmlformats.org/drawingml/2006/main">
-            <a:r>
-              <a:t/>
-            </a:r>
-          </a:p>
-          <a:p xmlns:a="http://schemas.openxmlformats.org/drawingml/2006/main">
+          <a:p>
+            <a:endParaRPr/>
+          </a:p>
+          <a:p>
             <a:r>
               <a:t>CHAT CUE (about 0:30; budget 15 seconds total)</a:t>
             </a:r>
           </a:p>
-          <a:p xmlns:a="http://schemas.openxmlformats.org/drawingml/2006/main">
+          <a:p>
             <a:r>
               <a:t>SAY: One word to start: is your usual AI prompt SHORT or DETAILED? Either is fine. Watching is welcome too.</a:t>
             </a:r>
           </a:p>
-          <a:p xmlns:a="http://schemas.openxmlformats.org/drawingml/2006/main">
+          <a:p>
             <a:r>
               <a:t>PAUSE: Wait silently for 8 seconds. Do not repeat the request.</a:t>
             </a:r>
           </a:p>
-          <a:p xmlns:a="http://schemas.openxmlformats.org/drawingml/2006/main">
+          <a:p>
             <a:r>
               <a:t>IF SOMEONE REPLIES: Acknowledge one actual answer. 'We will give the request a clear task and output format.'</a:t>
             </a:r>
           </a:p>
-          <a:p xmlns:a="http://schemas.openxmlformats.org/drawingml/2006/main">
+          <a:p>
             <a:r>
               <a:t>IF CHAT IS QUIET: Say, "I'll start with a short request and make the task clearer." Then continue. Never imply that somebody replied.</a:t>
             </a:r>
           </a:p>
-          <a:p xmlns:a="http://schemas.openxmlformats.org/drawingml/2006/main">
+          <a:p>
             <a:r>
               <a:t>FACILITATION: Acknowledge at most two actual replies, without calling on anyone by name. Accept a letter, a word, or a longer question. If a reply arrives later, acknowledge it at the next natural pause.</a:t>
             </a:r>
           </a:p>
-          <a:p xmlns:a="http://schemas.openxmlformats.org/drawingml/2006/main">
-            <a:r>
-              <a:t/>
-            </a:r>
-          </a:p>
-          <a:p xmlns:a="http://schemas.openxmlformats.org/drawingml/2006/main">
+          <a:p>
+            <a:endParaRPr/>
+          </a:p>
+          <a:p>
             <a:r>
               <a:t>Keep the opening to 60 seconds. Participation is optional. The learning continues even with no chat replies.</a:t>
             </a:r>
@@ -527,7 +388,7 @@
         <p:nvSpPr>
           <p:cNvPr id="4" name="Slide Number Placeholder 3"/>
           <p:cNvSpPr>
-            <a:spLocks xmlns:a="http://schemas.openxmlformats.org/drawingml/2006/main" noGrp="1"/>
+            <a:spLocks noGrp="1"/>
           </p:cNvSpPr>
           <p:nvPr>
             <p:ph type="sldNum" idx="5"/>
@@ -535,21 +396,23 @@
         </p:nvSpPr>
         <p:spPr/>
         <p:txBody>
-          <a:bodyPr xmlns:a="http://schemas.openxmlformats.org/drawingml/2006/main"/>
-          <a:lstStyle xmlns:a="http://schemas.openxmlformats.org/drawingml/2006/main"/>
-          <a:p xmlns:a="http://schemas.openxmlformats.org/drawingml/2006/main"/>
+          <a:bodyPr/>
+          <a:lstStyle/>
+          <a:p>
+            <a:endParaRPr/>
+          </a:p>
         </p:txBody>
       </p:sp>
     </p:spTree>
   </p:cSld>
   <p:clrMapOvr>
-    <a:masterClrMapping xmlns:a="http://schemas.openxmlformats.org/drawingml/2006/main"/>
+    <a:masterClrMapping/>
   </p:clrMapOvr>
 </p:notes>
 </file>
 
 <file path=ppt/notesSlides/notesSlide2.xml><?xml version="1.0" encoding="utf-8"?>
-<p:notes xmlns:p="http://schemas.openxmlformats.org/presentationml/2006/main">
+<p:notes xmlns:a="http://schemas.openxmlformats.org/drawingml/2006/main" xmlns:r="http://schemas.openxmlformats.org/officeDocument/2006/relationships" xmlns:p="http://schemas.openxmlformats.org/presentationml/2006/main">
   <p:cSld>
     <p:spTree>
       <p:nvGrpSpPr>
@@ -558,16 +421,21 @@
         <p:nvPr/>
       </p:nvGrpSpPr>
       <p:grpSpPr>
-        <a:xfrm xmlns:a="http://schemas.openxmlformats.org/drawingml/2006/main"/>
+        <a:xfrm>
+          <a:off x="0" y="0"/>
+          <a:ext cx="0" cy="0"/>
+          <a:chOff x="0" y="0"/>
+          <a:chExt cx="0" cy="0"/>
+        </a:xfrm>
       </p:grpSpPr>
       <p:sp>
         <p:nvSpPr>
           <p:cNvPr id="2" name="Slide Image Placeholder 1"/>
           <p:cNvSpPr>
-            <a:spLocks xmlns:a="http://schemas.openxmlformats.org/drawingml/2006/main" noGrp="1"/>
-          </p:cNvSpPr>
-          <p:nvPr>
-            <p:ph type="sldImg" idx="0"/>
+            <a:spLocks noGrp="1" noRot="1" noChangeAspect="1"/>
+          </p:cNvSpPr>
+          <p:nvPr>
+            <p:ph type="sldImg"/>
           </p:nvPr>
         </p:nvSpPr>
         <p:spPr/>
@@ -576,7 +444,7 @@
         <p:nvSpPr>
           <p:cNvPr id="3" name="Notes Placeholder 2"/>
           <p:cNvSpPr>
-            <a:spLocks xmlns:a="http://schemas.openxmlformats.org/drawingml/2006/main" noGrp="1"/>
+            <a:spLocks noGrp="1"/>
           </p:cNvSpPr>
           <p:nvPr>
             <p:ph type="body" idx="1"/>
@@ -584,9 +452,9 @@
         </p:nvSpPr>
         <p:spPr/>
         <p:txBody>
-          <a:bodyPr xmlns:a="http://schemas.openxmlformats.org/drawingml/2006/main"/>
-          <a:lstStyle xmlns:a="http://schemas.openxmlformats.org/drawingml/2006/main"/>
-          <a:p xmlns:a="http://schemas.openxmlformats.org/drawingml/2006/main">
+          <a:bodyPr/>
+          <a:lstStyle/>
+          <a:p>
             <a:r>
               <a:t>Last recap of the week. Monday, the machine learning already hiding in Excel. Tuesday, tables made the workbook machine-readable. Wednesday, Power Query recorded the cleanup and Refresh replayed it. Yesterday, real Python behind equals PY, with a chatbot writing the code. One thread ran through all of it: the better the machine can read your work, the better every tool performs. Today we apply that same idea to the words you send AI tools, because it turns out prompts have a structure too.</a:t>
             </a:r>
@@ -597,7 +465,7 @@
         <p:nvSpPr>
           <p:cNvPr id="4" name="Slide Number Placeholder 3"/>
           <p:cNvSpPr>
-            <a:spLocks xmlns:a="http://schemas.openxmlformats.org/drawingml/2006/main" noGrp="1"/>
+            <a:spLocks noGrp="1"/>
           </p:cNvSpPr>
           <p:nvPr>
             <p:ph type="sldNum" idx="5"/>
@@ -605,21 +473,23 @@
         </p:nvSpPr>
         <p:spPr/>
         <p:txBody>
-          <a:bodyPr xmlns:a="http://schemas.openxmlformats.org/drawingml/2006/main"/>
-          <a:lstStyle xmlns:a="http://schemas.openxmlformats.org/drawingml/2006/main"/>
-          <a:p xmlns:a="http://schemas.openxmlformats.org/drawingml/2006/main"/>
+          <a:bodyPr/>
+          <a:lstStyle/>
+          <a:p>
+            <a:endParaRPr/>
+          </a:p>
         </p:txBody>
       </p:sp>
     </p:spTree>
   </p:cSld>
   <p:clrMapOvr>
-    <a:masterClrMapping xmlns:a="http://schemas.openxmlformats.org/drawingml/2006/main"/>
+    <a:masterClrMapping/>
   </p:clrMapOvr>
 </p:notes>
 </file>
 
 <file path=ppt/notesSlides/notesSlide3.xml><?xml version="1.0" encoding="utf-8"?>
-<p:notes xmlns:p="http://schemas.openxmlformats.org/presentationml/2006/main">
+<p:notes xmlns:a="http://schemas.openxmlformats.org/drawingml/2006/main" xmlns:r="http://schemas.openxmlformats.org/officeDocument/2006/relationships" xmlns:p="http://schemas.openxmlformats.org/presentationml/2006/main">
   <p:cSld>
     <p:spTree>
       <p:nvGrpSpPr>
@@ -628,16 +498,21 @@
         <p:nvPr/>
       </p:nvGrpSpPr>
       <p:grpSpPr>
-        <a:xfrm xmlns:a="http://schemas.openxmlformats.org/drawingml/2006/main"/>
+        <a:xfrm>
+          <a:off x="0" y="0"/>
+          <a:ext cx="0" cy="0"/>
+          <a:chOff x="0" y="0"/>
+          <a:chExt cx="0" cy="0"/>
+        </a:xfrm>
       </p:grpSpPr>
       <p:sp>
         <p:nvSpPr>
           <p:cNvPr id="2" name="Slide Image Placeholder 1"/>
           <p:cNvSpPr>
-            <a:spLocks xmlns:a="http://schemas.openxmlformats.org/drawingml/2006/main" noGrp="1"/>
-          </p:cNvSpPr>
-          <p:nvPr>
-            <p:ph type="sldImg" idx="0"/>
+            <a:spLocks noGrp="1" noRot="1" noChangeAspect="1"/>
+          </p:cNvSpPr>
+          <p:nvPr>
+            <p:ph type="sldImg"/>
           </p:nvPr>
         </p:nvSpPr>
         <p:spPr/>
@@ -646,7 +521,7 @@
         <p:nvSpPr>
           <p:cNvPr id="3" name="Notes Placeholder 2"/>
           <p:cNvSpPr>
-            <a:spLocks xmlns:a="http://schemas.openxmlformats.org/drawingml/2006/main" noGrp="1"/>
+            <a:spLocks noGrp="1"/>
           </p:cNvSpPr>
           <p:nvPr>
             <p:ph type="body" idx="1"/>
@@ -654,9 +529,9 @@
         </p:nvSpPr>
         <p:spPr/>
         <p:txBody>
-          <a:bodyPr xmlns:a="http://schemas.openxmlformats.org/drawingml/2006/main"/>
-          <a:lstStyle xmlns:a="http://schemas.openxmlformats.org/drawingml/2006/main"/>
-          <a:p xmlns:a="http://schemas.openxmlformats.org/drawingml/2006/main">
+          <a:bodyPr/>
+          <a:lstStyle/>
+          <a:p>
             <a:r>
               <a:t>The final guerrilla hook. Behind almost every AI tool you touch is the same plain-text formatting language: Markdown. Hash marks for headings, dashes for bullets, pipes for tables. Chatbot answers are written in it. Copilot emits it. The instruction files that steer AI agents are plain Markdown documents. Which means twenty minutes of syntax buys you two powers. Steering: a prompt with headings and bullet structure is dramatically easier for a model to follow than a wall of text. And portability: tables written in Markdown move cleanly between Excel and any chatbot, in either direction, with no connectors and no licenses. Speaking the machine's language is the cheapest AI upgrade there is. Two demos and then we close out the week.</a:t>
             </a:r>
@@ -667,7 +542,7 @@
         <p:nvSpPr>
           <p:cNvPr id="4" name="Slide Number Placeholder 3"/>
           <p:cNvSpPr>
-            <a:spLocks xmlns:a="http://schemas.openxmlformats.org/drawingml/2006/main" noGrp="1"/>
+            <a:spLocks noGrp="1"/>
           </p:cNvSpPr>
           <p:nvPr>
             <p:ph type="sldNum" idx="5"/>
@@ -675,21 +550,23 @@
         </p:nvSpPr>
         <p:spPr/>
         <p:txBody>
-          <a:bodyPr xmlns:a="http://schemas.openxmlformats.org/drawingml/2006/main"/>
-          <a:lstStyle xmlns:a="http://schemas.openxmlformats.org/drawingml/2006/main"/>
-          <a:p xmlns:a="http://schemas.openxmlformats.org/drawingml/2006/main"/>
+          <a:bodyPr/>
+          <a:lstStyle/>
+          <a:p>
+            <a:endParaRPr/>
+          </a:p>
         </p:txBody>
       </p:sp>
     </p:spTree>
   </p:cSld>
   <p:clrMapOvr>
-    <a:masterClrMapping xmlns:a="http://schemas.openxmlformats.org/drawingml/2006/main"/>
+    <a:masterClrMapping/>
   </p:clrMapOvr>
 </p:notes>
 </file>
 
 <file path=ppt/notesSlides/notesSlide4.xml><?xml version="1.0" encoding="utf-8"?>
-<p:notes xmlns:p="http://schemas.openxmlformats.org/presentationml/2006/main">
+<p:notes xmlns:a="http://schemas.openxmlformats.org/drawingml/2006/main" xmlns:r="http://schemas.openxmlformats.org/officeDocument/2006/relationships" xmlns:p="http://schemas.openxmlformats.org/presentationml/2006/main">
   <p:cSld>
     <p:spTree>
       <p:nvGrpSpPr>
@@ -698,16 +575,21 @@
         <p:nvPr/>
       </p:nvGrpSpPr>
       <p:grpSpPr>
-        <a:xfrm xmlns:a="http://schemas.openxmlformats.org/drawingml/2006/main"/>
+        <a:xfrm>
+          <a:off x="0" y="0"/>
+          <a:ext cx="0" cy="0"/>
+          <a:chOff x="0" y="0"/>
+          <a:chExt cx="0" cy="0"/>
+        </a:xfrm>
       </p:grpSpPr>
       <p:sp>
         <p:nvSpPr>
           <p:cNvPr id="2" name="Slide Image Placeholder 1"/>
           <p:cNvSpPr>
-            <a:spLocks xmlns:a="http://schemas.openxmlformats.org/drawingml/2006/main" noGrp="1"/>
-          </p:cNvSpPr>
-          <p:nvPr>
-            <p:ph type="sldImg" idx="0"/>
+            <a:spLocks noGrp="1" noRot="1" noChangeAspect="1"/>
+          </p:cNvSpPr>
+          <p:nvPr>
+            <p:ph type="sldImg"/>
           </p:nvPr>
         </p:nvSpPr>
         <p:spPr/>
@@ -716,7 +598,7 @@
         <p:nvSpPr>
           <p:cNvPr id="3" name="Notes Placeholder 2"/>
           <p:cNvSpPr>
-            <a:spLocks xmlns:a="http://schemas.openxmlformats.org/drawingml/2006/main" noGrp="1"/>
+            <a:spLocks noGrp="1"/>
           </p:cNvSpPr>
           <p:nvPr>
             <p:ph type="body" idx="1"/>
@@ -724,59 +606,55 @@
         </p:nvSpPr>
         <p:spPr/>
         <p:txBody>
-          <a:bodyPr xmlns:a="http://schemas.openxmlformats.org/drawingml/2006/main"/>
-          <a:lstStyle xmlns:a="http://schemas.openxmlformats.org/drawingml/2006/main"/>
-          <a:p xmlns:a="http://schemas.openxmlformats.org/drawingml/2006/main">
+          <a:bodyPr/>
+          <a:lstStyle/>
+          <a:p>
             <a:r>
               <a:t>CHAT CUE (about 6:00; budget 15 seconds total)</a:t>
             </a:r>
           </a:p>
-          <a:p xmlns:a="http://schemas.openxmlformats.org/drawingml/2006/main">
+          <a:p>
             <a:r>
               <a:t>SAY: Which is easier for you to scan, A for the paragraph or B for headings? Just the letter.</a:t>
             </a:r>
           </a:p>
-          <a:p xmlns:a="http://schemas.openxmlformats.org/drawingml/2006/main">
+          <a:p>
             <a:r>
               <a:t>PAUSE: Wait silently for 8 seconds. Do not repeat the request.</a:t>
             </a:r>
           </a:p>
-          <a:p xmlns:a="http://schemas.openxmlformats.org/drawingml/2006/main">
+          <a:p>
             <a:r>
               <a:t>IF SOMEONE REPLIES: Acknowledge the choice without claiming a model result is guaranteed. Show the Task and Format sections. Compare the actual AI replies for requested content and errors.</a:t>
             </a:r>
           </a:p>
-          <a:p xmlns:a="http://schemas.openxmlformats.org/drawingml/2006/main">
+          <a:p>
             <a:r>
               <a:t>IF CHAT IS QUIET: Say, "I'll use B, headings, so we can find the task and requested format quickly." Then continue. Never imply that somebody replied.</a:t>
             </a:r>
           </a:p>
-          <a:p xmlns:a="http://schemas.openxmlformats.org/drawingml/2006/main">
+          <a:p>
             <a:r>
               <a:t>FACILITATION: Acknowledge at most two actual replies, without calling on anyone by name. Accept a letter, a word, or a longer question. If a reply arrives later, acknowledge it at the next natural pause.</a:t>
             </a:r>
           </a:p>
-          <a:p xmlns:a="http://schemas.openxmlformats.org/drawingml/2006/main">
-            <a:r>
-              <a:t/>
-            </a:r>
-          </a:p>
-          <a:p xmlns:a="http://schemas.openxmlformats.org/drawingml/2006/main">
+          <a:p>
+            <a:endParaRPr/>
+          </a:p>
+          <a:p>
             <a:r>
               <a:t>Use this cue at the indicated demo pause. Keep the Excel window visible when the prompt refers to its result.</a:t>
             </a:r>
           </a:p>
-          <a:p xmlns:a="http://schemas.openxmlformats.org/drawingml/2006/main">
-            <a:r>
-              <a:t/>
-            </a:r>
-          </a:p>
-          <a:p xmlns:a="http://schemas.openxmlformats.org/drawingml/2006/main">
+          <a:p>
+            <a:endParaRPr/>
+          </a:p>
+          <a:p>
             <a:r>
               <a:t>ORIGINAL TEACHING SCRIPT</a:t>
             </a:r>
           </a:p>
-          <a:p xmlns:a="http://schemas.openxmlformats.org/drawingml/2006/main">
+          <a:p>
             <a:r>
               <a:t>Demo one. On screen are two prompts asking for the same thing. The first is the blob: summarize this sales data and tell me whats important, followed by a messy paste of the whole export. It is an easy request to start with. The second is structured Markdown. A heading names the job: quarterly regional sales review. A Role section says who to be, an FP&amp;A analyst. A Task section lists three bullets: summarize by region, flag the trailing region, suggest two follow-ups. A Data section carries our regional summary as a clean Markdown table, and a Format section dictates the shape of the answer. I send both to a free chatbot, live. Compare the replies we actually get. Did each answer the task and follow the requested format? Did it use the numbers correctly? These examples differ in detail and data presentation as well as formatting, so do not attribute every difference to Markdown.</a:t>
             </a:r>
@@ -787,7 +665,7 @@
         <p:nvSpPr>
           <p:cNvPr id="4" name="Slide Number Placeholder 3"/>
           <p:cNvSpPr>
-            <a:spLocks xmlns:a="http://schemas.openxmlformats.org/drawingml/2006/main" noGrp="1"/>
+            <a:spLocks noGrp="1"/>
           </p:cNvSpPr>
           <p:nvPr>
             <p:ph type="sldNum" idx="5"/>
@@ -795,21 +673,23 @@
         </p:nvSpPr>
         <p:spPr/>
         <p:txBody>
-          <a:bodyPr xmlns:a="http://schemas.openxmlformats.org/drawingml/2006/main"/>
-          <a:lstStyle xmlns:a="http://schemas.openxmlformats.org/drawingml/2006/main"/>
-          <a:p xmlns:a="http://schemas.openxmlformats.org/drawingml/2006/main"/>
+          <a:bodyPr/>
+          <a:lstStyle/>
+          <a:p>
+            <a:endParaRPr/>
+          </a:p>
         </p:txBody>
       </p:sp>
     </p:spTree>
   </p:cSld>
   <p:clrMapOvr>
-    <a:masterClrMapping xmlns:a="http://schemas.openxmlformats.org/drawingml/2006/main"/>
+    <a:masterClrMapping/>
   </p:clrMapOvr>
 </p:notes>
 </file>
 
 <file path=ppt/notesSlides/notesSlide5.xml><?xml version="1.0" encoding="utf-8"?>
-<p:notes xmlns:p="http://schemas.openxmlformats.org/presentationml/2006/main">
+<p:notes xmlns:a="http://schemas.openxmlformats.org/drawingml/2006/main" xmlns:r="http://schemas.openxmlformats.org/officeDocument/2006/relationships" xmlns:p="http://schemas.openxmlformats.org/presentationml/2006/main">
   <p:cSld>
     <p:spTree>
       <p:nvGrpSpPr>
@@ -818,16 +698,21 @@
         <p:nvPr/>
       </p:nvGrpSpPr>
       <p:grpSpPr>
-        <a:xfrm xmlns:a="http://schemas.openxmlformats.org/drawingml/2006/main"/>
+        <a:xfrm>
+          <a:off x="0" y="0"/>
+          <a:ext cx="0" cy="0"/>
+          <a:chOff x="0" y="0"/>
+          <a:chExt cx="0" cy="0"/>
+        </a:xfrm>
       </p:grpSpPr>
       <p:sp>
         <p:nvSpPr>
           <p:cNvPr id="2" name="Slide Image Placeholder 1"/>
           <p:cNvSpPr>
-            <a:spLocks xmlns:a="http://schemas.openxmlformats.org/drawingml/2006/main" noGrp="1"/>
-          </p:cNvSpPr>
-          <p:nvPr>
-            <p:ph type="sldImg" idx="0"/>
+            <a:spLocks noGrp="1" noRot="1" noChangeAspect="1"/>
+          </p:cNvSpPr>
+          <p:nvPr>
+            <p:ph type="sldImg"/>
           </p:nvPr>
         </p:nvSpPr>
         <p:spPr/>
@@ -836,7 +721,7 @@
         <p:nvSpPr>
           <p:cNvPr id="3" name="Notes Placeholder 2"/>
           <p:cNvSpPr>
-            <a:spLocks xmlns:a="http://schemas.openxmlformats.org/drawingml/2006/main" noGrp="1"/>
+            <a:spLocks noGrp="1"/>
           </p:cNvSpPr>
           <p:nvPr>
             <p:ph type="body" idx="1"/>
@@ -844,61 +729,58 @@
         </p:nvSpPr>
         <p:spPr/>
         <p:txBody>
-          <a:bodyPr xmlns:a="http://schemas.openxmlformats.org/drawingml/2006/main"/>
-          <a:lstStyle xmlns:a="http://schemas.openxmlformats.org/drawingml/2006/main"/>
-          <a:p xmlns:a="http://schemas.openxmlformats.org/drawingml/2006/main">
-            <a:r>
-              <a:t>CHAT CUE (about 12:00; budget 15 seconds total)</a:t>
-            </a:r>
-          </a:p>
-          <a:p xmlns:a="http://schemas.openxmlformats.org/drawingml/2006/main">
-            <a:r>
-              <a:t>SAY: Look between the Markdown table columns: is the separator PIPE or COMMA? One word.</a:t>
-            </a:r>
-          </a:p>
-          <a:p xmlns:a="http://schemas.openxmlformats.org/drawingml/2006/main">
+          <a:bodyPr/>
+          <a:lstStyle/>
+          <a:p>
+            <a:r>
+              <a:t>CHAT CUE (about 16:30; budget 15 seconds total)</a:t>
+            </a:r>
+          </a:p>
+          <a:p>
+            <a:r>
+              <a:t>SAY: Pick one improvement for your next prompt: TASK or FORMAT. Type either word.</a:t>
+            </a:r>
+          </a:p>
+          <a:p>
             <a:r>
               <a:t>PAUSE: Wait silently for 8 seconds. Do not repeat the request.</a:t>
             </a:r>
           </a:p>
-          <a:p xmlns:a="http://schemas.openxmlformats.org/drawingml/2006/main">
-            <a:r>
-              <a:t>IF SOMEONE REPLIES: PIPE. Show the | character. After splitting, remove the Markdown separator row and empty edge columns, and verify headers and numbers.</a:t>
-            </a:r>
-          </a:p>
-          <a:p xmlns:a="http://schemas.openxmlformats.org/drawingml/2006/main">
-            <a:r>
-              <a:t>IF CHAT IS QUIET: Say, "It is PIPE, the vertical line between columns. I'll use it in Text to Columns." Then continue. Never imply that somebody replied.</a:t>
-            </a:r>
-          </a:p>
-          <a:p xmlns:a="http://schemas.openxmlformats.org/drawingml/2006/main">
+          <a:p>
+            <a:r>
+              <a:t>IF SOMEONE REPLIES: Acknowledge an actual choice. TASK: say exactly what to do. FORMAT: say how you want the answer returned. Try one change before adding more.</a:t>
+            </a:r>
+          </a:p>
+          <a:p>
+            <a:r>
+              <a:t>IF CHAT IS QUIET: Say, "I'll choose FORMAT, for example: return three bullets and a table." Then continue. Never imply that somebody replied.</a:t>
+            </a:r>
+          </a:p>
+          <a:p>
             <a:r>
               <a:t>FACILITATION: Acknowledge at most two actual replies, without calling on anyone by name. Accept a letter, a word, or a longer question. If a reply arrives later, acknowledge it at the next natural pause.</a:t>
             </a:r>
           </a:p>
-          <a:p xmlns:a="http://schemas.openxmlformats.org/drawingml/2006/main">
-            <a:r>
-              <a:t/>
-            </a:r>
-          </a:p>
-          <a:p xmlns:a="http://schemas.openxmlformats.org/drawingml/2006/main">
-            <a:r>
-              <a:t>Use this cue at the indicated demo pause. Keep the Excel window visible when the prompt refers to its result.</a:t>
-            </a:r>
-          </a:p>
-          <a:p xmlns:a="http://schemas.openxmlformats.org/drawingml/2006/main">
-            <a:r>
-              <a:t/>
-            </a:r>
-          </a:p>
-          <a:p xmlns:a="http://schemas.openxmlformats.org/drawingml/2006/main">
-            <a:r>
-              <a:t>ORIGINAL TEACHING SCRIPT</a:t>
-            </a:r>
-          </a:p>
-          <a:p xmlns:a="http://schemas.openxmlformats.org/drawingml/2006/main">
-            <a:r>
-              <a:t>Demo two, the round-trip. Going out is easy: I copy the RegionSummary table in Excel and paste it straight into the chat. It lands as a table the model reads cleanly, and you saw it handle that table perfectly in demo one. Coming back is the part nobody shows you. I ask the chatbot for its results as a Markdown table, and it returns rows with pipe characters between the columns. I copy that, paste it into a blank area of the sheet, and it lands squashed into one column. Now: Data tab, Text to Columns, Delimited, and the delimiter is the pipe character. Finish, remove the separator row with the dashes and any empty edge columns, then check the headers and numeric values. Copy out, Markdown back, Text to Columns. That is a data pipeline between Excel and any AI tool on earth, built from features that predate all of them.</a:t>
+          <a:p>
+            <a:endParaRPr/>
+          </a:p>
+          <a:p>
+            <a:r>
+              <a:t>Use this cue before reading the remaining notes.</a:t>
+            </a:r>
+          </a:p>
+          <a:p>
+            <a:endParaRPr/>
+          </a:p>
+          <a:p>
+            <a:r>
+              <a:t>TEACHING SCRIPT
+Pick one small next action. You do not need to complete every option. TASK: Add one clear sentence saying what you want the tool to do. FORMAT: Say how to return the answer, such as three bullets or a table. Choose one change, run the prompt, and check the answer.</a:t>
+            </a:r>
+          </a:p>
+          <a:p>
+            <a:r>
+              <a:t>Final desk actions of the series. One: take the next real prompt you were going to send anyway and rewrite it with a heading, a bulleted task list, and a Format section, then compare answers. That comparison converts people. Two: paste one small Excel table into a chatbot and ask for the reply as a Markdown table, then bring it home with Text to Columns. Three: save your best prompt as a dot md file. That file is reusable craft, and it is the seed of every agent instruction file you will ever write.</a:t>
             </a:r>
           </a:p>
         </p:txBody>
@@ -907,7 +789,7 @@
         <p:nvSpPr>
           <p:cNvPr id="4" name="Slide Number Placeholder 3"/>
           <p:cNvSpPr>
-            <a:spLocks xmlns:a="http://schemas.openxmlformats.org/drawingml/2006/main" noGrp="1"/>
+            <a:spLocks noGrp="1"/>
           </p:cNvSpPr>
           <p:nvPr>
             <p:ph type="sldNum" idx="5"/>
@@ -915,21 +797,23 @@
         </p:nvSpPr>
         <p:spPr/>
         <p:txBody>
-          <a:bodyPr xmlns:a="http://schemas.openxmlformats.org/drawingml/2006/main"/>
-          <a:lstStyle xmlns:a="http://schemas.openxmlformats.org/drawingml/2006/main"/>
-          <a:p xmlns:a="http://schemas.openxmlformats.org/drawingml/2006/main"/>
+          <a:bodyPr/>
+          <a:lstStyle/>
+          <a:p>
+            <a:endParaRPr/>
+          </a:p>
         </p:txBody>
       </p:sp>
     </p:spTree>
   </p:cSld>
   <p:clrMapOvr>
-    <a:masterClrMapping xmlns:a="http://schemas.openxmlformats.org/drawingml/2006/main"/>
+    <a:masterClrMapping/>
   </p:clrMapOvr>
 </p:notes>
 </file>
 
 <file path=ppt/notesSlides/notesSlide6.xml><?xml version="1.0" encoding="utf-8"?>
-<p:notes xmlns:p="http://schemas.openxmlformats.org/presentationml/2006/main">
+<p:notes xmlns:a="http://schemas.openxmlformats.org/drawingml/2006/main" xmlns:r="http://schemas.openxmlformats.org/officeDocument/2006/relationships" xmlns:p="http://schemas.openxmlformats.org/presentationml/2006/main">
   <p:cSld>
     <p:spTree>
       <p:nvGrpSpPr>
@@ -938,16 +822,21 @@
         <p:nvPr/>
       </p:nvGrpSpPr>
       <p:grpSpPr>
-        <a:xfrm xmlns:a="http://schemas.openxmlformats.org/drawingml/2006/main"/>
+        <a:xfrm>
+          <a:off x="0" y="0"/>
+          <a:ext cx="0" cy="0"/>
+          <a:chOff x="0" y="0"/>
+          <a:chExt cx="0" cy="0"/>
+        </a:xfrm>
       </p:grpSpPr>
       <p:sp>
         <p:nvSpPr>
           <p:cNvPr id="2" name="Slide Image Placeholder 1"/>
           <p:cNvSpPr>
-            <a:spLocks xmlns:a="http://schemas.openxmlformats.org/drawingml/2006/main" noGrp="1"/>
-          </p:cNvSpPr>
-          <p:nvPr>
-            <p:ph type="sldImg" idx="0"/>
+            <a:spLocks noGrp="1" noRot="1" noChangeAspect="1"/>
+          </p:cNvSpPr>
+          <p:nvPr>
+            <p:ph type="sldImg"/>
           </p:nvPr>
         </p:nvSpPr>
         <p:spPr/>
@@ -956,7 +845,7 @@
         <p:nvSpPr>
           <p:cNvPr id="3" name="Notes Placeholder 2"/>
           <p:cNvSpPr>
-            <a:spLocks xmlns:a="http://schemas.openxmlformats.org/drawingml/2006/main" noGrp="1"/>
+            <a:spLocks noGrp="1"/>
           </p:cNvSpPr>
           <p:nvPr>
             <p:ph type="body" idx="1"/>
@@ -964,62 +853,11 @@
         </p:nvSpPr>
         <p:spPr/>
         <p:txBody>
-          <a:bodyPr xmlns:a="http://schemas.openxmlformats.org/drawingml/2006/main"/>
-          <a:lstStyle xmlns:a="http://schemas.openxmlformats.org/drawingml/2006/main"/>
-          <a:p xmlns:a="http://schemas.openxmlformats.org/drawingml/2006/main">
-            <a:r>
-              <a:t>CHAT CUE (about 16:30; budget 15 seconds total)</a:t>
-            </a:r>
-          </a:p>
-          <a:p xmlns:a="http://schemas.openxmlformats.org/drawingml/2006/main">
-            <a:r>
-              <a:t>SAY: Pick one improvement for your next prompt: TASK or FORMAT. Type either word.</a:t>
-            </a:r>
-          </a:p>
-          <a:p xmlns:a="http://schemas.openxmlformats.org/drawingml/2006/main">
-            <a:r>
-              <a:t>PAUSE: Wait silently for 8 seconds. Do not repeat the request.</a:t>
-            </a:r>
-          </a:p>
-          <a:p xmlns:a="http://schemas.openxmlformats.org/drawingml/2006/main">
-            <a:r>
-              <a:t>IF SOMEONE REPLIES: Acknowledge an actual choice. TASK: say exactly what to do. FORMAT: say how you want the answer returned. Try one change before adding more.</a:t>
-            </a:r>
-          </a:p>
-          <a:p xmlns:a="http://schemas.openxmlformats.org/drawingml/2006/main">
-            <a:r>
-              <a:t>IF CHAT IS QUIET: Say, "I'll choose FORMAT, for example: return three bullets and a table." Then continue. Never imply that somebody replied.</a:t>
-            </a:r>
-          </a:p>
-          <a:p xmlns:a="http://schemas.openxmlformats.org/drawingml/2006/main">
-            <a:r>
-              <a:t>FACILITATION: Acknowledge at most two actual replies, without calling on anyone by name. Accept a letter, a word, or a longer question. If a reply arrives later, acknowledge it at the next natural pause.</a:t>
-            </a:r>
-          </a:p>
-          <a:p xmlns:a="http://schemas.openxmlformats.org/drawingml/2006/main">
-            <a:r>
-              <a:t/>
-            </a:r>
-          </a:p>
-          <a:p xmlns:a="http://schemas.openxmlformats.org/drawingml/2006/main">
-            <a:r>
-              <a:t>Use this cue before reading the remaining notes.</a:t>
-            </a:r>
-          </a:p>
-          <a:p xmlns:a="http://schemas.openxmlformats.org/drawingml/2006/main">
-            <a:r>
-              <a:t/>
-            </a:r>
-          </a:p>
-          <a:p xmlns:a="http://schemas.openxmlformats.org/drawingml/2006/main">
-            <a:r>
-              <a:t>TEACHING SCRIPT
-Pick one small next action. You do not need to complete every option. TASK: Add one clear sentence saying what you want the tool to do. FORMAT: Say how to return the answer, such as three bullets or a table. Choose one change, run the prompt, and check the answer.</a:t>
-            </a:r>
-          </a:p>
-          <a:p xmlns:a="http://schemas.openxmlformats.org/drawingml/2006/main">
-            <a:r>
-              <a:t>Final desk actions of the series. One: take the next real prompt you were going to send anyway and rewrite it with a heading, a bulleted task list, and a Format section, then compare answers. That comparison converts people. Two: paste one small Excel table into a chatbot and ask for the reply as a Markdown table, then bring it home with Text to Columns. Three: save your best prompt as a dot md file. That file is reusable craft, and it is the seed of every agent instruction file you will ever write.</a:t>
+          <a:bodyPr/>
+          <a:lstStyle/>
+          <a:p>
+            <a:r>
+              <a:t>Here is the week in numbers. Five twenty-minute wins. No Copilot license needed for these demos. Feature availability still depends on your existing Excel setup. One genuinely ugly sales export, fully tamed. Monday you found the machine learning already in Excel. Tuesday you made your data machine-readable. Wednesday you recorded the cleanup once and refreshed it forever. Thursday you ran real Python behind equals PY. Today you learned the language that steers all of it. The aim was to get more from tools in your existing setup. Check feature availability with your account and version. So, where next?</a:t>
             </a:r>
           </a:p>
         </p:txBody>
@@ -1028,7 +866,7 @@
         <p:nvSpPr>
           <p:cNvPr id="4" name="Slide Number Placeholder 3"/>
           <p:cNvSpPr>
-            <a:spLocks xmlns:a="http://schemas.openxmlformats.org/drawingml/2006/main" noGrp="1"/>
+            <a:spLocks noGrp="1"/>
           </p:cNvSpPr>
           <p:nvPr>
             <p:ph type="sldNum" idx="5"/>
@@ -1036,21 +874,23 @@
         </p:nvSpPr>
         <p:spPr/>
         <p:txBody>
-          <a:bodyPr xmlns:a="http://schemas.openxmlformats.org/drawingml/2006/main"/>
-          <a:lstStyle xmlns:a="http://schemas.openxmlformats.org/drawingml/2006/main"/>
-          <a:p xmlns:a="http://schemas.openxmlformats.org/drawingml/2006/main"/>
+          <a:bodyPr/>
+          <a:lstStyle/>
+          <a:p>
+            <a:endParaRPr/>
+          </a:p>
         </p:txBody>
       </p:sp>
     </p:spTree>
   </p:cSld>
   <p:clrMapOvr>
-    <a:masterClrMapping xmlns:a="http://schemas.openxmlformats.org/drawingml/2006/main"/>
+    <a:masterClrMapping/>
   </p:clrMapOvr>
 </p:notes>
 </file>
 
 <file path=ppt/notesSlides/notesSlide7.xml><?xml version="1.0" encoding="utf-8"?>
-<p:notes xmlns:p="http://schemas.openxmlformats.org/presentationml/2006/main">
+<p:notes xmlns:a="http://schemas.openxmlformats.org/drawingml/2006/main" xmlns:r="http://schemas.openxmlformats.org/officeDocument/2006/relationships" xmlns:p="http://schemas.openxmlformats.org/presentationml/2006/main">
   <p:cSld>
     <p:spTree>
       <p:nvGrpSpPr>
@@ -1059,16 +899,21 @@
         <p:nvPr/>
       </p:nvGrpSpPr>
       <p:grpSpPr>
-        <a:xfrm xmlns:a="http://schemas.openxmlformats.org/drawingml/2006/main"/>
+        <a:xfrm>
+          <a:off x="0" y="0"/>
+          <a:ext cx="0" cy="0"/>
+          <a:chOff x="0" y="0"/>
+          <a:chExt cx="0" cy="0"/>
+        </a:xfrm>
       </p:grpSpPr>
       <p:sp>
         <p:nvSpPr>
           <p:cNvPr id="2" name="Slide Image Placeholder 1"/>
           <p:cNvSpPr>
-            <a:spLocks xmlns:a="http://schemas.openxmlformats.org/drawingml/2006/main" noGrp="1"/>
-          </p:cNvSpPr>
-          <p:nvPr>
-            <p:ph type="sldImg" idx="0"/>
+            <a:spLocks noGrp="1" noRot="1" noChangeAspect="1"/>
+          </p:cNvSpPr>
+          <p:nvPr>
+            <p:ph type="sldImg"/>
           </p:nvPr>
         </p:nvSpPr>
         <p:spPr/>
@@ -1077,7 +922,7 @@
         <p:nvSpPr>
           <p:cNvPr id="3" name="Notes Placeholder 2"/>
           <p:cNvSpPr>
-            <a:spLocks xmlns:a="http://schemas.openxmlformats.org/drawingml/2006/main" noGrp="1"/>
+            <a:spLocks noGrp="1"/>
           </p:cNvSpPr>
           <p:nvPr>
             <p:ph type="body" idx="1"/>
@@ -1085,11 +930,11 @@
         </p:nvSpPr>
         <p:spPr/>
         <p:txBody>
-          <a:bodyPr xmlns:a="http://schemas.openxmlformats.org/drawingml/2006/main"/>
-          <a:lstStyle xmlns:a="http://schemas.openxmlformats.org/drawingml/2006/main"/>
-          <a:p xmlns:a="http://schemas.openxmlformats.org/drawingml/2006/main">
-            <a:r>
-              <a:t>Here is the week in numbers. Five twenty-minute wins. No Copilot license needed for these demos. Feature availability still depends on your existing Excel setup. One genuinely ugly sales export, fully tamed. Monday you found the machine learning already in Excel. Tuesday you made your data machine-readable. Wednesday you recorded the cleanup once and refreshed it forever. Thursday you ran real Python behind equals PY. Today you learned the language that steers all of it. The aim was to get more from tools in your existing setup. Check feature availability with your account and version. So, where next?</a:t>
+          <a:bodyPr/>
+          <a:lstStyle/>
+          <a:p>
+            <a:r>
+              <a:t>Two ways to keep going, and they stack. First, the replays. All five sessions from this week live in the Stringfest Analytics membership vault, along with my full back catalog of recordings. Ten dollars a month, cancel anytime. If you want to rewatch Wednesday with the workbook open in front of you, that is the place. Second, the deeper version. This December I am running AI for Excel in a Week: five live sessions, sixty minutes each, that take everything you saw here further, hands-on, with time to actually build alongside me. If this week was the espresso shot, December is the full pour. The registration link will be in tomorrow's thank-you email, sent to the address you registered with. Membership today, December for depth, or both.</a:t>
             </a:r>
           </a:p>
         </p:txBody>
@@ -1098,7 +943,7 @@
         <p:nvSpPr>
           <p:cNvPr id="4" name="Slide Number Placeholder 3"/>
           <p:cNvSpPr>
-            <a:spLocks xmlns:a="http://schemas.openxmlformats.org/drawingml/2006/main" noGrp="1"/>
+            <a:spLocks noGrp="1"/>
           </p:cNvSpPr>
           <p:nvPr>
             <p:ph type="sldNum" idx="5"/>
@@ -1106,21 +951,23 @@
         </p:nvSpPr>
         <p:spPr/>
         <p:txBody>
-          <a:bodyPr xmlns:a="http://schemas.openxmlformats.org/drawingml/2006/main"/>
-          <a:lstStyle xmlns:a="http://schemas.openxmlformats.org/drawingml/2006/main"/>
-          <a:p xmlns:a="http://schemas.openxmlformats.org/drawingml/2006/main"/>
+          <a:bodyPr/>
+          <a:lstStyle/>
+          <a:p>
+            <a:endParaRPr/>
+          </a:p>
         </p:txBody>
       </p:sp>
     </p:spTree>
   </p:cSld>
   <p:clrMapOvr>
-    <a:masterClrMapping xmlns:a="http://schemas.openxmlformats.org/drawingml/2006/main"/>
+    <a:masterClrMapping/>
   </p:clrMapOvr>
 </p:notes>
 </file>
 
 <file path=ppt/notesSlides/notesSlide8.xml><?xml version="1.0" encoding="utf-8"?>
-<p:notes xmlns:p="http://schemas.openxmlformats.org/presentationml/2006/main">
+<p:notes xmlns:a="http://schemas.openxmlformats.org/drawingml/2006/main" xmlns:r="http://schemas.openxmlformats.org/officeDocument/2006/relationships" xmlns:p="http://schemas.openxmlformats.org/presentationml/2006/main">
   <p:cSld>
     <p:spTree>
       <p:nvGrpSpPr>
@@ -1129,16 +976,21 @@
         <p:nvPr/>
       </p:nvGrpSpPr>
       <p:grpSpPr>
-        <a:xfrm xmlns:a="http://schemas.openxmlformats.org/drawingml/2006/main"/>
+        <a:xfrm>
+          <a:off x="0" y="0"/>
+          <a:ext cx="0" cy="0"/>
+          <a:chOff x="0" y="0"/>
+          <a:chExt cx="0" cy="0"/>
+        </a:xfrm>
       </p:grpSpPr>
       <p:sp>
         <p:nvSpPr>
           <p:cNvPr id="2" name="Slide Image Placeholder 1"/>
           <p:cNvSpPr>
-            <a:spLocks xmlns:a="http://schemas.openxmlformats.org/drawingml/2006/main" noGrp="1"/>
-          </p:cNvSpPr>
-          <p:nvPr>
-            <p:ph type="sldImg" idx="0"/>
+            <a:spLocks noGrp="1" noRot="1" noChangeAspect="1"/>
+          </p:cNvSpPr>
+          <p:nvPr>
+            <p:ph type="sldImg"/>
           </p:nvPr>
         </p:nvSpPr>
         <p:spPr/>
@@ -1147,7 +999,7 @@
         <p:nvSpPr>
           <p:cNvPr id="3" name="Notes Placeholder 2"/>
           <p:cNvSpPr>
-            <a:spLocks xmlns:a="http://schemas.openxmlformats.org/drawingml/2006/main" noGrp="1"/>
+            <a:spLocks noGrp="1"/>
           </p:cNvSpPr>
           <p:nvPr>
             <p:ph type="body" idx="1"/>
@@ -1155,11 +1007,57 @@
         </p:nvSpPr>
         <p:spPr/>
         <p:txBody>
-          <a:bodyPr xmlns:a="http://schemas.openxmlformats.org/drawingml/2006/main"/>
-          <a:lstStyle xmlns:a="http://schemas.openxmlformats.org/drawingml/2006/main"/>
-          <a:p xmlns:a="http://schemas.openxmlformats.org/drawingml/2006/main">
-            <a:r>
-              <a:t>Two ways to keep going, and they stack. First, the replays. All five sessions from this week live in the Stringfest Analytics membership vault, along with my full back catalog of recordings. Ten dollars a month, cancel anytime. If you want to rewatch Wednesday with the workbook open in front of you, that is the place. Second, the deeper version. This December I am running AI for Excel in a Week: five live sessions, sixty minutes each, that take everything you saw here further, hands-on, with time to actually build alongside me. If this week was the espresso shot, December is the full pour. The registration link will be in tomorrow's thank-you email, sent to the address you registered with. Membership today, December for depth, or both.</a:t>
+          <a:bodyPr/>
+          <a:lstStyle/>
+          <a:p>
+            <a:r>
+              <a:t>CHAT CUE (about 18:30; budget 15 seconds total)</a:t>
+            </a:r>
+          </a:p>
+          <a:p>
+            <a:r>
+              <a:t>SAY: One last chance to steer the demo: type PROMPT or TABLE if you want that part again. Full questions are welcome too.</a:t>
+            </a:r>
+          </a:p>
+          <a:p>
+            <a:r>
+              <a:t>PAUSE: Wait silently for 8 seconds. Do not repeat the request.</a:t>
+            </a:r>
+          </a:p>
+          <a:p>
+            <a:r>
+              <a:t>IF SOMEONE REPLIES: Answer one actual request. PROMPT: show Task and Format. TABLE: point to the pipe delimiter and remove the separator row. Thank participants once, without commenting on how many replied.</a:t>
+            </a:r>
+          </a:p>
+          <a:p>
+            <a:r>
+              <a:t>IF CHAT IS QUIET: Say, "One useful final check: compare the returned table with the original before using its numbers." Then continue. Never imply that somebody replied.</a:t>
+            </a:r>
+          </a:p>
+          <a:p>
+            <a:r>
+              <a:t>FACILITATION: Acknowledge at most two actual replies, without calling on anyone by name. Accept a letter, a word, or a longer question. If a reply arrives later, acknowledge it at the next natural pause.</a:t>
+            </a:r>
+          </a:p>
+          <a:p>
+            <a:endParaRPr/>
+          </a:p>
+          <a:p>
+            <a:r>
+              <a:t>Use this cue before reading the remaining notes.</a:t>
+            </a:r>
+          </a:p>
+          <a:p>
+            <a:endParaRPr/>
+          </a:p>
+          <a:p>
+            <a:r>
+              <a:t>ORIGINAL TEACHING SCRIPT</a:t>
+            </a:r>
+          </a:p>
+          <a:p>
+            <a:r>
+              <a:t>That is the series. Thank you, sincerely, for giving me twenty minutes a day of your week. Everything lands in your inbox tomorrow: the files, the links, the membership, and December's cohort. My ask is simple: pick one of the five moves and use it on real work this afternoon, because the move you use within a day is the one you keep. If this week saved you time, tell one coworker who is still cleaning columns by hand. I'm George Mount from Stringfest Analytics. Go be crafty.</a:t>
             </a:r>
           </a:p>
         </p:txBody>
@@ -1168,7 +1066,7 @@
         <p:nvSpPr>
           <p:cNvPr id="4" name="Slide Number Placeholder 3"/>
           <p:cNvSpPr>
-            <a:spLocks xmlns:a="http://schemas.openxmlformats.org/drawingml/2006/main" noGrp="1"/>
+            <a:spLocks noGrp="1"/>
           </p:cNvSpPr>
           <p:nvPr>
             <p:ph type="sldNum" idx="5"/>
@@ -1176,141 +1074,23 @@
         </p:nvSpPr>
         <p:spPr/>
         <p:txBody>
-          <a:bodyPr xmlns:a="http://schemas.openxmlformats.org/drawingml/2006/main"/>
-          <a:lstStyle xmlns:a="http://schemas.openxmlformats.org/drawingml/2006/main"/>
-          <a:p xmlns:a="http://schemas.openxmlformats.org/drawingml/2006/main"/>
+          <a:bodyPr/>
+          <a:lstStyle/>
+          <a:p>
+            <a:endParaRPr/>
+          </a:p>
         </p:txBody>
       </p:sp>
     </p:spTree>
   </p:cSld>
   <p:clrMapOvr>
-    <a:masterClrMapping xmlns:a="http://schemas.openxmlformats.org/drawingml/2006/main"/>
-  </p:clrMapOvr>
-</p:notes>
-</file>
-
-<file path=ppt/notesSlides/notesSlide9.xml><?xml version="1.0" encoding="utf-8"?>
-<p:notes xmlns:p="http://schemas.openxmlformats.org/presentationml/2006/main">
-  <p:cSld>
-    <p:spTree>
-      <p:nvGrpSpPr>
-        <p:cNvPr id="1" name=""/>
-        <p:cNvGrpSpPr/>
-        <p:nvPr/>
-      </p:nvGrpSpPr>
-      <p:grpSpPr>
-        <a:xfrm xmlns:a="http://schemas.openxmlformats.org/drawingml/2006/main"/>
-      </p:grpSpPr>
-      <p:sp>
-        <p:nvSpPr>
-          <p:cNvPr id="2" name="Slide Image Placeholder 1"/>
-          <p:cNvSpPr>
-            <a:spLocks xmlns:a="http://schemas.openxmlformats.org/drawingml/2006/main" noGrp="1"/>
-          </p:cNvSpPr>
-          <p:nvPr>
-            <p:ph type="sldImg" idx="0"/>
-          </p:nvPr>
-        </p:nvSpPr>
-        <p:spPr/>
-      </p:sp>
-      <p:sp>
-        <p:nvSpPr>
-          <p:cNvPr id="3" name="Notes Placeholder 2"/>
-          <p:cNvSpPr>
-            <a:spLocks xmlns:a="http://schemas.openxmlformats.org/drawingml/2006/main" noGrp="1"/>
-          </p:cNvSpPr>
-          <p:nvPr>
-            <p:ph type="body" idx="1"/>
-          </p:nvPr>
-        </p:nvSpPr>
-        <p:spPr/>
-        <p:txBody>
-          <a:bodyPr xmlns:a="http://schemas.openxmlformats.org/drawingml/2006/main"/>
-          <a:lstStyle xmlns:a="http://schemas.openxmlformats.org/drawingml/2006/main"/>
-          <a:p xmlns:a="http://schemas.openxmlformats.org/drawingml/2006/main">
-            <a:r>
-              <a:t>CHAT CUE (about 18:30; budget 15 seconds total)</a:t>
-            </a:r>
-          </a:p>
-          <a:p xmlns:a="http://schemas.openxmlformats.org/drawingml/2006/main">
-            <a:r>
-              <a:t>SAY: One last chance to steer the demo: type PROMPT or TABLE if you want that part again. Full questions are welcome too.</a:t>
-            </a:r>
-          </a:p>
-          <a:p xmlns:a="http://schemas.openxmlformats.org/drawingml/2006/main">
-            <a:r>
-              <a:t>PAUSE: Wait silently for 8 seconds. Do not repeat the request.</a:t>
-            </a:r>
-          </a:p>
-          <a:p xmlns:a="http://schemas.openxmlformats.org/drawingml/2006/main">
-            <a:r>
-              <a:t>IF SOMEONE REPLIES: Answer one actual request. PROMPT: show Task and Format. TABLE: point to the pipe delimiter and remove the separator row. Thank participants once, without commenting on how many replied.</a:t>
-            </a:r>
-          </a:p>
-          <a:p xmlns:a="http://schemas.openxmlformats.org/drawingml/2006/main">
-            <a:r>
-              <a:t>IF CHAT IS QUIET: Say, "One useful final check: compare the returned table with the original before using its numbers." Then continue. Never imply that somebody replied.</a:t>
-            </a:r>
-          </a:p>
-          <a:p xmlns:a="http://schemas.openxmlformats.org/drawingml/2006/main">
-            <a:r>
-              <a:t>FACILITATION: Acknowledge at most two actual replies, without calling on anyone by name. Accept a letter, a word, or a longer question. If a reply arrives later, acknowledge it at the next natural pause.</a:t>
-            </a:r>
-          </a:p>
-          <a:p xmlns:a="http://schemas.openxmlformats.org/drawingml/2006/main">
-            <a:r>
-              <a:t/>
-            </a:r>
-          </a:p>
-          <a:p xmlns:a="http://schemas.openxmlformats.org/drawingml/2006/main">
-            <a:r>
-              <a:t>Use this cue before reading the remaining notes.</a:t>
-            </a:r>
-          </a:p>
-          <a:p xmlns:a="http://schemas.openxmlformats.org/drawingml/2006/main">
-            <a:r>
-              <a:t/>
-            </a:r>
-          </a:p>
-          <a:p xmlns:a="http://schemas.openxmlformats.org/drawingml/2006/main">
-            <a:r>
-              <a:t>ORIGINAL TEACHING SCRIPT</a:t>
-            </a:r>
-          </a:p>
-          <a:p xmlns:a="http://schemas.openxmlformats.org/drawingml/2006/main">
-            <a:r>
-              <a:t>That is the series. Thank you, sincerely, for giving me twenty minutes a day of your week. Everything lands in your inbox tomorrow: the files, the links, the membership, and December's cohort. My ask is simple: pick one of the five moves and use it on real work this afternoon, because the move you use within a day is the one you keep. If this week saved you time, tell one coworker who is still cleaning columns by hand. I'm George Mount from Stringfest Analytics. Go be crafty.</a:t>
-            </a:r>
-          </a:p>
-        </p:txBody>
-      </p:sp>
-      <p:sp>
-        <p:nvSpPr>
-          <p:cNvPr id="4" name="Slide Number Placeholder 3"/>
-          <p:cNvSpPr>
-            <a:spLocks xmlns:a="http://schemas.openxmlformats.org/drawingml/2006/main" noGrp="1"/>
-          </p:cNvSpPr>
-          <p:nvPr>
-            <p:ph type="sldNum" idx="5"/>
-          </p:nvPr>
-        </p:nvSpPr>
-        <p:spPr/>
-        <p:txBody>
-          <a:bodyPr xmlns:a="http://schemas.openxmlformats.org/drawingml/2006/main"/>
-          <a:lstStyle xmlns:a="http://schemas.openxmlformats.org/drawingml/2006/main"/>
-          <a:p xmlns:a="http://schemas.openxmlformats.org/drawingml/2006/main"/>
-        </p:txBody>
-      </p:sp>
-    </p:spTree>
-  </p:cSld>
-  <p:clrMapOvr>
-    <a:masterClrMapping xmlns:a="http://schemas.openxmlformats.org/drawingml/2006/main"/>
+    <a:masterClrMapping/>
   </p:clrMapOvr>
 </p:notes>
 </file>
 
 <file path=ppt/slideLayouts/slideLayout1.xml><?xml version="1.0" encoding="utf-8"?>
-<p:sldLayout xmlns:p="http://schemas.openxmlformats.org/presentationml/2006/main" type="title" preserve="1">
+<p:sldLayout xmlns:a="http://schemas.openxmlformats.org/drawingml/2006/main" xmlns:r="http://schemas.openxmlformats.org/officeDocument/2006/relationships" xmlns:p="http://schemas.openxmlformats.org/presentationml/2006/main" type="title" preserve="1">
   <p:cSld name="Title Slide">
     <p:spTree>
       <p:nvGrpSpPr>
@@ -1319,66 +1099,70 @@
         <p:nvPr/>
       </p:nvGrpSpPr>
       <p:grpSpPr>
-        <a:xfrm xmlns:a="http://schemas.openxmlformats.org/drawingml/2006/main"/>
+        <a:xfrm>
+          <a:off x="0" y="0"/>
+          <a:ext cx="0" cy="0"/>
+          <a:chOff x="0" y="0"/>
+          <a:chExt cx="0" cy="0"/>
+        </a:xfrm>
       </p:grpSpPr>
       <p:sp>
         <p:nvSpPr>
           <p:cNvPr id="2" name="Title 1">
-            <a:extLst xmlns:a="http://schemas.openxmlformats.org/drawingml/2006/main">
+            <a:extLst>
               <a:ext uri="{FF2B5EF4-FFF2-40B4-BE49-F238E27FC236}">
                 <a16:creationId xmlns:a16="http://schemas.microsoft.com/office/drawing/2014/main" id="{EB409EFA-843A-4CD9-9435-2F705192D125}"/>
               </a:ext>
             </a:extLst>
           </p:cNvPr>
           <p:cNvSpPr>
-            <a:spLocks xmlns:a="http://schemas.openxmlformats.org/drawingml/2006/main" noGrp="1"/>
-          </p:cNvSpPr>
-          <p:nvPr>
-            <p:ph type="ctrTitle" idx="0"/>
+            <a:spLocks noGrp="1"/>
+          </p:cNvSpPr>
+          <p:nvPr>
+            <p:ph type="ctrTitle"/>
           </p:nvPr>
         </p:nvSpPr>
         <p:spPr>
-          <a:xfrm xmlns:a="http://schemas.openxmlformats.org/drawingml/2006/main">
+          <a:xfrm>
             <a:off x="685800" y="2130425"/>
             <a:ext cx="7772400" cy="1470025"/>
           </a:xfrm>
         </p:spPr>
         <p:txBody>
-          <a:bodyPr xmlns:a="http://schemas.openxmlformats.org/drawingml/2006/main"/>
-          <a:lstStyle xmlns:a="http://schemas.openxmlformats.org/drawingml/2006/main"/>
-          <a:p xmlns:a="http://schemas.openxmlformats.org/drawingml/2006/main">
+          <a:bodyPr/>
+          <a:lstStyle/>
+          <a:p>
             <a:r>
               <a:t>Click to edit Master title style</a:t>
             </a:r>
-            <a:endParaRPr/>
           </a:p>
         </p:txBody>
       </p:sp>
       <p:sp>
         <p:nvSpPr>
           <p:cNvPr id="3" name="Subtitle 2">
-            <a:extLst xmlns:a="http://schemas.openxmlformats.org/drawingml/2006/main">
+            <a:extLst>
               <a:ext uri="{FF2B5EF4-FFF2-40B4-BE49-F238E27FC236}">
                 <a16:creationId xmlns:a16="http://schemas.microsoft.com/office/drawing/2014/main" id="{88828987-BA29-4417-BFC0-24B257F66ED7}"/>
               </a:ext>
             </a:extLst>
           </p:cNvPr>
           <p:cNvSpPr>
-            <a:spLocks xmlns:a="http://schemas.openxmlformats.org/drawingml/2006/main" noGrp="1"/>
+            <a:spLocks noGrp="1"/>
           </p:cNvSpPr>
           <p:nvPr>
             <p:ph type="subTitle" idx="1"/>
           </p:nvPr>
         </p:nvSpPr>
         <p:spPr>
-          <a:xfrm xmlns:a="http://schemas.openxmlformats.org/drawingml/2006/main">
+          <a:xfrm>
             <a:off x="1371600" y="3886200"/>
             <a:ext cx="6400800" cy="1752600"/>
           </a:xfrm>
         </p:spPr>
         <p:txBody>
-          <a:bodyPr xmlns:a="http://schemas.openxmlformats.org/drawingml/2006/main"/>
-          <a:lstStyle xmlns:a="http://schemas.openxmlformats.org/drawingml/2006/main">
+          <a:bodyPr/>
+          <a:lstStyle>
             <a:lvl1pPr marL="0" indent="0" algn="ctr">
               <a:buNone/>
               <a:defRPr>
@@ -1470,25 +1254,24 @@
               </a:defRPr>
             </a:lvl9pPr>
           </a:lstStyle>
-          <a:p xmlns:a="http://schemas.openxmlformats.org/drawingml/2006/main">
+          <a:p>
             <a:r>
               <a:t>Click to edit Master subtitle style</a:t>
             </a:r>
-            <a:endParaRPr/>
           </a:p>
         </p:txBody>
       </p:sp>
       <p:sp>
         <p:nvSpPr>
           <p:cNvPr id="4" name="Date Placeholder 3">
-            <a:extLst xmlns:a="http://schemas.openxmlformats.org/drawingml/2006/main">
+            <a:extLst>
               <a:ext uri="{FF2B5EF4-FFF2-40B4-BE49-F238E27FC236}">
                 <a16:creationId xmlns:a16="http://schemas.microsoft.com/office/drawing/2014/main" id="{085131C1-ACBF-47F2-91DF-74E44E1D3E50}"/>
               </a:ext>
             </a:extLst>
           </p:cNvPr>
           <p:cNvSpPr>
-            <a:spLocks xmlns:a="http://schemas.openxmlformats.org/drawingml/2006/main" noGrp="1"/>
+            <a:spLocks noGrp="1"/>
           </p:cNvSpPr>
           <p:nvPr>
             <p:ph type="dt" idx="10"/>
@@ -1496,11 +1279,11 @@
         </p:nvSpPr>
         <p:spPr/>
         <p:txBody>
-          <a:bodyPr xmlns:a="http://schemas.openxmlformats.org/drawingml/2006/main"/>
-          <a:lstStyle xmlns:a="http://schemas.openxmlformats.org/drawingml/2006/main"/>
-          <a:p xmlns:a="http://schemas.openxmlformats.org/drawingml/2006/main">
+          <a:bodyPr/>
+          <a:lstStyle/>
+          <a:p>
             <a:fld id="{5BCAD085-E8A6-8845-BD4E-CB4CCA059FC4}" type="datetimeFigureOut">
-              <a:t>1/27/13</a:t>
+              <a:t>9/30/2026</a:t>
             </a:fld>
             <a:endParaRPr/>
           </a:p>
@@ -1509,14 +1292,14 @@
       <p:sp>
         <p:nvSpPr>
           <p:cNvPr id="5" name="Footer Placeholder 4">
-            <a:extLst xmlns:a="http://schemas.openxmlformats.org/drawingml/2006/main">
+            <a:extLst>
               <a:ext uri="{FF2B5EF4-FFF2-40B4-BE49-F238E27FC236}">
                 <a16:creationId xmlns:a16="http://schemas.microsoft.com/office/drawing/2014/main" id="{54777E38-A468-4D6A-9B05-480B3F60C990}"/>
               </a:ext>
             </a:extLst>
           </p:cNvPr>
           <p:cNvSpPr>
-            <a:spLocks xmlns:a="http://schemas.openxmlformats.org/drawingml/2006/main" noGrp="1"/>
+            <a:spLocks noGrp="1"/>
           </p:cNvSpPr>
           <p:nvPr>
             <p:ph type="ftr" idx="11"/>
@@ -1524,9 +1307,9 @@
         </p:nvSpPr>
         <p:spPr/>
         <p:txBody>
-          <a:bodyPr xmlns:a="http://schemas.openxmlformats.org/drawingml/2006/main"/>
-          <a:lstStyle xmlns:a="http://schemas.openxmlformats.org/drawingml/2006/main"/>
-          <a:p xmlns:a="http://schemas.openxmlformats.org/drawingml/2006/main">
+          <a:bodyPr/>
+          <a:lstStyle/>
+          <a:p>
             <a:endParaRPr/>
           </a:p>
         </p:txBody>
@@ -1534,14 +1317,14 @@
       <p:sp>
         <p:nvSpPr>
           <p:cNvPr id="6" name="Slide Number Placeholder 5">
-            <a:extLst xmlns:a="http://schemas.openxmlformats.org/drawingml/2006/main">
+            <a:extLst>
               <a:ext uri="{FF2B5EF4-FFF2-40B4-BE49-F238E27FC236}">
                 <a16:creationId xmlns:a16="http://schemas.microsoft.com/office/drawing/2014/main" id="{D4FEC2CA-8413-4061-8076-DB1AAB4ED228}"/>
               </a:ext>
             </a:extLst>
           </p:cNvPr>
           <p:cNvSpPr>
-            <a:spLocks xmlns:a="http://schemas.openxmlformats.org/drawingml/2006/main" noGrp="1"/>
+            <a:spLocks noGrp="1"/>
           </p:cNvSpPr>
           <p:nvPr>
             <p:ph type="sldNum" idx="12"/>
@@ -1549,9 +1332,9 @@
         </p:nvSpPr>
         <p:spPr/>
         <p:txBody>
-          <a:bodyPr xmlns:a="http://schemas.openxmlformats.org/drawingml/2006/main"/>
-          <a:lstStyle xmlns:a="http://schemas.openxmlformats.org/drawingml/2006/main"/>
-          <a:p xmlns:a="http://schemas.openxmlformats.org/drawingml/2006/main">
+          <a:bodyPr/>
+          <a:lstStyle/>
+          <a:p>
             <a:fld id="{C1FF6DA9-008F-8B48-92A6-B652298478BF}" type="slidenum">
               <a:t>‹#›</a:t>
             </a:fld>
@@ -1561,11 +1344,14 @@
       </p:sp>
     </p:spTree>
   </p:cSld>
+  <p:clrMapOvr>
+    <a:masterClrMapping/>
+  </p:clrMapOvr>
 </p:sldLayout>
 </file>
 
 <file path=ppt/slideLayouts/slideLayout10.xml><?xml version="1.0" encoding="utf-8"?>
-<p:sldLayout xmlns:p="http://schemas.openxmlformats.org/presentationml/2006/main" type="vertTx" preserve="1">
+<p:sldLayout xmlns:a="http://schemas.openxmlformats.org/drawingml/2006/main" xmlns:r="http://schemas.openxmlformats.org/officeDocument/2006/relationships" xmlns:p="http://schemas.openxmlformats.org/presentationml/2006/main" type="vertTx" preserve="1">
   <p:cSld name="Title and Vertical Text">
     <p:spTree>
       <p:nvGrpSpPr>
@@ -1574,47 +1360,51 @@
         <p:nvPr/>
       </p:nvGrpSpPr>
       <p:grpSpPr>
-        <a:xfrm xmlns:a="http://schemas.openxmlformats.org/drawingml/2006/main"/>
+        <a:xfrm>
+          <a:off x="0" y="0"/>
+          <a:ext cx="0" cy="0"/>
+          <a:chOff x="0" y="0"/>
+          <a:chExt cx="0" cy="0"/>
+        </a:xfrm>
       </p:grpSpPr>
       <p:sp>
         <p:nvSpPr>
           <p:cNvPr id="2" name="Title 1">
-            <a:extLst xmlns:a="http://schemas.openxmlformats.org/drawingml/2006/main">
+            <a:extLst>
               <a:ext uri="{FF2B5EF4-FFF2-40B4-BE49-F238E27FC236}">
                 <a16:creationId xmlns:a16="http://schemas.microsoft.com/office/drawing/2014/main" id="{00BED687-94E8-42D9-8BDA-40895D0FD898}"/>
               </a:ext>
             </a:extLst>
           </p:cNvPr>
           <p:cNvSpPr>
-            <a:spLocks xmlns:a="http://schemas.openxmlformats.org/drawingml/2006/main" noGrp="1"/>
-          </p:cNvSpPr>
-          <p:nvPr>
-            <p:ph type="title" idx="0"/>
+            <a:spLocks noGrp="1"/>
+          </p:cNvSpPr>
+          <p:nvPr>
+            <p:ph type="title"/>
           </p:nvPr>
         </p:nvSpPr>
         <p:spPr/>
         <p:txBody>
-          <a:bodyPr xmlns:a="http://schemas.openxmlformats.org/drawingml/2006/main"/>
-          <a:lstStyle xmlns:a="http://schemas.openxmlformats.org/drawingml/2006/main"/>
-          <a:p xmlns:a="http://schemas.openxmlformats.org/drawingml/2006/main">
+          <a:bodyPr/>
+          <a:lstStyle/>
+          <a:p>
             <a:r>
               <a:t>Click to edit Master title style</a:t>
             </a:r>
-            <a:endParaRPr/>
           </a:p>
         </p:txBody>
       </p:sp>
       <p:sp>
         <p:nvSpPr>
           <p:cNvPr id="3" name="Vertical Text Placeholder 2">
-            <a:extLst xmlns:a="http://schemas.openxmlformats.org/drawingml/2006/main">
+            <a:extLst>
               <a:ext uri="{FF2B5EF4-FFF2-40B4-BE49-F238E27FC236}">
                 <a16:creationId xmlns:a16="http://schemas.microsoft.com/office/drawing/2014/main" id="{B49468B5-B8F1-440E-91D7-61346AB665CC}"/>
               </a:ext>
             </a:extLst>
           </p:cNvPr>
           <p:cNvSpPr>
-            <a:spLocks xmlns:a="http://schemas.openxmlformats.org/drawingml/2006/main" noGrp="1"/>
+            <a:spLocks noGrp="1"/>
           </p:cNvSpPr>
           <p:nvPr>
             <p:ph type="body" idx="1"/>
@@ -1622,9 +1412,9 @@
         </p:nvSpPr>
         <p:spPr/>
         <p:txBody>
-          <a:bodyPr xmlns:a="http://schemas.openxmlformats.org/drawingml/2006/main" vert="eaVert"/>
-          <a:lstStyle xmlns:a="http://schemas.openxmlformats.org/drawingml/2006/main"/>
-          <a:p xmlns:a="http://schemas.openxmlformats.org/drawingml/2006/main">
+          <a:bodyPr vert="eaVert"/>
+          <a:lstStyle/>
+          <a:p>
             <a:pPr lvl="0">
               <a:buNone/>
             </a:pPr>
@@ -1632,7 +1422,7 @@
               <a:t>Click to edit Master text styles</a:t>
             </a:r>
           </a:p>
-          <a:p xmlns:a="http://schemas.openxmlformats.org/drawingml/2006/main">
+          <a:p>
             <a:pPr lvl="1">
               <a:buNone/>
             </a:pPr>
@@ -1640,7 +1430,7 @@
               <a:t>Second level</a:t>
             </a:r>
           </a:p>
-          <a:p xmlns:a="http://schemas.openxmlformats.org/drawingml/2006/main">
+          <a:p>
             <a:pPr lvl="2">
               <a:buNone/>
             </a:pPr>
@@ -1648,7 +1438,7 @@
               <a:t>Third level</a:t>
             </a:r>
           </a:p>
-          <a:p xmlns:a="http://schemas.openxmlformats.org/drawingml/2006/main">
+          <a:p>
             <a:pPr lvl="3">
               <a:buNone/>
             </a:pPr>
@@ -1656,28 +1446,27 @@
               <a:t>Fourth level</a:t>
             </a:r>
           </a:p>
-          <a:p xmlns:a="http://schemas.openxmlformats.org/drawingml/2006/main">
+          <a:p>
             <a:pPr lvl="4">
               <a:buNone/>
             </a:pPr>
             <a:r>
               <a:t>Fifth level</a:t>
             </a:r>
-            <a:endParaRPr/>
           </a:p>
         </p:txBody>
       </p:sp>
       <p:sp>
         <p:nvSpPr>
           <p:cNvPr id="4" name="Date Placeholder 3">
-            <a:extLst xmlns:a="http://schemas.openxmlformats.org/drawingml/2006/main">
+            <a:extLst>
               <a:ext uri="{FF2B5EF4-FFF2-40B4-BE49-F238E27FC236}">
                 <a16:creationId xmlns:a16="http://schemas.microsoft.com/office/drawing/2014/main" id="{EFE73DD9-E44B-401F-BB6F-D6076AF6330F}"/>
               </a:ext>
             </a:extLst>
           </p:cNvPr>
           <p:cNvSpPr>
-            <a:spLocks xmlns:a="http://schemas.openxmlformats.org/drawingml/2006/main" noGrp="1"/>
+            <a:spLocks noGrp="1"/>
           </p:cNvSpPr>
           <p:nvPr>
             <p:ph type="dt" idx="10"/>
@@ -1685,11 +1474,11 @@
         </p:nvSpPr>
         <p:spPr/>
         <p:txBody>
-          <a:bodyPr xmlns:a="http://schemas.openxmlformats.org/drawingml/2006/main"/>
-          <a:lstStyle xmlns:a="http://schemas.openxmlformats.org/drawingml/2006/main"/>
-          <a:p xmlns:a="http://schemas.openxmlformats.org/drawingml/2006/main">
+          <a:bodyPr/>
+          <a:lstStyle/>
+          <a:p>
             <a:fld id="{5BCAD085-E8A6-8845-BD4E-CB4CCA059FC4}" type="datetimeFigureOut">
-              <a:t>1/27/13</a:t>
+              <a:t>9/30/2026</a:t>
             </a:fld>
             <a:endParaRPr/>
           </a:p>
@@ -1698,14 +1487,14 @@
       <p:sp>
         <p:nvSpPr>
           <p:cNvPr id="5" name="Footer Placeholder 4">
-            <a:extLst xmlns:a="http://schemas.openxmlformats.org/drawingml/2006/main">
+            <a:extLst>
               <a:ext uri="{FF2B5EF4-FFF2-40B4-BE49-F238E27FC236}">
                 <a16:creationId xmlns:a16="http://schemas.microsoft.com/office/drawing/2014/main" id="{E69C189C-E350-482D-B946-EB32F13B31ED}"/>
               </a:ext>
             </a:extLst>
           </p:cNvPr>
           <p:cNvSpPr>
-            <a:spLocks xmlns:a="http://schemas.openxmlformats.org/drawingml/2006/main" noGrp="1"/>
+            <a:spLocks noGrp="1"/>
           </p:cNvSpPr>
           <p:nvPr>
             <p:ph type="ftr" idx="11"/>
@@ -1713,9 +1502,9 @@
         </p:nvSpPr>
         <p:spPr/>
         <p:txBody>
-          <a:bodyPr xmlns:a="http://schemas.openxmlformats.org/drawingml/2006/main"/>
-          <a:lstStyle xmlns:a="http://schemas.openxmlformats.org/drawingml/2006/main"/>
-          <a:p xmlns:a="http://schemas.openxmlformats.org/drawingml/2006/main">
+          <a:bodyPr/>
+          <a:lstStyle/>
+          <a:p>
             <a:endParaRPr/>
           </a:p>
         </p:txBody>
@@ -1723,14 +1512,14 @@
       <p:sp>
         <p:nvSpPr>
           <p:cNvPr id="6" name="Slide Number Placeholder 5">
-            <a:extLst xmlns:a="http://schemas.openxmlformats.org/drawingml/2006/main">
+            <a:extLst>
               <a:ext uri="{FF2B5EF4-FFF2-40B4-BE49-F238E27FC236}">
                 <a16:creationId xmlns:a16="http://schemas.microsoft.com/office/drawing/2014/main" id="{58F7F96B-7DF5-4F01-8034-DF6FBFD42403}"/>
               </a:ext>
             </a:extLst>
           </p:cNvPr>
           <p:cNvSpPr>
-            <a:spLocks xmlns:a="http://schemas.openxmlformats.org/drawingml/2006/main" noGrp="1"/>
+            <a:spLocks noGrp="1"/>
           </p:cNvSpPr>
           <p:nvPr>
             <p:ph type="sldNum" idx="12"/>
@@ -1738,9 +1527,9 @@
         </p:nvSpPr>
         <p:spPr/>
         <p:txBody>
-          <a:bodyPr xmlns:a="http://schemas.openxmlformats.org/drawingml/2006/main"/>
-          <a:lstStyle xmlns:a="http://schemas.openxmlformats.org/drawingml/2006/main"/>
-          <a:p xmlns:a="http://schemas.openxmlformats.org/drawingml/2006/main">
+          <a:bodyPr/>
+          <a:lstStyle/>
+          <a:p>
             <a:fld id="{C1FF6DA9-008F-8B48-92A6-B652298478BF}" type="slidenum">
               <a:t>‹#›</a:t>
             </a:fld>
@@ -1750,11 +1539,14 @@
       </p:sp>
     </p:spTree>
   </p:cSld>
+  <p:clrMapOvr>
+    <a:masterClrMapping/>
+  </p:clrMapOvr>
 </p:sldLayout>
 </file>
 
 <file path=ppt/slideLayouts/slideLayout11.xml><?xml version="1.0" encoding="utf-8"?>
-<p:sldLayout xmlns:p="http://schemas.openxmlformats.org/presentationml/2006/main" type="vertTitleAndTx" preserve="1">
+<p:sldLayout xmlns:a="http://schemas.openxmlformats.org/drawingml/2006/main" xmlns:r="http://schemas.openxmlformats.org/officeDocument/2006/relationships" xmlns:p="http://schemas.openxmlformats.org/presentationml/2006/main" type="vertTitleAndTx" preserve="1">
   <p:cSld name="Vertical Title and Text">
     <p:spTree>
       <p:nvGrpSpPr>
@@ -1763,67 +1555,71 @@
         <p:nvPr/>
       </p:nvGrpSpPr>
       <p:grpSpPr>
-        <a:xfrm xmlns:a="http://schemas.openxmlformats.org/drawingml/2006/main"/>
+        <a:xfrm>
+          <a:off x="0" y="0"/>
+          <a:ext cx="0" cy="0"/>
+          <a:chOff x="0" y="0"/>
+          <a:chExt cx="0" cy="0"/>
+        </a:xfrm>
       </p:grpSpPr>
       <p:sp>
         <p:nvSpPr>
           <p:cNvPr id="2" name="Vertical Title 1">
-            <a:extLst xmlns:a="http://schemas.openxmlformats.org/drawingml/2006/main">
+            <a:extLst>
               <a:ext uri="{FF2B5EF4-FFF2-40B4-BE49-F238E27FC236}">
                 <a16:creationId xmlns:a16="http://schemas.microsoft.com/office/drawing/2014/main" id="{F04263F3-EF13-4100-966A-1E0FDB882A09}"/>
               </a:ext>
             </a:extLst>
           </p:cNvPr>
           <p:cNvSpPr>
-            <a:spLocks xmlns:a="http://schemas.openxmlformats.org/drawingml/2006/main" noGrp="1"/>
-          </p:cNvSpPr>
-          <p:nvPr>
-            <p:ph type="title" idx="0"/>
+            <a:spLocks noGrp="1"/>
+          </p:cNvSpPr>
+          <p:nvPr>
+            <p:ph type="title"/>
           </p:nvPr>
         </p:nvSpPr>
         <p:spPr>
-          <a:xfrm xmlns:a="http://schemas.openxmlformats.org/drawingml/2006/main">
+          <a:xfrm>
             <a:off x="6629400" y="274638"/>
             <a:ext cx="2057400" cy="5851525"/>
           </a:xfrm>
         </p:spPr>
         <p:txBody>
-          <a:bodyPr xmlns:a="http://schemas.openxmlformats.org/drawingml/2006/main" vert="eaVert"/>
-          <a:lstStyle xmlns:a="http://schemas.openxmlformats.org/drawingml/2006/main"/>
-          <a:p xmlns:a="http://schemas.openxmlformats.org/drawingml/2006/main">
+          <a:bodyPr vert="eaVert"/>
+          <a:lstStyle/>
+          <a:p>
             <a:r>
               <a:t>Click to edit Master title style</a:t>
             </a:r>
-            <a:endParaRPr/>
           </a:p>
         </p:txBody>
       </p:sp>
       <p:sp>
         <p:nvSpPr>
           <p:cNvPr id="3" name="Vertical Text Placeholder 2">
-            <a:extLst xmlns:a="http://schemas.openxmlformats.org/drawingml/2006/main">
+            <a:extLst>
               <a:ext uri="{FF2B5EF4-FFF2-40B4-BE49-F238E27FC236}">
                 <a16:creationId xmlns:a16="http://schemas.microsoft.com/office/drawing/2014/main" id="{23D95FFE-52AE-468D-950C-EDE98ECAB3BA}"/>
               </a:ext>
             </a:extLst>
           </p:cNvPr>
           <p:cNvSpPr>
-            <a:spLocks xmlns:a="http://schemas.openxmlformats.org/drawingml/2006/main" noGrp="1"/>
+            <a:spLocks noGrp="1"/>
           </p:cNvSpPr>
           <p:nvPr>
             <p:ph type="body" idx="1"/>
           </p:nvPr>
         </p:nvSpPr>
         <p:spPr>
-          <a:xfrm xmlns:a="http://schemas.openxmlformats.org/drawingml/2006/main">
+          <a:xfrm>
             <a:off x="457200" y="274638"/>
             <a:ext cx="6019800" cy="5851525"/>
           </a:xfrm>
         </p:spPr>
         <p:txBody>
-          <a:bodyPr xmlns:a="http://schemas.openxmlformats.org/drawingml/2006/main" vert="eaVert"/>
-          <a:lstStyle xmlns:a="http://schemas.openxmlformats.org/drawingml/2006/main"/>
-          <a:p xmlns:a="http://schemas.openxmlformats.org/drawingml/2006/main">
+          <a:bodyPr vert="eaVert"/>
+          <a:lstStyle/>
+          <a:p>
             <a:pPr lvl="0">
               <a:buNone/>
             </a:pPr>
@@ -1831,7 +1627,7 @@
               <a:t>Click to edit Master text styles</a:t>
             </a:r>
           </a:p>
-          <a:p xmlns:a="http://schemas.openxmlformats.org/drawingml/2006/main">
+          <a:p>
             <a:pPr lvl="1">
               <a:buNone/>
             </a:pPr>
@@ -1839,7 +1635,7 @@
               <a:t>Second level</a:t>
             </a:r>
           </a:p>
-          <a:p xmlns:a="http://schemas.openxmlformats.org/drawingml/2006/main">
+          <a:p>
             <a:pPr lvl="2">
               <a:buNone/>
             </a:pPr>
@@ -1847,7 +1643,7 @@
               <a:t>Third level</a:t>
             </a:r>
           </a:p>
-          <a:p xmlns:a="http://schemas.openxmlformats.org/drawingml/2006/main">
+          <a:p>
             <a:pPr lvl="3">
               <a:buNone/>
             </a:pPr>
@@ -1855,28 +1651,27 @@
               <a:t>Fourth level</a:t>
             </a:r>
           </a:p>
-          <a:p xmlns:a="http://schemas.openxmlformats.org/drawingml/2006/main">
+          <a:p>
             <a:pPr lvl="4">
               <a:buNone/>
             </a:pPr>
             <a:r>
               <a:t>Fifth level</a:t>
             </a:r>
-            <a:endParaRPr/>
           </a:p>
         </p:txBody>
       </p:sp>
       <p:sp>
         <p:nvSpPr>
           <p:cNvPr id="4" name="Date Placeholder 3">
-            <a:extLst xmlns:a="http://schemas.openxmlformats.org/drawingml/2006/main">
+            <a:extLst>
               <a:ext uri="{FF2B5EF4-FFF2-40B4-BE49-F238E27FC236}">
                 <a16:creationId xmlns:a16="http://schemas.microsoft.com/office/drawing/2014/main" id="{35FE95C0-1A3A-40DA-A90B-92C4C29AA129}"/>
               </a:ext>
             </a:extLst>
           </p:cNvPr>
           <p:cNvSpPr>
-            <a:spLocks xmlns:a="http://schemas.openxmlformats.org/drawingml/2006/main" noGrp="1"/>
+            <a:spLocks noGrp="1"/>
           </p:cNvSpPr>
           <p:nvPr>
             <p:ph type="dt" idx="10"/>
@@ -1884,11 +1679,11 @@
         </p:nvSpPr>
         <p:spPr/>
         <p:txBody>
-          <a:bodyPr xmlns:a="http://schemas.openxmlformats.org/drawingml/2006/main"/>
-          <a:lstStyle xmlns:a="http://schemas.openxmlformats.org/drawingml/2006/main"/>
-          <a:p xmlns:a="http://schemas.openxmlformats.org/drawingml/2006/main">
+          <a:bodyPr/>
+          <a:lstStyle/>
+          <a:p>
             <a:fld id="{5BCAD085-E8A6-8845-BD4E-CB4CCA059FC4}" type="datetimeFigureOut">
-              <a:t>1/27/13</a:t>
+              <a:t>9/30/2026</a:t>
             </a:fld>
             <a:endParaRPr/>
           </a:p>
@@ -1897,14 +1692,14 @@
       <p:sp>
         <p:nvSpPr>
           <p:cNvPr id="5" name="Footer Placeholder 4">
-            <a:extLst xmlns:a="http://schemas.openxmlformats.org/drawingml/2006/main">
+            <a:extLst>
               <a:ext uri="{FF2B5EF4-FFF2-40B4-BE49-F238E27FC236}">
                 <a16:creationId xmlns:a16="http://schemas.microsoft.com/office/drawing/2014/main" id="{52B331E1-543D-437F-916F-D26F2F098FD6}"/>
               </a:ext>
             </a:extLst>
           </p:cNvPr>
           <p:cNvSpPr>
-            <a:spLocks xmlns:a="http://schemas.openxmlformats.org/drawingml/2006/main" noGrp="1"/>
+            <a:spLocks noGrp="1"/>
           </p:cNvSpPr>
           <p:nvPr>
             <p:ph type="ftr" idx="11"/>
@@ -1912,9 +1707,9 @@
         </p:nvSpPr>
         <p:spPr/>
         <p:txBody>
-          <a:bodyPr xmlns:a="http://schemas.openxmlformats.org/drawingml/2006/main"/>
-          <a:lstStyle xmlns:a="http://schemas.openxmlformats.org/drawingml/2006/main"/>
-          <a:p xmlns:a="http://schemas.openxmlformats.org/drawingml/2006/main">
+          <a:bodyPr/>
+          <a:lstStyle/>
+          <a:p>
             <a:endParaRPr/>
           </a:p>
         </p:txBody>
@@ -1922,14 +1717,14 @@
       <p:sp>
         <p:nvSpPr>
           <p:cNvPr id="6" name="Slide Number Placeholder 5">
-            <a:extLst xmlns:a="http://schemas.openxmlformats.org/drawingml/2006/main">
+            <a:extLst>
               <a:ext uri="{FF2B5EF4-FFF2-40B4-BE49-F238E27FC236}">
                 <a16:creationId xmlns:a16="http://schemas.microsoft.com/office/drawing/2014/main" id="{17424D32-4CF7-4A33-B9BC-1F97F238579B}"/>
               </a:ext>
             </a:extLst>
           </p:cNvPr>
           <p:cNvSpPr>
-            <a:spLocks xmlns:a="http://schemas.openxmlformats.org/drawingml/2006/main" noGrp="1"/>
+            <a:spLocks noGrp="1"/>
           </p:cNvSpPr>
           <p:nvPr>
             <p:ph type="sldNum" idx="12"/>
@@ -1937,9 +1732,9 @@
         </p:nvSpPr>
         <p:spPr/>
         <p:txBody>
-          <a:bodyPr xmlns:a="http://schemas.openxmlformats.org/drawingml/2006/main"/>
-          <a:lstStyle xmlns:a="http://schemas.openxmlformats.org/drawingml/2006/main"/>
-          <a:p xmlns:a="http://schemas.openxmlformats.org/drawingml/2006/main">
+          <a:bodyPr/>
+          <a:lstStyle/>
+          <a:p>
             <a:fld id="{C1FF6DA9-008F-8B48-92A6-B652298478BF}" type="slidenum">
               <a:t>‹#›</a:t>
             </a:fld>
@@ -1949,11 +1744,14 @@
       </p:sp>
     </p:spTree>
   </p:cSld>
+  <p:clrMapOvr>
+    <a:masterClrMapping/>
+  </p:clrMapOvr>
 </p:sldLayout>
 </file>
 
 <file path=ppt/slideLayouts/slideLayout2.xml><?xml version="1.0" encoding="utf-8"?>
-<p:sldLayout xmlns:p="http://schemas.openxmlformats.org/presentationml/2006/main" type="obj" preserve="1">
+<p:sldLayout xmlns:a="http://schemas.openxmlformats.org/drawingml/2006/main" xmlns:r="http://schemas.openxmlformats.org/officeDocument/2006/relationships" xmlns:p="http://schemas.openxmlformats.org/presentationml/2006/main" type="obj" preserve="1">
   <p:cSld name="Title and Content">
     <p:spTree>
       <p:nvGrpSpPr>
@@ -1962,47 +1760,51 @@
         <p:nvPr/>
       </p:nvGrpSpPr>
       <p:grpSpPr>
-        <a:xfrm xmlns:a="http://schemas.openxmlformats.org/drawingml/2006/main"/>
+        <a:xfrm>
+          <a:off x="0" y="0"/>
+          <a:ext cx="0" cy="0"/>
+          <a:chOff x="0" y="0"/>
+          <a:chExt cx="0" cy="0"/>
+        </a:xfrm>
       </p:grpSpPr>
       <p:sp>
         <p:nvSpPr>
           <p:cNvPr id="2" name="Title 1">
-            <a:extLst xmlns:a="http://schemas.openxmlformats.org/drawingml/2006/main">
+            <a:extLst>
               <a:ext uri="{FF2B5EF4-FFF2-40B4-BE49-F238E27FC236}">
                 <a16:creationId xmlns:a16="http://schemas.microsoft.com/office/drawing/2014/main" id="{32FB9EE8-FCAC-404E-A5BC-67A80D86572F}"/>
               </a:ext>
             </a:extLst>
           </p:cNvPr>
           <p:cNvSpPr>
-            <a:spLocks xmlns:a="http://schemas.openxmlformats.org/drawingml/2006/main" noGrp="1"/>
-          </p:cNvSpPr>
-          <p:nvPr>
-            <p:ph type="title" idx="0"/>
+            <a:spLocks noGrp="1"/>
+          </p:cNvSpPr>
+          <p:nvPr>
+            <p:ph type="title"/>
           </p:nvPr>
         </p:nvSpPr>
         <p:spPr/>
         <p:txBody>
-          <a:bodyPr xmlns:a="http://schemas.openxmlformats.org/drawingml/2006/main"/>
-          <a:lstStyle xmlns:a="http://schemas.openxmlformats.org/drawingml/2006/main"/>
-          <a:p xmlns:a="http://schemas.openxmlformats.org/drawingml/2006/main">
+          <a:bodyPr/>
+          <a:lstStyle/>
+          <a:p>
             <a:r>
               <a:t>Click to edit Master title style</a:t>
             </a:r>
-            <a:endParaRPr/>
           </a:p>
         </p:txBody>
       </p:sp>
       <p:sp>
         <p:nvSpPr>
           <p:cNvPr id="3" name="Content Placeholder 2">
-            <a:extLst xmlns:a="http://schemas.openxmlformats.org/drawingml/2006/main">
+            <a:extLst>
               <a:ext uri="{FF2B5EF4-FFF2-40B4-BE49-F238E27FC236}">
                 <a16:creationId xmlns:a16="http://schemas.microsoft.com/office/drawing/2014/main" id="{2E8F3A60-202B-4207-8443-651DA65D026E}"/>
               </a:ext>
             </a:extLst>
           </p:cNvPr>
           <p:cNvSpPr>
-            <a:spLocks xmlns:a="http://schemas.openxmlformats.org/drawingml/2006/main" noGrp="1"/>
+            <a:spLocks noGrp="1"/>
           </p:cNvSpPr>
           <p:nvPr>
             <p:ph idx="1"/>
@@ -2010,9 +1812,9 @@
         </p:nvSpPr>
         <p:spPr/>
         <p:txBody>
-          <a:bodyPr xmlns:a="http://schemas.openxmlformats.org/drawingml/2006/main"/>
-          <a:lstStyle xmlns:a="http://schemas.openxmlformats.org/drawingml/2006/main"/>
-          <a:p xmlns:a="http://schemas.openxmlformats.org/drawingml/2006/main">
+          <a:bodyPr/>
+          <a:lstStyle/>
+          <a:p>
             <a:pPr lvl="0">
               <a:buNone/>
             </a:pPr>
@@ -2020,7 +1822,7 @@
               <a:t>Click to edit Master text styles</a:t>
             </a:r>
           </a:p>
-          <a:p xmlns:a="http://schemas.openxmlformats.org/drawingml/2006/main">
+          <a:p>
             <a:pPr lvl="1">
               <a:buNone/>
             </a:pPr>
@@ -2028,7 +1830,7 @@
               <a:t>Second level</a:t>
             </a:r>
           </a:p>
-          <a:p xmlns:a="http://schemas.openxmlformats.org/drawingml/2006/main">
+          <a:p>
             <a:pPr lvl="2">
               <a:buNone/>
             </a:pPr>
@@ -2036,7 +1838,7 @@
               <a:t>Third level</a:t>
             </a:r>
           </a:p>
-          <a:p xmlns:a="http://schemas.openxmlformats.org/drawingml/2006/main">
+          <a:p>
             <a:pPr lvl="3">
               <a:buNone/>
             </a:pPr>
@@ -2044,28 +1846,27 @@
               <a:t>Fourth level</a:t>
             </a:r>
           </a:p>
-          <a:p xmlns:a="http://schemas.openxmlformats.org/drawingml/2006/main">
+          <a:p>
             <a:pPr lvl="4">
               <a:buNone/>
             </a:pPr>
             <a:r>
               <a:t>Fifth level</a:t>
             </a:r>
-            <a:endParaRPr/>
           </a:p>
         </p:txBody>
       </p:sp>
       <p:sp>
         <p:nvSpPr>
           <p:cNvPr id="4" name="Date Placeholder 3">
-            <a:extLst xmlns:a="http://schemas.openxmlformats.org/drawingml/2006/main">
+            <a:extLst>
               <a:ext uri="{FF2B5EF4-FFF2-40B4-BE49-F238E27FC236}">
                 <a16:creationId xmlns:a16="http://schemas.microsoft.com/office/drawing/2014/main" id="{2C50490D-47E5-44CB-9E86-1503876D4934}"/>
               </a:ext>
             </a:extLst>
           </p:cNvPr>
           <p:cNvSpPr>
-            <a:spLocks xmlns:a="http://schemas.openxmlformats.org/drawingml/2006/main" noGrp="1"/>
+            <a:spLocks noGrp="1"/>
           </p:cNvSpPr>
           <p:nvPr>
             <p:ph type="dt" idx="10"/>
@@ -2073,11 +1874,11 @@
         </p:nvSpPr>
         <p:spPr/>
         <p:txBody>
-          <a:bodyPr xmlns:a="http://schemas.openxmlformats.org/drawingml/2006/main"/>
-          <a:lstStyle xmlns:a="http://schemas.openxmlformats.org/drawingml/2006/main"/>
-          <a:p xmlns:a="http://schemas.openxmlformats.org/drawingml/2006/main">
+          <a:bodyPr/>
+          <a:lstStyle/>
+          <a:p>
             <a:fld id="{5BCAD085-E8A6-8845-BD4E-CB4CCA059FC4}" type="datetimeFigureOut">
-              <a:t>1/27/13</a:t>
+              <a:t>9/30/2026</a:t>
             </a:fld>
             <a:endParaRPr/>
           </a:p>
@@ -2086,14 +1887,14 @@
       <p:sp>
         <p:nvSpPr>
           <p:cNvPr id="5" name="Footer Placeholder 4">
-            <a:extLst xmlns:a="http://schemas.openxmlformats.org/drawingml/2006/main">
+            <a:extLst>
               <a:ext uri="{FF2B5EF4-FFF2-40B4-BE49-F238E27FC236}">
                 <a16:creationId xmlns:a16="http://schemas.microsoft.com/office/drawing/2014/main" id="{A3A178FD-B7E1-44C4-A8B1-BDE27CF33D15}"/>
               </a:ext>
             </a:extLst>
           </p:cNvPr>
           <p:cNvSpPr>
-            <a:spLocks xmlns:a="http://schemas.openxmlformats.org/drawingml/2006/main" noGrp="1"/>
+            <a:spLocks noGrp="1"/>
           </p:cNvSpPr>
           <p:nvPr>
             <p:ph type="ftr" idx="11"/>
@@ -2101,9 +1902,9 @@
         </p:nvSpPr>
         <p:spPr/>
         <p:txBody>
-          <a:bodyPr xmlns:a="http://schemas.openxmlformats.org/drawingml/2006/main"/>
-          <a:lstStyle xmlns:a="http://schemas.openxmlformats.org/drawingml/2006/main"/>
-          <a:p xmlns:a="http://schemas.openxmlformats.org/drawingml/2006/main">
+          <a:bodyPr/>
+          <a:lstStyle/>
+          <a:p>
             <a:endParaRPr/>
           </a:p>
         </p:txBody>
@@ -2111,14 +1912,14 @@
       <p:sp>
         <p:nvSpPr>
           <p:cNvPr id="6" name="Slide Number Placeholder 5">
-            <a:extLst xmlns:a="http://schemas.openxmlformats.org/drawingml/2006/main">
+            <a:extLst>
               <a:ext uri="{FF2B5EF4-FFF2-40B4-BE49-F238E27FC236}">
                 <a16:creationId xmlns:a16="http://schemas.microsoft.com/office/drawing/2014/main" id="{677C3F77-A9B3-4296-8C2C-75141537A376}"/>
               </a:ext>
             </a:extLst>
           </p:cNvPr>
           <p:cNvSpPr>
-            <a:spLocks xmlns:a="http://schemas.openxmlformats.org/drawingml/2006/main" noGrp="1"/>
+            <a:spLocks noGrp="1"/>
           </p:cNvSpPr>
           <p:nvPr>
             <p:ph type="sldNum" idx="12"/>
@@ -2126,9 +1927,9 @@
         </p:nvSpPr>
         <p:spPr/>
         <p:txBody>
-          <a:bodyPr xmlns:a="http://schemas.openxmlformats.org/drawingml/2006/main"/>
-          <a:lstStyle xmlns:a="http://schemas.openxmlformats.org/drawingml/2006/main"/>
-          <a:p xmlns:a="http://schemas.openxmlformats.org/drawingml/2006/main">
+          <a:bodyPr/>
+          <a:lstStyle/>
+          <a:p>
             <a:fld id="{C1FF6DA9-008F-8B48-92A6-B652298478BF}" type="slidenum">
               <a:t>‹#›</a:t>
             </a:fld>
@@ -2138,11 +1939,14 @@
       </p:sp>
     </p:spTree>
   </p:cSld>
+  <p:clrMapOvr>
+    <a:masterClrMapping/>
+  </p:clrMapOvr>
 </p:sldLayout>
 </file>
 
 <file path=ppt/slideLayouts/slideLayout3.xml><?xml version="1.0" encoding="utf-8"?>
-<p:sldLayout xmlns:p="http://schemas.openxmlformats.org/presentationml/2006/main" type="secHead" preserve="1">
+<p:sldLayout xmlns:a="http://schemas.openxmlformats.org/drawingml/2006/main" xmlns:r="http://schemas.openxmlformats.org/officeDocument/2006/relationships" xmlns:p="http://schemas.openxmlformats.org/presentationml/2006/main" type="secHead" preserve="1">
   <p:cSld name="Section Header">
     <p:spTree>
       <p:nvGrpSpPr>
@@ -2151,71 +1955,75 @@
         <p:nvPr/>
       </p:nvGrpSpPr>
       <p:grpSpPr>
-        <a:xfrm xmlns:a="http://schemas.openxmlformats.org/drawingml/2006/main"/>
+        <a:xfrm>
+          <a:off x="0" y="0"/>
+          <a:ext cx="0" cy="0"/>
+          <a:chOff x="0" y="0"/>
+          <a:chExt cx="0" cy="0"/>
+        </a:xfrm>
       </p:grpSpPr>
       <p:sp>
         <p:nvSpPr>
           <p:cNvPr id="2" name="Title 1">
-            <a:extLst xmlns:a="http://schemas.openxmlformats.org/drawingml/2006/main">
+            <a:extLst>
               <a:ext uri="{FF2B5EF4-FFF2-40B4-BE49-F238E27FC236}">
                 <a16:creationId xmlns:a16="http://schemas.microsoft.com/office/drawing/2014/main" id="{4EBA5C43-9C39-49CA-984F-FE989378EB6F}"/>
               </a:ext>
             </a:extLst>
           </p:cNvPr>
           <p:cNvSpPr>
-            <a:spLocks xmlns:a="http://schemas.openxmlformats.org/drawingml/2006/main" noGrp="1"/>
-          </p:cNvSpPr>
-          <p:nvPr>
-            <p:ph type="title" idx="0"/>
+            <a:spLocks noGrp="1"/>
+          </p:cNvSpPr>
+          <p:nvPr>
+            <p:ph type="title"/>
           </p:nvPr>
         </p:nvSpPr>
         <p:spPr>
-          <a:xfrm xmlns:a="http://schemas.openxmlformats.org/drawingml/2006/main">
+          <a:xfrm>
             <a:off x="722313" y="4406900"/>
             <a:ext cx="7772400" cy="1362075"/>
           </a:xfrm>
         </p:spPr>
         <p:txBody>
-          <a:bodyPr xmlns:a="http://schemas.openxmlformats.org/drawingml/2006/main" anchor="t"/>
-          <a:lstStyle xmlns:a="http://schemas.openxmlformats.org/drawingml/2006/main">
+          <a:bodyPr anchor="t"/>
+          <a:lstStyle>
             <a:lvl1pPr algn="l">
               <a:buNone/>
               <a:defRPr sz="4000" b="1" cap="all"/>
             </a:lvl1pPr>
           </a:lstStyle>
-          <a:p xmlns:a="http://schemas.openxmlformats.org/drawingml/2006/main">
+          <a:p>
             <a:r>
               <a:t>Click to edit Master title style</a:t>
             </a:r>
-            <a:endParaRPr/>
           </a:p>
         </p:txBody>
       </p:sp>
       <p:sp>
         <p:nvSpPr>
           <p:cNvPr id="3" name="Text Placeholder 2">
-            <a:extLst xmlns:a="http://schemas.openxmlformats.org/drawingml/2006/main">
+            <a:extLst>
               <a:ext uri="{FF2B5EF4-FFF2-40B4-BE49-F238E27FC236}">
                 <a16:creationId xmlns:a16="http://schemas.microsoft.com/office/drawing/2014/main" id="{44C72FCD-8127-4054-9E93-1A15953B7696}"/>
               </a:ext>
             </a:extLst>
           </p:cNvPr>
           <p:cNvSpPr>
-            <a:spLocks xmlns:a="http://schemas.openxmlformats.org/drawingml/2006/main" noGrp="1"/>
+            <a:spLocks noGrp="1"/>
           </p:cNvSpPr>
           <p:nvPr>
             <p:ph type="body" idx="1"/>
           </p:nvPr>
         </p:nvSpPr>
         <p:spPr>
-          <a:xfrm xmlns:a="http://schemas.openxmlformats.org/drawingml/2006/main">
+          <a:xfrm>
             <a:off x="722313" y="2906713"/>
             <a:ext cx="7772400" cy="1500187"/>
           </a:xfrm>
         </p:spPr>
         <p:txBody>
-          <a:bodyPr xmlns:a="http://schemas.openxmlformats.org/drawingml/2006/main" anchor="b"/>
-          <a:lstStyle xmlns:a="http://schemas.openxmlformats.org/drawingml/2006/main">
+          <a:bodyPr anchor="b"/>
+          <a:lstStyle>
             <a:lvl1pPr marL="0" indent="0">
               <a:buNone/>
               <a:defRPr sz="2000">
@@ -2307,7 +2115,7 @@
               </a:defRPr>
             </a:lvl9pPr>
           </a:lstStyle>
-          <a:p xmlns:a="http://schemas.openxmlformats.org/drawingml/2006/main">
+          <a:p>
             <a:pPr lvl="0">
               <a:buNone/>
             </a:pPr>
@@ -2320,14 +2128,14 @@
       <p:sp>
         <p:nvSpPr>
           <p:cNvPr id="4" name="Date Placeholder 3">
-            <a:extLst xmlns:a="http://schemas.openxmlformats.org/drawingml/2006/main">
+            <a:extLst>
               <a:ext uri="{FF2B5EF4-FFF2-40B4-BE49-F238E27FC236}">
                 <a16:creationId xmlns:a16="http://schemas.microsoft.com/office/drawing/2014/main" id="{C6E68B84-055C-4A6A-8A7E-CED51E9763E5}"/>
               </a:ext>
             </a:extLst>
           </p:cNvPr>
           <p:cNvSpPr>
-            <a:spLocks xmlns:a="http://schemas.openxmlformats.org/drawingml/2006/main" noGrp="1"/>
+            <a:spLocks noGrp="1"/>
           </p:cNvSpPr>
           <p:nvPr>
             <p:ph type="dt" idx="10"/>
@@ -2335,11 +2143,11 @@
         </p:nvSpPr>
         <p:spPr/>
         <p:txBody>
-          <a:bodyPr xmlns:a="http://schemas.openxmlformats.org/drawingml/2006/main"/>
-          <a:lstStyle xmlns:a="http://schemas.openxmlformats.org/drawingml/2006/main"/>
-          <a:p xmlns:a="http://schemas.openxmlformats.org/drawingml/2006/main">
+          <a:bodyPr/>
+          <a:lstStyle/>
+          <a:p>
             <a:fld id="{5BCAD085-E8A6-8845-BD4E-CB4CCA059FC4}" type="datetimeFigureOut">
-              <a:t>1/27/13</a:t>
+              <a:t>9/30/2026</a:t>
             </a:fld>
             <a:endParaRPr/>
           </a:p>
@@ -2348,14 +2156,14 @@
       <p:sp>
         <p:nvSpPr>
           <p:cNvPr id="5" name="Footer Placeholder 4">
-            <a:extLst xmlns:a="http://schemas.openxmlformats.org/drawingml/2006/main">
+            <a:extLst>
               <a:ext uri="{FF2B5EF4-FFF2-40B4-BE49-F238E27FC236}">
                 <a16:creationId xmlns:a16="http://schemas.microsoft.com/office/drawing/2014/main" id="{907E7D56-F46F-4BF9-94D2-CF61C0058AF7}"/>
               </a:ext>
             </a:extLst>
           </p:cNvPr>
           <p:cNvSpPr>
-            <a:spLocks xmlns:a="http://schemas.openxmlformats.org/drawingml/2006/main" noGrp="1"/>
+            <a:spLocks noGrp="1"/>
           </p:cNvSpPr>
           <p:nvPr>
             <p:ph type="ftr" idx="11"/>
@@ -2363,9 +2171,9 @@
         </p:nvSpPr>
         <p:spPr/>
         <p:txBody>
-          <a:bodyPr xmlns:a="http://schemas.openxmlformats.org/drawingml/2006/main"/>
-          <a:lstStyle xmlns:a="http://schemas.openxmlformats.org/drawingml/2006/main"/>
-          <a:p xmlns:a="http://schemas.openxmlformats.org/drawingml/2006/main">
+          <a:bodyPr/>
+          <a:lstStyle/>
+          <a:p>
             <a:endParaRPr/>
           </a:p>
         </p:txBody>
@@ -2373,14 +2181,14 @@
       <p:sp>
         <p:nvSpPr>
           <p:cNvPr id="6" name="Slide Number Placeholder 5">
-            <a:extLst xmlns:a="http://schemas.openxmlformats.org/drawingml/2006/main">
+            <a:extLst>
               <a:ext uri="{FF2B5EF4-FFF2-40B4-BE49-F238E27FC236}">
                 <a16:creationId xmlns:a16="http://schemas.microsoft.com/office/drawing/2014/main" id="{B4879584-BB77-40B3-A389-6815BCA31640}"/>
               </a:ext>
             </a:extLst>
           </p:cNvPr>
           <p:cNvSpPr>
-            <a:spLocks xmlns:a="http://schemas.openxmlformats.org/drawingml/2006/main" noGrp="1"/>
+            <a:spLocks noGrp="1"/>
           </p:cNvSpPr>
           <p:nvPr>
             <p:ph type="sldNum" idx="12"/>
@@ -2388,9 +2196,9 @@
         </p:nvSpPr>
         <p:spPr/>
         <p:txBody>
-          <a:bodyPr xmlns:a="http://schemas.openxmlformats.org/drawingml/2006/main"/>
-          <a:lstStyle xmlns:a="http://schemas.openxmlformats.org/drawingml/2006/main"/>
-          <a:p xmlns:a="http://schemas.openxmlformats.org/drawingml/2006/main">
+          <a:bodyPr/>
+          <a:lstStyle/>
+          <a:p>
             <a:fld id="{C1FF6DA9-008F-8B48-92A6-B652298478BF}" type="slidenum">
               <a:t>‹#›</a:t>
             </a:fld>
@@ -2400,11 +2208,14 @@
       </p:sp>
     </p:spTree>
   </p:cSld>
+  <p:clrMapOvr>
+    <a:masterClrMapping/>
+  </p:clrMapOvr>
 </p:sldLayout>
 </file>
 
 <file path=ppt/slideLayouts/slideLayout4.xml><?xml version="1.0" encoding="utf-8"?>
-<p:sldLayout xmlns:p="http://schemas.openxmlformats.org/presentationml/2006/main" type="twoObj" preserve="1">
+<p:sldLayout xmlns:a="http://schemas.openxmlformats.org/drawingml/2006/main" xmlns:r="http://schemas.openxmlformats.org/officeDocument/2006/relationships" xmlns:p="http://schemas.openxmlformats.org/presentationml/2006/main" type="twoObj" preserve="1">
   <p:cSld name="Two Content">
     <p:spTree>
       <p:nvGrpSpPr>
@@ -2413,61 +2224,65 @@
         <p:nvPr/>
       </p:nvGrpSpPr>
       <p:grpSpPr>
-        <a:xfrm xmlns:a="http://schemas.openxmlformats.org/drawingml/2006/main"/>
+        <a:xfrm>
+          <a:off x="0" y="0"/>
+          <a:ext cx="0" cy="0"/>
+          <a:chOff x="0" y="0"/>
+          <a:chExt cx="0" cy="0"/>
+        </a:xfrm>
       </p:grpSpPr>
       <p:sp>
         <p:nvSpPr>
           <p:cNvPr id="2" name="Title 1">
-            <a:extLst xmlns:a="http://schemas.openxmlformats.org/drawingml/2006/main">
+            <a:extLst>
               <a:ext uri="{FF2B5EF4-FFF2-40B4-BE49-F238E27FC236}">
                 <a16:creationId xmlns:a16="http://schemas.microsoft.com/office/drawing/2014/main" id="{0DE55062-3D25-4918-8ADD-484BDA79944B}"/>
               </a:ext>
             </a:extLst>
           </p:cNvPr>
           <p:cNvSpPr>
-            <a:spLocks xmlns:a="http://schemas.openxmlformats.org/drawingml/2006/main" noGrp="1"/>
-          </p:cNvSpPr>
-          <p:nvPr>
-            <p:ph type="title" idx="0"/>
+            <a:spLocks noGrp="1"/>
+          </p:cNvSpPr>
+          <p:nvPr>
+            <p:ph type="title"/>
           </p:nvPr>
         </p:nvSpPr>
         <p:spPr/>
         <p:txBody>
-          <a:bodyPr xmlns:a="http://schemas.openxmlformats.org/drawingml/2006/main"/>
-          <a:lstStyle xmlns:a="http://schemas.openxmlformats.org/drawingml/2006/main"/>
-          <a:p xmlns:a="http://schemas.openxmlformats.org/drawingml/2006/main">
+          <a:bodyPr/>
+          <a:lstStyle/>
+          <a:p>
             <a:r>
               <a:t>Click to edit Master title style</a:t>
             </a:r>
-            <a:endParaRPr/>
           </a:p>
         </p:txBody>
       </p:sp>
       <p:sp>
         <p:nvSpPr>
           <p:cNvPr id="3" name="Content Placeholder 2">
-            <a:extLst xmlns:a="http://schemas.openxmlformats.org/drawingml/2006/main">
+            <a:extLst>
               <a:ext uri="{FF2B5EF4-FFF2-40B4-BE49-F238E27FC236}">
                 <a16:creationId xmlns:a16="http://schemas.microsoft.com/office/drawing/2014/main" id="{7260FCC6-80F8-4770-B317-FAE6788EA719}"/>
               </a:ext>
             </a:extLst>
           </p:cNvPr>
           <p:cNvSpPr>
-            <a:spLocks xmlns:a="http://schemas.openxmlformats.org/drawingml/2006/main" noGrp="1"/>
+            <a:spLocks noGrp="1"/>
           </p:cNvSpPr>
           <p:nvPr>
             <p:ph idx="1"/>
           </p:nvPr>
         </p:nvSpPr>
         <p:spPr>
-          <a:xfrm xmlns:a="http://schemas.openxmlformats.org/drawingml/2006/main">
+          <a:xfrm>
             <a:off x="457200" y="1600200"/>
             <a:ext cx="4038600" cy="4525963"/>
           </a:xfrm>
         </p:spPr>
         <p:txBody>
-          <a:bodyPr xmlns:a="http://schemas.openxmlformats.org/drawingml/2006/main"/>
-          <a:lstStyle xmlns:a="http://schemas.openxmlformats.org/drawingml/2006/main">
+          <a:bodyPr/>
+          <a:lstStyle>
             <a:lvl1pPr>
               <a:buNone/>
               <a:defRPr sz="2800"/>
@@ -2505,7 +2320,7 @@
               <a:defRPr sz="1800"/>
             </a:lvl9pPr>
           </a:lstStyle>
-          <a:p xmlns:a="http://schemas.openxmlformats.org/drawingml/2006/main">
+          <a:p>
             <a:pPr lvl="0">
               <a:buNone/>
             </a:pPr>
@@ -2513,7 +2328,7 @@
               <a:t>Click to edit Master text styles</a:t>
             </a:r>
           </a:p>
-          <a:p xmlns:a="http://schemas.openxmlformats.org/drawingml/2006/main">
+          <a:p>
             <a:pPr lvl="1">
               <a:buNone/>
             </a:pPr>
@@ -2521,7 +2336,7 @@
               <a:t>Second level</a:t>
             </a:r>
           </a:p>
-          <a:p xmlns:a="http://schemas.openxmlformats.org/drawingml/2006/main">
+          <a:p>
             <a:pPr lvl="2">
               <a:buNone/>
             </a:pPr>
@@ -2529,7 +2344,7 @@
               <a:t>Third level</a:t>
             </a:r>
           </a:p>
-          <a:p xmlns:a="http://schemas.openxmlformats.org/drawingml/2006/main">
+          <a:p>
             <a:pPr lvl="3">
               <a:buNone/>
             </a:pPr>
@@ -2537,42 +2352,41 @@
               <a:t>Fourth level</a:t>
             </a:r>
           </a:p>
-          <a:p xmlns:a="http://schemas.openxmlformats.org/drawingml/2006/main">
+          <a:p>
             <a:pPr lvl="4">
               <a:buNone/>
             </a:pPr>
             <a:r>
               <a:t>Fifth level</a:t>
             </a:r>
-            <a:endParaRPr/>
           </a:p>
         </p:txBody>
       </p:sp>
       <p:sp>
         <p:nvSpPr>
           <p:cNvPr id="4" name="Content Placeholder 3">
-            <a:extLst xmlns:a="http://schemas.openxmlformats.org/drawingml/2006/main">
+            <a:extLst>
               <a:ext uri="{FF2B5EF4-FFF2-40B4-BE49-F238E27FC236}">
                 <a16:creationId xmlns:a16="http://schemas.microsoft.com/office/drawing/2014/main" id="{2580093B-4BB8-4DF6-A028-27C8EAACABBF}"/>
               </a:ext>
             </a:extLst>
           </p:cNvPr>
           <p:cNvSpPr>
-            <a:spLocks xmlns:a="http://schemas.openxmlformats.org/drawingml/2006/main" noGrp="1"/>
+            <a:spLocks noGrp="1"/>
           </p:cNvSpPr>
           <p:nvPr>
             <p:ph idx="2"/>
           </p:nvPr>
         </p:nvSpPr>
         <p:spPr>
-          <a:xfrm xmlns:a="http://schemas.openxmlformats.org/drawingml/2006/main">
+          <a:xfrm>
             <a:off x="4648200" y="1600200"/>
             <a:ext cx="4038600" cy="4525963"/>
           </a:xfrm>
         </p:spPr>
         <p:txBody>
-          <a:bodyPr xmlns:a="http://schemas.openxmlformats.org/drawingml/2006/main"/>
-          <a:lstStyle xmlns:a="http://schemas.openxmlformats.org/drawingml/2006/main">
+          <a:bodyPr/>
+          <a:lstStyle>
             <a:lvl1pPr>
               <a:buNone/>
               <a:defRPr sz="2800"/>
@@ -2610,7 +2424,7 @@
               <a:defRPr sz="1800"/>
             </a:lvl9pPr>
           </a:lstStyle>
-          <a:p xmlns:a="http://schemas.openxmlformats.org/drawingml/2006/main">
+          <a:p>
             <a:pPr lvl="0">
               <a:buNone/>
             </a:pPr>
@@ -2618,7 +2432,7 @@
               <a:t>Click to edit Master text styles</a:t>
             </a:r>
           </a:p>
-          <a:p xmlns:a="http://schemas.openxmlformats.org/drawingml/2006/main">
+          <a:p>
             <a:pPr lvl="1">
               <a:buNone/>
             </a:pPr>
@@ -2626,7 +2440,7 @@
               <a:t>Second level</a:t>
             </a:r>
           </a:p>
-          <a:p xmlns:a="http://schemas.openxmlformats.org/drawingml/2006/main">
+          <a:p>
             <a:pPr lvl="2">
               <a:buNone/>
             </a:pPr>
@@ -2634,7 +2448,7 @@
               <a:t>Third level</a:t>
             </a:r>
           </a:p>
-          <a:p xmlns:a="http://schemas.openxmlformats.org/drawingml/2006/main">
+          <a:p>
             <a:pPr lvl="3">
               <a:buNone/>
             </a:pPr>
@@ -2642,28 +2456,27 @@
               <a:t>Fourth level</a:t>
             </a:r>
           </a:p>
-          <a:p xmlns:a="http://schemas.openxmlformats.org/drawingml/2006/main">
+          <a:p>
             <a:pPr lvl="4">
               <a:buNone/>
             </a:pPr>
             <a:r>
               <a:t>Fifth level</a:t>
             </a:r>
-            <a:endParaRPr/>
           </a:p>
         </p:txBody>
       </p:sp>
       <p:sp>
         <p:nvSpPr>
           <p:cNvPr id="5" name="Date Placeholder 4">
-            <a:extLst xmlns:a="http://schemas.openxmlformats.org/drawingml/2006/main">
+            <a:extLst>
               <a:ext uri="{FF2B5EF4-FFF2-40B4-BE49-F238E27FC236}">
                 <a16:creationId xmlns:a16="http://schemas.microsoft.com/office/drawing/2014/main" id="{4374880C-7897-4BB6-B3BF-7A3539AFCF73}"/>
               </a:ext>
             </a:extLst>
           </p:cNvPr>
           <p:cNvSpPr>
-            <a:spLocks xmlns:a="http://schemas.openxmlformats.org/drawingml/2006/main" noGrp="1"/>
+            <a:spLocks noGrp="1"/>
           </p:cNvSpPr>
           <p:nvPr>
             <p:ph type="dt" idx="10"/>
@@ -2671,11 +2484,11 @@
         </p:nvSpPr>
         <p:spPr/>
         <p:txBody>
-          <a:bodyPr xmlns:a="http://schemas.openxmlformats.org/drawingml/2006/main"/>
-          <a:lstStyle xmlns:a="http://schemas.openxmlformats.org/drawingml/2006/main"/>
-          <a:p xmlns:a="http://schemas.openxmlformats.org/drawingml/2006/main">
+          <a:bodyPr/>
+          <a:lstStyle/>
+          <a:p>
             <a:fld id="{5BCAD085-E8A6-8845-BD4E-CB4CCA059FC4}" type="datetimeFigureOut">
-              <a:t>1/27/13</a:t>
+              <a:t>9/30/2026</a:t>
             </a:fld>
             <a:endParaRPr/>
           </a:p>
@@ -2684,14 +2497,14 @@
       <p:sp>
         <p:nvSpPr>
           <p:cNvPr id="6" name="Footer Placeholder 5">
-            <a:extLst xmlns:a="http://schemas.openxmlformats.org/drawingml/2006/main">
+            <a:extLst>
               <a:ext uri="{FF2B5EF4-FFF2-40B4-BE49-F238E27FC236}">
                 <a16:creationId xmlns:a16="http://schemas.microsoft.com/office/drawing/2014/main" id="{B15915DB-4627-4677-9647-65DBC56E0404}"/>
               </a:ext>
             </a:extLst>
           </p:cNvPr>
           <p:cNvSpPr>
-            <a:spLocks xmlns:a="http://schemas.openxmlformats.org/drawingml/2006/main" noGrp="1"/>
+            <a:spLocks noGrp="1"/>
           </p:cNvSpPr>
           <p:nvPr>
             <p:ph type="ftr" idx="11"/>
@@ -2699,9 +2512,9 @@
         </p:nvSpPr>
         <p:spPr/>
         <p:txBody>
-          <a:bodyPr xmlns:a="http://schemas.openxmlformats.org/drawingml/2006/main"/>
-          <a:lstStyle xmlns:a="http://schemas.openxmlformats.org/drawingml/2006/main"/>
-          <a:p xmlns:a="http://schemas.openxmlformats.org/drawingml/2006/main">
+          <a:bodyPr/>
+          <a:lstStyle/>
+          <a:p>
             <a:endParaRPr/>
           </a:p>
         </p:txBody>
@@ -2709,14 +2522,14 @@
       <p:sp>
         <p:nvSpPr>
           <p:cNvPr id="7" name="Slide Number Placeholder 6">
-            <a:extLst xmlns:a="http://schemas.openxmlformats.org/drawingml/2006/main">
+            <a:extLst>
               <a:ext uri="{FF2B5EF4-FFF2-40B4-BE49-F238E27FC236}">
                 <a16:creationId xmlns:a16="http://schemas.microsoft.com/office/drawing/2014/main" id="{ABCA56A8-CCB6-47D3-966B-1D3971EDBA93}"/>
               </a:ext>
             </a:extLst>
           </p:cNvPr>
           <p:cNvSpPr>
-            <a:spLocks xmlns:a="http://schemas.openxmlformats.org/drawingml/2006/main" noGrp="1"/>
+            <a:spLocks noGrp="1"/>
           </p:cNvSpPr>
           <p:nvPr>
             <p:ph type="sldNum" idx="12"/>
@@ -2724,9 +2537,9 @@
         </p:nvSpPr>
         <p:spPr/>
         <p:txBody>
-          <a:bodyPr xmlns:a="http://schemas.openxmlformats.org/drawingml/2006/main"/>
-          <a:lstStyle xmlns:a="http://schemas.openxmlformats.org/drawingml/2006/main"/>
-          <a:p xmlns:a="http://schemas.openxmlformats.org/drawingml/2006/main">
+          <a:bodyPr/>
+          <a:lstStyle/>
+          <a:p>
             <a:fld id="{C1FF6DA9-008F-8B48-92A6-B652298478BF}" type="slidenum">
               <a:t>‹#›</a:t>
             </a:fld>
@@ -2736,11 +2549,14 @@
       </p:sp>
     </p:spTree>
   </p:cSld>
+  <p:clrMapOvr>
+    <a:masterClrMapping/>
+  </p:clrMapOvr>
 </p:sldLayout>
 </file>
 
 <file path=ppt/slideLayouts/slideLayout5.xml><?xml version="1.0" encoding="utf-8"?>
-<p:sldLayout xmlns:p="http://schemas.openxmlformats.org/presentationml/2006/main" type="twoTxTwoObj" preserve="1">
+<p:sldLayout xmlns:a="http://schemas.openxmlformats.org/drawingml/2006/main" xmlns:r="http://schemas.openxmlformats.org/officeDocument/2006/relationships" xmlns:p="http://schemas.openxmlformats.org/presentationml/2006/main" type="twoTxTwoObj" preserve="1">
   <p:cSld name="Comparison">
     <p:spTree>
       <p:nvGrpSpPr>
@@ -2749,66 +2565,70 @@
         <p:nvPr/>
       </p:nvGrpSpPr>
       <p:grpSpPr>
-        <a:xfrm xmlns:a="http://schemas.openxmlformats.org/drawingml/2006/main"/>
+        <a:xfrm>
+          <a:off x="0" y="0"/>
+          <a:ext cx="0" cy="0"/>
+          <a:chOff x="0" y="0"/>
+          <a:chExt cx="0" cy="0"/>
+        </a:xfrm>
       </p:grpSpPr>
       <p:sp>
         <p:nvSpPr>
           <p:cNvPr id="2" name="Title 1">
-            <a:extLst xmlns:a="http://schemas.openxmlformats.org/drawingml/2006/main">
+            <a:extLst>
               <a:ext uri="{FF2B5EF4-FFF2-40B4-BE49-F238E27FC236}">
                 <a16:creationId xmlns:a16="http://schemas.microsoft.com/office/drawing/2014/main" id="{C4F68CFE-A197-4E77-808D-D0102251AD7C}"/>
               </a:ext>
             </a:extLst>
           </p:cNvPr>
           <p:cNvSpPr>
-            <a:spLocks xmlns:a="http://schemas.openxmlformats.org/drawingml/2006/main" noGrp="1"/>
-          </p:cNvSpPr>
-          <p:nvPr>
-            <p:ph type="title" idx="0"/>
+            <a:spLocks noGrp="1"/>
+          </p:cNvSpPr>
+          <p:nvPr>
+            <p:ph type="title"/>
           </p:nvPr>
         </p:nvSpPr>
         <p:spPr/>
         <p:txBody>
-          <a:bodyPr xmlns:a="http://schemas.openxmlformats.org/drawingml/2006/main"/>
-          <a:lstStyle xmlns:a="http://schemas.openxmlformats.org/drawingml/2006/main">
+          <a:bodyPr/>
+          <a:lstStyle>
             <a:lvl1pPr>
               <a:buNone/>
               <a:defRPr/>
             </a:lvl1pPr>
           </a:lstStyle>
-          <a:p xmlns:a="http://schemas.openxmlformats.org/drawingml/2006/main">
+          <a:p>
             <a:r>
               <a:t>Click to edit Master title style</a:t>
             </a:r>
-            <a:endParaRPr/>
           </a:p>
         </p:txBody>
       </p:sp>
       <p:sp>
         <p:nvSpPr>
           <p:cNvPr id="3" name="Text Placeholder 2">
-            <a:extLst xmlns:a="http://schemas.openxmlformats.org/drawingml/2006/main">
+            <a:extLst>
               <a:ext uri="{FF2B5EF4-FFF2-40B4-BE49-F238E27FC236}">
                 <a16:creationId xmlns:a16="http://schemas.microsoft.com/office/drawing/2014/main" id="{1D4D4FD1-314D-4A84-A46D-9E847A9666C1}"/>
               </a:ext>
             </a:extLst>
           </p:cNvPr>
           <p:cNvSpPr>
-            <a:spLocks xmlns:a="http://schemas.openxmlformats.org/drawingml/2006/main" noGrp="1"/>
+            <a:spLocks noGrp="1"/>
           </p:cNvSpPr>
           <p:nvPr>
             <p:ph type="body" idx="1"/>
           </p:nvPr>
         </p:nvSpPr>
         <p:spPr>
-          <a:xfrm xmlns:a="http://schemas.openxmlformats.org/drawingml/2006/main">
+          <a:xfrm>
             <a:off x="457200" y="1535113"/>
             <a:ext cx="4040188" cy="639762"/>
           </a:xfrm>
         </p:spPr>
         <p:txBody>
-          <a:bodyPr xmlns:a="http://schemas.openxmlformats.org/drawingml/2006/main" anchor="b"/>
-          <a:lstStyle xmlns:a="http://schemas.openxmlformats.org/drawingml/2006/main">
+          <a:bodyPr anchor="b"/>
+          <a:lstStyle>
             <a:lvl1pPr marL="0" indent="0">
               <a:buNone/>
               <a:defRPr sz="2400" b="1"/>
@@ -2846,7 +2666,7 @@
               <a:defRPr sz="1600" b="1"/>
             </a:lvl9pPr>
           </a:lstStyle>
-          <a:p xmlns:a="http://schemas.openxmlformats.org/drawingml/2006/main">
+          <a:p>
             <a:pPr lvl="0">
               <a:buNone/>
             </a:pPr>
@@ -2859,28 +2679,28 @@
       <p:sp>
         <p:nvSpPr>
           <p:cNvPr id="4" name="Content Placeholder 3">
-            <a:extLst xmlns:a="http://schemas.openxmlformats.org/drawingml/2006/main">
+            <a:extLst>
               <a:ext uri="{FF2B5EF4-FFF2-40B4-BE49-F238E27FC236}">
                 <a16:creationId xmlns:a16="http://schemas.microsoft.com/office/drawing/2014/main" id="{DBBDA8DE-F6F7-4546-B835-61B4778C38E4}"/>
               </a:ext>
             </a:extLst>
           </p:cNvPr>
           <p:cNvSpPr>
-            <a:spLocks xmlns:a="http://schemas.openxmlformats.org/drawingml/2006/main" noGrp="1"/>
+            <a:spLocks noGrp="1"/>
           </p:cNvSpPr>
           <p:nvPr>
             <p:ph idx="2"/>
           </p:nvPr>
         </p:nvSpPr>
         <p:spPr>
-          <a:xfrm xmlns:a="http://schemas.openxmlformats.org/drawingml/2006/main">
+          <a:xfrm>
             <a:off x="457200" y="2174875"/>
             <a:ext cx="4040188" cy="3951288"/>
           </a:xfrm>
         </p:spPr>
         <p:txBody>
-          <a:bodyPr xmlns:a="http://schemas.openxmlformats.org/drawingml/2006/main"/>
-          <a:lstStyle xmlns:a="http://schemas.openxmlformats.org/drawingml/2006/main">
+          <a:bodyPr/>
+          <a:lstStyle>
             <a:lvl1pPr>
               <a:buNone/>
               <a:defRPr sz="2400"/>
@@ -2918,7 +2738,7 @@
               <a:defRPr sz="1600"/>
             </a:lvl9pPr>
           </a:lstStyle>
-          <a:p xmlns:a="http://schemas.openxmlformats.org/drawingml/2006/main">
+          <a:p>
             <a:pPr lvl="0">
               <a:buNone/>
             </a:pPr>
@@ -2926,7 +2746,7 @@
               <a:t>Click to edit Master text styles</a:t>
             </a:r>
           </a:p>
-          <a:p xmlns:a="http://schemas.openxmlformats.org/drawingml/2006/main">
+          <a:p>
             <a:pPr lvl="1">
               <a:buNone/>
             </a:pPr>
@@ -2934,7 +2754,7 @@
               <a:t>Second level</a:t>
             </a:r>
           </a:p>
-          <a:p xmlns:a="http://schemas.openxmlformats.org/drawingml/2006/main">
+          <a:p>
             <a:pPr lvl="2">
               <a:buNone/>
             </a:pPr>
@@ -2942,7 +2762,7 @@
               <a:t>Third level</a:t>
             </a:r>
           </a:p>
-          <a:p xmlns:a="http://schemas.openxmlformats.org/drawingml/2006/main">
+          <a:p>
             <a:pPr lvl="3">
               <a:buNone/>
             </a:pPr>
@@ -2950,42 +2770,41 @@
               <a:t>Fourth level</a:t>
             </a:r>
           </a:p>
-          <a:p xmlns:a="http://schemas.openxmlformats.org/drawingml/2006/main">
+          <a:p>
             <a:pPr lvl="4">
               <a:buNone/>
             </a:pPr>
             <a:r>
               <a:t>Fifth level</a:t>
             </a:r>
-            <a:endParaRPr/>
           </a:p>
         </p:txBody>
       </p:sp>
       <p:sp>
         <p:nvSpPr>
           <p:cNvPr id="5" name="Text Placeholder 4">
-            <a:extLst xmlns:a="http://schemas.openxmlformats.org/drawingml/2006/main">
+            <a:extLst>
               <a:ext uri="{FF2B5EF4-FFF2-40B4-BE49-F238E27FC236}">
                 <a16:creationId xmlns:a16="http://schemas.microsoft.com/office/drawing/2014/main" id="{7138F431-A1B3-4E4F-BA89-EF9E068300D6}"/>
               </a:ext>
             </a:extLst>
           </p:cNvPr>
           <p:cNvSpPr>
-            <a:spLocks xmlns:a="http://schemas.openxmlformats.org/drawingml/2006/main" noGrp="1"/>
+            <a:spLocks noGrp="1"/>
           </p:cNvSpPr>
           <p:nvPr>
             <p:ph type="body" idx="3"/>
           </p:nvPr>
         </p:nvSpPr>
         <p:spPr>
-          <a:xfrm xmlns:a="http://schemas.openxmlformats.org/drawingml/2006/main">
+          <a:xfrm>
             <a:off x="4645025" y="1535113"/>
             <a:ext cx="4041775" cy="639762"/>
           </a:xfrm>
         </p:spPr>
         <p:txBody>
-          <a:bodyPr xmlns:a="http://schemas.openxmlformats.org/drawingml/2006/main" anchor="b"/>
-          <a:lstStyle xmlns:a="http://schemas.openxmlformats.org/drawingml/2006/main">
+          <a:bodyPr anchor="b"/>
+          <a:lstStyle>
             <a:lvl1pPr marL="0" indent="0">
               <a:buNone/>
               <a:defRPr sz="2400" b="1"/>
@@ -3023,7 +2842,7 @@
               <a:defRPr sz="1600" b="1"/>
             </a:lvl9pPr>
           </a:lstStyle>
-          <a:p xmlns:a="http://schemas.openxmlformats.org/drawingml/2006/main">
+          <a:p>
             <a:pPr lvl="0">
               <a:buNone/>
             </a:pPr>
@@ -3036,28 +2855,28 @@
       <p:sp>
         <p:nvSpPr>
           <p:cNvPr id="6" name="Content Placeholder 5">
-            <a:extLst xmlns:a="http://schemas.openxmlformats.org/drawingml/2006/main">
+            <a:extLst>
               <a:ext uri="{FF2B5EF4-FFF2-40B4-BE49-F238E27FC236}">
                 <a16:creationId xmlns:a16="http://schemas.microsoft.com/office/drawing/2014/main" id="{014D6267-B39F-42E7-B57E-9FE14F79B983}"/>
               </a:ext>
             </a:extLst>
           </p:cNvPr>
           <p:cNvSpPr>
-            <a:spLocks xmlns:a="http://schemas.openxmlformats.org/drawingml/2006/main" noGrp="1"/>
+            <a:spLocks noGrp="1"/>
           </p:cNvSpPr>
           <p:nvPr>
             <p:ph idx="4"/>
           </p:nvPr>
         </p:nvSpPr>
         <p:spPr>
-          <a:xfrm xmlns:a="http://schemas.openxmlformats.org/drawingml/2006/main">
+          <a:xfrm>
             <a:off x="4645025" y="2174875"/>
             <a:ext cx="4041775" cy="3951288"/>
           </a:xfrm>
         </p:spPr>
         <p:txBody>
-          <a:bodyPr xmlns:a="http://schemas.openxmlformats.org/drawingml/2006/main"/>
-          <a:lstStyle xmlns:a="http://schemas.openxmlformats.org/drawingml/2006/main">
+          <a:bodyPr/>
+          <a:lstStyle>
             <a:lvl1pPr>
               <a:buNone/>
               <a:defRPr sz="2400"/>
@@ -3095,7 +2914,7 @@
               <a:defRPr sz="1600"/>
             </a:lvl9pPr>
           </a:lstStyle>
-          <a:p xmlns:a="http://schemas.openxmlformats.org/drawingml/2006/main">
+          <a:p>
             <a:pPr lvl="0">
               <a:buNone/>
             </a:pPr>
@@ -3103,7 +2922,7 @@
               <a:t>Click to edit Master text styles</a:t>
             </a:r>
           </a:p>
-          <a:p xmlns:a="http://schemas.openxmlformats.org/drawingml/2006/main">
+          <a:p>
             <a:pPr lvl="1">
               <a:buNone/>
             </a:pPr>
@@ -3111,7 +2930,7 @@
               <a:t>Second level</a:t>
             </a:r>
           </a:p>
-          <a:p xmlns:a="http://schemas.openxmlformats.org/drawingml/2006/main">
+          <a:p>
             <a:pPr lvl="2">
               <a:buNone/>
             </a:pPr>
@@ -3119,7 +2938,7 @@
               <a:t>Third level</a:t>
             </a:r>
           </a:p>
-          <a:p xmlns:a="http://schemas.openxmlformats.org/drawingml/2006/main">
+          <a:p>
             <a:pPr lvl="3">
               <a:buNone/>
             </a:pPr>
@@ -3127,28 +2946,27 @@
               <a:t>Fourth level</a:t>
             </a:r>
           </a:p>
-          <a:p xmlns:a="http://schemas.openxmlformats.org/drawingml/2006/main">
+          <a:p>
             <a:pPr lvl="4">
               <a:buNone/>
             </a:pPr>
             <a:r>
               <a:t>Fifth level</a:t>
             </a:r>
-            <a:endParaRPr/>
           </a:p>
         </p:txBody>
       </p:sp>
       <p:sp>
         <p:nvSpPr>
           <p:cNvPr id="7" name="Date Placeholder 6">
-            <a:extLst xmlns:a="http://schemas.openxmlformats.org/drawingml/2006/main">
+            <a:extLst>
               <a:ext uri="{FF2B5EF4-FFF2-40B4-BE49-F238E27FC236}">
                 <a16:creationId xmlns:a16="http://schemas.microsoft.com/office/drawing/2014/main" id="{92AFACC2-E8D1-4B0E-BC7F-219A582C59AF}"/>
               </a:ext>
             </a:extLst>
           </p:cNvPr>
           <p:cNvSpPr>
-            <a:spLocks xmlns:a="http://schemas.openxmlformats.org/drawingml/2006/main" noGrp="1"/>
+            <a:spLocks noGrp="1"/>
           </p:cNvSpPr>
           <p:nvPr>
             <p:ph type="dt" idx="10"/>
@@ -3156,11 +2974,11 @@
         </p:nvSpPr>
         <p:spPr/>
         <p:txBody>
-          <a:bodyPr xmlns:a="http://schemas.openxmlformats.org/drawingml/2006/main"/>
-          <a:lstStyle xmlns:a="http://schemas.openxmlformats.org/drawingml/2006/main"/>
-          <a:p xmlns:a="http://schemas.openxmlformats.org/drawingml/2006/main">
+          <a:bodyPr/>
+          <a:lstStyle/>
+          <a:p>
             <a:fld id="{5BCAD085-E8A6-8845-BD4E-CB4CCA059FC4}" type="datetimeFigureOut">
-              <a:t>1/27/13</a:t>
+              <a:t>9/30/2026</a:t>
             </a:fld>
             <a:endParaRPr/>
           </a:p>
@@ -3169,14 +2987,14 @@
       <p:sp>
         <p:nvSpPr>
           <p:cNvPr id="8" name="Footer Placeholder 7">
-            <a:extLst xmlns:a="http://schemas.openxmlformats.org/drawingml/2006/main">
+            <a:extLst>
               <a:ext uri="{FF2B5EF4-FFF2-40B4-BE49-F238E27FC236}">
                 <a16:creationId xmlns:a16="http://schemas.microsoft.com/office/drawing/2014/main" id="{3C725241-9D97-41BE-A1F0-EAEE1F1B8EBC}"/>
               </a:ext>
             </a:extLst>
           </p:cNvPr>
           <p:cNvSpPr>
-            <a:spLocks xmlns:a="http://schemas.openxmlformats.org/drawingml/2006/main" noGrp="1"/>
+            <a:spLocks noGrp="1"/>
           </p:cNvSpPr>
           <p:nvPr>
             <p:ph type="ftr" idx="11"/>
@@ -3184,9 +3002,9 @@
         </p:nvSpPr>
         <p:spPr/>
         <p:txBody>
-          <a:bodyPr xmlns:a="http://schemas.openxmlformats.org/drawingml/2006/main"/>
-          <a:lstStyle xmlns:a="http://schemas.openxmlformats.org/drawingml/2006/main"/>
-          <a:p xmlns:a="http://schemas.openxmlformats.org/drawingml/2006/main">
+          <a:bodyPr/>
+          <a:lstStyle/>
+          <a:p>
             <a:endParaRPr/>
           </a:p>
         </p:txBody>
@@ -3194,14 +3012,14 @@
       <p:sp>
         <p:nvSpPr>
           <p:cNvPr id="9" name="Slide Number Placeholder 8">
-            <a:extLst xmlns:a="http://schemas.openxmlformats.org/drawingml/2006/main">
+            <a:extLst>
               <a:ext uri="{FF2B5EF4-FFF2-40B4-BE49-F238E27FC236}">
                 <a16:creationId xmlns:a16="http://schemas.microsoft.com/office/drawing/2014/main" id="{8D051176-C6E6-41B6-974F-C2FCC0B5F038}"/>
               </a:ext>
             </a:extLst>
           </p:cNvPr>
           <p:cNvSpPr>
-            <a:spLocks xmlns:a="http://schemas.openxmlformats.org/drawingml/2006/main" noGrp="1"/>
+            <a:spLocks noGrp="1"/>
           </p:cNvSpPr>
           <p:nvPr>
             <p:ph type="sldNum" idx="12"/>
@@ -3209,9 +3027,9 @@
         </p:nvSpPr>
         <p:spPr/>
         <p:txBody>
-          <a:bodyPr xmlns:a="http://schemas.openxmlformats.org/drawingml/2006/main"/>
-          <a:lstStyle xmlns:a="http://schemas.openxmlformats.org/drawingml/2006/main"/>
-          <a:p xmlns:a="http://schemas.openxmlformats.org/drawingml/2006/main">
+          <a:bodyPr/>
+          <a:lstStyle/>
+          <a:p>
             <a:fld id="{C1FF6DA9-008F-8B48-92A6-B652298478BF}" type="slidenum">
               <a:t>‹#›</a:t>
             </a:fld>
@@ -3221,11 +3039,14 @@
       </p:sp>
     </p:spTree>
   </p:cSld>
+  <p:clrMapOvr>
+    <a:masterClrMapping/>
+  </p:clrMapOvr>
 </p:sldLayout>
 </file>
 
 <file path=ppt/slideLayouts/slideLayout6.xml><?xml version="1.0" encoding="utf-8"?>
-<p:sldLayout xmlns:p="http://schemas.openxmlformats.org/presentationml/2006/main" type="titleOnly" preserve="1">
+<p:sldLayout xmlns:a="http://schemas.openxmlformats.org/drawingml/2006/main" xmlns:r="http://schemas.openxmlformats.org/officeDocument/2006/relationships" xmlns:p="http://schemas.openxmlformats.org/presentationml/2006/main" type="titleOnly" preserve="1">
   <p:cSld name="Title Only">
     <p:spTree>
       <p:nvGrpSpPr>
@@ -3234,47 +3055,51 @@
         <p:nvPr/>
       </p:nvGrpSpPr>
       <p:grpSpPr>
-        <a:xfrm xmlns:a="http://schemas.openxmlformats.org/drawingml/2006/main"/>
+        <a:xfrm>
+          <a:off x="0" y="0"/>
+          <a:ext cx="0" cy="0"/>
+          <a:chOff x="0" y="0"/>
+          <a:chExt cx="0" cy="0"/>
+        </a:xfrm>
       </p:grpSpPr>
       <p:sp>
         <p:nvSpPr>
           <p:cNvPr id="2" name="Title 1">
-            <a:extLst xmlns:a="http://schemas.openxmlformats.org/drawingml/2006/main">
+            <a:extLst>
               <a:ext uri="{FF2B5EF4-FFF2-40B4-BE49-F238E27FC236}">
                 <a16:creationId xmlns:a16="http://schemas.microsoft.com/office/drawing/2014/main" id="{3B5747C8-F68A-4588-B73A-BB799DAAF863}"/>
               </a:ext>
             </a:extLst>
           </p:cNvPr>
           <p:cNvSpPr>
-            <a:spLocks xmlns:a="http://schemas.openxmlformats.org/drawingml/2006/main" noGrp="1"/>
-          </p:cNvSpPr>
-          <p:nvPr>
-            <p:ph type="title" idx="0"/>
+            <a:spLocks noGrp="1"/>
+          </p:cNvSpPr>
+          <p:nvPr>
+            <p:ph type="title"/>
           </p:nvPr>
         </p:nvSpPr>
         <p:spPr/>
         <p:txBody>
-          <a:bodyPr xmlns:a="http://schemas.openxmlformats.org/drawingml/2006/main"/>
-          <a:lstStyle xmlns:a="http://schemas.openxmlformats.org/drawingml/2006/main"/>
-          <a:p xmlns:a="http://schemas.openxmlformats.org/drawingml/2006/main">
+          <a:bodyPr/>
+          <a:lstStyle/>
+          <a:p>
             <a:r>
               <a:t>Click to edit Master title style</a:t>
             </a:r>
-            <a:endParaRPr/>
           </a:p>
         </p:txBody>
       </p:sp>
       <p:sp>
         <p:nvSpPr>
           <p:cNvPr id="3" name="Date Placeholder 2">
-            <a:extLst xmlns:a="http://schemas.openxmlformats.org/drawingml/2006/main">
+            <a:extLst>
               <a:ext uri="{FF2B5EF4-FFF2-40B4-BE49-F238E27FC236}">
                 <a16:creationId xmlns:a16="http://schemas.microsoft.com/office/drawing/2014/main" id="{65A4E323-F46A-4FDA-8FBF-6C462E066C99}"/>
               </a:ext>
             </a:extLst>
           </p:cNvPr>
           <p:cNvSpPr>
-            <a:spLocks xmlns:a="http://schemas.openxmlformats.org/drawingml/2006/main" noGrp="1"/>
+            <a:spLocks noGrp="1"/>
           </p:cNvSpPr>
           <p:nvPr>
             <p:ph type="dt" idx="10"/>
@@ -3282,11 +3107,11 @@
         </p:nvSpPr>
         <p:spPr/>
         <p:txBody>
-          <a:bodyPr xmlns:a="http://schemas.openxmlformats.org/drawingml/2006/main"/>
-          <a:lstStyle xmlns:a="http://schemas.openxmlformats.org/drawingml/2006/main"/>
-          <a:p xmlns:a="http://schemas.openxmlformats.org/drawingml/2006/main">
+          <a:bodyPr/>
+          <a:lstStyle/>
+          <a:p>
             <a:fld id="{5BCAD085-E8A6-8845-BD4E-CB4CCA059FC4}" type="datetimeFigureOut">
-              <a:t>1/27/13</a:t>
+              <a:t>9/30/2026</a:t>
             </a:fld>
             <a:endParaRPr/>
           </a:p>
@@ -3295,14 +3120,14 @@
       <p:sp>
         <p:nvSpPr>
           <p:cNvPr id="4" name="Footer Placeholder 3">
-            <a:extLst xmlns:a="http://schemas.openxmlformats.org/drawingml/2006/main">
+            <a:extLst>
               <a:ext uri="{FF2B5EF4-FFF2-40B4-BE49-F238E27FC236}">
                 <a16:creationId xmlns:a16="http://schemas.microsoft.com/office/drawing/2014/main" id="{154ECCA1-1603-4A47-B418-B97EC1DF9B06}"/>
               </a:ext>
             </a:extLst>
           </p:cNvPr>
           <p:cNvSpPr>
-            <a:spLocks xmlns:a="http://schemas.openxmlformats.org/drawingml/2006/main" noGrp="1"/>
+            <a:spLocks noGrp="1"/>
           </p:cNvSpPr>
           <p:nvPr>
             <p:ph type="ftr" idx="11"/>
@@ -3310,9 +3135,9 @@
         </p:nvSpPr>
         <p:spPr/>
         <p:txBody>
-          <a:bodyPr xmlns:a="http://schemas.openxmlformats.org/drawingml/2006/main"/>
-          <a:lstStyle xmlns:a="http://schemas.openxmlformats.org/drawingml/2006/main"/>
-          <a:p xmlns:a="http://schemas.openxmlformats.org/drawingml/2006/main">
+          <a:bodyPr/>
+          <a:lstStyle/>
+          <a:p>
             <a:endParaRPr/>
           </a:p>
         </p:txBody>
@@ -3320,14 +3145,14 @@
       <p:sp>
         <p:nvSpPr>
           <p:cNvPr id="5" name="Slide Number Placeholder 4">
-            <a:extLst xmlns:a="http://schemas.openxmlformats.org/drawingml/2006/main">
+            <a:extLst>
               <a:ext uri="{FF2B5EF4-FFF2-40B4-BE49-F238E27FC236}">
                 <a16:creationId xmlns:a16="http://schemas.microsoft.com/office/drawing/2014/main" id="{0C9A3D68-6B04-4154-B6C5-84557650DEB6}"/>
               </a:ext>
             </a:extLst>
           </p:cNvPr>
           <p:cNvSpPr>
-            <a:spLocks xmlns:a="http://schemas.openxmlformats.org/drawingml/2006/main" noGrp="1"/>
+            <a:spLocks noGrp="1"/>
           </p:cNvSpPr>
           <p:nvPr>
             <p:ph type="sldNum" idx="12"/>
@@ -3335,9 +3160,9 @@
         </p:nvSpPr>
         <p:spPr/>
         <p:txBody>
-          <a:bodyPr xmlns:a="http://schemas.openxmlformats.org/drawingml/2006/main"/>
-          <a:lstStyle xmlns:a="http://schemas.openxmlformats.org/drawingml/2006/main"/>
-          <a:p xmlns:a="http://schemas.openxmlformats.org/drawingml/2006/main">
+          <a:bodyPr/>
+          <a:lstStyle/>
+          <a:p>
             <a:fld id="{C1FF6DA9-008F-8B48-92A6-B652298478BF}" type="slidenum">
               <a:t>‹#›</a:t>
             </a:fld>
@@ -3347,11 +3172,14 @@
       </p:sp>
     </p:spTree>
   </p:cSld>
+  <p:clrMapOvr>
+    <a:masterClrMapping/>
+  </p:clrMapOvr>
 </p:sldLayout>
 </file>
 
 <file path=ppt/slideLayouts/slideLayout7.xml><?xml version="1.0" encoding="utf-8"?>
-<p:sldLayout xmlns:p="http://schemas.openxmlformats.org/presentationml/2006/main" type="blank" preserve="1">
+<p:sldLayout xmlns:a="http://schemas.openxmlformats.org/drawingml/2006/main" xmlns:r="http://schemas.openxmlformats.org/officeDocument/2006/relationships" xmlns:p="http://schemas.openxmlformats.org/presentationml/2006/main" type="blank" preserve="1">
   <p:cSld name="Blank">
     <p:spTree>
       <p:nvGrpSpPr>
@@ -3360,19 +3188,24 @@
         <p:nvPr/>
       </p:nvGrpSpPr>
       <p:grpSpPr>
-        <a:xfrm xmlns:a="http://schemas.openxmlformats.org/drawingml/2006/main"/>
+        <a:xfrm>
+          <a:off x="0" y="0"/>
+          <a:ext cx="0" cy="0"/>
+          <a:chOff x="0" y="0"/>
+          <a:chExt cx="0" cy="0"/>
+        </a:xfrm>
       </p:grpSpPr>
       <p:sp>
         <p:nvSpPr>
           <p:cNvPr id="2" name="Date Placeholder 1">
-            <a:extLst xmlns:a="http://schemas.openxmlformats.org/drawingml/2006/main">
+            <a:extLst>
               <a:ext uri="{FF2B5EF4-FFF2-40B4-BE49-F238E27FC236}">
                 <a16:creationId xmlns:a16="http://schemas.microsoft.com/office/drawing/2014/main" id="{A8D5FAF1-219E-4200-8AA6-6A721E616A0C}"/>
               </a:ext>
             </a:extLst>
           </p:cNvPr>
           <p:cNvSpPr>
-            <a:spLocks xmlns:a="http://schemas.openxmlformats.org/drawingml/2006/main" noGrp="1"/>
+            <a:spLocks noGrp="1"/>
           </p:cNvSpPr>
           <p:nvPr>
             <p:ph type="dt" idx="10"/>
@@ -3380,11 +3213,11 @@
         </p:nvSpPr>
         <p:spPr/>
         <p:txBody>
-          <a:bodyPr xmlns:a="http://schemas.openxmlformats.org/drawingml/2006/main"/>
-          <a:lstStyle xmlns:a="http://schemas.openxmlformats.org/drawingml/2006/main"/>
-          <a:p xmlns:a="http://schemas.openxmlformats.org/drawingml/2006/main">
+          <a:bodyPr/>
+          <a:lstStyle/>
+          <a:p>
             <a:fld id="{5BCAD085-E8A6-8845-BD4E-CB4CCA059FC4}" type="datetimeFigureOut">
-              <a:t>1/27/13</a:t>
+              <a:t>9/30/2026</a:t>
             </a:fld>
             <a:endParaRPr/>
           </a:p>
@@ -3393,14 +3226,14 @@
       <p:sp>
         <p:nvSpPr>
           <p:cNvPr id="3" name="Footer Placeholder 2">
-            <a:extLst xmlns:a="http://schemas.openxmlformats.org/drawingml/2006/main">
+            <a:extLst>
               <a:ext uri="{FF2B5EF4-FFF2-40B4-BE49-F238E27FC236}">
                 <a16:creationId xmlns:a16="http://schemas.microsoft.com/office/drawing/2014/main" id="{EFD9D653-F201-411E-A86C-9ADAF9813C61}"/>
               </a:ext>
             </a:extLst>
           </p:cNvPr>
           <p:cNvSpPr>
-            <a:spLocks xmlns:a="http://schemas.openxmlformats.org/drawingml/2006/main" noGrp="1"/>
+            <a:spLocks noGrp="1"/>
           </p:cNvSpPr>
           <p:nvPr>
             <p:ph type="ftr" idx="11"/>
@@ -3408,9 +3241,9 @@
         </p:nvSpPr>
         <p:spPr/>
         <p:txBody>
-          <a:bodyPr xmlns:a="http://schemas.openxmlformats.org/drawingml/2006/main"/>
-          <a:lstStyle xmlns:a="http://schemas.openxmlformats.org/drawingml/2006/main"/>
-          <a:p xmlns:a="http://schemas.openxmlformats.org/drawingml/2006/main">
+          <a:bodyPr/>
+          <a:lstStyle/>
+          <a:p>
             <a:endParaRPr/>
           </a:p>
         </p:txBody>
@@ -3418,14 +3251,14 @@
       <p:sp>
         <p:nvSpPr>
           <p:cNvPr id="4" name="Slide Number Placeholder 3">
-            <a:extLst xmlns:a="http://schemas.openxmlformats.org/drawingml/2006/main">
+            <a:extLst>
               <a:ext uri="{FF2B5EF4-FFF2-40B4-BE49-F238E27FC236}">
                 <a16:creationId xmlns:a16="http://schemas.microsoft.com/office/drawing/2014/main" id="{AABCA08B-CE68-4D41-8A49-D8015BF2CD53}"/>
               </a:ext>
             </a:extLst>
           </p:cNvPr>
           <p:cNvSpPr>
-            <a:spLocks xmlns:a="http://schemas.openxmlformats.org/drawingml/2006/main" noGrp="1"/>
+            <a:spLocks noGrp="1"/>
           </p:cNvSpPr>
           <p:nvPr>
             <p:ph type="sldNum" idx="12"/>
@@ -3433,9 +3266,9 @@
         </p:nvSpPr>
         <p:spPr/>
         <p:txBody>
-          <a:bodyPr xmlns:a="http://schemas.openxmlformats.org/drawingml/2006/main"/>
-          <a:lstStyle xmlns:a="http://schemas.openxmlformats.org/drawingml/2006/main"/>
-          <a:p xmlns:a="http://schemas.openxmlformats.org/drawingml/2006/main">
+          <a:bodyPr/>
+          <a:lstStyle/>
+          <a:p>
             <a:fld id="{C1FF6DA9-008F-8B48-92A6-B652298478BF}" type="slidenum">
               <a:t>‹#›</a:t>
             </a:fld>
@@ -3445,11 +3278,14 @@
       </p:sp>
     </p:spTree>
   </p:cSld>
+  <p:clrMapOvr>
+    <a:masterClrMapping/>
+  </p:clrMapOvr>
 </p:sldLayout>
 </file>
 
 <file path=ppt/slideLayouts/slideLayout8.xml><?xml version="1.0" encoding="utf-8"?>
-<p:sldLayout xmlns:p="http://schemas.openxmlformats.org/presentationml/2006/main" type="objTx" preserve="1">
+<p:sldLayout xmlns:a="http://schemas.openxmlformats.org/drawingml/2006/main" xmlns:r="http://schemas.openxmlformats.org/officeDocument/2006/relationships" xmlns:p="http://schemas.openxmlformats.org/presentationml/2006/main" type="objTx" preserve="1">
   <p:cSld name="Content with Caption">
     <p:spTree>
       <p:nvGrpSpPr>
@@ -3458,71 +3294,75 @@
         <p:nvPr/>
       </p:nvGrpSpPr>
       <p:grpSpPr>
-        <a:xfrm xmlns:a="http://schemas.openxmlformats.org/drawingml/2006/main"/>
+        <a:xfrm>
+          <a:off x="0" y="0"/>
+          <a:ext cx="0" cy="0"/>
+          <a:chOff x="0" y="0"/>
+          <a:chExt cx="0" cy="0"/>
+        </a:xfrm>
       </p:grpSpPr>
       <p:sp>
         <p:nvSpPr>
           <p:cNvPr id="2" name="Title 1">
-            <a:extLst xmlns:a="http://schemas.openxmlformats.org/drawingml/2006/main">
+            <a:extLst>
               <a:ext uri="{FF2B5EF4-FFF2-40B4-BE49-F238E27FC236}">
                 <a16:creationId xmlns:a16="http://schemas.microsoft.com/office/drawing/2014/main" id="{D278E1A9-0D6E-4EFB-8CBC-B696B1F25E32}"/>
               </a:ext>
             </a:extLst>
           </p:cNvPr>
           <p:cNvSpPr>
-            <a:spLocks xmlns:a="http://schemas.openxmlformats.org/drawingml/2006/main" noGrp="1"/>
-          </p:cNvSpPr>
-          <p:nvPr>
-            <p:ph type="title" idx="0"/>
+            <a:spLocks noGrp="1"/>
+          </p:cNvSpPr>
+          <p:nvPr>
+            <p:ph type="title"/>
           </p:nvPr>
         </p:nvSpPr>
         <p:spPr>
-          <a:xfrm xmlns:a="http://schemas.openxmlformats.org/drawingml/2006/main">
+          <a:xfrm>
             <a:off x="457200" y="273050"/>
             <a:ext cx="3008313" cy="1162050"/>
           </a:xfrm>
         </p:spPr>
         <p:txBody>
-          <a:bodyPr xmlns:a="http://schemas.openxmlformats.org/drawingml/2006/main" anchor="b"/>
-          <a:lstStyle xmlns:a="http://schemas.openxmlformats.org/drawingml/2006/main">
+          <a:bodyPr anchor="b"/>
+          <a:lstStyle>
             <a:lvl1pPr algn="l">
               <a:buNone/>
               <a:defRPr sz="2000" b="1"/>
             </a:lvl1pPr>
           </a:lstStyle>
-          <a:p xmlns:a="http://schemas.openxmlformats.org/drawingml/2006/main">
+          <a:p>
             <a:r>
               <a:t>Click to edit Master title style</a:t>
             </a:r>
-            <a:endParaRPr/>
           </a:p>
         </p:txBody>
       </p:sp>
       <p:sp>
         <p:nvSpPr>
           <p:cNvPr id="3" name="Content Placeholder 2">
-            <a:extLst xmlns:a="http://schemas.openxmlformats.org/drawingml/2006/main">
+            <a:extLst>
               <a:ext uri="{FF2B5EF4-FFF2-40B4-BE49-F238E27FC236}">
                 <a16:creationId xmlns:a16="http://schemas.microsoft.com/office/drawing/2014/main" id="{AC95C166-DB05-4437-B992-C241B2A2D5E7}"/>
               </a:ext>
             </a:extLst>
           </p:cNvPr>
           <p:cNvSpPr>
-            <a:spLocks xmlns:a="http://schemas.openxmlformats.org/drawingml/2006/main" noGrp="1"/>
+            <a:spLocks noGrp="1"/>
           </p:cNvSpPr>
           <p:nvPr>
             <p:ph idx="1"/>
           </p:nvPr>
         </p:nvSpPr>
         <p:spPr>
-          <a:xfrm xmlns:a="http://schemas.openxmlformats.org/drawingml/2006/main">
+          <a:xfrm>
             <a:off x="3575050" y="273050"/>
             <a:ext cx="5111750" cy="5853113"/>
           </a:xfrm>
         </p:spPr>
         <p:txBody>
-          <a:bodyPr xmlns:a="http://schemas.openxmlformats.org/drawingml/2006/main"/>
-          <a:lstStyle xmlns:a="http://schemas.openxmlformats.org/drawingml/2006/main">
+          <a:bodyPr/>
+          <a:lstStyle>
             <a:lvl1pPr>
               <a:buNone/>
               <a:defRPr sz="3200"/>
@@ -3560,7 +3400,7 @@
               <a:defRPr sz="2000"/>
             </a:lvl9pPr>
           </a:lstStyle>
-          <a:p xmlns:a="http://schemas.openxmlformats.org/drawingml/2006/main">
+          <a:p>
             <a:pPr lvl="0">
               <a:buNone/>
             </a:pPr>
@@ -3568,7 +3408,7 @@
               <a:t>Click to edit Master text styles</a:t>
             </a:r>
           </a:p>
-          <a:p xmlns:a="http://schemas.openxmlformats.org/drawingml/2006/main">
+          <a:p>
             <a:pPr lvl="1">
               <a:buNone/>
             </a:pPr>
@@ -3576,7 +3416,7 @@
               <a:t>Second level</a:t>
             </a:r>
           </a:p>
-          <a:p xmlns:a="http://schemas.openxmlformats.org/drawingml/2006/main">
+          <a:p>
             <a:pPr lvl="2">
               <a:buNone/>
             </a:pPr>
@@ -3584,7 +3424,7 @@
               <a:t>Third level</a:t>
             </a:r>
           </a:p>
-          <a:p xmlns:a="http://schemas.openxmlformats.org/drawingml/2006/main">
+          <a:p>
             <a:pPr lvl="3">
               <a:buNone/>
             </a:pPr>
@@ -3592,42 +3432,41 @@
               <a:t>Fourth level</a:t>
             </a:r>
           </a:p>
-          <a:p xmlns:a="http://schemas.openxmlformats.org/drawingml/2006/main">
+          <a:p>
             <a:pPr lvl="4">
               <a:buNone/>
             </a:pPr>
             <a:r>
               <a:t>Fifth level</a:t>
             </a:r>
-            <a:endParaRPr/>
           </a:p>
         </p:txBody>
       </p:sp>
       <p:sp>
         <p:nvSpPr>
           <p:cNvPr id="4" name="Text Placeholder 3">
-            <a:extLst xmlns:a="http://schemas.openxmlformats.org/drawingml/2006/main">
+            <a:extLst>
               <a:ext uri="{FF2B5EF4-FFF2-40B4-BE49-F238E27FC236}">
                 <a16:creationId xmlns:a16="http://schemas.microsoft.com/office/drawing/2014/main" id="{8AC33C5C-32ED-4819-81AA-ABDBFF5C9A80}"/>
               </a:ext>
             </a:extLst>
           </p:cNvPr>
           <p:cNvSpPr>
-            <a:spLocks xmlns:a="http://schemas.openxmlformats.org/drawingml/2006/main" noGrp="1"/>
+            <a:spLocks noGrp="1"/>
           </p:cNvSpPr>
           <p:nvPr>
             <p:ph type="body" idx="2"/>
           </p:nvPr>
         </p:nvSpPr>
         <p:spPr>
-          <a:xfrm xmlns:a="http://schemas.openxmlformats.org/drawingml/2006/main">
+          <a:xfrm>
             <a:off x="457200" y="1435100"/>
             <a:ext cx="3008313" cy="4691063"/>
           </a:xfrm>
         </p:spPr>
         <p:txBody>
-          <a:bodyPr xmlns:a="http://schemas.openxmlformats.org/drawingml/2006/main"/>
-          <a:lstStyle xmlns:a="http://schemas.openxmlformats.org/drawingml/2006/main">
+          <a:bodyPr/>
+          <a:lstStyle>
             <a:lvl1pPr marL="0" indent="0">
               <a:buNone/>
               <a:defRPr sz="1400"/>
@@ -3665,7 +3504,7 @@
               <a:defRPr sz="900"/>
             </a:lvl9pPr>
           </a:lstStyle>
-          <a:p xmlns:a="http://schemas.openxmlformats.org/drawingml/2006/main">
+          <a:p>
             <a:pPr lvl="0">
               <a:buNone/>
             </a:pPr>
@@ -3678,14 +3517,14 @@
       <p:sp>
         <p:nvSpPr>
           <p:cNvPr id="5" name="Date Placeholder 4">
-            <a:extLst xmlns:a="http://schemas.openxmlformats.org/drawingml/2006/main">
+            <a:extLst>
               <a:ext uri="{FF2B5EF4-FFF2-40B4-BE49-F238E27FC236}">
                 <a16:creationId xmlns:a16="http://schemas.microsoft.com/office/drawing/2014/main" id="{15DAC9BF-A972-4470-AEC7-688729C8E023}"/>
               </a:ext>
             </a:extLst>
           </p:cNvPr>
           <p:cNvSpPr>
-            <a:spLocks xmlns:a="http://schemas.openxmlformats.org/drawingml/2006/main" noGrp="1"/>
+            <a:spLocks noGrp="1"/>
           </p:cNvSpPr>
           <p:nvPr>
             <p:ph type="dt" idx="10"/>
@@ -3693,11 +3532,11 @@
         </p:nvSpPr>
         <p:spPr/>
         <p:txBody>
-          <a:bodyPr xmlns:a="http://schemas.openxmlformats.org/drawingml/2006/main"/>
-          <a:lstStyle xmlns:a="http://schemas.openxmlformats.org/drawingml/2006/main"/>
-          <a:p xmlns:a="http://schemas.openxmlformats.org/drawingml/2006/main">
+          <a:bodyPr/>
+          <a:lstStyle/>
+          <a:p>
             <a:fld id="{5BCAD085-E8A6-8845-BD4E-CB4CCA059FC4}" type="datetimeFigureOut">
-              <a:t>1/27/13</a:t>
+              <a:t>9/30/2026</a:t>
             </a:fld>
             <a:endParaRPr/>
           </a:p>
@@ -3706,14 +3545,14 @@
       <p:sp>
         <p:nvSpPr>
           <p:cNvPr id="6" name="Footer Placeholder 5">
-            <a:extLst xmlns:a="http://schemas.openxmlformats.org/drawingml/2006/main">
+            <a:extLst>
               <a:ext uri="{FF2B5EF4-FFF2-40B4-BE49-F238E27FC236}">
                 <a16:creationId xmlns:a16="http://schemas.microsoft.com/office/drawing/2014/main" id="{90A03355-509D-448C-A54F-E3C413153597}"/>
               </a:ext>
             </a:extLst>
           </p:cNvPr>
           <p:cNvSpPr>
-            <a:spLocks xmlns:a="http://schemas.openxmlformats.org/drawingml/2006/main" noGrp="1"/>
+            <a:spLocks noGrp="1"/>
           </p:cNvSpPr>
           <p:nvPr>
             <p:ph type="ftr" idx="11"/>
@@ -3721,9 +3560,9 @@
         </p:nvSpPr>
         <p:spPr/>
         <p:txBody>
-          <a:bodyPr xmlns:a="http://schemas.openxmlformats.org/drawingml/2006/main"/>
-          <a:lstStyle xmlns:a="http://schemas.openxmlformats.org/drawingml/2006/main"/>
-          <a:p xmlns:a="http://schemas.openxmlformats.org/drawingml/2006/main">
+          <a:bodyPr/>
+          <a:lstStyle/>
+          <a:p>
             <a:endParaRPr/>
           </a:p>
         </p:txBody>
@@ -3731,14 +3570,14 @@
       <p:sp>
         <p:nvSpPr>
           <p:cNvPr id="7" name="Slide Number Placeholder 6">
-            <a:extLst xmlns:a="http://schemas.openxmlformats.org/drawingml/2006/main">
+            <a:extLst>
               <a:ext uri="{FF2B5EF4-FFF2-40B4-BE49-F238E27FC236}">
                 <a16:creationId xmlns:a16="http://schemas.microsoft.com/office/drawing/2014/main" id="{1C06BAE8-6717-46D4-93BD-8113B74055F0}"/>
               </a:ext>
             </a:extLst>
           </p:cNvPr>
           <p:cNvSpPr>
-            <a:spLocks xmlns:a="http://schemas.openxmlformats.org/drawingml/2006/main" noGrp="1"/>
+            <a:spLocks noGrp="1"/>
           </p:cNvSpPr>
           <p:nvPr>
             <p:ph type="sldNum" idx="12"/>
@@ -3746,9 +3585,9 @@
         </p:nvSpPr>
         <p:spPr/>
         <p:txBody>
-          <a:bodyPr xmlns:a="http://schemas.openxmlformats.org/drawingml/2006/main"/>
-          <a:lstStyle xmlns:a="http://schemas.openxmlformats.org/drawingml/2006/main"/>
-          <a:p xmlns:a="http://schemas.openxmlformats.org/drawingml/2006/main">
+          <a:bodyPr/>
+          <a:lstStyle/>
+          <a:p>
             <a:fld id="{C1FF6DA9-008F-8B48-92A6-B652298478BF}" type="slidenum">
               <a:t>‹#›</a:t>
             </a:fld>
@@ -3758,11 +3597,14 @@
       </p:sp>
     </p:spTree>
   </p:cSld>
+  <p:clrMapOvr>
+    <a:masterClrMapping/>
+  </p:clrMapOvr>
 </p:sldLayout>
 </file>
 
 <file path=ppt/slideLayouts/slideLayout9.xml><?xml version="1.0" encoding="utf-8"?>
-<p:sldLayout xmlns:p="http://schemas.openxmlformats.org/presentationml/2006/main" type="picTx" preserve="1">
+<p:sldLayout xmlns:a="http://schemas.openxmlformats.org/drawingml/2006/main" xmlns:r="http://schemas.openxmlformats.org/officeDocument/2006/relationships" xmlns:p="http://schemas.openxmlformats.org/presentationml/2006/main" type="picTx" preserve="1">
   <p:cSld name="Picture with Caption">
     <p:spTree>
       <p:nvGrpSpPr>
@@ -3771,71 +3613,75 @@
         <p:nvPr/>
       </p:nvGrpSpPr>
       <p:grpSpPr>
-        <a:xfrm xmlns:a="http://schemas.openxmlformats.org/drawingml/2006/main"/>
+        <a:xfrm>
+          <a:off x="0" y="0"/>
+          <a:ext cx="0" cy="0"/>
+          <a:chOff x="0" y="0"/>
+          <a:chExt cx="0" cy="0"/>
+        </a:xfrm>
       </p:grpSpPr>
       <p:sp>
         <p:nvSpPr>
           <p:cNvPr id="2" name="Title 1">
-            <a:extLst xmlns:a="http://schemas.openxmlformats.org/drawingml/2006/main">
+            <a:extLst>
               <a:ext uri="{FF2B5EF4-FFF2-40B4-BE49-F238E27FC236}">
                 <a16:creationId xmlns:a16="http://schemas.microsoft.com/office/drawing/2014/main" id="{6D4A3940-9793-4E17-982F-75DE809B5FC3}"/>
               </a:ext>
             </a:extLst>
           </p:cNvPr>
           <p:cNvSpPr>
-            <a:spLocks xmlns:a="http://schemas.openxmlformats.org/drawingml/2006/main" noGrp="1"/>
-          </p:cNvSpPr>
-          <p:nvPr>
-            <p:ph type="title" idx="0"/>
+            <a:spLocks noGrp="1"/>
+          </p:cNvSpPr>
+          <p:nvPr>
+            <p:ph type="title"/>
           </p:nvPr>
         </p:nvSpPr>
         <p:spPr>
-          <a:xfrm xmlns:a="http://schemas.openxmlformats.org/drawingml/2006/main">
+          <a:xfrm>
             <a:off x="1792288" y="4800600"/>
             <a:ext cx="5486400" cy="566738"/>
           </a:xfrm>
         </p:spPr>
         <p:txBody>
-          <a:bodyPr xmlns:a="http://schemas.openxmlformats.org/drawingml/2006/main" anchor="b"/>
-          <a:lstStyle xmlns:a="http://schemas.openxmlformats.org/drawingml/2006/main">
+          <a:bodyPr anchor="b"/>
+          <a:lstStyle>
             <a:lvl1pPr algn="l">
               <a:buNone/>
               <a:defRPr sz="2000" b="1"/>
             </a:lvl1pPr>
           </a:lstStyle>
-          <a:p xmlns:a="http://schemas.openxmlformats.org/drawingml/2006/main">
+          <a:p>
             <a:r>
               <a:t>Click to edit Master title style</a:t>
             </a:r>
-            <a:endParaRPr/>
           </a:p>
         </p:txBody>
       </p:sp>
       <p:sp>
         <p:nvSpPr>
           <p:cNvPr id="3" name="Picture Placeholder 2">
-            <a:extLst xmlns:a="http://schemas.openxmlformats.org/drawingml/2006/main">
+            <a:extLst>
               <a:ext uri="{FF2B5EF4-FFF2-40B4-BE49-F238E27FC236}">
                 <a16:creationId xmlns:a16="http://schemas.microsoft.com/office/drawing/2014/main" id="{1B043B23-6C48-479F-814A-650CD03C97FF}"/>
               </a:ext>
             </a:extLst>
           </p:cNvPr>
           <p:cNvSpPr>
-            <a:spLocks xmlns:a="http://schemas.openxmlformats.org/drawingml/2006/main" noGrp="1"/>
+            <a:spLocks noGrp="1"/>
           </p:cNvSpPr>
           <p:nvPr>
             <p:ph type="pic" idx="1"/>
           </p:nvPr>
         </p:nvSpPr>
         <p:spPr>
-          <a:xfrm xmlns:a="http://schemas.openxmlformats.org/drawingml/2006/main">
+          <a:xfrm>
             <a:off x="1792288" y="612775"/>
             <a:ext cx="5486400" cy="4114800"/>
           </a:xfrm>
         </p:spPr>
         <p:txBody>
-          <a:bodyPr xmlns:a="http://schemas.openxmlformats.org/drawingml/2006/main"/>
-          <a:lstStyle xmlns:a="http://schemas.openxmlformats.org/drawingml/2006/main">
+          <a:bodyPr/>
+          <a:lstStyle>
             <a:lvl1pPr marL="0" indent="0">
               <a:buNone/>
               <a:defRPr sz="3200"/>
@@ -3873,7 +3719,7 @@
               <a:defRPr sz="2000"/>
             </a:lvl9pPr>
           </a:lstStyle>
-          <a:p xmlns:a="http://schemas.openxmlformats.org/drawingml/2006/main">
+          <a:p>
             <a:endParaRPr/>
           </a:p>
         </p:txBody>
@@ -3881,28 +3727,28 @@
       <p:sp>
         <p:nvSpPr>
           <p:cNvPr id="4" name="Text Placeholder 3">
-            <a:extLst xmlns:a="http://schemas.openxmlformats.org/drawingml/2006/main">
+            <a:extLst>
               <a:ext uri="{FF2B5EF4-FFF2-40B4-BE49-F238E27FC236}">
                 <a16:creationId xmlns:a16="http://schemas.microsoft.com/office/drawing/2014/main" id="{3864957E-4073-4AB9-A6EE-B79DF88D9159}"/>
               </a:ext>
             </a:extLst>
           </p:cNvPr>
           <p:cNvSpPr>
-            <a:spLocks xmlns:a="http://schemas.openxmlformats.org/drawingml/2006/main" noGrp="1"/>
+            <a:spLocks noGrp="1"/>
           </p:cNvSpPr>
           <p:nvPr>
             <p:ph type="body" idx="2"/>
           </p:nvPr>
         </p:nvSpPr>
         <p:spPr>
-          <a:xfrm xmlns:a="http://schemas.openxmlformats.org/drawingml/2006/main">
+          <a:xfrm>
             <a:off x="1792288" y="5367338"/>
             <a:ext cx="5486400" cy="804862"/>
           </a:xfrm>
         </p:spPr>
         <p:txBody>
-          <a:bodyPr xmlns:a="http://schemas.openxmlformats.org/drawingml/2006/main"/>
-          <a:lstStyle xmlns:a="http://schemas.openxmlformats.org/drawingml/2006/main">
+          <a:bodyPr/>
+          <a:lstStyle>
             <a:lvl1pPr marL="0" indent="0">
               <a:buNone/>
               <a:defRPr sz="1400"/>
@@ -3940,7 +3786,7 @@
               <a:defRPr sz="900"/>
             </a:lvl9pPr>
           </a:lstStyle>
-          <a:p xmlns:a="http://schemas.openxmlformats.org/drawingml/2006/main">
+          <a:p>
             <a:pPr lvl="0">
               <a:buNone/>
             </a:pPr>
@@ -3953,14 +3799,14 @@
       <p:sp>
         <p:nvSpPr>
           <p:cNvPr id="5" name="Date Placeholder 4">
-            <a:extLst xmlns:a="http://schemas.openxmlformats.org/drawingml/2006/main">
+            <a:extLst>
               <a:ext uri="{FF2B5EF4-FFF2-40B4-BE49-F238E27FC236}">
                 <a16:creationId xmlns:a16="http://schemas.microsoft.com/office/drawing/2014/main" id="{0601747E-5349-4D45-8205-BA3AC7ADEE76}"/>
               </a:ext>
             </a:extLst>
           </p:cNvPr>
           <p:cNvSpPr>
-            <a:spLocks xmlns:a="http://schemas.openxmlformats.org/drawingml/2006/main" noGrp="1"/>
+            <a:spLocks noGrp="1"/>
           </p:cNvSpPr>
           <p:nvPr>
             <p:ph type="dt" idx="10"/>
@@ -3968,11 +3814,11 @@
         </p:nvSpPr>
         <p:spPr/>
         <p:txBody>
-          <a:bodyPr xmlns:a="http://schemas.openxmlformats.org/drawingml/2006/main"/>
-          <a:lstStyle xmlns:a="http://schemas.openxmlformats.org/drawingml/2006/main"/>
-          <a:p xmlns:a="http://schemas.openxmlformats.org/drawingml/2006/main">
+          <a:bodyPr/>
+          <a:lstStyle/>
+          <a:p>
             <a:fld id="{5BCAD085-E8A6-8845-BD4E-CB4CCA059FC4}" type="datetimeFigureOut">
-              <a:t>1/27/13</a:t>
+              <a:t>9/30/2026</a:t>
             </a:fld>
             <a:endParaRPr/>
           </a:p>
@@ -3981,14 +3827,14 @@
       <p:sp>
         <p:nvSpPr>
           <p:cNvPr id="6" name="Footer Placeholder 5">
-            <a:extLst xmlns:a="http://schemas.openxmlformats.org/drawingml/2006/main">
+            <a:extLst>
               <a:ext uri="{FF2B5EF4-FFF2-40B4-BE49-F238E27FC236}">
                 <a16:creationId xmlns:a16="http://schemas.microsoft.com/office/drawing/2014/main" id="{03F2E286-296F-4558-BD8D-EFFAEEDD541D}"/>
               </a:ext>
             </a:extLst>
           </p:cNvPr>
           <p:cNvSpPr>
-            <a:spLocks xmlns:a="http://schemas.openxmlformats.org/drawingml/2006/main" noGrp="1"/>
+            <a:spLocks noGrp="1"/>
           </p:cNvSpPr>
           <p:nvPr>
             <p:ph type="ftr" idx="11"/>
@@ -3996,9 +3842,9 @@
         </p:nvSpPr>
         <p:spPr/>
         <p:txBody>
-          <a:bodyPr xmlns:a="http://schemas.openxmlformats.org/drawingml/2006/main"/>
-          <a:lstStyle xmlns:a="http://schemas.openxmlformats.org/drawingml/2006/main"/>
-          <a:p xmlns:a="http://schemas.openxmlformats.org/drawingml/2006/main">
+          <a:bodyPr/>
+          <a:lstStyle/>
+          <a:p>
             <a:endParaRPr/>
           </a:p>
         </p:txBody>
@@ -4006,14 +3852,14 @@
       <p:sp>
         <p:nvSpPr>
           <p:cNvPr id="7" name="Slide Number Placeholder 6">
-            <a:extLst xmlns:a="http://schemas.openxmlformats.org/drawingml/2006/main">
+            <a:extLst>
               <a:ext uri="{FF2B5EF4-FFF2-40B4-BE49-F238E27FC236}">
                 <a16:creationId xmlns:a16="http://schemas.microsoft.com/office/drawing/2014/main" id="{20F1515B-3B0D-44D2-97DF-6BAAAA7A5253}"/>
               </a:ext>
             </a:extLst>
           </p:cNvPr>
           <p:cNvSpPr>
-            <a:spLocks xmlns:a="http://schemas.openxmlformats.org/drawingml/2006/main" noGrp="1"/>
+            <a:spLocks noGrp="1"/>
           </p:cNvSpPr>
           <p:nvPr>
             <p:ph type="sldNum" idx="12"/>
@@ -4021,9 +3867,9 @@
         </p:nvSpPr>
         <p:spPr/>
         <p:txBody>
-          <a:bodyPr xmlns:a="http://schemas.openxmlformats.org/drawingml/2006/main"/>
-          <a:lstStyle xmlns:a="http://schemas.openxmlformats.org/drawingml/2006/main"/>
-          <a:p xmlns:a="http://schemas.openxmlformats.org/drawingml/2006/main">
+          <a:bodyPr/>
+          <a:lstStyle/>
+          <a:p>
             <a:fld id="{C1FF6DA9-008F-8B48-92A6-B652298478BF}" type="slidenum">
               <a:t>‹#›</a:t>
             </a:fld>
@@ -4033,15 +3879,18 @@
       </p:sp>
     </p:spTree>
   </p:cSld>
+  <p:clrMapOvr>
+    <a:masterClrMapping/>
+  </p:clrMapOvr>
 </p:sldLayout>
 </file>
 
 <file path=ppt/slideMasters/slideMaster1.xml><?xml version="1.0" encoding="utf-8"?>
-<p:sldMaster xmlns:p="http://schemas.openxmlformats.org/presentationml/2006/main">
+<p:sldMaster xmlns:a="http://schemas.openxmlformats.org/drawingml/2006/main" xmlns:r="http://schemas.openxmlformats.org/officeDocument/2006/relationships" xmlns:p="http://schemas.openxmlformats.org/presentationml/2006/main">
   <p:cSld>
     <p:bg>
       <p:bgRef idx="1001">
-        <a:schemeClr xmlns:a="http://schemas.openxmlformats.org/drawingml/2006/main" val="bg1"/>
+        <a:schemeClr val="bg1"/>
       </p:bgRef>
     </p:bg>
     <p:spTree>
@@ -4051,77 +3900,81 @@
         <p:nvPr/>
       </p:nvGrpSpPr>
       <p:grpSpPr>
-        <a:xfrm xmlns:a="http://schemas.openxmlformats.org/drawingml/2006/main"/>
+        <a:xfrm>
+          <a:off x="0" y="0"/>
+          <a:ext cx="0" cy="0"/>
+          <a:chOff x="0" y="0"/>
+          <a:chExt cx="0" cy="0"/>
+        </a:xfrm>
       </p:grpSpPr>
       <p:sp>
         <p:nvSpPr>
           <p:cNvPr id="2" name="Title Placeholder 1">
-            <a:extLst xmlns:a="http://schemas.openxmlformats.org/drawingml/2006/main">
+            <a:extLst>
               <a:ext uri="{FF2B5EF4-FFF2-40B4-BE49-F238E27FC236}">
                 <a16:creationId xmlns:a16="http://schemas.microsoft.com/office/drawing/2014/main" id="{403EF7AA-6FC6-4CA3-984A-DB1DA491160B}"/>
               </a:ext>
             </a:extLst>
           </p:cNvPr>
           <p:cNvSpPr>
-            <a:spLocks xmlns:a="http://schemas.openxmlformats.org/drawingml/2006/main" noGrp="1"/>
-          </p:cNvSpPr>
-          <p:nvPr>
-            <p:ph type="title" idx="0"/>
+            <a:spLocks noGrp="1"/>
+          </p:cNvSpPr>
+          <p:nvPr>
+            <p:ph type="title"/>
           </p:nvPr>
         </p:nvSpPr>
         <p:spPr>
-          <a:xfrm xmlns:a="http://schemas.openxmlformats.org/drawingml/2006/main">
+          <a:xfrm>
             <a:off x="457200" y="274638"/>
             <a:ext cx="8229600" cy="1143000"/>
           </a:xfrm>
-          <a:prstGeom xmlns:a="http://schemas.openxmlformats.org/drawingml/2006/main" prst="rect">
+          <a:prstGeom prst="rect">
             <a:avLst/>
           </a:prstGeom>
         </p:spPr>
         <p:txBody>
-          <a:bodyPr xmlns:a="http://schemas.openxmlformats.org/drawingml/2006/main" vert="horz" lIns="91440" tIns="45720" rIns="91440" bIns="45720" anchor="ctr">
+          <a:bodyPr vert="horz" lIns="91440" tIns="45720" rIns="91440" bIns="45720" anchor="ctr">
             <a:normAutofit/>
           </a:bodyPr>
-          <a:lstStyle xmlns:a="http://schemas.openxmlformats.org/drawingml/2006/main"/>
-          <a:p xmlns:a="http://schemas.openxmlformats.org/drawingml/2006/main">
+          <a:lstStyle/>
+          <a:p>
             <a:r>
               <a:t>Click to edit Master title style</a:t>
             </a:r>
-            <a:endParaRPr/>
           </a:p>
         </p:txBody>
       </p:sp>
       <p:sp>
         <p:nvSpPr>
           <p:cNvPr id="3" name="Text Placeholder 2">
-            <a:extLst xmlns:a="http://schemas.openxmlformats.org/drawingml/2006/main">
+            <a:extLst>
               <a:ext uri="{FF2B5EF4-FFF2-40B4-BE49-F238E27FC236}">
                 <a16:creationId xmlns:a16="http://schemas.microsoft.com/office/drawing/2014/main" id="{A515DF36-7A0F-4C0B-B807-FF9A3B9F9AEE}"/>
               </a:ext>
             </a:extLst>
           </p:cNvPr>
           <p:cNvSpPr>
-            <a:spLocks xmlns:a="http://schemas.openxmlformats.org/drawingml/2006/main" noGrp="1"/>
+            <a:spLocks noGrp="1"/>
           </p:cNvSpPr>
           <p:nvPr>
             <p:ph type="body" idx="1"/>
           </p:nvPr>
         </p:nvSpPr>
         <p:spPr>
-          <a:xfrm xmlns:a="http://schemas.openxmlformats.org/drawingml/2006/main">
+          <a:xfrm>
             <a:off x="457200" y="1600200"/>
             <a:ext cx="8229600" cy="4525963"/>
           </a:xfrm>
-          <a:prstGeom xmlns:a="http://schemas.openxmlformats.org/drawingml/2006/main" prst="rect">
+          <a:prstGeom prst="rect">
             <a:avLst/>
           </a:prstGeom>
         </p:spPr>
         <p:txBody>
-          <a:bodyPr xmlns:a="http://schemas.openxmlformats.org/drawingml/2006/main" vert="horz" lIns="91440" tIns="45720" rIns="91440" bIns="45720">
+          <a:bodyPr vert="horz" lIns="91440" tIns="45720" rIns="91440" bIns="45720">
             <a:normAutofit/>
           </a:bodyPr>
-          <a:lstStyle xmlns:a="http://schemas.openxmlformats.org/drawingml/2006/main"/>
-          <a:p xmlns:a="http://schemas.openxmlformats.org/drawingml/2006/main">
+          <a:lstStyle/>
+          <a:p>
             <a:pPr lvl="0">
               <a:buNone/>
             </a:pPr>
@@ -4129,7 +3982,7 @@
               <a:t>Click to edit Master text styles</a:t>
             </a:r>
           </a:p>
-          <a:p xmlns:a="http://schemas.openxmlformats.org/drawingml/2006/main">
+          <a:p>
             <a:pPr lvl="1">
               <a:buNone/>
             </a:pPr>
@@ -4137,7 +3990,7 @@
               <a:t>Second level</a:t>
             </a:r>
           </a:p>
-          <a:p xmlns:a="http://schemas.openxmlformats.org/drawingml/2006/main">
+          <a:p>
             <a:pPr lvl="2">
               <a:buNone/>
             </a:pPr>
@@ -4145,7 +3998,7 @@
               <a:t>Third level</a:t>
             </a:r>
           </a:p>
-          <a:p xmlns:a="http://schemas.openxmlformats.org/drawingml/2006/main">
+          <a:p>
             <a:pPr lvl="3">
               <a:buNone/>
             </a:pPr>
@@ -4153,45 +4006,44 @@
               <a:t>Fourth level</a:t>
             </a:r>
           </a:p>
-          <a:p xmlns:a="http://schemas.openxmlformats.org/drawingml/2006/main">
+          <a:p>
             <a:pPr lvl="4">
               <a:buNone/>
             </a:pPr>
             <a:r>
               <a:t>Fifth level</a:t>
             </a:r>
-            <a:endParaRPr/>
           </a:p>
         </p:txBody>
       </p:sp>
       <p:sp>
         <p:nvSpPr>
           <p:cNvPr id="4" name="Date Placeholder 3">
-            <a:extLst xmlns:a="http://schemas.openxmlformats.org/drawingml/2006/main">
+            <a:extLst>
               <a:ext uri="{FF2B5EF4-FFF2-40B4-BE49-F238E27FC236}">
                 <a16:creationId xmlns:a16="http://schemas.microsoft.com/office/drawing/2014/main" id="{DBF5A033-DFB6-4C9A-8ACC-440104DA8A82}"/>
               </a:ext>
             </a:extLst>
           </p:cNvPr>
           <p:cNvSpPr>
-            <a:spLocks xmlns:a="http://schemas.openxmlformats.org/drawingml/2006/main" noGrp="1"/>
+            <a:spLocks noGrp="1"/>
           </p:cNvSpPr>
           <p:nvPr>
             <p:ph type="dt" idx="2"/>
           </p:nvPr>
         </p:nvSpPr>
         <p:spPr>
-          <a:xfrm xmlns:a="http://schemas.openxmlformats.org/drawingml/2006/main">
+          <a:xfrm>
             <a:off x="457200" y="6356350"/>
             <a:ext cx="2133600" cy="365125"/>
           </a:xfrm>
-          <a:prstGeom xmlns:a="http://schemas.openxmlformats.org/drawingml/2006/main" prst="rect">
+          <a:prstGeom prst="rect">
             <a:avLst/>
           </a:prstGeom>
         </p:spPr>
         <p:txBody>
-          <a:bodyPr xmlns:a="http://schemas.openxmlformats.org/drawingml/2006/main" vert="horz" lIns="91440" tIns="45720" rIns="91440" bIns="45720" anchor="ctr"/>
-          <a:lstStyle xmlns:a="http://schemas.openxmlformats.org/drawingml/2006/main">
+          <a:bodyPr vert="horz" lIns="91440" tIns="45720" rIns="91440" bIns="45720" anchor="ctr"/>
+          <a:lstStyle>
             <a:lvl1pPr algn="l">
               <a:buNone/>
               <a:defRPr sz="1200">
@@ -4203,9 +4055,9 @@
               </a:defRPr>
             </a:lvl1pPr>
           </a:lstStyle>
-          <a:p xmlns:a="http://schemas.openxmlformats.org/drawingml/2006/main">
+          <a:p>
             <a:fld id="{5BCAD085-E8A6-8845-BD4E-CB4CCA059FC4}" type="datetimeFigureOut">
-              <a:t>1/27/13</a:t>
+              <a:t>9/30/2026</a:t>
             </a:fld>
             <a:endParaRPr/>
           </a:p>
@@ -4214,31 +4066,31 @@
       <p:sp>
         <p:nvSpPr>
           <p:cNvPr id="5" name="Footer Placeholder 4">
-            <a:extLst xmlns:a="http://schemas.openxmlformats.org/drawingml/2006/main">
+            <a:extLst>
               <a:ext uri="{FF2B5EF4-FFF2-40B4-BE49-F238E27FC236}">
                 <a16:creationId xmlns:a16="http://schemas.microsoft.com/office/drawing/2014/main" id="{7B7D062B-8856-4526-A0BF-80F4019CEC08}"/>
               </a:ext>
             </a:extLst>
           </p:cNvPr>
           <p:cNvSpPr>
-            <a:spLocks xmlns:a="http://schemas.openxmlformats.org/drawingml/2006/main" noGrp="1"/>
+            <a:spLocks noGrp="1"/>
           </p:cNvSpPr>
           <p:nvPr>
             <p:ph type="ftr" idx="3"/>
           </p:nvPr>
         </p:nvSpPr>
         <p:spPr>
-          <a:xfrm xmlns:a="http://schemas.openxmlformats.org/drawingml/2006/main">
+          <a:xfrm>
             <a:off x="3124200" y="6356350"/>
             <a:ext cx="2895600" cy="365125"/>
           </a:xfrm>
-          <a:prstGeom xmlns:a="http://schemas.openxmlformats.org/drawingml/2006/main" prst="rect">
+          <a:prstGeom prst="rect">
             <a:avLst/>
           </a:prstGeom>
         </p:spPr>
         <p:txBody>
-          <a:bodyPr xmlns:a="http://schemas.openxmlformats.org/drawingml/2006/main" vert="horz" lIns="91440" tIns="45720" rIns="91440" bIns="45720" anchor="ctr"/>
-          <a:lstStyle xmlns:a="http://schemas.openxmlformats.org/drawingml/2006/main">
+          <a:bodyPr vert="horz" lIns="91440" tIns="45720" rIns="91440" bIns="45720" anchor="ctr"/>
+          <a:lstStyle>
             <a:lvl1pPr algn="ctr">
               <a:buNone/>
               <a:defRPr sz="1200">
@@ -4250,7 +4102,7 @@
               </a:defRPr>
             </a:lvl1pPr>
           </a:lstStyle>
-          <a:p xmlns:a="http://schemas.openxmlformats.org/drawingml/2006/main">
+          <a:p>
             <a:endParaRPr/>
           </a:p>
         </p:txBody>
@@ -4258,31 +4110,31 @@
       <p:sp>
         <p:nvSpPr>
           <p:cNvPr id="6" name="Slide Number Placeholder 5">
-            <a:extLst xmlns:a="http://schemas.openxmlformats.org/drawingml/2006/main">
+            <a:extLst>
               <a:ext uri="{FF2B5EF4-FFF2-40B4-BE49-F238E27FC236}">
                 <a16:creationId xmlns:a16="http://schemas.microsoft.com/office/drawing/2014/main" id="{E45E59F1-5C22-495A-A0FD-FF84CBDC3AA4}"/>
               </a:ext>
             </a:extLst>
           </p:cNvPr>
           <p:cNvSpPr>
-            <a:spLocks xmlns:a="http://schemas.openxmlformats.org/drawingml/2006/main" noGrp="1"/>
+            <a:spLocks noGrp="1"/>
           </p:cNvSpPr>
           <p:nvPr>
             <p:ph type="sldNum" idx="4"/>
           </p:nvPr>
         </p:nvSpPr>
         <p:spPr>
-          <a:xfrm xmlns:a="http://schemas.openxmlformats.org/drawingml/2006/main">
+          <a:xfrm>
             <a:off x="6553200" y="6356350"/>
             <a:ext cx="2133600" cy="365125"/>
           </a:xfrm>
-          <a:prstGeom xmlns:a="http://schemas.openxmlformats.org/drawingml/2006/main" prst="rect">
+          <a:prstGeom prst="rect">
             <a:avLst/>
           </a:prstGeom>
         </p:spPr>
         <p:txBody>
-          <a:bodyPr xmlns:a="http://schemas.openxmlformats.org/drawingml/2006/main" vert="horz" lIns="91440" tIns="45720" rIns="91440" bIns="45720" anchor="ctr"/>
-          <a:lstStyle xmlns:a="http://schemas.openxmlformats.org/drawingml/2006/main">
+          <a:bodyPr vert="horz" lIns="91440" tIns="45720" rIns="91440" bIns="45720" anchor="ctr"/>
+          <a:lstStyle>
             <a:lvl1pPr algn="r">
               <a:buNone/>
               <a:defRPr sz="1200">
@@ -4294,7 +4146,7 @@
               </a:defRPr>
             </a:lvl1pPr>
           </a:lstStyle>
-          <a:p xmlns:a="http://schemas.openxmlformats.org/drawingml/2006/main">
+          <a:p>
             <a:fld id="{C1FF6DA9-008F-8B48-92A6-B652298478BF}" type="slidenum">
               <a:t>‹#›</a:t>
             </a:fld>
@@ -4306,21 +4158,21 @@
   </p:cSld>
   <p:clrMap bg1="lt1" tx1="dk1" bg2="lt2" tx2="dk2" accent1="accent1" accent2="accent2" accent3="accent3" accent4="accent4" accent5="accent5" accent6="accent6" hlink="hlink" folHlink="folHlink"/>
   <p:sldLayoutIdLst>
-    <p:sldLayoutId xmlns:r="http://schemas.openxmlformats.org/officeDocument/2006/relationships" id="2147483649" r:id="Ra73a00216d4a4836"/>
-    <p:sldLayoutId xmlns:r="http://schemas.openxmlformats.org/officeDocument/2006/relationships" id="2147483650" r:id="Rc49db4a8e726453c"/>
-    <p:sldLayoutId xmlns:r="http://schemas.openxmlformats.org/officeDocument/2006/relationships" id="2147483651" r:id="R4b47c1a539c0470a"/>
-    <p:sldLayoutId xmlns:r="http://schemas.openxmlformats.org/officeDocument/2006/relationships" id="2147483652" r:id="Rd4a15f6844f942c3"/>
-    <p:sldLayoutId xmlns:r="http://schemas.openxmlformats.org/officeDocument/2006/relationships" id="2147483653" r:id="R5f9a27fe39da44d1"/>
-    <p:sldLayoutId xmlns:r="http://schemas.openxmlformats.org/officeDocument/2006/relationships" id="2147483654" r:id="Rd61c27c4e5994bd2"/>
-    <p:sldLayoutId xmlns:r="http://schemas.openxmlformats.org/officeDocument/2006/relationships" id="2147483655" r:id="R7f40049726754c23"/>
-    <p:sldLayoutId xmlns:r="http://schemas.openxmlformats.org/officeDocument/2006/relationships" id="2147483656" r:id="R5a43829887674985"/>
-    <p:sldLayoutId xmlns:r="http://schemas.openxmlformats.org/officeDocument/2006/relationships" id="2147483657" r:id="R128dd493fa3545b7"/>
-    <p:sldLayoutId xmlns:r="http://schemas.openxmlformats.org/officeDocument/2006/relationships" id="2147483658" r:id="Re4dfd616fe6d4cd6"/>
-    <p:sldLayoutId xmlns:r="http://schemas.openxmlformats.org/officeDocument/2006/relationships" id="2147483659" r:id="R716afc370d6c40f3"/>
+    <p:sldLayoutId id="2147483649" r:id="rId1"/>
+    <p:sldLayoutId id="2147483650" r:id="rId2"/>
+    <p:sldLayoutId id="2147483651" r:id="rId3"/>
+    <p:sldLayoutId id="2147483652" r:id="rId4"/>
+    <p:sldLayoutId id="2147483653" r:id="rId5"/>
+    <p:sldLayoutId id="2147483654" r:id="rId6"/>
+    <p:sldLayoutId id="2147483655" r:id="rId7"/>
+    <p:sldLayoutId id="2147483656" r:id="rId8"/>
+    <p:sldLayoutId id="2147483657" r:id="rId9"/>
+    <p:sldLayoutId id="2147483658" r:id="rId10"/>
+    <p:sldLayoutId id="2147483659" r:id="rId11"/>
   </p:sldLayoutIdLst>
   <p:txStyles>
     <p:titleStyle>
-      <a:lvl1pPr xmlns:a="http://schemas.openxmlformats.org/drawingml/2006/main" algn="ctr" defTabSz="457200">
+      <a:lvl1pPr algn="ctr" defTabSz="457200">
         <a:spcBef>
           <a:spcPct val="0"/>
         </a:spcBef>
@@ -4336,7 +4188,7 @@
       </a:lvl1pPr>
     </p:titleStyle>
     <p:bodyStyle>
-      <a:lvl1pPr xmlns:a="http://schemas.openxmlformats.org/drawingml/2006/main" marL="342900" indent="-342900" algn="l" defTabSz="457200">
+      <a:lvl1pPr marL="342900" indent="-342900" algn="l" defTabSz="457200">
         <a:spcBef>
           <a:spcPct val="20000"/>
         </a:spcBef>
@@ -4351,7 +4203,7 @@
           <a:cs typeface="+mn-lt"/>
         </a:defRPr>
       </a:lvl1pPr>
-      <a:lvl2pPr xmlns:a="http://schemas.openxmlformats.org/drawingml/2006/main" marL="742950" indent="-285750" algn="l" defTabSz="457200">
+      <a:lvl2pPr marL="742950" indent="-285750" algn="l" defTabSz="457200">
         <a:spcBef>
           <a:spcPct val="20000"/>
         </a:spcBef>
@@ -4366,7 +4218,7 @@
           <a:cs typeface="+mn-lt"/>
         </a:defRPr>
       </a:lvl2pPr>
-      <a:lvl3pPr xmlns:a="http://schemas.openxmlformats.org/drawingml/2006/main" marL="1143000" indent="-228600" algn="l" defTabSz="457200">
+      <a:lvl3pPr marL="1143000" indent="-228600" algn="l" defTabSz="457200">
         <a:spcBef>
           <a:spcPct val="20000"/>
         </a:spcBef>
@@ -4381,7 +4233,7 @@
           <a:cs typeface="+mn-lt"/>
         </a:defRPr>
       </a:lvl3pPr>
-      <a:lvl4pPr xmlns:a="http://schemas.openxmlformats.org/drawingml/2006/main" marL="1600200" indent="-228600" algn="l" defTabSz="457200">
+      <a:lvl4pPr marL="1600200" indent="-228600" algn="l" defTabSz="457200">
         <a:spcBef>
           <a:spcPct val="20000"/>
         </a:spcBef>
@@ -4396,7 +4248,7 @@
           <a:cs typeface="+mn-lt"/>
         </a:defRPr>
       </a:lvl4pPr>
-      <a:lvl5pPr xmlns:a="http://schemas.openxmlformats.org/drawingml/2006/main" marL="2057400" indent="-228600" algn="l" defTabSz="457200">
+      <a:lvl5pPr marL="2057400" indent="-228600" algn="l" defTabSz="457200">
         <a:spcBef>
           <a:spcPct val="20000"/>
         </a:spcBef>
@@ -4411,7 +4263,7 @@
           <a:cs typeface="+mn-lt"/>
         </a:defRPr>
       </a:lvl5pPr>
-      <a:lvl6pPr xmlns:a="http://schemas.openxmlformats.org/drawingml/2006/main" marL="2514600" indent="-228600" algn="l" defTabSz="457200">
+      <a:lvl6pPr marL="2514600" indent="-228600" algn="l" defTabSz="457200">
         <a:spcBef>
           <a:spcPct val="20000"/>
         </a:spcBef>
@@ -4426,7 +4278,7 @@
           <a:cs typeface="+mn-lt"/>
         </a:defRPr>
       </a:lvl6pPr>
-      <a:lvl7pPr xmlns:a="http://schemas.openxmlformats.org/drawingml/2006/main" marL="2971800" indent="-228600" algn="l" defTabSz="457200">
+      <a:lvl7pPr marL="2971800" indent="-228600" algn="l" defTabSz="457200">
         <a:spcBef>
           <a:spcPct val="20000"/>
         </a:spcBef>
@@ -4441,7 +4293,7 @@
           <a:cs typeface="+mn-lt"/>
         </a:defRPr>
       </a:lvl7pPr>
-      <a:lvl8pPr xmlns:a="http://schemas.openxmlformats.org/drawingml/2006/main" marL="3429000" indent="-228600" algn="l" defTabSz="457200">
+      <a:lvl8pPr marL="3429000" indent="-228600" algn="l" defTabSz="457200">
         <a:spcBef>
           <a:spcPct val="20000"/>
         </a:spcBef>
@@ -4456,7 +4308,7 @@
           <a:cs typeface="+mn-lt"/>
         </a:defRPr>
       </a:lvl8pPr>
-      <a:lvl9pPr xmlns:a="http://schemas.openxmlformats.org/drawingml/2006/main" marL="3886200" indent="-228600" algn="l" defTabSz="457200">
+      <a:lvl9pPr marL="3886200" indent="-228600" algn="l" defTabSz="457200">
         <a:spcBef>
           <a:spcPct val="20000"/>
         </a:spcBef>
@@ -4473,7 +4325,7 @@
       </a:lvl9pPr>
     </p:bodyStyle>
     <p:otherStyle>
-      <a:lvl1pPr xmlns:a="http://schemas.openxmlformats.org/drawingml/2006/main" marL="0" algn="l" defTabSz="457200">
+      <a:lvl1pPr marL="0" algn="l" defTabSz="457200">
         <a:buNone/>
         <a:defRPr sz="1800" kern="1200">
           <a:solidFill>
@@ -4484,7 +4336,7 @@
           <a:cs typeface="+mn-lt"/>
         </a:defRPr>
       </a:lvl1pPr>
-      <a:lvl2pPr xmlns:a="http://schemas.openxmlformats.org/drawingml/2006/main" marL="457200" algn="l" defTabSz="457200">
+      <a:lvl2pPr marL="457200" algn="l" defTabSz="457200">
         <a:buNone/>
         <a:defRPr sz="1800" kern="1200">
           <a:solidFill>
@@ -4495,7 +4347,7 @@
           <a:cs typeface="+mn-lt"/>
         </a:defRPr>
       </a:lvl2pPr>
-      <a:lvl3pPr xmlns:a="http://schemas.openxmlformats.org/drawingml/2006/main" marL="914400" algn="l" defTabSz="457200">
+      <a:lvl3pPr marL="914400" algn="l" defTabSz="457200">
         <a:buNone/>
         <a:defRPr sz="1800" kern="1200">
           <a:solidFill>
@@ -4506,7 +4358,7 @@
           <a:cs typeface="+mn-lt"/>
         </a:defRPr>
       </a:lvl3pPr>
-      <a:lvl4pPr xmlns:a="http://schemas.openxmlformats.org/drawingml/2006/main" marL="1371600" algn="l" defTabSz="457200">
+      <a:lvl4pPr marL="1371600" algn="l" defTabSz="457200">
         <a:buNone/>
         <a:defRPr sz="1800" kern="1200">
           <a:solidFill>
@@ -4517,7 +4369,7 @@
           <a:cs typeface="+mn-lt"/>
         </a:defRPr>
       </a:lvl4pPr>
-      <a:lvl5pPr xmlns:a="http://schemas.openxmlformats.org/drawingml/2006/main" marL="1828800" algn="l" defTabSz="457200">
+      <a:lvl5pPr marL="1828800" algn="l" defTabSz="457200">
         <a:buNone/>
         <a:defRPr sz="1800" kern="1200">
           <a:solidFill>
@@ -4528,7 +4380,7 @@
           <a:cs typeface="+mn-lt"/>
         </a:defRPr>
       </a:lvl5pPr>
-      <a:lvl6pPr xmlns:a="http://schemas.openxmlformats.org/drawingml/2006/main" marL="2286000" algn="l" defTabSz="457200">
+      <a:lvl6pPr marL="2286000" algn="l" defTabSz="457200">
         <a:buNone/>
         <a:defRPr sz="1800" kern="1200">
           <a:solidFill>
@@ -4539,7 +4391,7 @@
           <a:cs typeface="+mn-lt"/>
         </a:defRPr>
       </a:lvl6pPr>
-      <a:lvl7pPr xmlns:a="http://schemas.openxmlformats.org/drawingml/2006/main" marL="2743200" algn="l" defTabSz="457200">
+      <a:lvl7pPr marL="2743200" algn="l" defTabSz="457200">
         <a:buNone/>
         <a:defRPr sz="1800" kern="1200">
           <a:solidFill>
@@ -4550,7 +4402,7 @@
           <a:cs typeface="+mn-lt"/>
         </a:defRPr>
       </a:lvl7pPr>
-      <a:lvl8pPr xmlns:a="http://schemas.openxmlformats.org/drawingml/2006/main" marL="3200400" algn="l" defTabSz="457200">
+      <a:lvl8pPr marL="3200400" algn="l" defTabSz="457200">
         <a:buNone/>
         <a:defRPr sz="1800" kern="1200">
           <a:solidFill>
@@ -4561,7 +4413,7 @@
           <a:cs typeface="+mn-lt"/>
         </a:defRPr>
       </a:lvl8pPr>
-      <a:lvl9pPr xmlns:a="http://schemas.openxmlformats.org/drawingml/2006/main" marL="3657600" algn="l" defTabSz="457200">
+      <a:lvl9pPr marL="3657600" algn="l" defTabSz="457200">
         <a:buNone/>
         <a:defRPr sz="1800" kern="1200">
           <a:solidFill>
@@ -4577,282 +4429,15 @@
 </p:sldMaster>
 </file>
 
-<file path=ppt/slideMasters/theme/theme2.xml><?xml version="1.0" encoding="utf-8"?>
-<a:theme xmlns:a="http://schemas.openxmlformats.org/drawingml/2006/main" name="Office Theme">
-  <a:themeElements>
-    <a:clrScheme name="Office">
-      <a:dk1>
-        <a:sysClr val="windowText" lastClr="000000"/>
-      </a:dk1>
-      <a:lt1>
-        <a:sysClr val="window" lastClr="FFFFFF"/>
-      </a:lt1>
-      <a:dk2>
-        <a:srgbClr val="1F497D"/>
-      </a:dk2>
-      <a:lt2>
-        <a:srgbClr val="EEECE1"/>
-      </a:lt2>
-      <a:accent1>
-        <a:srgbClr val="4F81BD"/>
-      </a:accent1>
-      <a:accent2>
-        <a:srgbClr val="C0504D"/>
-      </a:accent2>
-      <a:accent3>
-        <a:srgbClr val="9BBB59"/>
-      </a:accent3>
-      <a:accent4>
-        <a:srgbClr val="8064A2"/>
-      </a:accent4>
-      <a:accent5>
-        <a:srgbClr val="4BACC6"/>
-      </a:accent5>
-      <a:accent6>
-        <a:srgbClr val="F79646"/>
-      </a:accent6>
-      <a:hlink>
-        <a:srgbClr val="0000FF"/>
-      </a:hlink>
-      <a:folHlink>
-        <a:srgbClr val="800080"/>
-      </a:folHlink>
-    </a:clrScheme>
-    <a:fontScheme name="Office">
-      <a:majorFont>
-        <a:latin typeface="Calibri"/>
-        <a:ea typeface=""/>
-        <a:cs typeface=""/>
-        <a:font script="Jpan" typeface="ＭＳ Ｐゴシック"/>
-        <a:font script="Hang" typeface="맑은 고딕"/>
-        <a:font script="Hans" typeface="宋体"/>
-        <a:font script="Hant" typeface="新細明體"/>
-        <a:font script="Arab" typeface="Times New Roman"/>
-        <a:font script="Hebr" typeface="Times New Roman"/>
-        <a:font script="Thai" typeface="Angsana New"/>
-        <a:font script="Ethi" typeface="Nyala"/>
-        <a:font script="Beng" typeface="Vrinda"/>
-        <a:font script="Gujr" typeface="Shruti"/>
-        <a:font script="Khmr" typeface="MoolBoran"/>
-        <a:font script="Knda" typeface="Tunga"/>
-        <a:font script="Guru" typeface="Raavi"/>
-        <a:font script="Cans" typeface="Euphemia"/>
-        <a:font script="Cher" typeface="Plantagenet Cherokee"/>
-        <a:font script="Yiii" typeface="Microsoft Yi Baiti"/>
-        <a:font script="Tibt" typeface="Microsoft Himalaya"/>
-        <a:font script="Thaa" typeface="MV Boli"/>
-        <a:font script="Deva" typeface="Mangal"/>
-        <a:font script="Telu" typeface="Gautami"/>
-        <a:font script="Taml" typeface="Latha"/>
-        <a:font script="Syrc" typeface="Estrangelo Edessa"/>
-        <a:font script="Orya" typeface="Kalinga"/>
-        <a:font script="Mlym" typeface="Kartika"/>
-        <a:font script="Laoo" typeface="DokChampa"/>
-        <a:font script="Sinh" typeface="Iskoola Pota"/>
-        <a:font script="Mong" typeface="Mongolian Baiti"/>
-        <a:font script="Viet" typeface="Times New Roman"/>
-        <a:font script="Uigh" typeface="Microsoft Uighur"/>
-        <a:font script="Geor" typeface="Sylfaen"/>
-      </a:majorFont>
-      <a:minorFont>
-        <a:latin typeface="Calibri"/>
-        <a:ea typeface=""/>
-        <a:cs typeface=""/>
-        <a:font script="Jpan" typeface="ＭＳ Ｐゴシック"/>
-        <a:font script="Hang" typeface="맑은 고딕"/>
-        <a:font script="Hans" typeface="宋体"/>
-        <a:font script="Hant" typeface="新細明體"/>
-        <a:font script="Arab" typeface="Arial"/>
-        <a:font script="Hebr" typeface="Arial"/>
-        <a:font script="Thai" typeface="Cordia New"/>
-        <a:font script="Ethi" typeface="Nyala"/>
-        <a:font script="Beng" typeface="Vrinda"/>
-        <a:font script="Gujr" typeface="Shruti"/>
-        <a:font script="Khmr" typeface="DaunPenh"/>
-        <a:font script="Knda" typeface="Tunga"/>
-        <a:font script="Guru" typeface="Raavi"/>
-        <a:font script="Cans" typeface="Euphemia"/>
-        <a:font script="Cher" typeface="Plantagenet Cherokee"/>
-        <a:font script="Yiii" typeface="Microsoft Yi Baiti"/>
-        <a:font script="Tibt" typeface="Microsoft Himalaya"/>
-        <a:font script="Thaa" typeface="MV Boli"/>
-        <a:font script="Deva" typeface="Mangal"/>
-        <a:font script="Telu" typeface="Gautami"/>
-        <a:font script="Taml" typeface="Latha"/>
-        <a:font script="Syrc" typeface="Estrangelo Edessa"/>
-        <a:font script="Orya" typeface="Kalinga"/>
-        <a:font script="Mlym" typeface="Kartika"/>
-        <a:font script="Laoo" typeface="DokChampa"/>
-        <a:font script="Sinh" typeface="Iskoola Pota"/>
-        <a:font script="Mong" typeface="Mongolian Baiti"/>
-        <a:font script="Viet" typeface="Arial"/>
-        <a:font script="Uigh" typeface="Microsoft Uighur"/>
-        <a:font script="Geor" typeface="Sylfaen"/>
-      </a:minorFont>
-    </a:fontScheme>
-    <a:fmtScheme name="Office">
-      <a:fillStyleLst>
-        <a:solidFill>
-          <a:schemeClr val="phClr"/>
-        </a:solidFill>
-        <a:gradFill rotWithShape="1">
-          <a:gsLst>
-            <a:gs pos="0">
-              <a:schemeClr val="phClr">
-                <a:tint val="50000"/>
-                <a:satMod val="300000"/>
-              </a:schemeClr>
-            </a:gs>
-            <a:gs pos="35000">
-              <a:schemeClr val="phClr">
-                <a:tint val="37000"/>
-                <a:satMod val="300000"/>
-              </a:schemeClr>
-            </a:gs>
-            <a:gs pos="100000">
-              <a:schemeClr val="phClr">
-                <a:tint val="15000"/>
-                <a:satMod val="350000"/>
-              </a:schemeClr>
-            </a:gs>
-          </a:gsLst>
-          <a:lin ang="16200000" scaled="1"/>
-        </a:gradFill>
-        <a:gradFill rotWithShape="1">
-          <a:gsLst>
-            <a:gs pos="0">
-              <a:schemeClr val="phClr">
-                <a:tint val="100000"/>
-                <a:shade val="100000"/>
-                <a:satMod val="130000"/>
-              </a:schemeClr>
-            </a:gs>
-            <a:gs pos="100000">
-              <a:schemeClr val="phClr">
-                <a:tint val="50000"/>
-                <a:shade val="100000"/>
-                <a:satMod val="350000"/>
-              </a:schemeClr>
-            </a:gs>
-          </a:gsLst>
-          <a:lin ang="16200000" scaled="0"/>
-        </a:gradFill>
-      </a:fillStyleLst>
-      <a:lnStyleLst>
-        <a:ln w="9525">
-          <a:solidFill>
-            <a:schemeClr val="phClr">
-              <a:shade val="95000"/>
-              <a:satMod val="105000"/>
-            </a:schemeClr>
-          </a:solidFill>
-          <a:prstDash val="solid"/>
-        </a:ln>
-        <a:ln w="25400">
-          <a:solidFill>
-            <a:schemeClr val="phClr"/>
-          </a:solidFill>
-          <a:prstDash val="solid"/>
-        </a:ln>
-        <a:ln w="38100">
-          <a:solidFill>
-            <a:schemeClr val="phClr"/>
-          </a:solidFill>
-          <a:prstDash val="solid"/>
-        </a:ln>
-      </a:lnStyleLst>
-      <a:effectStyleLst>
-        <a:effectStyle>
-          <a:effectLst>
-            <a:outerShdw blurRad="40000" dist="20000" dir="5400000" rotWithShape="0">
-              <a:srgbClr val="000000">
-                <a:alpha val="38000"/>
-              </a:srgbClr>
-            </a:outerShdw>
-          </a:effectLst>
-        </a:effectStyle>
-        <a:effectStyle>
-          <a:effectLst>
-            <a:outerShdw blurRad="40000" dist="23000" dir="5400000" rotWithShape="0">
-              <a:srgbClr val="000000">
-                <a:alpha val="35000"/>
-              </a:srgbClr>
-            </a:outerShdw>
-          </a:effectLst>
-        </a:effectStyle>
-        <a:effectStyle>
-          <a:effectLst>
-            <a:outerShdw blurRad="40000" dist="23000" dir="5400000" rotWithShape="0">
-              <a:srgbClr val="000000">
-                <a:alpha val="35000"/>
-              </a:srgbClr>
-            </a:outerShdw>
-          </a:effectLst>
-        </a:effectStyle>
-      </a:effectStyleLst>
-      <a:bgFillStyleLst>
-        <a:solidFill>
-          <a:schemeClr val="phClr"/>
-        </a:solidFill>
-        <a:gradFill rotWithShape="1">
-          <a:gsLst>
-            <a:gs pos="0">
-              <a:schemeClr val="phClr">
-                <a:tint val="40000"/>
-                <a:satMod val="350000"/>
-              </a:schemeClr>
-            </a:gs>
-            <a:gs pos="40000">
-              <a:schemeClr val="phClr">
-                <a:tint val="45000"/>
-                <a:shade val="99000"/>
-                <a:satMod val="350000"/>
-              </a:schemeClr>
-            </a:gs>
-            <a:gs pos="100000">
-              <a:schemeClr val="phClr">
-                <a:shade val="20000"/>
-                <a:satMod val="255000"/>
-              </a:schemeClr>
-            </a:gs>
-          </a:gsLst>
-          <a:path path="circle">
-            <a:fillToRect l="50000" t="-80000" r="50000" b="180000"/>
-          </a:path>
-        </a:gradFill>
-        <a:gradFill rotWithShape="1">
-          <a:gsLst>
-            <a:gs pos="0">
-              <a:schemeClr val="phClr">
-                <a:tint val="80000"/>
-                <a:satMod val="300000"/>
-              </a:schemeClr>
-            </a:gs>
-            <a:gs pos="100000">
-              <a:schemeClr val="phClr">
-                <a:shade val="30000"/>
-                <a:satMod val="200000"/>
-              </a:schemeClr>
-            </a:gs>
-          </a:gsLst>
-          <a:path path="circle">
-            <a:fillToRect l="50000" t="50000" r="50000" b="50000"/>
-          </a:path>
-        </a:gradFill>
-      </a:bgFillStyleLst>
-    </a:fmtScheme>
-  </a:themeElements>
-</a:theme>
-</file>
-
 <file path=ppt/slides/slide1.xml><?xml version="1.0" encoding="utf-8"?>
-<p:sld xmlns:p="http://schemas.openxmlformats.org/presentationml/2006/main">
+<p:sld xmlns:a="http://schemas.openxmlformats.org/drawingml/2006/main" xmlns:r="http://schemas.openxmlformats.org/officeDocument/2006/relationships" xmlns:p="http://schemas.openxmlformats.org/presentationml/2006/main">
   <p:cSld>
     <p:bg>
       <p:bgPr>
-        <a:solidFill xmlns:a="http://schemas.openxmlformats.org/drawingml/2006/main">
+        <a:solidFill>
           <a:srgbClr val="EEECE1"/>
         </a:solidFill>
+        <a:effectLst/>
       </p:bgPr>
     </p:bg>
     <p:spTree>
@@ -4862,38 +4447,43 @@
         <p:nvPr/>
       </p:nvGrpSpPr>
       <p:grpSpPr>
-        <a:xfrm xmlns:a="http://schemas.openxmlformats.org/drawingml/2006/main"/>
+        <a:xfrm>
+          <a:off x="0" y="0"/>
+          <a:ext cx="0" cy="0"/>
+          <a:chOff x="0" y="0"/>
+          <a:chExt cx="0" cy="0"/>
+        </a:xfrm>
       </p:grpSpPr>
       <p:sp>
         <p:nvSpPr>
           <p:cNvPr id="2" name="TextBox 1">
-            <a:extLst xmlns:a="http://schemas.openxmlformats.org/drawingml/2006/main">
+            <a:extLst>
               <a:ext uri="{FF2B5EF4-FFF2-40B4-BE49-F238E27FC236}">
                 <a16:creationId xmlns:a16="http://schemas.microsoft.com/office/drawing/2014/main" id="{E2D1AF41-89EC-4BAF-9B88-EB527E2629A2}"/>
               </a:ext>
             </a:extLst>
           </p:cNvPr>
           <p:cNvSpPr>
-            <a:spLocks xmlns:a="http://schemas.openxmlformats.org/drawingml/2006/main" noGrp="1"/>
+            <a:spLocks noGrp="1"/>
           </p:cNvSpPr>
           <p:nvPr/>
         </p:nvSpPr>
         <p:spPr>
-          <a:xfrm xmlns:a="http://schemas.openxmlformats.org/drawingml/2006/main">
+          <a:xfrm>
             <a:off x="640080" y="2103120"/>
             <a:ext cx="10607040" cy="2076450"/>
           </a:xfrm>
-          <a:prstGeom xmlns:a="http://schemas.openxmlformats.org/drawingml/2006/main" prst="rect">
+          <a:prstGeom prst="rect">
             <a:avLst/>
           </a:prstGeom>
-          <a:noFill xmlns:a="http://schemas.openxmlformats.org/drawingml/2006/main"/>
+          <a:noFill/>
         </p:spPr>
         <p:txBody>
-          <a:bodyPr xmlns:a="http://schemas.openxmlformats.org/drawingml/2006/main" wrap="square" lIns="0" tIns="0" rIns="0" bIns="0">
+          <a:bodyPr wrap="square" lIns="0" tIns="0" rIns="0" bIns="0">
             <a:spAutoFit/>
           </a:bodyPr>
-          <a:lstStyle xmlns:a="http://schemas.openxmlformats.org/drawingml/2006/main"/>
-          <a:p xmlns:a="http://schemas.openxmlformats.org/drawingml/2006/main">
+          <a:lstStyle/>
+          <a:p>
             <a:r>
               <a:rPr sz="1500" b="1" i="0">
                 <a:solidFill>
@@ -4906,7 +4496,7 @@
               <a:t>GUERRILLA AI FOR EXCEL. A LIVE SERIES, DAY 5 OF 5</a:t>
             </a:r>
           </a:p>
-          <a:p xmlns:a="http://schemas.openxmlformats.org/drawingml/2006/main">
+          <a:p>
             <a:pPr>
               <a:spcBef>
                 <a:spcPts val="1000"/>
@@ -4925,7 +4515,7 @@
               <a:t>Markdown: the language AI speaks</a:t>
             </a:r>
           </a:p>
-          <a:p xmlns:a="http://schemas.openxmlformats.org/drawingml/2006/main">
+          <a:p>
             <a:pPr>
               <a:spcBef>
                 <a:spcPts val="1400"/>
@@ -4949,33 +4539,33 @@
       <p:sp>
         <p:nvSpPr>
           <p:cNvPr id="3" name="TextBox 2">
-            <a:extLst xmlns:a="http://schemas.openxmlformats.org/drawingml/2006/main">
+            <a:extLst>
               <a:ext uri="{FF2B5EF4-FFF2-40B4-BE49-F238E27FC236}">
                 <a16:creationId xmlns:a16="http://schemas.microsoft.com/office/drawing/2014/main" id="{FB8C1566-70C3-48B7-AD08-EC0093C659F2}"/>
               </a:ext>
             </a:extLst>
           </p:cNvPr>
           <p:cNvSpPr>
-            <a:spLocks xmlns:a="http://schemas.openxmlformats.org/drawingml/2006/main" noGrp="1"/>
+            <a:spLocks noGrp="1"/>
           </p:cNvSpPr>
           <p:nvPr/>
         </p:nvSpPr>
         <p:spPr>
-          <a:xfrm xmlns:a="http://schemas.openxmlformats.org/drawingml/2006/main">
+          <a:xfrm>
             <a:off x="640080" y="6080760"/>
             <a:ext cx="10972800" cy="457200"/>
           </a:xfrm>
-          <a:prstGeom xmlns:a="http://schemas.openxmlformats.org/drawingml/2006/main" prst="rect">
+          <a:prstGeom prst="rect">
             <a:avLst/>
           </a:prstGeom>
-          <a:noFill xmlns:a="http://schemas.openxmlformats.org/drawingml/2006/main"/>
+          <a:noFill/>
         </p:spPr>
         <p:txBody>
-          <a:bodyPr xmlns:a="http://schemas.openxmlformats.org/drawingml/2006/main" wrap="square" lIns="0" tIns="0" rIns="0" bIns="0">
+          <a:bodyPr wrap="square" lIns="0" tIns="0" rIns="0" bIns="0">
             <a:spAutoFit/>
           </a:bodyPr>
-          <a:lstStyle xmlns:a="http://schemas.openxmlformats.org/drawingml/2006/main"/>
-          <a:p xmlns:a="http://schemas.openxmlformats.org/drawingml/2006/main">
+          <a:lstStyle/>
+          <a:p>
             <a:r>
               <a:rPr sz="1300" b="0" i="1">
                 <a:solidFill>
@@ -4993,33 +4583,33 @@
       <p:sp>
         <p:nvSpPr>
           <p:cNvPr id="4" name="TextBox 3">
-            <a:extLst xmlns:a="http://schemas.openxmlformats.org/drawingml/2006/main">
+            <a:extLst>
               <a:ext uri="{FF2B5EF4-FFF2-40B4-BE49-F238E27FC236}">
                 <a16:creationId xmlns:a16="http://schemas.microsoft.com/office/drawing/2014/main" id="{149F9233-9D34-4C44-B98F-1FBCDFDC589E}"/>
               </a:ext>
             </a:extLst>
           </p:cNvPr>
           <p:cNvSpPr>
-            <a:spLocks xmlns:a="http://schemas.openxmlformats.org/drawingml/2006/main" noGrp="1"/>
+            <a:spLocks noGrp="1"/>
           </p:cNvSpPr>
           <p:nvPr/>
         </p:nvSpPr>
         <p:spPr>
-          <a:xfrm xmlns:a="http://schemas.openxmlformats.org/drawingml/2006/main">
+          <a:xfrm>
             <a:off x="457200" y="384048"/>
             <a:ext cx="4114800" cy="365760"/>
           </a:xfrm>
-          <a:prstGeom xmlns:a="http://schemas.openxmlformats.org/drawingml/2006/main" prst="rect">
+          <a:prstGeom prst="rect">
             <a:avLst/>
           </a:prstGeom>
-          <a:noFill xmlns:a="http://schemas.openxmlformats.org/drawingml/2006/main"/>
+          <a:noFill/>
         </p:spPr>
         <p:txBody>
-          <a:bodyPr xmlns:a="http://schemas.openxmlformats.org/drawingml/2006/main" wrap="square" lIns="0" tIns="0" rIns="0" bIns="0">
+          <a:bodyPr wrap="square" lIns="0" tIns="0" rIns="0" bIns="0">
             <a:spAutoFit/>
           </a:bodyPr>
-          <a:lstStyle xmlns:a="http://schemas.openxmlformats.org/drawingml/2006/main"/>
-          <a:p xmlns:a="http://schemas.openxmlformats.org/drawingml/2006/main">
+          <a:lstStyle/>
+          <a:p>
             <a:r>
               <a:rPr sz="1300" b="1" i="0">
                 <a:solidFill>
@@ -5030,218 +4620,6 @@
                 <a:cs typeface="Arial Black"/>
               </a:rPr>
               <a:t>STRINGFEST ANALYTICS</a:t>
-            </a:r>
-          </a:p>
-        </p:txBody>
-      </p:sp>
-      <p:sp>
-        <p:nvSpPr>
-          <p:cNvPr id="5" name="Chat prompt panel">
-            <a:extLst xmlns:a="http://schemas.openxmlformats.org/drawingml/2006/main">
-              <a:ext uri="{FF2B5EF4-FFF2-40B4-BE49-F238E27FC236}">
-                <a16:creationId xmlns:a16="http://schemas.microsoft.com/office/drawing/2014/main" id="{70196ADC-061A-4D3F-8570-FED7DFBF6858}"/>
-              </a:ext>
-            </a:extLst>
-          </p:cNvPr>
-          <p:cNvSpPr>
-            <a:spLocks xmlns:a="http://schemas.openxmlformats.org/drawingml/2006/main" noGrp="1"/>
-          </p:cNvSpPr>
-          <p:nvPr/>
-        </p:nvSpPr>
-        <p:spPr>
-          <a:xfrm xmlns:a="http://schemas.openxmlformats.org/drawingml/2006/main">
-            <a:off x="638175" y="4352925"/>
-            <a:ext cx="10896600" cy="1352550"/>
-          </a:xfrm>
-          <a:prstGeom xmlns:a="http://schemas.openxmlformats.org/drawingml/2006/main" prst="rect">
-            <a:avLst/>
-          </a:prstGeom>
-          <a:solidFill xmlns:a="http://schemas.openxmlformats.org/drawingml/2006/main">
-            <a:srgbClr val="1F2120"/>
-          </a:solidFill>
-          <a:ln xmlns:a="http://schemas.openxmlformats.org/drawingml/2006/main" w="0">
-            <a:noFill/>
-          </a:ln>
-        </p:spPr>
-        <p:txBody>
-          <a:bodyPr xmlns:a="http://schemas.openxmlformats.org/drawingml/2006/main" wrap="square" lIns="0" tIns="0" rIns="0" bIns="0">
-            <a:noAutofit/>
-          </a:bodyPr>
-          <a:lstStyle xmlns:a="http://schemas.openxmlformats.org/drawingml/2006/main"/>
-          <a:p xmlns:a="http://schemas.openxmlformats.org/drawingml/2006/main">
-            <a:r>
-              <a:t/>
-            </a:r>
-          </a:p>
-        </p:txBody>
-      </p:sp>
-      <p:sp>
-        <p:nvSpPr>
-          <p:cNvPr id="6" name="Chat question">
-            <a:extLst xmlns:a="http://schemas.openxmlformats.org/drawingml/2006/main">
-              <a:ext uri="{FF2B5EF4-FFF2-40B4-BE49-F238E27FC236}">
-                <a16:creationId xmlns:a16="http://schemas.microsoft.com/office/drawing/2014/main" id="{A91C3EDA-4E3C-4B6F-A0B8-8F1A6B866A6C}"/>
-              </a:ext>
-            </a:extLst>
-          </p:cNvPr>
-          <p:cNvSpPr>
-            <a:spLocks xmlns:a="http://schemas.openxmlformats.org/drawingml/2006/main" noGrp="1"/>
-          </p:cNvSpPr>
-          <p:nvPr/>
-        </p:nvSpPr>
-        <p:spPr>
-          <a:xfrm xmlns:a="http://schemas.openxmlformats.org/drawingml/2006/main">
-            <a:off x="857250" y="4495800"/>
-            <a:ext cx="10429875" cy="381000"/>
-          </a:xfrm>
-          <a:prstGeom xmlns:a="http://schemas.openxmlformats.org/drawingml/2006/main" prst="rect">
-            <a:avLst/>
-          </a:prstGeom>
-          <a:noFill xmlns:a="http://schemas.openxmlformats.org/drawingml/2006/main"/>
-          <a:ln xmlns:a="http://schemas.openxmlformats.org/drawingml/2006/main" w="0">
-            <a:noFill/>
-          </a:ln>
-        </p:spPr>
-        <p:txBody>
-          <a:bodyPr xmlns:a="http://schemas.openxmlformats.org/drawingml/2006/main" wrap="square" lIns="0" tIns="0" rIns="0" bIns="0">
-            <a:noAutofit/>
-          </a:bodyPr>
-          <a:lstStyle xmlns:a="http://schemas.openxmlformats.org/drawingml/2006/main"/>
-          <a:p xmlns:a="http://schemas.openxmlformats.org/drawingml/2006/main">
-            <a:pPr>
-              <a:defRPr sz="2100" b="1">
-                <a:solidFill>
-                  <a:srgbClr val="FFFFFF"/>
-                </a:solidFill>
-                <a:latin typeface="Arial"/>
-                <a:ea typeface="Arial"/>
-                <a:cs typeface="Arial"/>
-              </a:defRPr>
-            </a:pPr>
-            <a:r>
-              <a:rPr sz="2100" b="1">
-                <a:solidFill>
-                  <a:srgbClr val="FFFFFF"/>
-                </a:solidFill>
-                <a:latin typeface="Arial"/>
-                <a:ea typeface="Arial"/>
-                <a:cs typeface="Arial"/>
-              </a:rPr>
-              <a:t>Your usual AI prompt?</a:t>
-            </a:r>
-          </a:p>
-        </p:txBody>
-      </p:sp>
-      <p:sp>
-        <p:nvSpPr>
-          <p:cNvPr id="7" name="Chat choices">
-            <a:extLst xmlns:a="http://schemas.openxmlformats.org/drawingml/2006/main">
-              <a:ext uri="{FF2B5EF4-FFF2-40B4-BE49-F238E27FC236}">
-                <a16:creationId xmlns:a16="http://schemas.microsoft.com/office/drawing/2014/main" id="{BD29C22E-122D-476F-8CE4-E850E0F23080}"/>
-              </a:ext>
-            </a:extLst>
-          </p:cNvPr>
-          <p:cNvSpPr>
-            <a:spLocks xmlns:a="http://schemas.openxmlformats.org/drawingml/2006/main" noGrp="1"/>
-          </p:cNvSpPr>
-          <p:nvPr/>
-        </p:nvSpPr>
-        <p:spPr>
-          <a:xfrm xmlns:a="http://schemas.openxmlformats.org/drawingml/2006/main">
-            <a:off x="857250" y="4962525"/>
-            <a:ext cx="6858000" cy="419100"/>
-          </a:xfrm>
-          <a:prstGeom xmlns:a="http://schemas.openxmlformats.org/drawingml/2006/main" prst="rect">
-            <a:avLst/>
-          </a:prstGeom>
-          <a:noFill xmlns:a="http://schemas.openxmlformats.org/drawingml/2006/main"/>
-          <a:ln xmlns:a="http://schemas.openxmlformats.org/drawingml/2006/main" w="0">
-            <a:noFill/>
-          </a:ln>
-        </p:spPr>
-        <p:txBody>
-          <a:bodyPr xmlns:a="http://schemas.openxmlformats.org/drawingml/2006/main" wrap="square" lIns="0" tIns="0" rIns="0" bIns="0">
-            <a:noAutofit/>
-          </a:bodyPr>
-          <a:lstStyle xmlns:a="http://schemas.openxmlformats.org/drawingml/2006/main"/>
-          <a:p xmlns:a="http://schemas.openxmlformats.org/drawingml/2006/main">
-            <a:pPr>
-              <a:defRPr sz="2400" b="1">
-                <a:solidFill>
-                  <a:srgbClr val="FFFFFF"/>
-                </a:solidFill>
-                <a:latin typeface="Arial"/>
-                <a:ea typeface="Arial"/>
-                <a:cs typeface="Arial"/>
-              </a:defRPr>
-            </a:pPr>
-            <a:r>
-              <a:rPr sz="2400" b="1">
-                <a:solidFill>
-                  <a:srgbClr val="FFFFFF"/>
-                </a:solidFill>
-                <a:latin typeface="Arial"/>
-                <a:ea typeface="Arial"/>
-                <a:cs typeface="Arial"/>
-              </a:rPr>
-              <a:t>SHORT / DETAILED</a:t>
-            </a:r>
-          </a:p>
-        </p:txBody>
-      </p:sp>
-      <p:sp>
-        <p:nvSpPr>
-          <p:cNvPr id="8" name="Chat instruction">
-            <a:extLst xmlns:a="http://schemas.openxmlformats.org/drawingml/2006/main">
-              <a:ext uri="{FF2B5EF4-FFF2-40B4-BE49-F238E27FC236}">
-                <a16:creationId xmlns:a16="http://schemas.microsoft.com/office/drawing/2014/main" id="{D0A2B355-E242-46A9-840B-693419A72105}"/>
-              </a:ext>
-            </a:extLst>
-          </p:cNvPr>
-          <p:cNvSpPr>
-            <a:spLocks xmlns:a="http://schemas.openxmlformats.org/drawingml/2006/main" noGrp="1"/>
-          </p:cNvSpPr>
-          <p:nvPr/>
-        </p:nvSpPr>
-        <p:spPr>
-          <a:xfrm xmlns:a="http://schemas.openxmlformats.org/drawingml/2006/main">
-            <a:off x="8143875" y="5095875"/>
-            <a:ext cx="3048000" cy="400050"/>
-          </a:xfrm>
-          <a:prstGeom xmlns:a="http://schemas.openxmlformats.org/drawingml/2006/main" prst="rect">
-            <a:avLst/>
-          </a:prstGeom>
-          <a:noFill xmlns:a="http://schemas.openxmlformats.org/drawingml/2006/main"/>
-          <a:ln xmlns:a="http://schemas.openxmlformats.org/drawingml/2006/main" w="0">
-            <a:noFill/>
-          </a:ln>
-        </p:spPr>
-        <p:txBody>
-          <a:bodyPr xmlns:a="http://schemas.openxmlformats.org/drawingml/2006/main" wrap="square" lIns="0" tIns="0" rIns="0" bIns="0">
-            <a:noAutofit/>
-          </a:bodyPr>
-          <a:lstStyle xmlns:a="http://schemas.openxmlformats.org/drawingml/2006/main"/>
-          <a:p xmlns:a="http://schemas.openxmlformats.org/drawingml/2006/main">
-            <a:pPr>
-              <a:defRPr sz="1425" b="0">
-                <a:solidFill>
-                  <a:srgbClr val="FFFFFF"/>
-                </a:solidFill>
-                <a:latin typeface="Arial"/>
-                <a:ea typeface="Arial"/>
-                <a:cs typeface="Arial"/>
-              </a:defRPr>
-            </a:pPr>
-            <a:r>
-              <a:rPr sz="1425" b="0">
-                <a:solidFill>
-                  <a:srgbClr val="FFFFFF"/>
-                </a:solidFill>
-                <a:latin typeface="Arial"/>
-                <a:ea typeface="Arial"/>
-                <a:cs typeface="Arial"/>
-              </a:rPr>
-              <a:t>Type one word in chat.</a:t>
             </a:r>
           </a:p>
         </p:txBody>
@@ -5253,17 +4631,21 @@
       </p:ext>
     </p:extLst>
   </p:cSld>
+  <p:clrMapOvr>
+    <a:masterClrMapping/>
+  </p:clrMapOvr>
 </p:sld>
 </file>
 
 <file path=ppt/slides/slide2.xml><?xml version="1.0" encoding="utf-8"?>
-<p:sld xmlns:p="http://schemas.openxmlformats.org/presentationml/2006/main">
+<p:sld xmlns:a="http://schemas.openxmlformats.org/drawingml/2006/main" xmlns:r="http://schemas.openxmlformats.org/officeDocument/2006/relationships" xmlns:p="http://schemas.openxmlformats.org/presentationml/2006/main">
   <p:cSld>
     <p:bg>
       <p:bgPr>
-        <a:solidFill xmlns:a="http://schemas.openxmlformats.org/drawingml/2006/main">
+        <a:solidFill>
           <a:srgbClr val="EEECE1"/>
         </a:solidFill>
+        <a:effectLst/>
       </p:bgPr>
     </p:bg>
     <p:spTree>
@@ -5273,38 +4655,43 @@
         <p:nvPr/>
       </p:nvGrpSpPr>
       <p:grpSpPr>
-        <a:xfrm xmlns:a="http://schemas.openxmlformats.org/drawingml/2006/main"/>
+        <a:xfrm>
+          <a:off x="0" y="0"/>
+          <a:ext cx="0" cy="0"/>
+          <a:chOff x="0" y="0"/>
+          <a:chExt cx="0" cy="0"/>
+        </a:xfrm>
       </p:grpSpPr>
       <p:sp>
         <p:nvSpPr>
           <p:cNvPr id="2" name="TextBox 1">
-            <a:extLst xmlns:a="http://schemas.openxmlformats.org/drawingml/2006/main">
+            <a:extLst>
               <a:ext uri="{FF2B5EF4-FFF2-40B4-BE49-F238E27FC236}">
                 <a16:creationId xmlns:a16="http://schemas.microsoft.com/office/drawing/2014/main" id="{025C5574-5457-4AC3-85E3-9A469F4010CB}"/>
               </a:ext>
             </a:extLst>
           </p:cNvPr>
           <p:cNvSpPr>
-            <a:spLocks xmlns:a="http://schemas.openxmlformats.org/drawingml/2006/main" noGrp="1"/>
+            <a:spLocks noGrp="1"/>
           </p:cNvSpPr>
           <p:nvPr/>
         </p:nvSpPr>
         <p:spPr>
-          <a:xfrm xmlns:a="http://schemas.openxmlformats.org/drawingml/2006/main">
+          <a:xfrm>
             <a:off x="640080" y="457200"/>
             <a:ext cx="10881360" cy="1188720"/>
           </a:xfrm>
-          <a:prstGeom xmlns:a="http://schemas.openxmlformats.org/drawingml/2006/main" prst="rect">
+          <a:prstGeom prst="rect">
             <a:avLst/>
           </a:prstGeom>
-          <a:noFill xmlns:a="http://schemas.openxmlformats.org/drawingml/2006/main"/>
+          <a:noFill/>
         </p:spPr>
         <p:txBody>
-          <a:bodyPr xmlns:a="http://schemas.openxmlformats.org/drawingml/2006/main" wrap="square" lIns="0" tIns="0" rIns="0" bIns="0">
+          <a:bodyPr wrap="square" lIns="0" tIns="0" rIns="0" bIns="0">
             <a:spAutoFit/>
           </a:bodyPr>
-          <a:lstStyle xmlns:a="http://schemas.openxmlformats.org/drawingml/2006/main"/>
-          <a:p xmlns:a="http://schemas.openxmlformats.org/drawingml/2006/main">
+          <a:lstStyle/>
+          <a:p>
             <a:r>
               <a:rPr sz="3000" b="1" i="0">
                 <a:solidFill>
@@ -5317,7 +4704,7 @@
               <a:t>Yesterday in 30 seconds</a:t>
             </a:r>
           </a:p>
-          <a:p xmlns:a="http://schemas.openxmlformats.org/drawingml/2006/main">
+          <a:p>
             <a:pPr>
               <a:spcBef>
                 <a:spcPts val="400"/>
@@ -5341,33 +4728,33 @@
       <p:sp>
         <p:nvSpPr>
           <p:cNvPr id="3" name="TextBox 2">
-            <a:extLst xmlns:a="http://schemas.openxmlformats.org/drawingml/2006/main">
+            <a:extLst>
               <a:ext uri="{FF2B5EF4-FFF2-40B4-BE49-F238E27FC236}">
                 <a16:creationId xmlns:a16="http://schemas.microsoft.com/office/drawing/2014/main" id="{B775A5BD-A004-4E43-8973-CB0494677270}"/>
               </a:ext>
             </a:extLst>
           </p:cNvPr>
           <p:cNvSpPr>
-            <a:spLocks xmlns:a="http://schemas.openxmlformats.org/drawingml/2006/main" noGrp="1"/>
+            <a:spLocks noGrp="1"/>
           </p:cNvSpPr>
           <p:nvPr/>
         </p:nvSpPr>
         <p:spPr>
-          <a:xfrm xmlns:a="http://schemas.openxmlformats.org/drawingml/2006/main">
+          <a:xfrm>
             <a:off x="640080" y="1783080"/>
             <a:ext cx="10881360" cy="4846320"/>
           </a:xfrm>
-          <a:prstGeom xmlns:a="http://schemas.openxmlformats.org/drawingml/2006/main" prst="rect">
+          <a:prstGeom prst="rect">
             <a:avLst/>
           </a:prstGeom>
-          <a:noFill xmlns:a="http://schemas.openxmlformats.org/drawingml/2006/main"/>
+          <a:noFill/>
         </p:spPr>
         <p:txBody>
-          <a:bodyPr xmlns:a="http://schemas.openxmlformats.org/drawingml/2006/main" wrap="square" lIns="0" tIns="0" rIns="0" bIns="0">
+          <a:bodyPr wrap="square" lIns="0" tIns="0" rIns="0" bIns="0">
             <a:spAutoFit/>
           </a:bodyPr>
-          <a:lstStyle xmlns:a="http://schemas.openxmlformats.org/drawingml/2006/main"/>
-          <a:p xmlns:a="http://schemas.openxmlformats.org/drawingml/2006/main">
+          <a:lstStyle/>
+          <a:p>
             <a:pPr>
               <a:spcAft>
                 <a:spcPts val="700"/>
@@ -5397,7 +4784,7 @@
               <a:t>Day 4 was A data science lab behind =PY().</a:t>
             </a:r>
           </a:p>
-          <a:p xmlns:a="http://schemas.openxmlformats.org/drawingml/2006/main">
+          <a:p>
             <a:pPr>
               <a:spcAft>
                 <a:spcPts val="700"/>
@@ -5427,7 +4814,7 @@
               <a:t>If Python is available in your Excel, start by describing the result you need.</a:t>
             </a:r>
           </a:p>
-          <a:p xmlns:a="http://schemas.openxmlformats.org/drawingml/2006/main">
+          <a:p>
             <a:pPr>
               <a:spcAft>
                 <a:spcPts val="700"/>
@@ -5466,17 +4853,21 @@
       </p:ext>
     </p:extLst>
   </p:cSld>
+  <p:clrMapOvr>
+    <a:masterClrMapping/>
+  </p:clrMapOvr>
 </p:sld>
 </file>
 
 <file path=ppt/slides/slide3.xml><?xml version="1.0" encoding="utf-8"?>
-<p:sld xmlns:p="http://schemas.openxmlformats.org/presentationml/2006/main">
+<p:sld xmlns:a="http://schemas.openxmlformats.org/drawingml/2006/main" xmlns:r="http://schemas.openxmlformats.org/officeDocument/2006/relationships" xmlns:p="http://schemas.openxmlformats.org/presentationml/2006/main">
   <p:cSld>
     <p:bg>
       <p:bgPr>
-        <a:solidFill xmlns:a="http://schemas.openxmlformats.org/drawingml/2006/main">
+        <a:solidFill>
           <a:srgbClr val="EEECE1"/>
         </a:solidFill>
+        <a:effectLst/>
       </p:bgPr>
     </p:bg>
     <p:spTree>
@@ -5486,38 +4877,43 @@
         <p:nvPr/>
       </p:nvGrpSpPr>
       <p:grpSpPr>
-        <a:xfrm xmlns:a="http://schemas.openxmlformats.org/drawingml/2006/main"/>
+        <a:xfrm>
+          <a:off x="0" y="0"/>
+          <a:ext cx="0" cy="0"/>
+          <a:chOff x="0" y="0"/>
+          <a:chExt cx="0" cy="0"/>
+        </a:xfrm>
       </p:grpSpPr>
       <p:sp>
         <p:nvSpPr>
           <p:cNvPr id="2" name="TextBox 1">
-            <a:extLst xmlns:a="http://schemas.openxmlformats.org/drawingml/2006/main">
+            <a:extLst>
               <a:ext uri="{FF2B5EF4-FFF2-40B4-BE49-F238E27FC236}">
                 <a16:creationId xmlns:a16="http://schemas.microsoft.com/office/drawing/2014/main" id="{E7071D42-8958-435F-8EC6-B3C1AFB93959}"/>
               </a:ext>
             </a:extLst>
           </p:cNvPr>
           <p:cNvSpPr>
-            <a:spLocks xmlns:a="http://schemas.openxmlformats.org/drawingml/2006/main" noGrp="1"/>
+            <a:spLocks noGrp="1"/>
           </p:cNvSpPr>
           <p:nvPr/>
         </p:nvSpPr>
         <p:spPr>
-          <a:xfrm xmlns:a="http://schemas.openxmlformats.org/drawingml/2006/main">
+          <a:xfrm>
             <a:off x="640080" y="457200"/>
             <a:ext cx="10881360" cy="1188720"/>
           </a:xfrm>
-          <a:prstGeom xmlns:a="http://schemas.openxmlformats.org/drawingml/2006/main" prst="rect">
+          <a:prstGeom prst="rect">
             <a:avLst/>
           </a:prstGeom>
-          <a:noFill xmlns:a="http://schemas.openxmlformats.org/drawingml/2006/main"/>
+          <a:noFill/>
         </p:spPr>
         <p:txBody>
-          <a:bodyPr xmlns:a="http://schemas.openxmlformats.org/drawingml/2006/main" wrap="square" lIns="0" tIns="0" rIns="0" bIns="0">
+          <a:bodyPr wrap="square" lIns="0" tIns="0" rIns="0" bIns="0">
             <a:spAutoFit/>
           </a:bodyPr>
-          <a:lstStyle xmlns:a="http://schemas.openxmlformats.org/drawingml/2006/main"/>
-          <a:p xmlns:a="http://schemas.openxmlformats.org/drawingml/2006/main">
+          <a:lstStyle/>
+          <a:p>
             <a:r>
               <a:rPr sz="3000" b="1" i="0">
                 <a:solidFill>
@@ -5530,7 +4926,7 @@
               <a:t>Why this counts as AI</a:t>
             </a:r>
           </a:p>
-          <a:p xmlns:a="http://schemas.openxmlformats.org/drawingml/2006/main">
+          <a:p>
             <a:pPr>
               <a:spcBef>
                 <a:spcPts val="400"/>
@@ -5554,33 +4950,33 @@
       <p:sp>
         <p:nvSpPr>
           <p:cNvPr id="3" name="TextBox 2">
-            <a:extLst xmlns:a="http://schemas.openxmlformats.org/drawingml/2006/main">
+            <a:extLst>
               <a:ext uri="{FF2B5EF4-FFF2-40B4-BE49-F238E27FC236}">
                 <a16:creationId xmlns:a16="http://schemas.microsoft.com/office/drawing/2014/main" id="{5EDA4F27-F550-474D-8C55-BB8B91C2FEA3}"/>
               </a:ext>
             </a:extLst>
           </p:cNvPr>
           <p:cNvSpPr>
-            <a:spLocks xmlns:a="http://schemas.openxmlformats.org/drawingml/2006/main" noGrp="1"/>
+            <a:spLocks noGrp="1"/>
           </p:cNvSpPr>
           <p:nvPr/>
         </p:nvSpPr>
         <p:spPr>
-          <a:xfrm xmlns:a="http://schemas.openxmlformats.org/drawingml/2006/main">
+          <a:xfrm>
             <a:off x="640080" y="1783080"/>
             <a:ext cx="10881360" cy="4846320"/>
           </a:xfrm>
-          <a:prstGeom xmlns:a="http://schemas.openxmlformats.org/drawingml/2006/main" prst="rect">
+          <a:prstGeom prst="rect">
             <a:avLst/>
           </a:prstGeom>
-          <a:noFill xmlns:a="http://schemas.openxmlformats.org/drawingml/2006/main"/>
+          <a:noFill/>
         </p:spPr>
         <p:txBody>
-          <a:bodyPr xmlns:a="http://schemas.openxmlformats.org/drawingml/2006/main" wrap="square" lIns="0" tIns="0" rIns="0" bIns="0">
+          <a:bodyPr wrap="square" lIns="0" tIns="0" rIns="0" bIns="0">
             <a:spAutoFit/>
           </a:bodyPr>
-          <a:lstStyle xmlns:a="http://schemas.openxmlformats.org/drawingml/2006/main"/>
-          <a:p xmlns:a="http://schemas.openxmlformats.org/drawingml/2006/main">
+          <a:lstStyle/>
+          <a:p>
             <a:pPr>
               <a:spcAft>
                 <a:spcPts val="700"/>
@@ -5610,7 +5006,7 @@
               <a:t>Many AI tools accept Markdown headings, lists, and tables.</a:t>
             </a:r>
           </a:p>
-          <a:p xmlns:a="http://schemas.openxmlformats.org/drawingml/2006/main">
+          <a:p>
             <a:pPr>
               <a:spcAft>
                 <a:spcPts val="700"/>
@@ -5640,7 +5036,7 @@
               <a:t>Twenty minutes of syntax makes every AI tool easier to steer and its output easier to reuse.</a:t>
             </a:r>
           </a:p>
-          <a:p xmlns:a="http://schemas.openxmlformats.org/drawingml/2006/main">
+          <a:p>
             <a:pPr>
               <a:spcAft>
                 <a:spcPts val="700"/>
@@ -5670,7 +5066,7 @@
               <a:t>Small tables can move as Markdown. Check the rows and columns after pasting.</a:t>
             </a:r>
           </a:p>
-          <a:p xmlns:a="http://schemas.openxmlformats.org/drawingml/2006/main">
+          <a:p>
             <a:pPr>
               <a:spcAft>
                 <a:spcPts val="700"/>
@@ -5700,7 +5096,7 @@
               <a:t>No connectors, no licenses, no IT ticket. Just structure.</a:t>
             </a:r>
           </a:p>
-          <a:p xmlns:a="http://schemas.openxmlformats.org/drawingml/2006/main">
+          <a:p>
             <a:pPr>
               <a:spcAft>
                 <a:spcPts val="700"/>
@@ -5739,17 +5135,21 @@
       </p:ext>
     </p:extLst>
   </p:cSld>
+  <p:clrMapOvr>
+    <a:masterClrMapping/>
+  </p:clrMapOvr>
 </p:sld>
 </file>
 
 <file path=ppt/slides/slide4.xml><?xml version="1.0" encoding="utf-8"?>
-<p:sld xmlns:p="http://schemas.openxmlformats.org/presentationml/2006/main">
+<p:sld xmlns:a="http://schemas.openxmlformats.org/drawingml/2006/main" xmlns:r="http://schemas.openxmlformats.org/officeDocument/2006/relationships" xmlns:p="http://schemas.openxmlformats.org/presentationml/2006/main">
   <p:cSld>
     <p:bg>
       <p:bgPr>
-        <a:solidFill xmlns:a="http://schemas.openxmlformats.org/drawingml/2006/main">
+        <a:solidFill>
           <a:srgbClr val="EEECE1"/>
         </a:solidFill>
+        <a:effectLst/>
       </p:bgPr>
     </p:bg>
     <p:spTree>
@@ -5759,91 +5159,97 @@
         <p:nvPr/>
       </p:nvGrpSpPr>
       <p:grpSpPr>
-        <a:xfrm xmlns:a="http://schemas.openxmlformats.org/drawingml/2006/main"/>
+        <a:xfrm>
+          <a:off x="0" y="0"/>
+          <a:ext cx="0" cy="0"/>
+          <a:chOff x="0" y="0"/>
+          <a:chExt cx="0" cy="0"/>
+        </a:xfrm>
       </p:grpSpPr>
       <p:sp>
         <p:nvSpPr>
           <p:cNvPr id="2" name="Rectangle 1">
-            <a:extLst xmlns:a="http://schemas.openxmlformats.org/drawingml/2006/main">
+            <a:extLst>
               <a:ext uri="{FF2B5EF4-FFF2-40B4-BE49-F238E27FC236}">
                 <a16:creationId xmlns:a16="http://schemas.microsoft.com/office/drawing/2014/main" id="{05F8DD33-EF88-4D55-97B8-F5FF33FF49E9}"/>
               </a:ext>
             </a:extLst>
           </p:cNvPr>
           <p:cNvSpPr>
-            <a:spLocks xmlns:a="http://schemas.openxmlformats.org/drawingml/2006/main" noGrp="1"/>
+            <a:spLocks noGrp="1"/>
           </p:cNvSpPr>
           <p:nvPr/>
         </p:nvSpPr>
         <p:spPr>
-          <a:xfrm xmlns:a="http://schemas.openxmlformats.org/drawingml/2006/main">
+          <a:xfrm>
             <a:off x="9082735" y="0"/>
             <a:ext cx="3108960" cy="6858000"/>
           </a:xfrm>
-          <a:prstGeom xmlns:a="http://schemas.openxmlformats.org/drawingml/2006/main" prst="rect">
+          <a:prstGeom prst="rect">
             <a:avLst/>
           </a:prstGeom>
-          <a:solidFill xmlns:a="http://schemas.openxmlformats.org/drawingml/2006/main">
+          <a:solidFill>
             <a:srgbClr val="CF3338"/>
           </a:solidFill>
-          <a:ln xmlns:a="http://schemas.openxmlformats.org/drawingml/2006/main">
+          <a:ln>
             <a:noFill/>
           </a:ln>
         </p:spPr>
         <p:style>
-          <a:lnRef xmlns:a="http://schemas.openxmlformats.org/drawingml/2006/main" idx="1">
+          <a:lnRef idx="1">
             <a:schemeClr val="accent1"/>
           </a:lnRef>
-          <a:fillRef xmlns:a="http://schemas.openxmlformats.org/drawingml/2006/main" idx="3">
+          <a:fillRef idx="3">
             <a:schemeClr val="accent1"/>
           </a:fillRef>
-          <a:effectRef xmlns:a="http://schemas.openxmlformats.org/drawingml/2006/main" idx="2">
+          <a:effectRef idx="2">
             <a:schemeClr val="accent1"/>
           </a:effectRef>
-          <a:fontRef xmlns:a="http://schemas.openxmlformats.org/drawingml/2006/main" idx="minor">
+          <a:fontRef idx="minor">
             <a:schemeClr val="lt1"/>
           </a:fontRef>
         </p:style>
         <p:txBody>
-          <a:bodyPr xmlns:a="http://schemas.openxmlformats.org/drawingml/2006/main" anchor="ctr"/>
-          <a:lstStyle xmlns:a="http://schemas.openxmlformats.org/drawingml/2006/main"/>
-          <a:p xmlns:a="http://schemas.openxmlformats.org/drawingml/2006/main">
+          <a:bodyPr anchor="ctr"/>
+          <a:lstStyle/>
+          <a:p>
             <a:pPr algn="ctr">
               <a:buNone/>
             </a:pPr>
+            <a:endParaRPr/>
           </a:p>
         </p:txBody>
       </p:sp>
       <p:sp>
         <p:nvSpPr>
           <p:cNvPr id="3" name="TextBox 2">
-            <a:extLst xmlns:a="http://schemas.openxmlformats.org/drawingml/2006/main">
+            <a:extLst>
               <a:ext uri="{FF2B5EF4-FFF2-40B4-BE49-F238E27FC236}">
                 <a16:creationId xmlns:a16="http://schemas.microsoft.com/office/drawing/2014/main" id="{898B9BD5-44DF-4538-B931-330E4742D33C}"/>
               </a:ext>
             </a:extLst>
           </p:cNvPr>
           <p:cNvSpPr>
-            <a:spLocks xmlns:a="http://schemas.openxmlformats.org/drawingml/2006/main" noGrp="1"/>
+            <a:spLocks noGrp="1"/>
           </p:cNvSpPr>
           <p:nvPr/>
         </p:nvSpPr>
         <p:spPr>
-          <a:xfrm xmlns:a="http://schemas.openxmlformats.org/drawingml/2006/main">
+          <a:xfrm>
             <a:off x="9311335" y="640080"/>
             <a:ext cx="2468880" cy="1828800"/>
           </a:xfrm>
-          <a:prstGeom xmlns:a="http://schemas.openxmlformats.org/drawingml/2006/main" prst="rect">
+          <a:prstGeom prst="rect">
             <a:avLst/>
           </a:prstGeom>
-          <a:noFill xmlns:a="http://schemas.openxmlformats.org/drawingml/2006/main"/>
+          <a:noFill/>
         </p:spPr>
         <p:txBody>
-          <a:bodyPr xmlns:a="http://schemas.openxmlformats.org/drawingml/2006/main" wrap="square" lIns="0" tIns="0" rIns="0" bIns="0">
+          <a:bodyPr wrap="square" lIns="0" tIns="0" rIns="0" bIns="0">
             <a:spAutoFit/>
           </a:bodyPr>
-          <a:lstStyle xmlns:a="http://schemas.openxmlformats.org/drawingml/2006/main"/>
-          <a:p xmlns:a="http://schemas.openxmlformats.org/drawingml/2006/main">
+          <a:lstStyle/>
+          <a:p>
             <a:r>
               <a:rPr sz="2600" b="1" i="0">
                 <a:solidFill>
@@ -5856,7 +5262,7 @@
               <a:t>LIVE</a:t>
             </a:r>
           </a:p>
-          <a:p xmlns:a="http://schemas.openxmlformats.org/drawingml/2006/main">
+          <a:p>
             <a:r>
               <a:rPr sz="2600" b="1" i="0">
                 <a:solidFill>
@@ -5874,33 +5280,33 @@
       <p:sp>
         <p:nvSpPr>
           <p:cNvPr id="4" name="TextBox 3">
-            <a:extLst xmlns:a="http://schemas.openxmlformats.org/drawingml/2006/main">
+            <a:extLst>
               <a:ext uri="{FF2B5EF4-FFF2-40B4-BE49-F238E27FC236}">
                 <a16:creationId xmlns:a16="http://schemas.microsoft.com/office/drawing/2014/main" id="{6D672F27-83C4-4394-BFA6-00E777B23174}"/>
               </a:ext>
             </a:extLst>
           </p:cNvPr>
           <p:cNvSpPr>
-            <a:spLocks xmlns:a="http://schemas.openxmlformats.org/drawingml/2006/main" noGrp="1"/>
+            <a:spLocks noGrp="1"/>
           </p:cNvSpPr>
           <p:nvPr/>
         </p:nvSpPr>
         <p:spPr>
-          <a:xfrm xmlns:a="http://schemas.openxmlformats.org/drawingml/2006/main">
+          <a:xfrm>
             <a:off x="548640" y="411480"/>
             <a:ext cx="8229600" cy="1097280"/>
           </a:xfrm>
-          <a:prstGeom xmlns:a="http://schemas.openxmlformats.org/drawingml/2006/main" prst="rect">
+          <a:prstGeom prst="rect">
             <a:avLst/>
           </a:prstGeom>
-          <a:noFill xmlns:a="http://schemas.openxmlformats.org/drawingml/2006/main"/>
+          <a:noFill/>
         </p:spPr>
         <p:txBody>
-          <a:bodyPr xmlns:a="http://schemas.openxmlformats.org/drawingml/2006/main" wrap="square" lIns="0" tIns="0" rIns="0" bIns="0">
+          <a:bodyPr wrap="square" lIns="0" tIns="0" rIns="0" bIns="0">
             <a:spAutoFit/>
           </a:bodyPr>
-          <a:lstStyle xmlns:a="http://schemas.openxmlformats.org/drawingml/2006/main"/>
-          <a:p xmlns:a="http://schemas.openxmlformats.org/drawingml/2006/main">
+          <a:lstStyle/>
+          <a:p>
             <a:r>
               <a:rPr sz="2500" b="1" i="0">
                 <a:solidFill>
@@ -5913,7 +5319,7 @@
               <a:t>Live demo: structure beats the blob</a:t>
             </a:r>
           </a:p>
-          <a:p xmlns:a="http://schemas.openxmlformats.org/drawingml/2006/main">
+          <a:p>
             <a:pPr>
               <a:spcBef>
                 <a:spcPts val="300"/>
@@ -5937,50 +5343,50 @@
       <p:sp>
         <p:nvSpPr>
           <p:cNvPr id="5" name="Rounded Rectangle 4">
-            <a:extLst xmlns:a="http://schemas.openxmlformats.org/drawingml/2006/main">
+            <a:extLst>
               <a:ext uri="{FF2B5EF4-FFF2-40B4-BE49-F238E27FC236}">
                 <a16:creationId xmlns:a16="http://schemas.microsoft.com/office/drawing/2014/main" id="{364B04F7-C5AD-477E-B89B-DD92372445A4}"/>
               </a:ext>
             </a:extLst>
           </p:cNvPr>
           <p:cNvSpPr>
-            <a:spLocks xmlns:a="http://schemas.openxmlformats.org/drawingml/2006/main" noGrp="1"/>
+            <a:spLocks noGrp="1"/>
           </p:cNvSpPr>
           <p:nvPr/>
         </p:nvSpPr>
         <p:spPr>
-          <a:xfrm xmlns:a="http://schemas.openxmlformats.org/drawingml/2006/main">
+          <a:xfrm>
             <a:off x="548640" y="1600200"/>
             <a:ext cx="8229600" cy="4023360"/>
           </a:xfrm>
-          <a:prstGeom xmlns:a="http://schemas.openxmlformats.org/drawingml/2006/main" prst="roundRect">
+          <a:prstGeom prst="roundRect">
             <a:avLst/>
           </a:prstGeom>
-          <a:solidFill xmlns:a="http://schemas.openxmlformats.org/drawingml/2006/main">
+          <a:solidFill>
             <a:srgbClr val="2B2B2B"/>
           </a:solidFill>
-          <a:ln xmlns:a="http://schemas.openxmlformats.org/drawingml/2006/main">
+          <a:ln>
             <a:noFill/>
           </a:ln>
         </p:spPr>
         <p:style>
-          <a:lnRef xmlns:a="http://schemas.openxmlformats.org/drawingml/2006/main" idx="1">
+          <a:lnRef idx="1">
             <a:schemeClr val="accent1"/>
           </a:lnRef>
-          <a:fillRef xmlns:a="http://schemas.openxmlformats.org/drawingml/2006/main" idx="3">
+          <a:fillRef idx="3">
             <a:schemeClr val="accent1"/>
           </a:fillRef>
-          <a:effectRef xmlns:a="http://schemas.openxmlformats.org/drawingml/2006/main" idx="2">
+          <a:effectRef idx="2">
             <a:schemeClr val="accent1"/>
           </a:effectRef>
-          <a:fontRef xmlns:a="http://schemas.openxmlformats.org/drawingml/2006/main" idx="minor">
+          <a:fontRef idx="minor">
             <a:schemeClr val="lt1"/>
           </a:fontRef>
         </p:style>
         <p:txBody>
-          <a:bodyPr xmlns:a="http://schemas.openxmlformats.org/drawingml/2006/main" wrap="square" lIns="256032" tIns="182880" rIns="182880" bIns="109728" anchor="t"/>
-          <a:lstStyle xmlns:a="http://schemas.openxmlformats.org/drawingml/2006/main"/>
-          <a:p xmlns:a="http://schemas.openxmlformats.org/drawingml/2006/main">
+          <a:bodyPr wrap="square" lIns="256032" tIns="182880" rIns="182880" bIns="109728" anchor="t"/>
+          <a:lstStyle/>
+          <a:p>
             <a:pPr algn="l">
               <a:spcAft>
                 <a:spcPts val="100"/>
@@ -5999,7 +5405,7 @@
               <a:t># The blob prompt (what most people send)</a:t>
             </a:r>
           </a:p>
-          <a:p xmlns:a="http://schemas.openxmlformats.org/drawingml/2006/main">
+          <a:p>
             <a:pPr algn="l">
               <a:spcAft>
                 <a:spcPts val="100"/>
@@ -6018,7 +5424,7 @@
               <a:t>summarize this sales data and tell me whats important</a:t>
             </a:r>
           </a:p>
-          <a:p xmlns:a="http://schemas.openxmlformats.org/drawingml/2006/main">
+          <a:p>
             <a:pPr algn="l">
               <a:spcAft>
                 <a:spcPts val="100"/>
@@ -6037,7 +5443,7 @@
               <a:t>[messy paste of the whole export]</a:t>
             </a:r>
           </a:p>
-          <a:p xmlns:a="http://schemas.openxmlformats.org/drawingml/2006/main">
+          <a:p>
             <a:pPr algn="l">
               <a:spcAft>
                 <a:spcPts val="100"/>
@@ -6056,7 +5462,7 @@
               <a:t> </a:t>
             </a:r>
           </a:p>
-          <a:p xmlns:a="http://schemas.openxmlformats.org/drawingml/2006/main">
+          <a:p>
             <a:pPr algn="l">
               <a:spcAft>
                 <a:spcPts val="100"/>
@@ -6075,7 +5481,7 @@
               <a:t># Quarterly regional sales review</a:t>
             </a:r>
           </a:p>
-          <a:p xmlns:a="http://schemas.openxmlformats.org/drawingml/2006/main">
+          <a:p>
             <a:pPr algn="l">
               <a:spcAft>
                 <a:spcPts val="100"/>
@@ -6094,7 +5500,7 @@
               <a:t>## Role</a:t>
             </a:r>
           </a:p>
-          <a:p xmlns:a="http://schemas.openxmlformats.org/drawingml/2006/main">
+          <a:p>
             <a:pPr algn="l">
               <a:spcAft>
                 <a:spcPts val="100"/>
@@ -6113,7 +5519,7 @@
               <a:t>You are an FP&amp;A analyst reviewing regional sales.</a:t>
             </a:r>
           </a:p>
-          <a:p xmlns:a="http://schemas.openxmlformats.org/drawingml/2006/main">
+          <a:p>
             <a:pPr algn="l">
               <a:spcAft>
                 <a:spcPts val="100"/>
@@ -6132,7 +5538,7 @@
               <a:t>## Task</a:t>
             </a:r>
           </a:p>
-          <a:p xmlns:a="http://schemas.openxmlformats.org/drawingml/2006/main">
+          <a:p>
             <a:pPr algn="l">
               <a:spcAft>
                 <a:spcPts val="100"/>
@@ -6151,7 +5557,7 @@
               <a:t>- Summarize performance by region</a:t>
             </a:r>
           </a:p>
-          <a:p xmlns:a="http://schemas.openxmlformats.org/drawingml/2006/main">
+          <a:p>
             <a:pPr algn="l">
               <a:spcAft>
                 <a:spcPts val="100"/>
@@ -6170,7 +5576,7 @@
               <a:t>- Flag any region trailing the others</a:t>
             </a:r>
           </a:p>
-          <a:p xmlns:a="http://schemas.openxmlformats.org/drawingml/2006/main">
+          <a:p>
             <a:pPr algn="l">
               <a:spcAft>
                 <a:spcPts val="100"/>
@@ -6189,7 +5595,7 @@
               <a:t>- Suggest two follow-up questions</a:t>
             </a:r>
           </a:p>
-          <a:p xmlns:a="http://schemas.openxmlformats.org/drawingml/2006/main">
+          <a:p>
             <a:pPr algn="l">
               <a:spcAft>
                 <a:spcPts val="100"/>
@@ -6208,7 +5614,7 @@
               <a:t>## Data</a:t>
             </a:r>
           </a:p>
-          <a:p xmlns:a="http://schemas.openxmlformats.org/drawingml/2006/main">
+          <a:p>
             <a:pPr algn="l">
               <a:spcAft>
                 <a:spcPts val="100"/>
@@ -6232,33 +5638,33 @@
       <p:sp>
         <p:nvSpPr>
           <p:cNvPr id="6" name="TextBox 5">
-            <a:extLst xmlns:a="http://schemas.openxmlformats.org/drawingml/2006/main">
+            <a:extLst>
               <a:ext uri="{FF2B5EF4-FFF2-40B4-BE49-F238E27FC236}">
                 <a16:creationId xmlns:a16="http://schemas.microsoft.com/office/drawing/2014/main" id="{68EB9ED0-F121-4E81-A32A-9A7D6EBF677E}"/>
               </a:ext>
             </a:extLst>
           </p:cNvPr>
           <p:cNvSpPr>
-            <a:spLocks xmlns:a="http://schemas.openxmlformats.org/drawingml/2006/main" noGrp="1"/>
+            <a:spLocks noGrp="1"/>
           </p:cNvSpPr>
           <p:nvPr/>
         </p:nvSpPr>
         <p:spPr>
-          <a:xfrm xmlns:a="http://schemas.openxmlformats.org/drawingml/2006/main">
+          <a:xfrm>
             <a:off x="548640" y="5806440"/>
             <a:ext cx="8229600" cy="777240"/>
           </a:xfrm>
-          <a:prstGeom xmlns:a="http://schemas.openxmlformats.org/drawingml/2006/main" prst="rect">
+          <a:prstGeom prst="rect">
             <a:avLst/>
           </a:prstGeom>
-          <a:noFill xmlns:a="http://schemas.openxmlformats.org/drawingml/2006/main"/>
+          <a:noFill/>
         </p:spPr>
         <p:txBody>
-          <a:bodyPr xmlns:a="http://schemas.openxmlformats.org/drawingml/2006/main" wrap="square" lIns="0" tIns="0" rIns="0" bIns="0">
+          <a:bodyPr wrap="square" lIns="0" tIns="0" rIns="0" bIns="0">
             <a:spAutoFit/>
           </a:bodyPr>
-          <a:lstStyle xmlns:a="http://schemas.openxmlformats.org/drawingml/2006/main"/>
-          <a:p xmlns:a="http://schemas.openxmlformats.org/drawingml/2006/main">
+          <a:lstStyle/>
+          <a:p>
             <a:r>
               <a:rPr sz="1300" b="1" i="0">
                 <a:solidFill>
@@ -6268,18 +5674,7 @@
                 <a:ea typeface="Arial"/>
                 <a:cs typeface="Arial"/>
               </a:rPr>
-              <a:t>• </a:t>
-            </a:r>
-            <a:r>
-              <a:rPr sz="1300" b="1" i="0">
-                <a:solidFill>
-                  <a:srgbClr val="CF3338"/>
-                </a:solidFill>
-                <a:latin typeface="Arial"/>
-                <a:ea typeface="Arial"/>
-                <a:cs typeface="Arial"/>
-              </a:rPr>
-              <a:t>Headings and bullets are steering, and steering is free</a:t>
+              <a:t>• Headings and bullets are steering, and steering is free</a:t>
             </a:r>
           </a:p>
         </p:txBody>
@@ -6287,36 +5682,36 @@
       <p:sp>
         <p:nvSpPr>
           <p:cNvPr id="7" name="Chat question">
-            <a:extLst xmlns:a="http://schemas.openxmlformats.org/drawingml/2006/main">
+            <a:extLst>
               <a:ext uri="{FF2B5EF4-FFF2-40B4-BE49-F238E27FC236}">
                 <a16:creationId xmlns:a16="http://schemas.microsoft.com/office/drawing/2014/main" id="{A1AD58D4-A98D-4309-B52E-CC7BC3C53564}"/>
               </a:ext>
             </a:extLst>
           </p:cNvPr>
           <p:cNvSpPr>
-            <a:spLocks xmlns:a="http://schemas.openxmlformats.org/drawingml/2006/main" noGrp="1"/>
+            <a:spLocks noGrp="1"/>
           </p:cNvSpPr>
           <p:nvPr/>
         </p:nvSpPr>
         <p:spPr>
-          <a:xfrm xmlns:a="http://schemas.openxmlformats.org/drawingml/2006/main">
+          <a:xfrm>
             <a:off x="9353550" y="2790825"/>
             <a:ext cx="2428875" cy="1362075"/>
           </a:xfrm>
-          <a:prstGeom xmlns:a="http://schemas.openxmlformats.org/drawingml/2006/main" prst="rect">
+          <a:prstGeom prst="rect">
             <a:avLst/>
           </a:prstGeom>
-          <a:noFill xmlns:a="http://schemas.openxmlformats.org/drawingml/2006/main"/>
-          <a:ln xmlns:a="http://schemas.openxmlformats.org/drawingml/2006/main" w="0">
+          <a:noFill/>
+          <a:ln w="0">
             <a:noFill/>
           </a:ln>
         </p:spPr>
         <p:txBody>
-          <a:bodyPr xmlns:a="http://schemas.openxmlformats.org/drawingml/2006/main" wrap="square" lIns="0" tIns="0" rIns="0" bIns="0">
+          <a:bodyPr wrap="square" lIns="0" tIns="0" rIns="0" bIns="0">
             <a:noAutofit/>
           </a:bodyPr>
-          <a:lstStyle xmlns:a="http://schemas.openxmlformats.org/drawingml/2006/main"/>
-          <a:p xmlns:a="http://schemas.openxmlformats.org/drawingml/2006/main">
+          <a:lstStyle/>
+          <a:p>
             <a:pPr>
               <a:defRPr sz="2175" b="1">
                 <a:solidFill>
@@ -6344,36 +5739,36 @@
       <p:sp>
         <p:nvSpPr>
           <p:cNvPr id="8" name="Chat choices">
-            <a:extLst xmlns:a="http://schemas.openxmlformats.org/drawingml/2006/main">
+            <a:extLst>
               <a:ext uri="{FF2B5EF4-FFF2-40B4-BE49-F238E27FC236}">
                 <a16:creationId xmlns:a16="http://schemas.microsoft.com/office/drawing/2014/main" id="{C5EA68D6-4E5E-42BD-8F72-D1B6830AD576}"/>
               </a:ext>
             </a:extLst>
           </p:cNvPr>
           <p:cNvSpPr>
-            <a:spLocks xmlns:a="http://schemas.openxmlformats.org/drawingml/2006/main" noGrp="1"/>
+            <a:spLocks noGrp="1"/>
           </p:cNvSpPr>
           <p:nvPr/>
         </p:nvSpPr>
         <p:spPr>
-          <a:xfrm xmlns:a="http://schemas.openxmlformats.org/drawingml/2006/main">
+          <a:xfrm>
             <a:off x="9353550" y="4362450"/>
             <a:ext cx="2428875" cy="1009650"/>
           </a:xfrm>
-          <a:prstGeom xmlns:a="http://schemas.openxmlformats.org/drawingml/2006/main" prst="rect">
+          <a:prstGeom prst="rect">
             <a:avLst/>
           </a:prstGeom>
-          <a:noFill xmlns:a="http://schemas.openxmlformats.org/drawingml/2006/main"/>
-          <a:ln xmlns:a="http://schemas.openxmlformats.org/drawingml/2006/main" w="0">
+          <a:noFill/>
+          <a:ln w="0">
             <a:noFill/>
           </a:ln>
         </p:spPr>
         <p:txBody>
-          <a:bodyPr xmlns:a="http://schemas.openxmlformats.org/drawingml/2006/main" wrap="square" lIns="0" tIns="0" rIns="0" bIns="0">
+          <a:bodyPr wrap="square" lIns="0" tIns="0" rIns="0" bIns="0">
             <a:noAutofit/>
           </a:bodyPr>
-          <a:lstStyle xmlns:a="http://schemas.openxmlformats.org/drawingml/2006/main"/>
-          <a:p xmlns:a="http://schemas.openxmlformats.org/drawingml/2006/main">
+          <a:lstStyle/>
+          <a:p>
             <a:pPr>
               <a:defRPr sz="1950" b="1">
                 <a:solidFill>
@@ -6396,7 +5791,7 @@
               <a:t>A = paragraph</a:t>
             </a:r>
           </a:p>
-          <a:p xmlns:a="http://schemas.openxmlformats.org/drawingml/2006/main">
+          <a:p>
             <a:pPr>
               <a:defRPr sz="1950" b="1">
                 <a:solidFill>
@@ -6424,36 +5819,36 @@
       <p:sp>
         <p:nvSpPr>
           <p:cNvPr id="9" name="Chat instruction">
-            <a:extLst xmlns:a="http://schemas.openxmlformats.org/drawingml/2006/main">
+            <a:extLst>
               <a:ext uri="{FF2B5EF4-FFF2-40B4-BE49-F238E27FC236}">
                 <a16:creationId xmlns:a16="http://schemas.microsoft.com/office/drawing/2014/main" id="{D1995622-B794-457F-BA79-9EE19394DBB8}"/>
               </a:ext>
             </a:extLst>
           </p:cNvPr>
           <p:cNvSpPr>
-            <a:spLocks xmlns:a="http://schemas.openxmlformats.org/drawingml/2006/main" noGrp="1"/>
+            <a:spLocks noGrp="1"/>
           </p:cNvSpPr>
           <p:nvPr/>
         </p:nvSpPr>
         <p:spPr>
-          <a:xfrm xmlns:a="http://schemas.openxmlformats.org/drawingml/2006/main">
+          <a:xfrm>
             <a:off x="9353550" y="5715000"/>
             <a:ext cx="2428875" cy="609600"/>
           </a:xfrm>
-          <a:prstGeom xmlns:a="http://schemas.openxmlformats.org/drawingml/2006/main" prst="rect">
+          <a:prstGeom prst="rect">
             <a:avLst/>
           </a:prstGeom>
-          <a:noFill xmlns:a="http://schemas.openxmlformats.org/drawingml/2006/main"/>
-          <a:ln xmlns:a="http://schemas.openxmlformats.org/drawingml/2006/main" w="0">
+          <a:noFill/>
+          <a:ln w="0">
             <a:noFill/>
           </a:ln>
         </p:spPr>
         <p:txBody>
-          <a:bodyPr xmlns:a="http://schemas.openxmlformats.org/drawingml/2006/main" wrap="square" lIns="0" tIns="0" rIns="0" bIns="0">
+          <a:bodyPr wrap="square" lIns="0" tIns="0" rIns="0" bIns="0">
             <a:noAutofit/>
           </a:bodyPr>
-          <a:lstStyle xmlns:a="http://schemas.openxmlformats.org/drawingml/2006/main"/>
-          <a:p xmlns:a="http://schemas.openxmlformats.org/drawingml/2006/main">
+          <a:lstStyle/>
+          <a:p>
             <a:pPr>
               <a:defRPr sz="1500" b="0">
                 <a:solidFill>
@@ -6476,7 +5871,7 @@
               <a:t>Type one word</a:t>
             </a:r>
           </a:p>
-          <a:p xmlns:a="http://schemas.openxmlformats.org/drawingml/2006/main">
+          <a:p>
             <a:pPr>
               <a:defRPr sz="1500" b="0">
                 <a:solidFill>
@@ -6508,17 +5903,21 @@
       </p:ext>
     </p:extLst>
   </p:cSld>
+  <p:clrMapOvr>
+    <a:masterClrMapping/>
+  </p:clrMapOvr>
 </p:sld>
 </file>
 
 <file path=ppt/slides/slide5.xml><?xml version="1.0" encoding="utf-8"?>
-<p:sld xmlns:p="http://schemas.openxmlformats.org/presentationml/2006/main">
+<p:sld xmlns:a="http://schemas.openxmlformats.org/drawingml/2006/main" xmlns:r="http://schemas.openxmlformats.org/officeDocument/2006/relationships" xmlns:p="http://schemas.openxmlformats.org/presentationml/2006/main">
   <p:cSld>
     <p:bg>
       <p:bgPr>
-        <a:solidFill xmlns:a="http://schemas.openxmlformats.org/drawingml/2006/main">
+        <a:solidFill>
           <a:srgbClr val="EEECE1"/>
         </a:solidFill>
+        <a:effectLst/>
       </p:bgPr>
     </p:bg>
     <p:spTree>
@@ -6528,433 +5927,232 @@
         <p:nvPr/>
       </p:nvGrpSpPr>
       <p:grpSpPr>
-        <a:xfrm xmlns:a="http://schemas.openxmlformats.org/drawingml/2006/main"/>
+        <a:xfrm>
+          <a:off x="0" y="0"/>
+          <a:ext cx="0" cy="0"/>
+          <a:chOff x="0" y="0"/>
+          <a:chExt cx="0" cy="0"/>
+        </a:xfrm>
       </p:grpSpPr>
       <p:sp>
         <p:nvSpPr>
-          <p:cNvPr id="2" name="Rectangle 1">
-            <a:extLst xmlns:a="http://schemas.openxmlformats.org/drawingml/2006/main">
-              <a:ext uri="{FF2B5EF4-FFF2-40B4-BE49-F238E27FC236}">
-                <a16:creationId xmlns:a16="http://schemas.microsoft.com/office/drawing/2014/main" id="{678DB148-68C6-4F4C-83FF-869DB7B054B2}"/>
-              </a:ext>
-            </a:extLst>
-          </p:cNvPr>
-          <p:cNvSpPr>
-            <a:spLocks xmlns:a="http://schemas.openxmlformats.org/drawingml/2006/main" noGrp="1"/>
+          <p:cNvPr id="2" name="TextBox 1">
+            <a:extLst>
+              <a:ext uri="{FF2B5EF4-FFF2-40B4-BE49-F238E27FC236}">
+                <a16:creationId xmlns:a16="http://schemas.microsoft.com/office/drawing/2014/main" id="{910625D8-42DC-4BF5-95F6-EED9731FFEF4}"/>
+              </a:ext>
+            </a:extLst>
+          </p:cNvPr>
+          <p:cNvSpPr>
+            <a:spLocks noGrp="1"/>
           </p:cNvSpPr>
           <p:nvPr/>
         </p:nvSpPr>
         <p:spPr>
-          <a:xfrm xmlns:a="http://schemas.openxmlformats.org/drawingml/2006/main">
-            <a:off x="9082735" y="0"/>
-            <a:ext cx="3108960" cy="6858000"/>
+          <a:xfrm>
+            <a:off x="640080" y="457200"/>
+            <a:ext cx="10881360" cy="1188720"/>
           </a:xfrm>
-          <a:prstGeom xmlns:a="http://schemas.openxmlformats.org/drawingml/2006/main" prst="rect">
+          <a:prstGeom prst="rect">
             <a:avLst/>
           </a:prstGeom>
-          <a:solidFill xmlns:a="http://schemas.openxmlformats.org/drawingml/2006/main">
-            <a:srgbClr val="CF3338"/>
-          </a:solidFill>
-          <a:ln xmlns:a="http://schemas.openxmlformats.org/drawingml/2006/main">
+          <a:noFill/>
+        </p:spPr>
+        <p:txBody>
+          <a:bodyPr wrap="square" lIns="0" tIns="0" rIns="0" bIns="0">
+            <a:spAutoFit/>
+          </a:bodyPr>
+          <a:lstStyle/>
+          <a:p>
+            <a:r>
+              <a:rPr sz="3000" b="1" i="0">
+                <a:solidFill>
+                  <a:srgbClr val="1F2120"/>
+                </a:solidFill>
+                <a:latin typeface="Arial Black"/>
+                <a:ea typeface="Arial Black"/>
+                <a:cs typeface="Arial Black"/>
+              </a:rPr>
+              <a:t>Do this at your desk today</a:t>
+            </a:r>
+          </a:p>
+          <a:p>
+            <a:pPr>
+              <a:spcBef>
+                <a:spcPts val="400"/>
+              </a:spcBef>
+              <a:buNone/>
+            </a:pPr>
+            <a:r>
+              <a:rPr sz="1500" b="0" i="1">
+                <a:solidFill>
+                  <a:srgbClr val="CF3338"/>
+                </a:solidFill>
+                <a:latin typeface="Arial"/>
+                <a:ea typeface="Arial"/>
+                <a:cs typeface="Arial"/>
+              </a:rPr>
+              <a:t>Choose one small win</a:t>
+            </a:r>
+          </a:p>
+        </p:txBody>
+      </p:sp>
+      <p:sp>
+        <p:nvSpPr>
+          <p:cNvPr id="3" name="TextBox 2">
+            <a:extLst>
+              <a:ext uri="{FF2B5EF4-FFF2-40B4-BE49-F238E27FC236}">
+                <a16:creationId xmlns:a16="http://schemas.microsoft.com/office/drawing/2014/main" id="{ECA26EED-30E7-41B6-9151-E51722E720C5}"/>
+              </a:ext>
+            </a:extLst>
+          </p:cNvPr>
+          <p:cNvSpPr>
+            <a:spLocks noGrp="1"/>
+          </p:cNvSpPr>
+          <p:nvPr/>
+        </p:nvSpPr>
+        <p:spPr>
+          <a:xfrm>
+            <a:off x="640080" y="1783080"/>
+            <a:ext cx="10881360" cy="2409825"/>
+          </a:xfrm>
+          <a:prstGeom prst="rect">
+            <a:avLst/>
+          </a:prstGeom>
+          <a:noFill/>
+        </p:spPr>
+        <p:txBody>
+          <a:bodyPr wrap="square" lIns="0" tIns="0" rIns="0" bIns="0">
+            <a:spAutoFit/>
+          </a:bodyPr>
+          <a:lstStyle/>
+          <a:p>
+            <a:pPr>
+              <a:spcAft>
+                <a:spcPts val="700"/>
+              </a:spcAft>
+              <a:buNone/>
+            </a:pPr>
+            <a:r>
+              <a:rPr sz="1200" b="1" i="0">
+                <a:solidFill>
+                  <a:srgbClr val="CF3338"/>
+                </a:solidFill>
+                <a:latin typeface="Arial"/>
+                <a:ea typeface="Arial"/>
+                <a:cs typeface="Arial"/>
+              </a:rPr>
+              <a:t>• </a:t>
+            </a:r>
+            <a:r>
+              <a:rPr sz="1600" b="0" i="0">
+                <a:solidFill>
+                  <a:srgbClr val="1F2120"/>
+                </a:solidFill>
+                <a:latin typeface="Arial"/>
+                <a:ea typeface="Arial"/>
+                <a:cs typeface="Arial"/>
+              </a:rPr>
+              <a:t>TASK: Add one clear sentence saying what you want the tool to do.</a:t>
+            </a:r>
+          </a:p>
+          <a:p>
+            <a:pPr>
+              <a:spcAft>
+                <a:spcPts val="700"/>
+              </a:spcAft>
+              <a:buNone/>
+            </a:pPr>
+            <a:r>
+              <a:rPr sz="1200" b="1" i="0">
+                <a:solidFill>
+                  <a:srgbClr val="CF3338"/>
+                </a:solidFill>
+                <a:latin typeface="Arial"/>
+                <a:ea typeface="Arial"/>
+                <a:cs typeface="Arial"/>
+              </a:rPr>
+              <a:t>• </a:t>
+            </a:r>
+            <a:r>
+              <a:rPr sz="1600" b="0" i="0">
+                <a:solidFill>
+                  <a:srgbClr val="1F2120"/>
+                </a:solidFill>
+                <a:latin typeface="Arial"/>
+                <a:ea typeface="Arial"/>
+                <a:cs typeface="Arial"/>
+              </a:rPr>
+              <a:t>FORMAT: Say how to return the answer, such as three bullets or a table.</a:t>
+            </a:r>
+          </a:p>
+          <a:p>
+            <a:pPr>
+              <a:spcAft>
+                <a:spcPts val="700"/>
+              </a:spcAft>
+              <a:buNone/>
+            </a:pPr>
+            <a:r>
+              <a:rPr sz="1200" b="1" i="0">
+                <a:solidFill>
+                  <a:srgbClr val="CF3338"/>
+                </a:solidFill>
+                <a:latin typeface="Arial"/>
+                <a:ea typeface="Arial"/>
+                <a:cs typeface="Arial"/>
+              </a:rPr>
+              <a:t>• </a:t>
+            </a:r>
+            <a:r>
+              <a:rPr sz="1600" b="0" i="0">
+                <a:solidFill>
+                  <a:srgbClr val="1F2120"/>
+                </a:solidFill>
+                <a:latin typeface="Arial"/>
+                <a:ea typeface="Arial"/>
+                <a:cs typeface="Arial"/>
+              </a:rPr>
+              <a:t>Choose one change, run the prompt, and check the answer.</a:t>
+            </a:r>
+          </a:p>
+        </p:txBody>
+      </p:sp>
+      <p:sp>
+        <p:nvSpPr>
+          <p:cNvPr id="7" name="Chat instruction">
+            <a:extLst>
+              <a:ext uri="{FF2B5EF4-FFF2-40B4-BE49-F238E27FC236}">
+                <a16:creationId xmlns:a16="http://schemas.microsoft.com/office/drawing/2014/main" id="{19E8D802-EBBE-4DFA-B414-67EB9E16D2FC}"/>
+              </a:ext>
+            </a:extLst>
+          </p:cNvPr>
+          <p:cNvSpPr>
+            <a:spLocks noGrp="1"/>
+          </p:cNvSpPr>
+          <p:nvPr/>
+        </p:nvSpPr>
+        <p:spPr>
+          <a:xfrm>
+            <a:off x="8143875" y="5219700"/>
+            <a:ext cx="3048000" cy="400050"/>
+          </a:xfrm>
+          <a:prstGeom prst="rect">
+            <a:avLst/>
+          </a:prstGeom>
+          <a:noFill/>
+          <a:ln w="0">
             <a:noFill/>
           </a:ln>
         </p:spPr>
-        <p:style>
-          <a:lnRef xmlns:a="http://schemas.openxmlformats.org/drawingml/2006/main" idx="1">
-            <a:schemeClr val="accent1"/>
-          </a:lnRef>
-          <a:fillRef xmlns:a="http://schemas.openxmlformats.org/drawingml/2006/main" idx="3">
-            <a:schemeClr val="accent1"/>
-          </a:fillRef>
-          <a:effectRef xmlns:a="http://schemas.openxmlformats.org/drawingml/2006/main" idx="2">
-            <a:schemeClr val="accent1"/>
-          </a:effectRef>
-          <a:fontRef xmlns:a="http://schemas.openxmlformats.org/drawingml/2006/main" idx="minor">
-            <a:schemeClr val="lt1"/>
-          </a:fontRef>
-        </p:style>
-        <p:txBody>
-          <a:bodyPr xmlns:a="http://schemas.openxmlformats.org/drawingml/2006/main" anchor="ctr"/>
-          <a:lstStyle xmlns:a="http://schemas.openxmlformats.org/drawingml/2006/main"/>
-          <a:p xmlns:a="http://schemas.openxmlformats.org/drawingml/2006/main">
-            <a:pPr algn="ctr">
-              <a:buNone/>
-            </a:pPr>
-          </a:p>
-        </p:txBody>
-      </p:sp>
-      <p:sp>
-        <p:nvSpPr>
-          <p:cNvPr id="3" name="TextBox 2">
-            <a:extLst xmlns:a="http://schemas.openxmlformats.org/drawingml/2006/main">
-              <a:ext uri="{FF2B5EF4-FFF2-40B4-BE49-F238E27FC236}">
-                <a16:creationId xmlns:a16="http://schemas.microsoft.com/office/drawing/2014/main" id="{57955CC7-8372-43B7-A51F-D5D0548FC53A}"/>
-              </a:ext>
-            </a:extLst>
-          </p:cNvPr>
-          <p:cNvSpPr>
-            <a:spLocks xmlns:a="http://schemas.openxmlformats.org/drawingml/2006/main" noGrp="1"/>
-          </p:cNvSpPr>
-          <p:nvPr/>
-        </p:nvSpPr>
-        <p:spPr>
-          <a:xfrm xmlns:a="http://schemas.openxmlformats.org/drawingml/2006/main">
-            <a:off x="9311335" y="640080"/>
-            <a:ext cx="2468880" cy="1828800"/>
-          </a:xfrm>
-          <a:prstGeom xmlns:a="http://schemas.openxmlformats.org/drawingml/2006/main" prst="rect">
-            <a:avLst/>
-          </a:prstGeom>
-          <a:noFill xmlns:a="http://schemas.openxmlformats.org/drawingml/2006/main"/>
-        </p:spPr>
-        <p:txBody>
-          <a:bodyPr xmlns:a="http://schemas.openxmlformats.org/drawingml/2006/main" wrap="square" lIns="0" tIns="0" rIns="0" bIns="0">
-            <a:spAutoFit/>
-          </a:bodyPr>
-          <a:lstStyle xmlns:a="http://schemas.openxmlformats.org/drawingml/2006/main"/>
-          <a:p xmlns:a="http://schemas.openxmlformats.org/drawingml/2006/main">
-            <a:r>
-              <a:rPr sz="2600" b="1" i="0">
-                <a:solidFill>
-                  <a:srgbClr val="FFFFFF"/>
-                </a:solidFill>
-                <a:latin typeface="Arial Black"/>
-                <a:ea typeface="Arial Black"/>
-                <a:cs typeface="Arial Black"/>
-              </a:rPr>
-              <a:t>LIVE</a:t>
-            </a:r>
-          </a:p>
-          <a:p xmlns:a="http://schemas.openxmlformats.org/drawingml/2006/main">
-            <a:r>
-              <a:rPr sz="2600" b="1" i="0">
-                <a:solidFill>
-                  <a:srgbClr val="FFFFFF"/>
-                </a:solidFill>
-                <a:latin typeface="Arial Black"/>
-                <a:ea typeface="Arial Black"/>
-                <a:cs typeface="Arial Black"/>
-              </a:rPr>
-              <a:t>DEMO</a:t>
-            </a:r>
-          </a:p>
-        </p:txBody>
-      </p:sp>
-      <p:sp>
-        <p:nvSpPr>
-          <p:cNvPr id="4" name="TextBox 3">
-            <a:extLst xmlns:a="http://schemas.openxmlformats.org/drawingml/2006/main">
-              <a:ext uri="{FF2B5EF4-FFF2-40B4-BE49-F238E27FC236}">
-                <a16:creationId xmlns:a16="http://schemas.microsoft.com/office/drawing/2014/main" id="{F4FD56D0-3FB6-4CFE-8867-B176A7319433}"/>
-              </a:ext>
-            </a:extLst>
-          </p:cNvPr>
-          <p:cNvSpPr>
-            <a:spLocks xmlns:a="http://schemas.openxmlformats.org/drawingml/2006/main" noGrp="1"/>
-          </p:cNvSpPr>
-          <p:nvPr/>
-        </p:nvSpPr>
-        <p:spPr>
-          <a:xfrm xmlns:a="http://schemas.openxmlformats.org/drawingml/2006/main">
-            <a:off x="548640" y="411480"/>
-            <a:ext cx="8229600" cy="1097280"/>
-          </a:xfrm>
-          <a:prstGeom xmlns:a="http://schemas.openxmlformats.org/drawingml/2006/main" prst="rect">
-            <a:avLst/>
-          </a:prstGeom>
-          <a:noFill xmlns:a="http://schemas.openxmlformats.org/drawingml/2006/main"/>
-        </p:spPr>
-        <p:txBody>
-          <a:bodyPr xmlns:a="http://schemas.openxmlformats.org/drawingml/2006/main" wrap="square" lIns="0" tIns="0" rIns="0" bIns="0">
-            <a:spAutoFit/>
-          </a:bodyPr>
-          <a:lstStyle xmlns:a="http://schemas.openxmlformats.org/drawingml/2006/main"/>
-          <a:p xmlns:a="http://schemas.openxmlformats.org/drawingml/2006/main">
-            <a:r>
-              <a:rPr sz="2500" b="1" i="0">
-                <a:solidFill>
-                  <a:srgbClr val="CF3338"/>
-                </a:solidFill>
-                <a:latin typeface="Arial Black"/>
-                <a:ea typeface="Arial Black"/>
-                <a:cs typeface="Arial Black"/>
-              </a:rPr>
-              <a:t>Live demo: the Excel round-trip</a:t>
-            </a:r>
-          </a:p>
-          <a:p xmlns:a="http://schemas.openxmlformats.org/drawingml/2006/main">
-            <a:pPr>
-              <a:spcBef>
-                <a:spcPts val="300"/>
-              </a:spcBef>
-              <a:buNone/>
-            </a:pPr>
-            <a:r>
-              <a:rPr sz="1450" b="0" i="1">
-                <a:solidFill>
-                  <a:srgbClr val="707070"/>
-                </a:solidFill>
-                <a:latin typeface="Arial"/>
-                <a:ea typeface="Arial"/>
-                <a:cs typeface="Arial"/>
-              </a:rPr>
-              <a:t>Copy out, Markdown back, Text to Columns. No connectors.</a:t>
-            </a:r>
-          </a:p>
-        </p:txBody>
-      </p:sp>
-      <p:sp>
-        <p:nvSpPr>
-          <p:cNvPr id="5" name="Rounded Rectangle 4">
-            <a:extLst xmlns:a="http://schemas.openxmlformats.org/drawingml/2006/main">
-              <a:ext uri="{FF2B5EF4-FFF2-40B4-BE49-F238E27FC236}">
-                <a16:creationId xmlns:a16="http://schemas.microsoft.com/office/drawing/2014/main" id="{1BB1E2DE-FB8B-4C0F-90F4-46A7767C4C56}"/>
-              </a:ext>
-            </a:extLst>
-          </p:cNvPr>
-          <p:cNvSpPr>
-            <a:spLocks xmlns:a="http://schemas.openxmlformats.org/drawingml/2006/main" noGrp="1"/>
-          </p:cNvSpPr>
-          <p:nvPr/>
-        </p:nvSpPr>
-        <p:spPr>
-          <a:xfrm xmlns:a="http://schemas.openxmlformats.org/drawingml/2006/main">
-            <a:off x="548640" y="1600200"/>
-            <a:ext cx="8229600" cy="4023360"/>
-          </a:xfrm>
-          <a:prstGeom xmlns:a="http://schemas.openxmlformats.org/drawingml/2006/main" prst="roundRect">
-            <a:avLst/>
-          </a:prstGeom>
-          <a:solidFill xmlns:a="http://schemas.openxmlformats.org/drawingml/2006/main">
-            <a:srgbClr val="2B2B2B"/>
-          </a:solidFill>
-          <a:ln xmlns:a="http://schemas.openxmlformats.org/drawingml/2006/main">
-            <a:noFill/>
-          </a:ln>
-        </p:spPr>
-        <p:style>
-          <a:lnRef xmlns:a="http://schemas.openxmlformats.org/drawingml/2006/main" idx="1">
-            <a:schemeClr val="accent1"/>
-          </a:lnRef>
-          <a:fillRef xmlns:a="http://schemas.openxmlformats.org/drawingml/2006/main" idx="3">
-            <a:schemeClr val="accent1"/>
-          </a:fillRef>
-          <a:effectRef xmlns:a="http://schemas.openxmlformats.org/drawingml/2006/main" idx="2">
-            <a:schemeClr val="accent1"/>
-          </a:effectRef>
-          <a:fontRef xmlns:a="http://schemas.openxmlformats.org/drawingml/2006/main" idx="minor">
-            <a:schemeClr val="lt1"/>
-          </a:fontRef>
-        </p:style>
-        <p:txBody>
-          <a:bodyPr xmlns:a="http://schemas.openxmlformats.org/drawingml/2006/main" wrap="square" lIns="256032" tIns="182880" rIns="182880" bIns="109728" anchor="t"/>
-          <a:lstStyle xmlns:a="http://schemas.openxmlformats.org/drawingml/2006/main"/>
-          <a:p xmlns:a="http://schemas.openxmlformats.org/drawingml/2006/main">
-            <a:pPr algn="l">
-              <a:spcAft>
-                <a:spcPts val="100"/>
-              </a:spcAft>
-              <a:buNone/>
-            </a:pPr>
-            <a:r>
-              <a:rPr sz="1300" b="0" i="0">
-                <a:solidFill>
-                  <a:srgbClr val="9EC57A"/>
-                </a:solidFill>
-                <a:latin typeface="Consolas"/>
-                <a:ea typeface="Consolas"/>
-                <a:cs typeface="Consolas"/>
-              </a:rPr>
-              <a:t># Move tables in and out of AI tools</a:t>
-            </a:r>
-          </a:p>
-          <a:p xmlns:a="http://schemas.openxmlformats.org/drawingml/2006/main">
-            <a:pPr algn="l">
-              <a:spcAft>
-                <a:spcPts val="100"/>
-              </a:spcAft>
-              <a:buNone/>
-            </a:pPr>
-            <a:r>
-              <a:rPr sz="1300" b="0" i="0">
-                <a:solidFill>
-                  <a:srgbClr val="F5F5F5"/>
-                </a:solidFill>
-                <a:latin typeface="Consolas"/>
-                <a:ea typeface="Consolas"/>
-                <a:cs typeface="Consolas"/>
-              </a:rPr>
-              <a:t>1. Copy the RegionSummary table in Excel, paste to a chatbot</a:t>
-            </a:r>
-          </a:p>
-          <a:p xmlns:a="http://schemas.openxmlformats.org/drawingml/2006/main">
-            <a:pPr algn="l">
-              <a:spcAft>
-                <a:spcPts val="100"/>
-              </a:spcAft>
-              <a:buNone/>
-            </a:pPr>
-            <a:r>
-              <a:rPr sz="1300" b="0" i="0">
-                <a:solidFill>
-                  <a:srgbClr val="F5F5F5"/>
-                </a:solidFill>
-                <a:latin typeface="Consolas"/>
-                <a:ea typeface="Consolas"/>
-                <a:cs typeface="Consolas"/>
-              </a:rPr>
-              <a:t>2. It arrives as a table the model reads cleanly</a:t>
-            </a:r>
-          </a:p>
-          <a:p xmlns:a="http://schemas.openxmlformats.org/drawingml/2006/main">
-            <a:pPr algn="l">
-              <a:spcAft>
-                <a:spcPts val="100"/>
-              </a:spcAft>
-              <a:buNone/>
-            </a:pPr>
-            <a:r>
-              <a:rPr sz="1300" b="0" i="0">
-                <a:solidFill>
-                  <a:srgbClr val="F5F5F5"/>
-                </a:solidFill>
-                <a:latin typeface="Consolas"/>
-                <a:ea typeface="Consolas"/>
-                <a:cs typeface="Consolas"/>
-              </a:rPr>
-              <a:t>3. Ask for results 'as a Markdown table'</a:t>
-            </a:r>
-          </a:p>
-          <a:p xmlns:a="http://schemas.openxmlformats.org/drawingml/2006/main">
-            <a:pPr algn="l">
-              <a:spcAft>
-                <a:spcPts val="100"/>
-              </a:spcAft>
-              <a:buNone/>
-            </a:pPr>
-            <a:r>
-              <a:rPr sz="1300" b="0" i="0">
-                <a:solidFill>
-                  <a:srgbClr val="F5F5F5"/>
-                </a:solidFill>
-                <a:latin typeface="Consolas"/>
-                <a:ea typeface="Consolas"/>
-                <a:cs typeface="Consolas"/>
-              </a:rPr>
-              <a:t>4. Paste the reply into Excel, then Data &gt; Text to Columns</a:t>
-            </a:r>
-          </a:p>
-          <a:p xmlns:a="http://schemas.openxmlformats.org/drawingml/2006/main">
-            <a:pPr algn="l">
-              <a:spcAft>
-                <a:spcPts val="100"/>
-              </a:spcAft>
-              <a:buNone/>
-            </a:pPr>
-            <a:r>
-              <a:rPr sz="1300" b="0" i="0">
-                <a:solidFill>
-                  <a:srgbClr val="F5F5F5"/>
-                </a:solidFill>
-                <a:latin typeface="Consolas"/>
-                <a:ea typeface="Consolas"/>
-                <a:cs typeface="Consolas"/>
-              </a:rPr>
-              <a:t>5. Split on | (pipe). Remove the separator row and empty edge columns</a:t>
-            </a:r>
-          </a:p>
-        </p:txBody>
-      </p:sp>
-      <p:sp>
-        <p:nvSpPr>
-          <p:cNvPr id="6" name="TextBox 5">
-            <a:extLst xmlns:a="http://schemas.openxmlformats.org/drawingml/2006/main">
-              <a:ext uri="{FF2B5EF4-FFF2-40B4-BE49-F238E27FC236}">
-                <a16:creationId xmlns:a16="http://schemas.microsoft.com/office/drawing/2014/main" id="{D19D7DEC-7841-4F53-9631-B66533421059}"/>
-              </a:ext>
-            </a:extLst>
-          </p:cNvPr>
-          <p:cNvSpPr>
-            <a:spLocks xmlns:a="http://schemas.openxmlformats.org/drawingml/2006/main" noGrp="1"/>
-          </p:cNvSpPr>
-          <p:nvPr/>
-        </p:nvSpPr>
-        <p:spPr>
-          <a:xfrm xmlns:a="http://schemas.openxmlformats.org/drawingml/2006/main">
-            <a:off x="548640" y="5806440"/>
-            <a:ext cx="8229600" cy="777240"/>
-          </a:xfrm>
-          <a:prstGeom xmlns:a="http://schemas.openxmlformats.org/drawingml/2006/main" prst="rect">
-            <a:avLst/>
-          </a:prstGeom>
-          <a:noFill xmlns:a="http://schemas.openxmlformats.org/drawingml/2006/main"/>
-        </p:spPr>
-        <p:txBody>
-          <a:bodyPr xmlns:a="http://schemas.openxmlformats.org/drawingml/2006/main" wrap="square" lIns="0" tIns="0" rIns="0" bIns="0">
-            <a:spAutoFit/>
-          </a:bodyPr>
-          <a:lstStyle xmlns:a="http://schemas.openxmlformats.org/drawingml/2006/main"/>
-          <a:p xmlns:a="http://schemas.openxmlformats.org/drawingml/2006/main">
-            <a:r>
-              <a:rPr sz="1300" b="1" i="0">
-                <a:solidFill>
-                  <a:srgbClr val="CF3338"/>
-                </a:solidFill>
-                <a:latin typeface="Arial"/>
-                <a:ea typeface="Arial"/>
-                <a:cs typeface="Arial"/>
-              </a:rPr>
-              <a:t>• </a:t>
-            </a:r>
-            <a:r>
-              <a:rPr sz="1300" b="1" i="0">
-                <a:solidFill>
-                  <a:srgbClr val="CF3338"/>
-                </a:solidFill>
-                <a:latin typeface="Arial"/>
-                <a:ea typeface="Arial"/>
-                <a:cs typeface="Arial"/>
-              </a:rPr>
-              <a:t>The guerrilla data pipeline: copy, paste, pipe, done</a:t>
-            </a:r>
-          </a:p>
-        </p:txBody>
-      </p:sp>
-      <p:sp>
-        <p:nvSpPr>
-          <p:cNvPr id="7" name="Chat question">
-            <a:extLst xmlns:a="http://schemas.openxmlformats.org/drawingml/2006/main">
-              <a:ext uri="{FF2B5EF4-FFF2-40B4-BE49-F238E27FC236}">
-                <a16:creationId xmlns:a16="http://schemas.microsoft.com/office/drawing/2014/main" id="{D60C09E5-B049-4D66-BE5B-ED25A7D24ED5}"/>
-              </a:ext>
-            </a:extLst>
-          </p:cNvPr>
-          <p:cNvSpPr>
-            <a:spLocks xmlns:a="http://schemas.openxmlformats.org/drawingml/2006/main" noGrp="1"/>
-          </p:cNvSpPr>
-          <p:nvPr/>
-        </p:nvSpPr>
-        <p:spPr>
-          <a:xfrm xmlns:a="http://schemas.openxmlformats.org/drawingml/2006/main">
-            <a:off x="9353550" y="2790825"/>
-            <a:ext cx="2428875" cy="1362075"/>
-          </a:xfrm>
-          <a:prstGeom xmlns:a="http://schemas.openxmlformats.org/drawingml/2006/main" prst="rect">
-            <a:avLst/>
-          </a:prstGeom>
-          <a:noFill xmlns:a="http://schemas.openxmlformats.org/drawingml/2006/main"/>
-          <a:ln xmlns:a="http://schemas.openxmlformats.org/drawingml/2006/main" w="0">
-            <a:noFill/>
-          </a:ln>
-        </p:spPr>
-        <p:txBody>
-          <a:bodyPr xmlns:a="http://schemas.openxmlformats.org/drawingml/2006/main" wrap="square" lIns="0" tIns="0" rIns="0" bIns="0">
+        <p:txBody>
+          <a:bodyPr wrap="square" lIns="0" tIns="0" rIns="0" bIns="0">
             <a:noAutofit/>
           </a:bodyPr>
-          <a:lstStyle xmlns:a="http://schemas.openxmlformats.org/drawingml/2006/main"/>
-          <a:p xmlns:a="http://schemas.openxmlformats.org/drawingml/2006/main">
+          <a:lstStyle/>
+          <a:p>
             <a:pPr>
-              <a:defRPr sz="2175" b="1">
+              <a:defRPr sz="1425" b="0">
                 <a:solidFill>
                   <a:srgbClr val="FFFFFF"/>
                 </a:solidFill>
@@ -6964,7 +6162,7 @@
               </a:defRPr>
             </a:pPr>
             <a:r>
-              <a:rPr sz="2175" b="1">
+              <a:rPr sz="1425" b="0">
                 <a:solidFill>
                   <a:srgbClr val="FFFFFF"/>
                 </a:solidFill>
@@ -6972,167 +6170,7 @@
                 <a:ea typeface="Arial"/>
                 <a:cs typeface="Arial"/>
               </a:rPr>
-              <a:t>Which separator</a:t>
-            </a:r>
-          </a:p>
-          <a:p xmlns:a="http://schemas.openxmlformats.org/drawingml/2006/main">
-            <a:pPr>
-              <a:defRPr sz="2175" b="1">
-                <a:solidFill>
-                  <a:srgbClr val="FFFFFF"/>
-                </a:solidFill>
-                <a:latin typeface="Arial"/>
-                <a:ea typeface="Arial"/>
-                <a:cs typeface="Arial"/>
-              </a:defRPr>
-            </a:pPr>
-            <a:r>
-              <a:rPr sz="2175" b="1">
-                <a:solidFill>
-                  <a:srgbClr val="FFFFFF"/>
-                </a:solidFill>
-                <a:latin typeface="Arial"/>
-                <a:ea typeface="Arial"/>
-                <a:cs typeface="Arial"/>
-              </a:rPr>
-              <a:t>is in this table?</a:t>
-            </a:r>
-          </a:p>
-        </p:txBody>
-      </p:sp>
-      <p:sp>
-        <p:nvSpPr>
-          <p:cNvPr id="8" name="Chat choices">
-            <a:extLst xmlns:a="http://schemas.openxmlformats.org/drawingml/2006/main">
-              <a:ext uri="{FF2B5EF4-FFF2-40B4-BE49-F238E27FC236}">
-                <a16:creationId xmlns:a16="http://schemas.microsoft.com/office/drawing/2014/main" id="{2EE0CCF8-2BBA-4115-91F3-4BF0829B19FF}"/>
-              </a:ext>
-            </a:extLst>
-          </p:cNvPr>
-          <p:cNvSpPr>
-            <a:spLocks xmlns:a="http://schemas.openxmlformats.org/drawingml/2006/main" noGrp="1"/>
-          </p:cNvSpPr>
-          <p:nvPr/>
-        </p:nvSpPr>
-        <p:spPr>
-          <a:xfrm xmlns:a="http://schemas.openxmlformats.org/drawingml/2006/main">
-            <a:off x="9353550" y="4362450"/>
-            <a:ext cx="2428875" cy="1009650"/>
-          </a:xfrm>
-          <a:prstGeom xmlns:a="http://schemas.openxmlformats.org/drawingml/2006/main" prst="rect">
-            <a:avLst/>
-          </a:prstGeom>
-          <a:noFill xmlns:a="http://schemas.openxmlformats.org/drawingml/2006/main"/>
-          <a:ln xmlns:a="http://schemas.openxmlformats.org/drawingml/2006/main" w="0">
-            <a:noFill/>
-          </a:ln>
-        </p:spPr>
-        <p:txBody>
-          <a:bodyPr xmlns:a="http://schemas.openxmlformats.org/drawingml/2006/main" wrap="square" lIns="0" tIns="0" rIns="0" bIns="0">
-            <a:noAutofit/>
-          </a:bodyPr>
-          <a:lstStyle xmlns:a="http://schemas.openxmlformats.org/drawingml/2006/main"/>
-          <a:p xmlns:a="http://schemas.openxmlformats.org/drawingml/2006/main">
-            <a:pPr>
-              <a:defRPr sz="1950" b="1">
-                <a:solidFill>
-                  <a:srgbClr val="FFFFFF"/>
-                </a:solidFill>
-                <a:latin typeface="Arial"/>
-                <a:ea typeface="Arial"/>
-                <a:cs typeface="Arial"/>
-              </a:defRPr>
-            </a:pPr>
-            <a:r>
-              <a:rPr sz="1950" b="1">
-                <a:solidFill>
-                  <a:srgbClr val="FFFFFF"/>
-                </a:solidFill>
-                <a:latin typeface="Arial"/>
-                <a:ea typeface="Arial"/>
-                <a:cs typeface="Arial"/>
-              </a:rPr>
-              <a:t>PIPE / COMMA</a:t>
-            </a:r>
-          </a:p>
-        </p:txBody>
-      </p:sp>
-      <p:sp>
-        <p:nvSpPr>
-          <p:cNvPr id="9" name="Chat instruction">
-            <a:extLst xmlns:a="http://schemas.openxmlformats.org/drawingml/2006/main">
-              <a:ext uri="{FF2B5EF4-FFF2-40B4-BE49-F238E27FC236}">
-                <a16:creationId xmlns:a16="http://schemas.microsoft.com/office/drawing/2014/main" id="{5C3D94EF-9302-4D5D-A85A-23398DE7040B}"/>
-              </a:ext>
-            </a:extLst>
-          </p:cNvPr>
-          <p:cNvSpPr>
-            <a:spLocks xmlns:a="http://schemas.openxmlformats.org/drawingml/2006/main" noGrp="1"/>
-          </p:cNvSpPr>
-          <p:nvPr/>
-        </p:nvSpPr>
-        <p:spPr>
-          <a:xfrm xmlns:a="http://schemas.openxmlformats.org/drawingml/2006/main">
-            <a:off x="9353550" y="5715000"/>
-            <a:ext cx="2428875" cy="609600"/>
-          </a:xfrm>
-          <a:prstGeom xmlns:a="http://schemas.openxmlformats.org/drawingml/2006/main" prst="rect">
-            <a:avLst/>
-          </a:prstGeom>
-          <a:noFill xmlns:a="http://schemas.openxmlformats.org/drawingml/2006/main"/>
-          <a:ln xmlns:a="http://schemas.openxmlformats.org/drawingml/2006/main" w="0">
-            <a:noFill/>
-          </a:ln>
-        </p:spPr>
-        <p:txBody>
-          <a:bodyPr xmlns:a="http://schemas.openxmlformats.org/drawingml/2006/main" wrap="square" lIns="0" tIns="0" rIns="0" bIns="0">
-            <a:noAutofit/>
-          </a:bodyPr>
-          <a:lstStyle xmlns:a="http://schemas.openxmlformats.org/drawingml/2006/main"/>
-          <a:p xmlns:a="http://schemas.openxmlformats.org/drawingml/2006/main">
-            <a:pPr>
-              <a:defRPr sz="1500" b="0">
-                <a:solidFill>
-                  <a:srgbClr val="FFFFFF"/>
-                </a:solidFill>
-                <a:latin typeface="Arial"/>
-                <a:ea typeface="Arial"/>
-                <a:cs typeface="Arial"/>
-              </a:defRPr>
-            </a:pPr>
-            <a:r>
-              <a:rPr sz="1500" b="0">
-                <a:solidFill>
-                  <a:srgbClr val="FFFFFF"/>
-                </a:solidFill>
-                <a:latin typeface="Arial"/>
-                <a:ea typeface="Arial"/>
-                <a:cs typeface="Arial"/>
-              </a:rPr>
-              <a:t>Type one word</a:t>
-            </a:r>
-          </a:p>
-          <a:p xmlns:a="http://schemas.openxmlformats.org/drawingml/2006/main">
-            <a:pPr>
-              <a:defRPr sz="1500" b="0">
-                <a:solidFill>
-                  <a:srgbClr val="FFFFFF"/>
-                </a:solidFill>
-                <a:latin typeface="Arial"/>
-                <a:ea typeface="Arial"/>
-                <a:cs typeface="Arial"/>
-              </a:defRPr>
-            </a:pPr>
-            <a:r>
-              <a:rPr sz="1500" b="0">
-                <a:solidFill>
-                  <a:srgbClr val="FFFFFF"/>
-                </a:solidFill>
-                <a:latin typeface="Arial"/>
-                <a:ea typeface="Arial"/>
-                <a:cs typeface="Arial"/>
-              </a:rPr>
-              <a:t>or a letter in chat.</a:t>
+              <a:t>Type one word in chat.</a:t>
             </a:r>
           </a:p>
         </p:txBody>
@@ -7140,21 +6178,25 @@
     </p:spTree>
     <p:extLst>
       <p:ext uri="{BB962C8B-B14F-4D97-AF65-F5344CB8AC3E}">
-        <p14:creationId xmlns:p14="http://schemas.microsoft.com/office/powerpoint/2010/main" val="224359827"/>
+        <p14:creationId xmlns:p14="http://schemas.microsoft.com/office/powerpoint/2010/main" val="449196952"/>
       </p:ext>
     </p:extLst>
   </p:cSld>
+  <p:clrMapOvr>
+    <a:masterClrMapping/>
+  </p:clrMapOvr>
 </p:sld>
 </file>
 
 <file path=ppt/slides/slide6.xml><?xml version="1.0" encoding="utf-8"?>
-<p:sld xmlns:p="http://schemas.openxmlformats.org/presentationml/2006/main">
+<p:sld xmlns:a="http://schemas.openxmlformats.org/drawingml/2006/main" xmlns:r="http://schemas.openxmlformats.org/officeDocument/2006/relationships" xmlns:p="http://schemas.openxmlformats.org/presentationml/2006/main">
   <p:cSld>
     <p:bg>
       <p:bgPr>
-        <a:solidFill xmlns:a="http://schemas.openxmlformats.org/drawingml/2006/main">
+        <a:solidFill>
           <a:srgbClr val="EEECE1"/>
         </a:solidFill>
+        <a:effectLst/>
       </p:bgPr>
     </p:bg>
     <p:spTree>
@@ -7164,40 +6206,45 @@
         <p:nvPr/>
       </p:nvGrpSpPr>
       <p:grpSpPr>
-        <a:xfrm xmlns:a="http://schemas.openxmlformats.org/drawingml/2006/main"/>
+        <a:xfrm>
+          <a:off x="0" y="0"/>
+          <a:ext cx="0" cy="0"/>
+          <a:chOff x="0" y="0"/>
+          <a:chExt cx="0" cy="0"/>
+        </a:xfrm>
       </p:grpSpPr>
       <p:sp>
         <p:nvSpPr>
           <p:cNvPr id="2" name="TextBox 1">
-            <a:extLst xmlns:a="http://schemas.openxmlformats.org/drawingml/2006/main">
-              <a:ext uri="{FF2B5EF4-FFF2-40B4-BE49-F238E27FC236}">
-                <a16:creationId xmlns:a16="http://schemas.microsoft.com/office/drawing/2014/main" id="{910625D8-42DC-4BF5-95F6-EED9731FFEF4}"/>
-              </a:ext>
-            </a:extLst>
-          </p:cNvPr>
-          <p:cNvSpPr>
-            <a:spLocks xmlns:a="http://schemas.openxmlformats.org/drawingml/2006/main" noGrp="1"/>
+            <a:extLst>
+              <a:ext uri="{FF2B5EF4-FFF2-40B4-BE49-F238E27FC236}">
+                <a16:creationId xmlns:a16="http://schemas.microsoft.com/office/drawing/2014/main" id="{73CB5428-8DE3-420A-8F53-F2E8D4E5733F}"/>
+              </a:ext>
+            </a:extLst>
+          </p:cNvPr>
+          <p:cNvSpPr>
+            <a:spLocks noGrp="1"/>
           </p:cNvSpPr>
           <p:nvPr/>
         </p:nvSpPr>
         <p:spPr>
-          <a:xfrm xmlns:a="http://schemas.openxmlformats.org/drawingml/2006/main">
-            <a:off x="640080" y="457200"/>
-            <a:ext cx="10881360" cy="1188720"/>
+          <a:xfrm>
+            <a:off x="640080" y="640080"/>
+            <a:ext cx="10881360" cy="914400"/>
           </a:xfrm>
-          <a:prstGeom xmlns:a="http://schemas.openxmlformats.org/drawingml/2006/main" prst="rect">
+          <a:prstGeom prst="rect">
             <a:avLst/>
           </a:prstGeom>
-          <a:noFill xmlns:a="http://schemas.openxmlformats.org/drawingml/2006/main"/>
+          <a:noFill/>
         </p:spPr>
         <p:txBody>
-          <a:bodyPr xmlns:a="http://schemas.openxmlformats.org/drawingml/2006/main" wrap="square" lIns="0" tIns="0" rIns="0" bIns="0">
+          <a:bodyPr wrap="square" lIns="0" tIns="0" rIns="0" bIns="0">
             <a:spAutoFit/>
           </a:bodyPr>
-          <a:lstStyle xmlns:a="http://schemas.openxmlformats.org/drawingml/2006/main"/>
-          <a:p xmlns:a="http://schemas.openxmlformats.org/drawingml/2006/main">
-            <a:r>
-              <a:rPr sz="3000" b="1" i="0">
+          <a:lstStyle/>
+          <a:p>
+            <a:r>
+              <a:rPr sz="2900" b="1" i="0">
                 <a:solidFill>
                   <a:srgbClr val="1F2120"/>
                 </a:solidFill>
@@ -7205,109 +6252,295 @@
                 <a:ea typeface="Arial Black"/>
                 <a:cs typeface="Arial Black"/>
               </a:rPr>
-              <a:t>Do this at your desk today</a:t>
-            </a:r>
-          </a:p>
-          <a:p xmlns:a="http://schemas.openxmlformats.org/drawingml/2006/main">
+              <a:t>The week, in numbers</a:t>
+            </a:r>
+          </a:p>
+        </p:txBody>
+      </p:sp>
+      <p:sp>
+        <p:nvSpPr>
+          <p:cNvPr id="3" name="TextBox 2">
+            <a:extLst>
+              <a:ext uri="{FF2B5EF4-FFF2-40B4-BE49-F238E27FC236}">
+                <a16:creationId xmlns:a16="http://schemas.microsoft.com/office/drawing/2014/main" id="{FA04EB0E-7D63-45F1-8148-D9F29F37A121}"/>
+              </a:ext>
+            </a:extLst>
+          </p:cNvPr>
+          <p:cNvSpPr>
+            <a:spLocks noGrp="1"/>
+          </p:cNvSpPr>
+          <p:nvPr/>
+        </p:nvSpPr>
+        <p:spPr>
+          <a:xfrm>
+            <a:off x="640080" y="2468880"/>
+            <a:ext cx="2446020" cy="2560320"/>
+          </a:xfrm>
+          <a:prstGeom prst="rect">
+            <a:avLst/>
+          </a:prstGeom>
+          <a:noFill/>
+        </p:spPr>
+        <p:txBody>
+          <a:bodyPr wrap="square" lIns="0" tIns="0" rIns="0" bIns="0">
+            <a:spAutoFit/>
+          </a:bodyPr>
+          <a:lstStyle/>
+          <a:p>
+            <a:r>
+              <a:rPr sz="5800" b="1" i="0">
+                <a:solidFill>
+                  <a:srgbClr val="CF3338"/>
+                </a:solidFill>
+                <a:latin typeface="Arial Black"/>
+                <a:ea typeface="Arial Black"/>
+                <a:cs typeface="Arial Black"/>
+              </a:rPr>
+              <a:t>5</a:t>
+            </a:r>
+          </a:p>
+          <a:p>
             <a:pPr>
               <a:spcBef>
-                <a:spcPts val="400"/>
+                <a:spcPts val="600"/>
               </a:spcBef>
               <a:buNone/>
             </a:pPr>
             <a:r>
-              <a:rPr sz="1500" b="0" i="1">
-                <a:solidFill>
-                  <a:srgbClr val="CF3338"/>
+              <a:rPr sz="1500" b="0" i="0">
+                <a:solidFill>
+                  <a:srgbClr val="707070"/>
                 </a:solidFill>
                 <a:latin typeface="Arial"/>
                 <a:ea typeface="Arial"/>
                 <a:cs typeface="Arial"/>
               </a:rPr>
-              <a:t>Choose one small win</a:t>
-            </a:r>
-          </a:p>
-        </p:txBody>
-      </p:sp>
-      <p:sp>
-        <p:nvSpPr>
-          <p:cNvPr id="3" name="TextBox 2">
-            <a:extLst xmlns:a="http://schemas.openxmlformats.org/drawingml/2006/main">
-              <a:ext uri="{FF2B5EF4-FFF2-40B4-BE49-F238E27FC236}">
-                <a16:creationId xmlns:a16="http://schemas.microsoft.com/office/drawing/2014/main" id="{ECA26EED-30E7-41B6-9151-E51722E720C5}"/>
-              </a:ext>
-            </a:extLst>
-          </p:cNvPr>
-          <p:cNvSpPr>
-            <a:spLocks xmlns:a="http://schemas.openxmlformats.org/drawingml/2006/main" noGrp="1"/>
+              <a:t>twenty-minute wins</a:t>
+            </a:r>
+          </a:p>
+        </p:txBody>
+      </p:sp>
+      <p:sp>
+        <p:nvSpPr>
+          <p:cNvPr id="4" name="TextBox 3">
+            <a:extLst>
+              <a:ext uri="{FF2B5EF4-FFF2-40B4-BE49-F238E27FC236}">
+                <a16:creationId xmlns:a16="http://schemas.microsoft.com/office/drawing/2014/main" id="{82150078-312D-4949-8427-97E410C887D4}"/>
+              </a:ext>
+            </a:extLst>
+          </p:cNvPr>
+          <p:cNvSpPr>
+            <a:spLocks noGrp="1"/>
           </p:cNvSpPr>
           <p:nvPr/>
         </p:nvSpPr>
         <p:spPr>
-          <a:xfrm xmlns:a="http://schemas.openxmlformats.org/drawingml/2006/main">
-            <a:off x="640080" y="1783080"/>
-            <a:ext cx="10881360" cy="2409825"/>
+          <a:xfrm>
+            <a:off x="3360420" y="2468880"/>
+            <a:ext cx="2446020" cy="2560320"/>
           </a:xfrm>
-          <a:prstGeom xmlns:a="http://schemas.openxmlformats.org/drawingml/2006/main" prst="rect">
+          <a:prstGeom prst="rect">
             <a:avLst/>
           </a:prstGeom>
-          <a:noFill xmlns:a="http://schemas.openxmlformats.org/drawingml/2006/main"/>
+          <a:noFill/>
         </p:spPr>
         <p:txBody>
-          <a:bodyPr xmlns:a="http://schemas.openxmlformats.org/drawingml/2006/main" wrap="square" lIns="0" tIns="0" rIns="0" bIns="0">
+          <a:bodyPr wrap="square" lIns="0" tIns="0" rIns="0" bIns="0">
             <a:spAutoFit/>
           </a:bodyPr>
-          <a:lstStyle xmlns:a="http://schemas.openxmlformats.org/drawingml/2006/main"/>
-          <a:p xmlns:a="http://schemas.openxmlformats.org/drawingml/2006/main">
+          <a:lstStyle/>
+          <a:p>
+            <a:r>
+              <a:rPr sz="5800" b="1" i="0">
+                <a:solidFill>
+                  <a:srgbClr val="CF3338"/>
+                </a:solidFill>
+                <a:latin typeface="Arial Black"/>
+                <a:ea typeface="Arial Black"/>
+                <a:cs typeface="Arial Black"/>
+              </a:rPr>
+              <a:t>0</a:t>
+            </a:r>
+          </a:p>
+          <a:p>
             <a:pPr>
-              <a:spcAft>
-                <a:spcPts val="700"/>
-              </a:spcAft>
-              <a:buNone/>
-            </a:pPr>
-            <a:r>
-              <a:rPr sz="1200" b="1" i="0">
-                <a:solidFill>
-                  <a:srgbClr val="CF3338"/>
+              <a:spcBef>
+                <a:spcPts val="600"/>
+              </a:spcBef>
+              <a:buNone/>
+            </a:pPr>
+            <a:r>
+              <a:rPr sz="1500" b="0" i="0">
+                <a:solidFill>
+                  <a:srgbClr val="707070"/>
                 </a:solidFill>
                 <a:latin typeface="Arial"/>
                 <a:ea typeface="Arial"/>
                 <a:cs typeface="Arial"/>
               </a:rPr>
-              <a:t>• </a:t>
-            </a:r>
-            <a:r>
-              <a:rPr sz="1600" b="0" i="0">
-                <a:solidFill>
-                  <a:srgbClr val="1F2120"/>
+              <a:t>Copilot licenses needed</a:t>
+            </a:r>
+          </a:p>
+        </p:txBody>
+      </p:sp>
+      <p:sp>
+        <p:nvSpPr>
+          <p:cNvPr id="5" name="TextBox 4">
+            <a:extLst>
+              <a:ext uri="{FF2B5EF4-FFF2-40B4-BE49-F238E27FC236}">
+                <a16:creationId xmlns:a16="http://schemas.microsoft.com/office/drawing/2014/main" id="{B28D41EA-8EF2-4DD7-87AA-BBAF51B8EF50}"/>
+              </a:ext>
+            </a:extLst>
+          </p:cNvPr>
+          <p:cNvSpPr>
+            <a:spLocks noGrp="1"/>
+          </p:cNvSpPr>
+          <p:nvPr/>
+        </p:nvSpPr>
+        <p:spPr>
+          <a:xfrm>
+            <a:off x="6080760" y="2468880"/>
+            <a:ext cx="2446020" cy="2560320"/>
+          </a:xfrm>
+          <a:prstGeom prst="rect">
+            <a:avLst/>
+          </a:prstGeom>
+          <a:noFill/>
+        </p:spPr>
+        <p:txBody>
+          <a:bodyPr wrap="square" lIns="0" tIns="0" rIns="0" bIns="0">
+            <a:spAutoFit/>
+          </a:bodyPr>
+          <a:lstStyle/>
+          <a:p>
+            <a:r>
+              <a:rPr sz="5800" b="1" i="0">
+                <a:solidFill>
+                  <a:srgbClr val="CF3338"/>
+                </a:solidFill>
+                <a:latin typeface="Arial Black"/>
+                <a:ea typeface="Arial Black"/>
+                <a:cs typeface="Arial Black"/>
+              </a:rPr>
+              <a:t>$0</a:t>
+            </a:r>
+          </a:p>
+          <a:p>
+            <a:pPr>
+              <a:spcBef>
+                <a:spcPts val="600"/>
+              </a:spcBef>
+              <a:buNone/>
+            </a:pPr>
+            <a:r>
+              <a:rPr sz="1500" b="0" i="0">
+                <a:solidFill>
+                  <a:srgbClr val="707070"/>
                 </a:solidFill>
                 <a:latin typeface="Arial"/>
                 <a:ea typeface="Arial"/>
                 <a:cs typeface="Arial"/>
               </a:rPr>
-              <a:t>TASK: Add one clear sentence saying what you want the tool to do.</a:t>
-            </a:r>
-          </a:p>
-          <a:p xmlns:a="http://schemas.openxmlformats.org/drawingml/2006/main">
+              <a:t>spent on tools</a:t>
+            </a:r>
+          </a:p>
+        </p:txBody>
+      </p:sp>
+      <p:sp>
+        <p:nvSpPr>
+          <p:cNvPr id="6" name="TextBox 5">
+            <a:extLst>
+              <a:ext uri="{FF2B5EF4-FFF2-40B4-BE49-F238E27FC236}">
+                <a16:creationId xmlns:a16="http://schemas.microsoft.com/office/drawing/2014/main" id="{DE735D06-9442-4481-8C82-9A651E22BB7F}"/>
+              </a:ext>
+            </a:extLst>
+          </p:cNvPr>
+          <p:cNvSpPr>
+            <a:spLocks noGrp="1"/>
+          </p:cNvSpPr>
+          <p:nvPr/>
+        </p:nvSpPr>
+        <p:spPr>
+          <a:xfrm>
+            <a:off x="8801100" y="2468880"/>
+            <a:ext cx="2446020" cy="2560320"/>
+          </a:xfrm>
+          <a:prstGeom prst="rect">
+            <a:avLst/>
+          </a:prstGeom>
+          <a:noFill/>
+        </p:spPr>
+        <p:txBody>
+          <a:bodyPr wrap="square" lIns="0" tIns="0" rIns="0" bIns="0">
+            <a:spAutoFit/>
+          </a:bodyPr>
+          <a:lstStyle/>
+          <a:p>
+            <a:r>
+              <a:rPr sz="5800" b="1" i="0">
+                <a:solidFill>
+                  <a:srgbClr val="CF3338"/>
+                </a:solidFill>
+                <a:latin typeface="Arial Black"/>
+                <a:ea typeface="Arial Black"/>
+                <a:cs typeface="Arial Black"/>
+              </a:rPr>
+              <a:t>1</a:t>
+            </a:r>
+          </a:p>
+          <a:p>
             <a:pPr>
-              <a:spcAft>
-                <a:spcPts val="700"/>
-              </a:spcAft>
-              <a:buNone/>
-            </a:pPr>
-            <a:r>
-              <a:rPr sz="1200" b="1" i="0">
-                <a:solidFill>
-                  <a:srgbClr val="CF3338"/>
+              <a:spcBef>
+                <a:spcPts val="600"/>
+              </a:spcBef>
+              <a:buNone/>
+            </a:pPr>
+            <a:r>
+              <a:rPr sz="1500" b="0" i="0">
+                <a:solidFill>
+                  <a:srgbClr val="707070"/>
                 </a:solidFill>
                 <a:latin typeface="Arial"/>
                 <a:ea typeface="Arial"/>
                 <a:cs typeface="Arial"/>
               </a:rPr>
-              <a:t>• </a:t>
-            </a:r>
-            <a:r>
-              <a:rPr sz="1600" b="0" i="0">
+              <a:t>ugly export, fully tamed</a:t>
+            </a:r>
+          </a:p>
+        </p:txBody>
+      </p:sp>
+      <p:sp>
+        <p:nvSpPr>
+          <p:cNvPr id="7" name="TextBox 6">
+            <a:extLst>
+              <a:ext uri="{FF2B5EF4-FFF2-40B4-BE49-F238E27FC236}">
+                <a16:creationId xmlns:a16="http://schemas.microsoft.com/office/drawing/2014/main" id="{B0117597-CCE8-48BA-AB1B-E01B7A1CC390}"/>
+              </a:ext>
+            </a:extLst>
+          </p:cNvPr>
+          <p:cNvSpPr>
+            <a:spLocks noGrp="1"/>
+          </p:cNvSpPr>
+          <p:nvPr/>
+        </p:nvSpPr>
+        <p:spPr>
+          <a:xfrm>
+            <a:off x="640080" y="5486400"/>
+            <a:ext cx="10881360" cy="822960"/>
+          </a:xfrm>
+          <a:prstGeom prst="rect">
+            <a:avLst/>
+          </a:prstGeom>
+          <a:noFill/>
+        </p:spPr>
+        <p:txBody>
+          <a:bodyPr wrap="square" lIns="0" tIns="0" rIns="0" bIns="0">
+            <a:spAutoFit/>
+          </a:bodyPr>
+          <a:lstStyle/>
+          <a:p>
+            <a:r>
+              <a:rPr sz="1500" b="0" i="1">
                 <a:solidFill>
                   <a:srgbClr val="1F2120"/>
                 </a:solidFill>
@@ -7315,249 +6548,7 @@
                 <a:ea typeface="Arial"/>
                 <a:cs typeface="Arial"/>
               </a:rPr>
-              <a:t>FORMAT: Say how to return the answer, such as three bullets or a table.</a:t>
-            </a:r>
-          </a:p>
-          <a:p xmlns:a="http://schemas.openxmlformats.org/drawingml/2006/main">
-            <a:pPr>
-              <a:spcAft>
-                <a:spcPts val="700"/>
-              </a:spcAft>
-              <a:buNone/>
-            </a:pPr>
-            <a:r>
-              <a:rPr sz="1200" b="1" i="0">
-                <a:solidFill>
-                  <a:srgbClr val="CF3338"/>
-                </a:solidFill>
-                <a:latin typeface="Arial"/>
-                <a:ea typeface="Arial"/>
-                <a:cs typeface="Arial"/>
-              </a:rPr>
-              <a:t>• </a:t>
-            </a:r>
-            <a:r>
-              <a:rPr sz="1600" b="0" i="0">
-                <a:solidFill>
-                  <a:srgbClr val="1F2120"/>
-                </a:solidFill>
-                <a:latin typeface="Arial"/>
-                <a:ea typeface="Arial"/>
-                <a:cs typeface="Arial"/>
-              </a:rPr>
-              <a:t>Choose one change, run the prompt, and check the answer.</a:t>
-            </a:r>
-          </a:p>
-        </p:txBody>
-      </p:sp>
-      <p:sp>
-        <p:nvSpPr>
-          <p:cNvPr id="4" name="Chat prompt panel">
-            <a:extLst xmlns:a="http://schemas.openxmlformats.org/drawingml/2006/main">
-              <a:ext uri="{FF2B5EF4-FFF2-40B4-BE49-F238E27FC236}">
-                <a16:creationId xmlns:a16="http://schemas.microsoft.com/office/drawing/2014/main" id="{A61D0635-E16F-4564-9CFA-05C2DF90BB9C}"/>
-              </a:ext>
-            </a:extLst>
-          </p:cNvPr>
-          <p:cNvSpPr>
-            <a:spLocks xmlns:a="http://schemas.openxmlformats.org/drawingml/2006/main" noGrp="1"/>
-          </p:cNvSpPr>
-          <p:nvPr/>
-        </p:nvSpPr>
-        <p:spPr>
-          <a:xfrm xmlns:a="http://schemas.openxmlformats.org/drawingml/2006/main">
-            <a:off x="638175" y="4476750"/>
-            <a:ext cx="10896600" cy="1352550"/>
-          </a:xfrm>
-          <a:prstGeom xmlns:a="http://schemas.openxmlformats.org/drawingml/2006/main" prst="rect">
-            <a:avLst/>
-          </a:prstGeom>
-          <a:solidFill xmlns:a="http://schemas.openxmlformats.org/drawingml/2006/main">
-            <a:srgbClr val="1F2120"/>
-          </a:solidFill>
-          <a:ln xmlns:a="http://schemas.openxmlformats.org/drawingml/2006/main" w="0">
-            <a:noFill/>
-          </a:ln>
-        </p:spPr>
-        <p:txBody>
-          <a:bodyPr xmlns:a="http://schemas.openxmlformats.org/drawingml/2006/main" wrap="square" lIns="0" tIns="0" rIns="0" bIns="0">
-            <a:noAutofit/>
-          </a:bodyPr>
-          <a:lstStyle xmlns:a="http://schemas.openxmlformats.org/drawingml/2006/main"/>
-          <a:p xmlns:a="http://schemas.openxmlformats.org/drawingml/2006/main">
-            <a:r>
-              <a:t/>
-            </a:r>
-          </a:p>
-        </p:txBody>
-      </p:sp>
-      <p:sp>
-        <p:nvSpPr>
-          <p:cNvPr id="5" name="Chat question">
-            <a:extLst xmlns:a="http://schemas.openxmlformats.org/drawingml/2006/main">
-              <a:ext uri="{FF2B5EF4-FFF2-40B4-BE49-F238E27FC236}">
-                <a16:creationId xmlns:a16="http://schemas.microsoft.com/office/drawing/2014/main" id="{C351DB70-E657-4C80-92ED-6431AA8F05F6}"/>
-              </a:ext>
-            </a:extLst>
-          </p:cNvPr>
-          <p:cNvSpPr>
-            <a:spLocks xmlns:a="http://schemas.openxmlformats.org/drawingml/2006/main" noGrp="1"/>
-          </p:cNvSpPr>
-          <p:nvPr/>
-        </p:nvSpPr>
-        <p:spPr>
-          <a:xfrm xmlns:a="http://schemas.openxmlformats.org/drawingml/2006/main">
-            <a:off x="857250" y="4619625"/>
-            <a:ext cx="10429875" cy="381000"/>
-          </a:xfrm>
-          <a:prstGeom xmlns:a="http://schemas.openxmlformats.org/drawingml/2006/main" prst="rect">
-            <a:avLst/>
-          </a:prstGeom>
-          <a:noFill xmlns:a="http://schemas.openxmlformats.org/drawingml/2006/main"/>
-          <a:ln xmlns:a="http://schemas.openxmlformats.org/drawingml/2006/main" w="0">
-            <a:noFill/>
-          </a:ln>
-        </p:spPr>
-        <p:txBody>
-          <a:bodyPr xmlns:a="http://schemas.openxmlformats.org/drawingml/2006/main" wrap="square" lIns="0" tIns="0" rIns="0" bIns="0">
-            <a:noAutofit/>
-          </a:bodyPr>
-          <a:lstStyle xmlns:a="http://schemas.openxmlformats.org/drawingml/2006/main"/>
-          <a:p xmlns:a="http://schemas.openxmlformats.org/drawingml/2006/main">
-            <a:pPr>
-              <a:defRPr sz="2100" b="1">
-                <a:solidFill>
-                  <a:srgbClr val="FFFFFF"/>
-                </a:solidFill>
-                <a:latin typeface="Arial"/>
-                <a:ea typeface="Arial"/>
-                <a:cs typeface="Arial"/>
-              </a:defRPr>
-            </a:pPr>
-            <a:r>
-              <a:rPr sz="2100" b="1">
-                <a:solidFill>
-                  <a:srgbClr val="FFFFFF"/>
-                </a:solidFill>
-                <a:latin typeface="Arial"/>
-                <a:ea typeface="Arial"/>
-                <a:cs typeface="Arial"/>
-              </a:rPr>
-              <a:t>What will you add to your next prompt?</a:t>
-            </a:r>
-          </a:p>
-        </p:txBody>
-      </p:sp>
-      <p:sp>
-        <p:nvSpPr>
-          <p:cNvPr id="6" name="Chat choices">
-            <a:extLst xmlns:a="http://schemas.openxmlformats.org/drawingml/2006/main">
-              <a:ext uri="{FF2B5EF4-FFF2-40B4-BE49-F238E27FC236}">
-                <a16:creationId xmlns:a16="http://schemas.microsoft.com/office/drawing/2014/main" id="{8F746660-22C5-4E5B-8DE1-15619F58A0FF}"/>
-              </a:ext>
-            </a:extLst>
-          </p:cNvPr>
-          <p:cNvSpPr>
-            <a:spLocks xmlns:a="http://schemas.openxmlformats.org/drawingml/2006/main" noGrp="1"/>
-          </p:cNvSpPr>
-          <p:nvPr/>
-        </p:nvSpPr>
-        <p:spPr>
-          <a:xfrm xmlns:a="http://schemas.openxmlformats.org/drawingml/2006/main">
-            <a:off x="857250" y="5086350"/>
-            <a:ext cx="6858000" cy="419100"/>
-          </a:xfrm>
-          <a:prstGeom xmlns:a="http://schemas.openxmlformats.org/drawingml/2006/main" prst="rect">
-            <a:avLst/>
-          </a:prstGeom>
-          <a:noFill xmlns:a="http://schemas.openxmlformats.org/drawingml/2006/main"/>
-          <a:ln xmlns:a="http://schemas.openxmlformats.org/drawingml/2006/main" w="0">
-            <a:noFill/>
-          </a:ln>
-        </p:spPr>
-        <p:txBody>
-          <a:bodyPr xmlns:a="http://schemas.openxmlformats.org/drawingml/2006/main" wrap="square" lIns="0" tIns="0" rIns="0" bIns="0">
-            <a:noAutofit/>
-          </a:bodyPr>
-          <a:lstStyle xmlns:a="http://schemas.openxmlformats.org/drawingml/2006/main"/>
-          <a:p xmlns:a="http://schemas.openxmlformats.org/drawingml/2006/main">
-            <a:pPr>
-              <a:defRPr sz="2400" b="1">
-                <a:solidFill>
-                  <a:srgbClr val="FFFFFF"/>
-                </a:solidFill>
-                <a:latin typeface="Arial"/>
-                <a:ea typeface="Arial"/>
-                <a:cs typeface="Arial"/>
-              </a:defRPr>
-            </a:pPr>
-            <a:r>
-              <a:rPr sz="2400" b="1">
-                <a:solidFill>
-                  <a:srgbClr val="FFFFFF"/>
-                </a:solidFill>
-                <a:latin typeface="Arial"/>
-                <a:ea typeface="Arial"/>
-                <a:cs typeface="Arial"/>
-              </a:rPr>
-              <a:t>TASK / FORMAT</a:t>
-            </a:r>
-          </a:p>
-        </p:txBody>
-      </p:sp>
-      <p:sp>
-        <p:nvSpPr>
-          <p:cNvPr id="7" name="Chat instruction">
-            <a:extLst xmlns:a="http://schemas.openxmlformats.org/drawingml/2006/main">
-              <a:ext uri="{FF2B5EF4-FFF2-40B4-BE49-F238E27FC236}">
-                <a16:creationId xmlns:a16="http://schemas.microsoft.com/office/drawing/2014/main" id="{19E8D802-EBBE-4DFA-B414-67EB9E16D2FC}"/>
-              </a:ext>
-            </a:extLst>
-          </p:cNvPr>
-          <p:cNvSpPr>
-            <a:spLocks xmlns:a="http://schemas.openxmlformats.org/drawingml/2006/main" noGrp="1"/>
-          </p:cNvSpPr>
-          <p:nvPr/>
-        </p:nvSpPr>
-        <p:spPr>
-          <a:xfrm xmlns:a="http://schemas.openxmlformats.org/drawingml/2006/main">
-            <a:off x="8143875" y="5219700"/>
-            <a:ext cx="3048000" cy="400050"/>
-          </a:xfrm>
-          <a:prstGeom xmlns:a="http://schemas.openxmlformats.org/drawingml/2006/main" prst="rect">
-            <a:avLst/>
-          </a:prstGeom>
-          <a:noFill xmlns:a="http://schemas.openxmlformats.org/drawingml/2006/main"/>
-          <a:ln xmlns:a="http://schemas.openxmlformats.org/drawingml/2006/main" w="0">
-            <a:noFill/>
-          </a:ln>
-        </p:spPr>
-        <p:txBody>
-          <a:bodyPr xmlns:a="http://schemas.openxmlformats.org/drawingml/2006/main" wrap="square" lIns="0" tIns="0" rIns="0" bIns="0">
-            <a:noAutofit/>
-          </a:bodyPr>
-          <a:lstStyle xmlns:a="http://schemas.openxmlformats.org/drawingml/2006/main"/>
-          <a:p xmlns:a="http://schemas.openxmlformats.org/drawingml/2006/main">
-            <a:pPr>
-              <a:defRPr sz="1425" b="0">
-                <a:solidFill>
-                  <a:srgbClr val="FFFFFF"/>
-                </a:solidFill>
-                <a:latin typeface="Arial"/>
-                <a:ea typeface="Arial"/>
-                <a:cs typeface="Arial"/>
-              </a:defRPr>
-            </a:pPr>
-            <a:r>
-              <a:rPr sz="1425" b="0">
-                <a:solidFill>
-                  <a:srgbClr val="FFFFFF"/>
-                </a:solidFill>
-                <a:latin typeface="Arial"/>
-                <a:ea typeface="Arial"/>
-                <a:cs typeface="Arial"/>
-              </a:rPr>
-              <a:t>Type one word in chat.</a:t>
+              <a:t>Flash Fill. Tables. Power Query. Python. Markdown. Availability varies by Excel setup.</a:t>
             </a:r>
           </a:p>
         </p:txBody>
@@ -7565,21 +6556,25 @@
     </p:spTree>
     <p:extLst>
       <p:ext uri="{BB962C8B-B14F-4D97-AF65-F5344CB8AC3E}">
-        <p14:creationId xmlns:p14="http://schemas.microsoft.com/office/powerpoint/2010/main" val="449196952"/>
+        <p14:creationId xmlns:p14="http://schemas.microsoft.com/office/powerpoint/2010/main" val="982033497"/>
       </p:ext>
     </p:extLst>
   </p:cSld>
+  <p:clrMapOvr>
+    <a:masterClrMapping/>
+  </p:clrMapOvr>
 </p:sld>
 </file>
 
 <file path=ppt/slides/slide7.xml><?xml version="1.0" encoding="utf-8"?>
-<p:sld xmlns:p="http://schemas.openxmlformats.org/presentationml/2006/main">
+<p:sld xmlns:a="http://schemas.openxmlformats.org/drawingml/2006/main" xmlns:r="http://schemas.openxmlformats.org/officeDocument/2006/relationships" xmlns:p="http://schemas.openxmlformats.org/presentationml/2006/main">
   <p:cSld>
     <p:bg>
       <p:bgPr>
-        <a:solidFill xmlns:a="http://schemas.openxmlformats.org/drawingml/2006/main">
+        <a:solidFill>
           <a:srgbClr val="EEECE1"/>
         </a:solidFill>
+        <a:effectLst/>
       </p:bgPr>
     </p:bg>
     <p:spTree>
@@ -7589,40 +6584,45 @@
         <p:nvPr/>
       </p:nvGrpSpPr>
       <p:grpSpPr>
-        <a:xfrm xmlns:a="http://schemas.openxmlformats.org/drawingml/2006/main"/>
+        <a:xfrm>
+          <a:off x="0" y="0"/>
+          <a:ext cx="0" cy="0"/>
+          <a:chOff x="0" y="0"/>
+          <a:chExt cx="0" cy="0"/>
+        </a:xfrm>
       </p:grpSpPr>
       <p:sp>
         <p:nvSpPr>
           <p:cNvPr id="2" name="TextBox 1">
-            <a:extLst xmlns:a="http://schemas.openxmlformats.org/drawingml/2006/main">
-              <a:ext uri="{FF2B5EF4-FFF2-40B4-BE49-F238E27FC236}">
-                <a16:creationId xmlns:a16="http://schemas.microsoft.com/office/drawing/2014/main" id="{73CB5428-8DE3-420A-8F53-F2E8D4E5733F}"/>
-              </a:ext>
-            </a:extLst>
-          </p:cNvPr>
-          <p:cNvSpPr>
-            <a:spLocks xmlns:a="http://schemas.openxmlformats.org/drawingml/2006/main" noGrp="1"/>
+            <a:extLst>
+              <a:ext uri="{FF2B5EF4-FFF2-40B4-BE49-F238E27FC236}">
+                <a16:creationId xmlns:a16="http://schemas.microsoft.com/office/drawing/2014/main" id="{75ED4722-C23E-416A-ACBB-4B49D9C923B3}"/>
+              </a:ext>
+            </a:extLst>
+          </p:cNvPr>
+          <p:cNvSpPr>
+            <a:spLocks noGrp="1"/>
           </p:cNvSpPr>
           <p:nvPr/>
         </p:nvSpPr>
         <p:spPr>
-          <a:xfrm xmlns:a="http://schemas.openxmlformats.org/drawingml/2006/main">
-            <a:off x="640080" y="640080"/>
-            <a:ext cx="10881360" cy="914400"/>
+          <a:xfrm>
+            <a:off x="640080" y="457200"/>
+            <a:ext cx="10881360" cy="1005840"/>
           </a:xfrm>
-          <a:prstGeom xmlns:a="http://schemas.openxmlformats.org/drawingml/2006/main" prst="rect">
+          <a:prstGeom prst="rect">
             <a:avLst/>
           </a:prstGeom>
-          <a:noFill xmlns:a="http://schemas.openxmlformats.org/drawingml/2006/main"/>
+          <a:noFill/>
         </p:spPr>
         <p:txBody>
-          <a:bodyPr xmlns:a="http://schemas.openxmlformats.org/drawingml/2006/main" wrap="square" lIns="0" tIns="0" rIns="0" bIns="0">
+          <a:bodyPr wrap="square" lIns="0" tIns="0" rIns="0" bIns="0">
             <a:spAutoFit/>
           </a:bodyPr>
-          <a:lstStyle xmlns:a="http://schemas.openxmlformats.org/drawingml/2006/main"/>
-          <a:p xmlns:a="http://schemas.openxmlformats.org/drawingml/2006/main">
-            <a:r>
-              <a:rPr sz="2900" b="1" i="0">
+          <a:lstStyle/>
+          <a:p>
+            <a:r>
+              <a:rPr sz="3000" b="1" i="0">
                 <a:solidFill>
                   <a:srgbClr val="1F2120"/>
                 </a:solidFill>
@@ -7630,43 +6630,118 @@
                 <a:ea typeface="Arial Black"/>
                 <a:cs typeface="Arial Black"/>
               </a:rPr>
-              <a:t>The week, in numbers</a:t>
-            </a:r>
-          </a:p>
-        </p:txBody>
-      </p:sp>
-      <p:sp>
-        <p:nvSpPr>
-          <p:cNvPr id="3" name="TextBox 2">
-            <a:extLst xmlns:a="http://schemas.openxmlformats.org/drawingml/2006/main">
-              <a:ext uri="{FF2B5EF4-FFF2-40B4-BE49-F238E27FC236}">
-                <a16:creationId xmlns:a16="http://schemas.microsoft.com/office/drawing/2014/main" id="{FA04EB0E-7D63-45F1-8148-D9F29F37A121}"/>
-              </a:ext>
-            </a:extLst>
-          </p:cNvPr>
-          <p:cNvSpPr>
-            <a:spLocks xmlns:a="http://schemas.openxmlformats.org/drawingml/2006/main" noGrp="1"/>
+              <a:t>Where to go from here</a:t>
+            </a:r>
+          </a:p>
+          <a:p>
+            <a:pPr>
+              <a:spcBef>
+                <a:spcPts val="300"/>
+              </a:spcBef>
+              <a:buNone/>
+            </a:pPr>
+            <a:r>
+              <a:rPr sz="1500" b="0" i="1">
+                <a:solidFill>
+                  <a:srgbClr val="CF3338"/>
+                </a:solidFill>
+                <a:latin typeface="Arial"/>
+                <a:ea typeface="Arial"/>
+                <a:cs typeface="Arial"/>
+              </a:rPr>
+              <a:t>Two paths, and they stack</a:t>
+            </a:r>
+          </a:p>
+        </p:txBody>
+      </p:sp>
+      <p:sp>
+        <p:nvSpPr>
+          <p:cNvPr id="3" name="Rounded Rectangle 2">
+            <a:extLst>
+              <a:ext uri="{FF2B5EF4-FFF2-40B4-BE49-F238E27FC236}">
+                <a16:creationId xmlns:a16="http://schemas.microsoft.com/office/drawing/2014/main" id="{A6F52750-31EF-486E-A310-1B4531F1D2F0}"/>
+              </a:ext>
+            </a:extLst>
+          </p:cNvPr>
+          <p:cNvSpPr>
+            <a:spLocks noGrp="1"/>
           </p:cNvSpPr>
           <p:nvPr/>
         </p:nvSpPr>
         <p:spPr>
-          <a:xfrm xmlns:a="http://schemas.openxmlformats.org/drawingml/2006/main">
-            <a:off x="640080" y="2468880"/>
-            <a:ext cx="2446020" cy="2560320"/>
+          <a:xfrm>
+            <a:off x="640080" y="1828800"/>
+            <a:ext cx="5212080" cy="4389120"/>
           </a:xfrm>
-          <a:prstGeom xmlns:a="http://schemas.openxmlformats.org/drawingml/2006/main" prst="rect">
+          <a:prstGeom prst="roundRect">
             <a:avLst/>
           </a:prstGeom>
-          <a:noFill xmlns:a="http://schemas.openxmlformats.org/drawingml/2006/main"/>
+          <a:solidFill>
+            <a:srgbClr val="FFFFFF"/>
+          </a:solidFill>
+          <a:ln w="19050">
+            <a:solidFill>
+              <a:srgbClr val="CF3338"/>
+            </a:solidFill>
+          </a:ln>
         </p:spPr>
-        <p:txBody>
-          <a:bodyPr xmlns:a="http://schemas.openxmlformats.org/drawingml/2006/main" wrap="square" lIns="0" tIns="0" rIns="0" bIns="0">
+        <p:style>
+          <a:lnRef idx="1">
+            <a:schemeClr val="accent1"/>
+          </a:lnRef>
+          <a:fillRef idx="3">
+            <a:schemeClr val="accent1"/>
+          </a:fillRef>
+          <a:effectRef idx="2">
+            <a:schemeClr val="accent1"/>
+          </a:effectRef>
+          <a:fontRef idx="minor">
+            <a:schemeClr val="lt1"/>
+          </a:fontRef>
+        </p:style>
+        <p:txBody>
+          <a:bodyPr anchor="ctr"/>
+          <a:lstStyle/>
+          <a:p>
+            <a:pPr algn="ctr">
+              <a:buNone/>
+            </a:pPr>
+            <a:endParaRPr/>
+          </a:p>
+        </p:txBody>
+      </p:sp>
+      <p:sp>
+        <p:nvSpPr>
+          <p:cNvPr id="4" name="TextBox 3">
+            <a:extLst>
+              <a:ext uri="{FF2B5EF4-FFF2-40B4-BE49-F238E27FC236}">
+                <a16:creationId xmlns:a16="http://schemas.microsoft.com/office/drawing/2014/main" id="{1CE3A10F-FAC5-4A32-AA7B-074CA9D614D7}"/>
+              </a:ext>
+            </a:extLst>
+          </p:cNvPr>
+          <p:cNvSpPr>
+            <a:spLocks noGrp="1"/>
+          </p:cNvSpPr>
+          <p:nvPr/>
+        </p:nvSpPr>
+        <p:spPr>
+          <a:xfrm>
+            <a:off x="960120" y="2057400"/>
+            <a:ext cx="4617720" cy="3931920"/>
+          </a:xfrm>
+          <a:prstGeom prst="rect">
+            <a:avLst/>
+          </a:prstGeom>
+          <a:noFill/>
+        </p:spPr>
+        <p:txBody>
+          <a:bodyPr wrap="square" lIns="0" tIns="0" rIns="0" bIns="0">
             <a:spAutoFit/>
           </a:bodyPr>
-          <a:lstStyle xmlns:a="http://schemas.openxmlformats.org/drawingml/2006/main"/>
-          <a:p xmlns:a="http://schemas.openxmlformats.org/drawingml/2006/main">
-            <a:r>
-              <a:rPr sz="5800" b="1" i="0">
+          <a:lstStyle/>
+          <a:p>
+            <a:r>
+              <a:rPr sz="1800" b="1" i="0">
                 <a:solidFill>
                   <a:srgbClr val="CF3338"/>
                 </a:solidFill>
@@ -7674,62 +6749,189 @@
                 <a:ea typeface="Arial Black"/>
                 <a:cs typeface="Arial Black"/>
               </a:rPr>
-              <a:t>5</a:t>
-            </a:r>
-          </a:p>
-          <a:p xmlns:a="http://schemas.openxmlformats.org/drawingml/2006/main">
+              <a:t>Keep the momentum</a:t>
+            </a:r>
+          </a:p>
+          <a:p>
             <a:pPr>
               <a:spcBef>
-                <a:spcPts val="600"/>
+                <a:spcPts val="700"/>
               </a:spcBef>
               <a:buNone/>
             </a:pPr>
             <a:r>
-              <a:rPr sz="1500" b="0" i="0">
-                <a:solidFill>
-                  <a:srgbClr val="707070"/>
+              <a:rPr sz="1100" b="1" i="0">
+                <a:solidFill>
+                  <a:srgbClr val="CF3338"/>
                 </a:solidFill>
                 <a:latin typeface="Arial"/>
                 <a:ea typeface="Arial"/>
                 <a:cs typeface="Arial"/>
               </a:rPr>
-              <a:t>twenty-minute wins</a:t>
-            </a:r>
-          </a:p>
-        </p:txBody>
-      </p:sp>
-      <p:sp>
-        <p:nvSpPr>
-          <p:cNvPr id="4" name="TextBox 3">
-            <a:extLst xmlns:a="http://schemas.openxmlformats.org/drawingml/2006/main">
-              <a:ext uri="{FF2B5EF4-FFF2-40B4-BE49-F238E27FC236}">
-                <a16:creationId xmlns:a16="http://schemas.microsoft.com/office/drawing/2014/main" id="{82150078-312D-4949-8427-97E410C887D4}"/>
-              </a:ext>
-            </a:extLst>
-          </p:cNvPr>
-          <p:cNvSpPr>
-            <a:spLocks xmlns:a="http://schemas.openxmlformats.org/drawingml/2006/main" noGrp="1"/>
+              <a:t>• </a:t>
+            </a:r>
+            <a:r>
+              <a:rPr sz="1400" b="0" i="0">
+                <a:solidFill>
+                  <a:srgbClr val="1F2120"/>
+                </a:solidFill>
+                <a:latin typeface="Arial"/>
+                <a:ea typeface="Arial"/>
+                <a:cs typeface="Arial"/>
+              </a:rPr>
+              <a:t>Replays of all five sessions live in the membership vault.</a:t>
+            </a:r>
+          </a:p>
+          <a:p>
+            <a:pPr>
+              <a:spcBef>
+                <a:spcPts val="700"/>
+              </a:spcBef>
+              <a:buNone/>
+            </a:pPr>
+            <a:r>
+              <a:rPr sz="1100" b="1" i="0">
+                <a:solidFill>
+                  <a:srgbClr val="CF3338"/>
+                </a:solidFill>
+                <a:latin typeface="Arial"/>
+                <a:ea typeface="Arial"/>
+                <a:cs typeface="Arial"/>
+              </a:rPr>
+              <a:t>• </a:t>
+            </a:r>
+            <a:r>
+              <a:rPr sz="1400" b="0" i="0">
+                <a:solidFill>
+                  <a:srgbClr val="1F2120"/>
+                </a:solidFill>
+                <a:latin typeface="Arial"/>
+                <a:ea typeface="Arial"/>
+                <a:cs typeface="Arial"/>
+              </a:rPr>
+              <a:t>Ten dollars a month, cancel anytime, full back catalog included.</a:t>
+            </a:r>
+          </a:p>
+          <a:p>
+            <a:pPr>
+              <a:spcBef>
+                <a:spcPts val="700"/>
+              </a:spcBef>
+              <a:buNone/>
+            </a:pPr>
+            <a:r>
+              <a:rPr sz="1100" b="1" i="0">
+                <a:solidFill>
+                  <a:srgbClr val="CF3338"/>
+                </a:solidFill>
+                <a:latin typeface="Arial"/>
+                <a:ea typeface="Arial"/>
+                <a:cs typeface="Arial"/>
+              </a:rPr>
+              <a:t>• </a:t>
+            </a:r>
+            <a:r>
+              <a:rPr sz="1400" b="0" i="0">
+                <a:solidFill>
+                  <a:srgbClr val="1F2120"/>
+                </a:solidFill>
+                <a:latin typeface="Arial"/>
+                <a:ea typeface="Arial"/>
+                <a:cs typeface="Arial"/>
+              </a:rPr>
+              <a:t>Rewatch the demos with the files in front of you.</a:t>
+            </a:r>
+          </a:p>
+        </p:txBody>
+      </p:sp>
+      <p:sp>
+        <p:nvSpPr>
+          <p:cNvPr id="5" name="Rounded Rectangle 4">
+            <a:extLst>
+              <a:ext uri="{FF2B5EF4-FFF2-40B4-BE49-F238E27FC236}">
+                <a16:creationId xmlns:a16="http://schemas.microsoft.com/office/drawing/2014/main" id="{67176FB7-7EFE-41F5-8F4E-71412DDF430B}"/>
+              </a:ext>
+            </a:extLst>
+          </p:cNvPr>
+          <p:cNvSpPr>
+            <a:spLocks noGrp="1"/>
           </p:cNvSpPr>
           <p:nvPr/>
         </p:nvSpPr>
         <p:spPr>
-          <a:xfrm xmlns:a="http://schemas.openxmlformats.org/drawingml/2006/main">
-            <a:off x="3360420" y="2468880"/>
-            <a:ext cx="2446020" cy="2560320"/>
+          <a:xfrm>
+            <a:off x="6400800" y="1828800"/>
+            <a:ext cx="5212080" cy="4389120"/>
           </a:xfrm>
-          <a:prstGeom xmlns:a="http://schemas.openxmlformats.org/drawingml/2006/main" prst="rect">
+          <a:prstGeom prst="roundRect">
             <a:avLst/>
           </a:prstGeom>
-          <a:noFill xmlns:a="http://schemas.openxmlformats.org/drawingml/2006/main"/>
+          <a:solidFill>
+            <a:srgbClr val="FFFFFF"/>
+          </a:solidFill>
+          <a:ln w="19050">
+            <a:solidFill>
+              <a:srgbClr val="CF3338"/>
+            </a:solidFill>
+          </a:ln>
         </p:spPr>
-        <p:txBody>
-          <a:bodyPr xmlns:a="http://schemas.openxmlformats.org/drawingml/2006/main" wrap="square" lIns="0" tIns="0" rIns="0" bIns="0">
+        <p:style>
+          <a:lnRef idx="1">
+            <a:schemeClr val="accent1"/>
+          </a:lnRef>
+          <a:fillRef idx="3">
+            <a:schemeClr val="accent1"/>
+          </a:fillRef>
+          <a:effectRef idx="2">
+            <a:schemeClr val="accent1"/>
+          </a:effectRef>
+          <a:fontRef idx="minor">
+            <a:schemeClr val="lt1"/>
+          </a:fontRef>
+        </p:style>
+        <p:txBody>
+          <a:bodyPr anchor="ctr"/>
+          <a:lstStyle/>
+          <a:p>
+            <a:pPr algn="ctr">
+              <a:buNone/>
+            </a:pPr>
+            <a:endParaRPr/>
+          </a:p>
+        </p:txBody>
+      </p:sp>
+      <p:sp>
+        <p:nvSpPr>
+          <p:cNvPr id="6" name="TextBox 5">
+            <a:extLst>
+              <a:ext uri="{FF2B5EF4-FFF2-40B4-BE49-F238E27FC236}">
+                <a16:creationId xmlns:a16="http://schemas.microsoft.com/office/drawing/2014/main" id="{E9BC8E41-3B95-4A2D-98E1-9B55F98A01A8}"/>
+              </a:ext>
+            </a:extLst>
+          </p:cNvPr>
+          <p:cNvSpPr>
+            <a:spLocks noGrp="1"/>
+          </p:cNvSpPr>
+          <p:nvPr/>
+        </p:nvSpPr>
+        <p:spPr>
+          <a:xfrm>
+            <a:off x="6720840" y="2057400"/>
+            <a:ext cx="4617720" cy="3931920"/>
+          </a:xfrm>
+          <a:prstGeom prst="rect">
+            <a:avLst/>
+          </a:prstGeom>
+          <a:noFill/>
+        </p:spPr>
+        <p:txBody>
+          <a:bodyPr wrap="square" lIns="0" tIns="0" rIns="0" bIns="0">
             <a:spAutoFit/>
           </a:bodyPr>
-          <a:lstStyle xmlns:a="http://schemas.openxmlformats.org/drawingml/2006/main"/>
-          <a:p xmlns:a="http://schemas.openxmlformats.org/drawingml/2006/main">
-            <a:r>
-              <a:rPr sz="5800" b="1" i="0">
+          <a:lstStyle/>
+          <a:p>
+            <a:r>
+              <a:rPr sz="1800" b="1" i="0">
                 <a:solidFill>
                   <a:srgbClr val="CF3338"/>
                 </a:solidFill>
@@ -7737,188 +6939,59 @@
                 <a:ea typeface="Arial Black"/>
                 <a:cs typeface="Arial Black"/>
               </a:rPr>
-              <a:t>0</a:t>
-            </a:r>
-          </a:p>
-          <a:p xmlns:a="http://schemas.openxmlformats.org/drawingml/2006/main">
+              <a:t>Go deeper in December</a:t>
+            </a:r>
+          </a:p>
+          <a:p>
             <a:pPr>
               <a:spcBef>
-                <a:spcPts val="600"/>
+                <a:spcPts val="700"/>
               </a:spcBef>
               <a:buNone/>
             </a:pPr>
             <a:r>
-              <a:rPr sz="1500" b="0" i="0">
-                <a:solidFill>
-                  <a:srgbClr val="707070"/>
+              <a:rPr sz="1100" b="1" i="0">
+                <a:solidFill>
+                  <a:srgbClr val="CF3338"/>
                 </a:solidFill>
                 <a:latin typeface="Arial"/>
                 <a:ea typeface="Arial"/>
                 <a:cs typeface="Arial"/>
               </a:rPr>
-              <a:t>Copilot licenses needed</a:t>
-            </a:r>
-          </a:p>
-        </p:txBody>
-      </p:sp>
-      <p:sp>
-        <p:nvSpPr>
-          <p:cNvPr id="5" name="TextBox 4">
-            <a:extLst xmlns:a="http://schemas.openxmlformats.org/drawingml/2006/main">
-              <a:ext uri="{FF2B5EF4-FFF2-40B4-BE49-F238E27FC236}">
-                <a16:creationId xmlns:a16="http://schemas.microsoft.com/office/drawing/2014/main" id="{B28D41EA-8EF2-4DD7-87AA-BBAF51B8EF50}"/>
-              </a:ext>
-            </a:extLst>
-          </p:cNvPr>
-          <p:cNvSpPr>
-            <a:spLocks xmlns:a="http://schemas.openxmlformats.org/drawingml/2006/main" noGrp="1"/>
-          </p:cNvSpPr>
-          <p:nvPr/>
-        </p:nvSpPr>
-        <p:spPr>
-          <a:xfrm xmlns:a="http://schemas.openxmlformats.org/drawingml/2006/main">
-            <a:off x="6080760" y="2468880"/>
-            <a:ext cx="2446020" cy="2560320"/>
-          </a:xfrm>
-          <a:prstGeom xmlns:a="http://schemas.openxmlformats.org/drawingml/2006/main" prst="rect">
-            <a:avLst/>
-          </a:prstGeom>
-          <a:noFill xmlns:a="http://schemas.openxmlformats.org/drawingml/2006/main"/>
-        </p:spPr>
-        <p:txBody>
-          <a:bodyPr xmlns:a="http://schemas.openxmlformats.org/drawingml/2006/main" wrap="square" lIns="0" tIns="0" rIns="0" bIns="0">
-            <a:spAutoFit/>
-          </a:bodyPr>
-          <a:lstStyle xmlns:a="http://schemas.openxmlformats.org/drawingml/2006/main"/>
-          <a:p xmlns:a="http://schemas.openxmlformats.org/drawingml/2006/main">
-            <a:r>
-              <a:rPr sz="5800" b="1" i="0">
-                <a:solidFill>
-                  <a:srgbClr val="CF3338"/>
-                </a:solidFill>
-                <a:latin typeface="Arial Black"/>
-                <a:ea typeface="Arial Black"/>
-                <a:cs typeface="Arial Black"/>
-              </a:rPr>
-              <a:t>$0</a:t>
-            </a:r>
-          </a:p>
-          <a:p xmlns:a="http://schemas.openxmlformats.org/drawingml/2006/main">
-            <a:pPr>
-              <a:spcBef>
-                <a:spcPts val="600"/>
-              </a:spcBef>
-              <a:buNone/>
-            </a:pPr>
-            <a:r>
-              <a:rPr sz="1500" b="0" i="0">
-                <a:solidFill>
-                  <a:srgbClr val="707070"/>
+              <a:t>• </a:t>
+            </a:r>
+            <a:r>
+              <a:rPr sz="1400" b="0" i="0">
+                <a:solidFill>
+                  <a:srgbClr val="1F2120"/>
                 </a:solidFill>
                 <a:latin typeface="Arial"/>
                 <a:ea typeface="Arial"/>
                 <a:cs typeface="Arial"/>
               </a:rPr>
-              <a:t>spent on tools</a:t>
-            </a:r>
-          </a:p>
-        </p:txBody>
-      </p:sp>
-      <p:sp>
-        <p:nvSpPr>
-          <p:cNvPr id="6" name="TextBox 5">
-            <a:extLst xmlns:a="http://schemas.openxmlformats.org/drawingml/2006/main">
-              <a:ext uri="{FF2B5EF4-FFF2-40B4-BE49-F238E27FC236}">
-                <a16:creationId xmlns:a16="http://schemas.microsoft.com/office/drawing/2014/main" id="{DE735D06-9442-4481-8C82-9A651E22BB7F}"/>
-              </a:ext>
-            </a:extLst>
-          </p:cNvPr>
-          <p:cNvSpPr>
-            <a:spLocks xmlns:a="http://schemas.openxmlformats.org/drawingml/2006/main" noGrp="1"/>
-          </p:cNvSpPr>
-          <p:nvPr/>
-        </p:nvSpPr>
-        <p:spPr>
-          <a:xfrm xmlns:a="http://schemas.openxmlformats.org/drawingml/2006/main">
-            <a:off x="8801100" y="2468880"/>
-            <a:ext cx="2446020" cy="2560320"/>
-          </a:xfrm>
-          <a:prstGeom xmlns:a="http://schemas.openxmlformats.org/drawingml/2006/main" prst="rect">
-            <a:avLst/>
-          </a:prstGeom>
-          <a:noFill xmlns:a="http://schemas.openxmlformats.org/drawingml/2006/main"/>
-        </p:spPr>
-        <p:txBody>
-          <a:bodyPr xmlns:a="http://schemas.openxmlformats.org/drawingml/2006/main" wrap="square" lIns="0" tIns="0" rIns="0" bIns="0">
-            <a:spAutoFit/>
-          </a:bodyPr>
-          <a:lstStyle xmlns:a="http://schemas.openxmlformats.org/drawingml/2006/main"/>
-          <a:p xmlns:a="http://schemas.openxmlformats.org/drawingml/2006/main">
-            <a:r>
-              <a:rPr sz="5800" b="1" i="0">
-                <a:solidFill>
-                  <a:srgbClr val="CF3338"/>
-                </a:solidFill>
-                <a:latin typeface="Arial Black"/>
-                <a:ea typeface="Arial Black"/>
-                <a:cs typeface="Arial Black"/>
-              </a:rPr>
-              <a:t>1</a:t>
-            </a:r>
-          </a:p>
-          <a:p xmlns:a="http://schemas.openxmlformats.org/drawingml/2006/main">
+              <a:t>AI for Excel in a Week: five live 60-minute sessions.</a:t>
+            </a:r>
+          </a:p>
+          <a:p>
             <a:pPr>
               <a:spcBef>
-                <a:spcPts val="600"/>
+                <a:spcPts val="700"/>
               </a:spcBef>
               <a:buNone/>
             </a:pPr>
             <a:r>
-              <a:rPr sz="1500" b="0" i="0">
-                <a:solidFill>
-                  <a:srgbClr val="707070"/>
+              <a:rPr sz="1100" b="1" i="0">
+                <a:solidFill>
+                  <a:srgbClr val="CF3338"/>
                 </a:solidFill>
                 <a:latin typeface="Arial"/>
                 <a:ea typeface="Arial"/>
                 <a:cs typeface="Arial"/>
               </a:rPr>
-              <a:t>ugly export, fully tamed</a:t>
-            </a:r>
-          </a:p>
-        </p:txBody>
-      </p:sp>
-      <p:sp>
-        <p:nvSpPr>
-          <p:cNvPr id="7" name="TextBox 6">
-            <a:extLst xmlns:a="http://schemas.openxmlformats.org/drawingml/2006/main">
-              <a:ext uri="{FF2B5EF4-FFF2-40B4-BE49-F238E27FC236}">
-                <a16:creationId xmlns:a16="http://schemas.microsoft.com/office/drawing/2014/main" id="{B0117597-CCE8-48BA-AB1B-E01B7A1CC390}"/>
-              </a:ext>
-            </a:extLst>
-          </p:cNvPr>
-          <p:cNvSpPr>
-            <a:spLocks xmlns:a="http://schemas.openxmlformats.org/drawingml/2006/main" noGrp="1"/>
-          </p:cNvSpPr>
-          <p:nvPr/>
-        </p:nvSpPr>
-        <p:spPr>
-          <a:xfrm xmlns:a="http://schemas.openxmlformats.org/drawingml/2006/main">
-            <a:off x="640080" y="5486400"/>
-            <a:ext cx="10881360" cy="822960"/>
-          </a:xfrm>
-          <a:prstGeom xmlns:a="http://schemas.openxmlformats.org/drawingml/2006/main" prst="rect">
-            <a:avLst/>
-          </a:prstGeom>
-          <a:noFill xmlns:a="http://schemas.openxmlformats.org/drawingml/2006/main"/>
-        </p:spPr>
-        <p:txBody>
-          <a:bodyPr xmlns:a="http://schemas.openxmlformats.org/drawingml/2006/main" wrap="square" lIns="0" tIns="0" rIns="0" bIns="0">
-            <a:spAutoFit/>
-          </a:bodyPr>
-          <a:lstStyle xmlns:a="http://schemas.openxmlformats.org/drawingml/2006/main"/>
-          <a:p xmlns:a="http://schemas.openxmlformats.org/drawingml/2006/main">
-            <a:r>
-              <a:rPr sz="1500" b="0" i="1">
+              <a:t>• </a:t>
+            </a:r>
+            <a:r>
+              <a:rPr sz="1400" b="0" i="0">
                 <a:solidFill>
                   <a:srgbClr val="1F2120"/>
                 </a:solidFill>
@@ -7926,18 +6999,37 @@
                 <a:ea typeface="Arial"/>
                 <a:cs typeface="Arial"/>
               </a:rPr>
-              <a:t>Flash Fill. Tables. Power Query. Python. Markdown. </a:t>
-            </a:r>
-            <a:r>
-              <a:rPr sz="1500" b="0" i="1">
-                <a:solidFill>
-                  <a:srgbClr val="1F2120"/>
+              <a:t>Everything from this week, hands-on and in depth.</a:t>
+            </a:r>
+          </a:p>
+          <a:p>
+            <a:pPr>
+              <a:spcBef>
+                <a:spcPts val="700"/>
+              </a:spcBef>
+              <a:buNone/>
+            </a:pPr>
+            <a:r>
+              <a:rPr sz="1100" b="1" i="0">
+                <a:solidFill>
+                  <a:srgbClr val="CF3338"/>
                 </a:solidFill>
                 <a:latin typeface="Arial"/>
                 <a:ea typeface="Arial"/>
                 <a:cs typeface="Arial"/>
               </a:rPr>
-              <a:t>Availability varies by Excel setup.</a:t>
+              <a:t>• </a:t>
+            </a:r>
+            <a:r>
+              <a:rPr sz="1400" b="0" i="0">
+                <a:solidFill>
+                  <a:srgbClr val="1F2120"/>
+                </a:solidFill>
+                <a:latin typeface="Arial"/>
+                <a:ea typeface="Arial"/>
+                <a:cs typeface="Arial"/>
+              </a:rPr>
+              <a:t>Registration link lands in tomorrow's thank-you email.</a:t>
             </a:r>
           </a:p>
         </p:txBody>
@@ -7945,21 +7037,25 @@
     </p:spTree>
     <p:extLst>
       <p:ext uri="{BB962C8B-B14F-4D97-AF65-F5344CB8AC3E}">
-        <p14:creationId xmlns:p14="http://schemas.microsoft.com/office/powerpoint/2010/main" val="982033497"/>
+        <p14:creationId xmlns:p14="http://schemas.microsoft.com/office/powerpoint/2010/main" val="1360934625"/>
       </p:ext>
     </p:extLst>
   </p:cSld>
+  <p:clrMapOvr>
+    <a:masterClrMapping/>
+  </p:clrMapOvr>
 </p:sld>
 </file>
 
 <file path=ppt/slides/slide8.xml><?xml version="1.0" encoding="utf-8"?>
-<p:sld xmlns:p="http://schemas.openxmlformats.org/presentationml/2006/main">
+<p:sld xmlns:a="http://schemas.openxmlformats.org/drawingml/2006/main" xmlns:r="http://schemas.openxmlformats.org/officeDocument/2006/relationships" xmlns:p="http://schemas.openxmlformats.org/presentationml/2006/main">
   <p:cSld>
     <p:bg>
       <p:bgPr>
-        <a:solidFill xmlns:a="http://schemas.openxmlformats.org/drawingml/2006/main">
-          <a:srgbClr val="EEECE1"/>
+        <a:solidFill>
+          <a:srgbClr val="C00000"/>
         </a:solidFill>
+        <a:effectLst/>
       </p:bgPr>
     </p:bg>
     <p:spTree>
@@ -7969,521 +7065,56 @@
         <p:nvPr/>
       </p:nvGrpSpPr>
       <p:grpSpPr>
-        <a:xfrm xmlns:a="http://schemas.openxmlformats.org/drawingml/2006/main"/>
+        <a:xfrm>
+          <a:off x="0" y="0"/>
+          <a:ext cx="0" cy="0"/>
+          <a:chOff x="0" y="0"/>
+          <a:chExt cx="0" cy="0"/>
+        </a:xfrm>
       </p:grpSpPr>
       <p:sp>
         <p:nvSpPr>
           <p:cNvPr id="2" name="TextBox 1">
-            <a:extLst xmlns:a="http://schemas.openxmlformats.org/drawingml/2006/main">
-              <a:ext uri="{FF2B5EF4-FFF2-40B4-BE49-F238E27FC236}">
-                <a16:creationId xmlns:a16="http://schemas.microsoft.com/office/drawing/2014/main" id="{75ED4722-C23E-416A-ACBB-4B49D9C923B3}"/>
-              </a:ext>
-            </a:extLst>
-          </p:cNvPr>
-          <p:cNvSpPr>
-            <a:spLocks xmlns:a="http://schemas.openxmlformats.org/drawingml/2006/main" noGrp="1"/>
+            <a:extLst>
+              <a:ext uri="{FF2B5EF4-FFF2-40B4-BE49-F238E27FC236}">
+                <a16:creationId xmlns:a16="http://schemas.microsoft.com/office/drawing/2014/main" id="{50172C39-809E-4C35-B0DF-723952D0096E}"/>
+              </a:ext>
+            </a:extLst>
+          </p:cNvPr>
+          <p:cNvSpPr>
+            <a:spLocks noGrp="1"/>
           </p:cNvSpPr>
           <p:nvPr/>
         </p:nvSpPr>
         <p:spPr>
-          <a:xfrm xmlns:a="http://schemas.openxmlformats.org/drawingml/2006/main">
-            <a:off x="640080" y="457200"/>
-            <a:ext cx="10881360" cy="1005840"/>
+          <a:xfrm>
+            <a:off x="822960" y="2103120"/>
+            <a:ext cx="10515600" cy="2114550"/>
           </a:xfrm>
-          <a:prstGeom xmlns:a="http://schemas.openxmlformats.org/drawingml/2006/main" prst="rect">
+          <a:prstGeom prst="rect">
             <a:avLst/>
           </a:prstGeom>
-          <a:noFill xmlns:a="http://schemas.openxmlformats.org/drawingml/2006/main"/>
+          <a:noFill/>
         </p:spPr>
         <p:txBody>
-          <a:bodyPr xmlns:a="http://schemas.openxmlformats.org/drawingml/2006/main" wrap="square" lIns="0" tIns="0" rIns="0" bIns="0">
+          <a:bodyPr wrap="square" lIns="0" tIns="0" rIns="0" bIns="0">
             <a:spAutoFit/>
           </a:bodyPr>
-          <a:lstStyle xmlns:a="http://schemas.openxmlformats.org/drawingml/2006/main"/>
-          <a:p xmlns:a="http://schemas.openxmlformats.org/drawingml/2006/main">
-            <a:r>
-              <a:rPr sz="3000" b="1" i="0">
-                <a:solidFill>
-                  <a:srgbClr val="1F2120"/>
+          <a:lstStyle/>
+          <a:p>
+            <a:r>
+              <a:rPr sz="1600" b="1" i="0">
+                <a:solidFill>
+                  <a:srgbClr val="FFFFFF"/>
                 </a:solidFill>
                 <a:latin typeface="Arial Black"/>
                 <a:ea typeface="Arial Black"/>
                 <a:cs typeface="Arial Black"/>
               </a:rPr>
-              <a:t>Where to go from here</a:t>
-            </a:r>
-          </a:p>
-          <a:p xmlns:a="http://schemas.openxmlformats.org/drawingml/2006/main">
-            <a:pPr>
-              <a:spcBef>
-                <a:spcPts val="300"/>
-              </a:spcBef>
-              <a:buNone/>
-            </a:pPr>
-            <a:r>
-              <a:rPr sz="1500" b="0" i="1">
-                <a:solidFill>
-                  <a:srgbClr val="CF3338"/>
-                </a:solidFill>
-                <a:latin typeface="Arial"/>
-                <a:ea typeface="Arial"/>
-                <a:cs typeface="Arial"/>
-              </a:rPr>
-              <a:t>Two paths, and they stack</a:t>
-            </a:r>
-          </a:p>
-        </p:txBody>
-      </p:sp>
-      <p:sp>
-        <p:nvSpPr>
-          <p:cNvPr id="3" name="Rounded Rectangle 2">
-            <a:extLst xmlns:a="http://schemas.openxmlformats.org/drawingml/2006/main">
-              <a:ext uri="{FF2B5EF4-FFF2-40B4-BE49-F238E27FC236}">
-                <a16:creationId xmlns:a16="http://schemas.microsoft.com/office/drawing/2014/main" id="{A6F52750-31EF-486E-A310-1B4531F1D2F0}"/>
-              </a:ext>
-            </a:extLst>
-          </p:cNvPr>
-          <p:cNvSpPr>
-            <a:spLocks xmlns:a="http://schemas.openxmlformats.org/drawingml/2006/main" noGrp="1"/>
-          </p:cNvSpPr>
-          <p:nvPr/>
-        </p:nvSpPr>
-        <p:spPr>
-          <a:xfrm xmlns:a="http://schemas.openxmlformats.org/drawingml/2006/main">
-            <a:off x="640080" y="1828800"/>
-            <a:ext cx="5212080" cy="4389120"/>
-          </a:xfrm>
-          <a:prstGeom xmlns:a="http://schemas.openxmlformats.org/drawingml/2006/main" prst="roundRect">
-            <a:avLst/>
-          </a:prstGeom>
-          <a:solidFill xmlns:a="http://schemas.openxmlformats.org/drawingml/2006/main">
-            <a:srgbClr val="FFFFFF"/>
-          </a:solidFill>
-          <a:ln xmlns:a="http://schemas.openxmlformats.org/drawingml/2006/main" w="19050">
-            <a:solidFill>
-              <a:srgbClr val="CF3338"/>
-            </a:solidFill>
-          </a:ln>
-        </p:spPr>
-        <p:style>
-          <a:lnRef xmlns:a="http://schemas.openxmlformats.org/drawingml/2006/main" idx="1">
-            <a:schemeClr val="accent1"/>
-          </a:lnRef>
-          <a:fillRef xmlns:a="http://schemas.openxmlformats.org/drawingml/2006/main" idx="3">
-            <a:schemeClr val="accent1"/>
-          </a:fillRef>
-          <a:effectRef xmlns:a="http://schemas.openxmlformats.org/drawingml/2006/main" idx="2">
-            <a:schemeClr val="accent1"/>
-          </a:effectRef>
-          <a:fontRef xmlns:a="http://schemas.openxmlformats.org/drawingml/2006/main" idx="minor">
-            <a:schemeClr val="lt1"/>
-          </a:fontRef>
-        </p:style>
-        <p:txBody>
-          <a:bodyPr xmlns:a="http://schemas.openxmlformats.org/drawingml/2006/main" anchor="ctr"/>
-          <a:lstStyle xmlns:a="http://schemas.openxmlformats.org/drawingml/2006/main"/>
-          <a:p xmlns:a="http://schemas.openxmlformats.org/drawingml/2006/main">
-            <a:pPr algn="ctr">
-              <a:buNone/>
-            </a:pPr>
-          </a:p>
-        </p:txBody>
-      </p:sp>
-      <p:sp>
-        <p:nvSpPr>
-          <p:cNvPr id="4" name="TextBox 3">
-            <a:extLst xmlns:a="http://schemas.openxmlformats.org/drawingml/2006/main">
-              <a:ext uri="{FF2B5EF4-FFF2-40B4-BE49-F238E27FC236}">
-                <a16:creationId xmlns:a16="http://schemas.microsoft.com/office/drawing/2014/main" id="{1CE3A10F-FAC5-4A32-AA7B-074CA9D614D7}"/>
-              </a:ext>
-            </a:extLst>
-          </p:cNvPr>
-          <p:cNvSpPr>
-            <a:spLocks xmlns:a="http://schemas.openxmlformats.org/drawingml/2006/main" noGrp="1"/>
-          </p:cNvSpPr>
-          <p:nvPr/>
-        </p:nvSpPr>
-        <p:spPr>
-          <a:xfrm xmlns:a="http://schemas.openxmlformats.org/drawingml/2006/main">
-            <a:off x="960120" y="2057400"/>
-            <a:ext cx="4617720" cy="3931920"/>
-          </a:xfrm>
-          <a:prstGeom xmlns:a="http://schemas.openxmlformats.org/drawingml/2006/main" prst="rect">
-            <a:avLst/>
-          </a:prstGeom>
-          <a:noFill xmlns:a="http://schemas.openxmlformats.org/drawingml/2006/main"/>
-        </p:spPr>
-        <p:txBody>
-          <a:bodyPr xmlns:a="http://schemas.openxmlformats.org/drawingml/2006/main" wrap="square" lIns="0" tIns="0" rIns="0" bIns="0">
-            <a:spAutoFit/>
-          </a:bodyPr>
-          <a:lstStyle xmlns:a="http://schemas.openxmlformats.org/drawingml/2006/main"/>
-          <a:p xmlns:a="http://schemas.openxmlformats.org/drawingml/2006/main">
-            <a:r>
-              <a:rPr sz="1800" b="1" i="0">
-                <a:solidFill>
-                  <a:srgbClr val="CF3338"/>
-                </a:solidFill>
-                <a:latin typeface="Arial Black"/>
-                <a:ea typeface="Arial Black"/>
-                <a:cs typeface="Arial Black"/>
-              </a:rPr>
-              <a:t>Keep the momentum</a:t>
-            </a:r>
-          </a:p>
-          <a:p xmlns:a="http://schemas.openxmlformats.org/drawingml/2006/main">
-            <a:pPr>
-              <a:spcBef>
-                <a:spcPts val="700"/>
-              </a:spcBef>
-              <a:buNone/>
-            </a:pPr>
-            <a:r>
-              <a:rPr sz="1100" b="1" i="0">
-                <a:solidFill>
-                  <a:srgbClr val="CF3338"/>
-                </a:solidFill>
-                <a:latin typeface="Arial"/>
-                <a:ea typeface="Arial"/>
-                <a:cs typeface="Arial"/>
-              </a:rPr>
-              <a:t>• </a:t>
-            </a:r>
-            <a:r>
-              <a:rPr sz="1400" b="0" i="0">
-                <a:solidFill>
-                  <a:srgbClr val="1F2120"/>
-                </a:solidFill>
-                <a:latin typeface="Arial"/>
-                <a:ea typeface="Arial"/>
-                <a:cs typeface="Arial"/>
-              </a:rPr>
-              <a:t>Replays of all five sessions live in the membership vault.</a:t>
-            </a:r>
-          </a:p>
-          <a:p xmlns:a="http://schemas.openxmlformats.org/drawingml/2006/main">
-            <a:pPr>
-              <a:spcBef>
-                <a:spcPts val="700"/>
-              </a:spcBef>
-              <a:buNone/>
-            </a:pPr>
-            <a:r>
-              <a:rPr sz="1100" b="1" i="0">
-                <a:solidFill>
-                  <a:srgbClr val="CF3338"/>
-                </a:solidFill>
-                <a:latin typeface="Arial"/>
-                <a:ea typeface="Arial"/>
-                <a:cs typeface="Arial"/>
-              </a:rPr>
-              <a:t>• </a:t>
-            </a:r>
-            <a:r>
-              <a:rPr sz="1400" b="0" i="0">
-                <a:solidFill>
-                  <a:srgbClr val="1F2120"/>
-                </a:solidFill>
-                <a:latin typeface="Arial"/>
-                <a:ea typeface="Arial"/>
-                <a:cs typeface="Arial"/>
-              </a:rPr>
-              <a:t>Ten dollars a month, cancel anytime, full back catalog included.</a:t>
-            </a:r>
-          </a:p>
-          <a:p xmlns:a="http://schemas.openxmlformats.org/drawingml/2006/main">
-            <a:pPr>
-              <a:spcBef>
-                <a:spcPts val="700"/>
-              </a:spcBef>
-              <a:buNone/>
-            </a:pPr>
-            <a:r>
-              <a:rPr sz="1100" b="1" i="0">
-                <a:solidFill>
-                  <a:srgbClr val="CF3338"/>
-                </a:solidFill>
-                <a:latin typeface="Arial"/>
-                <a:ea typeface="Arial"/>
-                <a:cs typeface="Arial"/>
-              </a:rPr>
-              <a:t>• </a:t>
-            </a:r>
-            <a:r>
-              <a:rPr sz="1400" b="0" i="0">
-                <a:solidFill>
-                  <a:srgbClr val="1F2120"/>
-                </a:solidFill>
-                <a:latin typeface="Arial"/>
-                <a:ea typeface="Arial"/>
-                <a:cs typeface="Arial"/>
-              </a:rPr>
-              <a:t>Rewatch the demos with the files in front of you.</a:t>
-            </a:r>
-          </a:p>
-        </p:txBody>
-      </p:sp>
-      <p:sp>
-        <p:nvSpPr>
-          <p:cNvPr id="5" name="Rounded Rectangle 4">
-            <a:extLst xmlns:a="http://schemas.openxmlformats.org/drawingml/2006/main">
-              <a:ext uri="{FF2B5EF4-FFF2-40B4-BE49-F238E27FC236}">
-                <a16:creationId xmlns:a16="http://schemas.microsoft.com/office/drawing/2014/main" id="{67176FB7-7EFE-41F5-8F4E-71412DDF430B}"/>
-              </a:ext>
-            </a:extLst>
-          </p:cNvPr>
-          <p:cNvSpPr>
-            <a:spLocks xmlns:a="http://schemas.openxmlformats.org/drawingml/2006/main" noGrp="1"/>
-          </p:cNvSpPr>
-          <p:nvPr/>
-        </p:nvSpPr>
-        <p:spPr>
-          <a:xfrm xmlns:a="http://schemas.openxmlformats.org/drawingml/2006/main">
-            <a:off x="6400800" y="1828800"/>
-            <a:ext cx="5212080" cy="4389120"/>
-          </a:xfrm>
-          <a:prstGeom xmlns:a="http://schemas.openxmlformats.org/drawingml/2006/main" prst="roundRect">
-            <a:avLst/>
-          </a:prstGeom>
-          <a:solidFill xmlns:a="http://schemas.openxmlformats.org/drawingml/2006/main">
-            <a:srgbClr val="FFFFFF"/>
-          </a:solidFill>
-          <a:ln xmlns:a="http://schemas.openxmlformats.org/drawingml/2006/main" w="19050">
-            <a:solidFill>
-              <a:srgbClr val="CF3338"/>
-            </a:solidFill>
-          </a:ln>
-        </p:spPr>
-        <p:style>
-          <a:lnRef xmlns:a="http://schemas.openxmlformats.org/drawingml/2006/main" idx="1">
-            <a:schemeClr val="accent1"/>
-          </a:lnRef>
-          <a:fillRef xmlns:a="http://schemas.openxmlformats.org/drawingml/2006/main" idx="3">
-            <a:schemeClr val="accent1"/>
-          </a:fillRef>
-          <a:effectRef xmlns:a="http://schemas.openxmlformats.org/drawingml/2006/main" idx="2">
-            <a:schemeClr val="accent1"/>
-          </a:effectRef>
-          <a:fontRef xmlns:a="http://schemas.openxmlformats.org/drawingml/2006/main" idx="minor">
-            <a:schemeClr val="lt1"/>
-          </a:fontRef>
-        </p:style>
-        <p:txBody>
-          <a:bodyPr xmlns:a="http://schemas.openxmlformats.org/drawingml/2006/main" anchor="ctr"/>
-          <a:lstStyle xmlns:a="http://schemas.openxmlformats.org/drawingml/2006/main"/>
-          <a:p xmlns:a="http://schemas.openxmlformats.org/drawingml/2006/main">
-            <a:pPr algn="ctr">
-              <a:buNone/>
-            </a:pPr>
-          </a:p>
-        </p:txBody>
-      </p:sp>
-      <p:sp>
-        <p:nvSpPr>
-          <p:cNvPr id="6" name="TextBox 5">
-            <a:extLst xmlns:a="http://schemas.openxmlformats.org/drawingml/2006/main">
-              <a:ext uri="{FF2B5EF4-FFF2-40B4-BE49-F238E27FC236}">
-                <a16:creationId xmlns:a16="http://schemas.microsoft.com/office/drawing/2014/main" id="{E9BC8E41-3B95-4A2D-98E1-9B55F98A01A8}"/>
-              </a:ext>
-            </a:extLst>
-          </p:cNvPr>
-          <p:cNvSpPr>
-            <a:spLocks xmlns:a="http://schemas.openxmlformats.org/drawingml/2006/main" noGrp="1"/>
-          </p:cNvSpPr>
-          <p:nvPr/>
-        </p:nvSpPr>
-        <p:spPr>
-          <a:xfrm xmlns:a="http://schemas.openxmlformats.org/drawingml/2006/main">
-            <a:off x="6720840" y="2057400"/>
-            <a:ext cx="4617720" cy="3931920"/>
-          </a:xfrm>
-          <a:prstGeom xmlns:a="http://schemas.openxmlformats.org/drawingml/2006/main" prst="rect">
-            <a:avLst/>
-          </a:prstGeom>
-          <a:noFill xmlns:a="http://schemas.openxmlformats.org/drawingml/2006/main"/>
-        </p:spPr>
-        <p:txBody>
-          <a:bodyPr xmlns:a="http://schemas.openxmlformats.org/drawingml/2006/main" wrap="square" lIns="0" tIns="0" rIns="0" bIns="0">
-            <a:spAutoFit/>
-          </a:bodyPr>
-          <a:lstStyle xmlns:a="http://schemas.openxmlformats.org/drawingml/2006/main"/>
-          <a:p xmlns:a="http://schemas.openxmlformats.org/drawingml/2006/main">
-            <a:r>
-              <a:rPr sz="1800" b="1" i="0">
-                <a:solidFill>
-                  <a:srgbClr val="CF3338"/>
-                </a:solidFill>
-                <a:latin typeface="Arial Black"/>
-                <a:ea typeface="Arial Black"/>
-                <a:cs typeface="Arial Black"/>
-              </a:rPr>
-              <a:t>Go deeper in December</a:t>
-            </a:r>
-          </a:p>
-          <a:p xmlns:a="http://schemas.openxmlformats.org/drawingml/2006/main">
-            <a:pPr>
-              <a:spcBef>
-                <a:spcPts val="700"/>
-              </a:spcBef>
-              <a:buNone/>
-            </a:pPr>
-            <a:r>
-              <a:rPr sz="1100" b="1" i="0">
-                <a:solidFill>
-                  <a:srgbClr val="CF3338"/>
-                </a:solidFill>
-                <a:latin typeface="Arial"/>
-                <a:ea typeface="Arial"/>
-                <a:cs typeface="Arial"/>
-              </a:rPr>
-              <a:t>• </a:t>
-            </a:r>
-            <a:r>
-              <a:rPr sz="1400" b="0" i="0">
-                <a:solidFill>
-                  <a:srgbClr val="1F2120"/>
-                </a:solidFill>
-                <a:latin typeface="Arial"/>
-                <a:ea typeface="Arial"/>
-                <a:cs typeface="Arial"/>
-              </a:rPr>
-              <a:t>AI for Excel in a Week: five live 60-minute sessions.</a:t>
-            </a:r>
-          </a:p>
-          <a:p xmlns:a="http://schemas.openxmlformats.org/drawingml/2006/main">
-            <a:pPr>
-              <a:spcBef>
-                <a:spcPts val="700"/>
-              </a:spcBef>
-              <a:buNone/>
-            </a:pPr>
-            <a:r>
-              <a:rPr sz="1100" b="1" i="0">
-                <a:solidFill>
-                  <a:srgbClr val="CF3338"/>
-                </a:solidFill>
-                <a:latin typeface="Arial"/>
-                <a:ea typeface="Arial"/>
-                <a:cs typeface="Arial"/>
-              </a:rPr>
-              <a:t>• </a:t>
-            </a:r>
-            <a:r>
-              <a:rPr sz="1400" b="0" i="0">
-                <a:solidFill>
-                  <a:srgbClr val="1F2120"/>
-                </a:solidFill>
-                <a:latin typeface="Arial"/>
-                <a:ea typeface="Arial"/>
-                <a:cs typeface="Arial"/>
-              </a:rPr>
-              <a:t>Everything from this week, hands-on and in depth.</a:t>
-            </a:r>
-          </a:p>
-          <a:p xmlns:a="http://schemas.openxmlformats.org/drawingml/2006/main">
-            <a:pPr>
-              <a:spcBef>
-                <a:spcPts val="700"/>
-              </a:spcBef>
-              <a:buNone/>
-            </a:pPr>
-            <a:r>
-              <a:rPr sz="1100" b="1" i="0">
-                <a:solidFill>
-                  <a:srgbClr val="CF3338"/>
-                </a:solidFill>
-                <a:latin typeface="Arial"/>
-                <a:ea typeface="Arial"/>
-                <a:cs typeface="Arial"/>
-              </a:rPr>
-              <a:t>• </a:t>
-            </a:r>
-            <a:r>
-              <a:rPr sz="1400" b="0" i="0">
-                <a:solidFill>
-                  <a:srgbClr val="1F2120"/>
-                </a:solidFill>
-                <a:latin typeface="Arial"/>
-                <a:ea typeface="Arial"/>
-                <a:cs typeface="Arial"/>
-              </a:rPr>
-              <a:t>Registration link lands in tomorrow's thank-you email.</a:t>
-            </a:r>
-          </a:p>
-        </p:txBody>
-      </p:sp>
-    </p:spTree>
-    <p:extLst>
-      <p:ext uri="{BB962C8B-B14F-4D97-AF65-F5344CB8AC3E}">
-        <p14:creationId xmlns:p14="http://schemas.microsoft.com/office/powerpoint/2010/main" val="1360934625"/>
-      </p:ext>
-    </p:extLst>
-  </p:cSld>
-</p:sld>
-</file>
-
-<file path=ppt/slides/slide9.xml><?xml version="1.0" encoding="utf-8"?>
-<p:sld xmlns:p="http://schemas.openxmlformats.org/presentationml/2006/main">
-  <p:cSld>
-    <p:bg>
-      <p:bgPr>
-        <a:solidFill xmlns:a="http://schemas.openxmlformats.org/drawingml/2006/main">
-          <a:srgbClr val="C00000"/>
-        </a:solidFill>
-      </p:bgPr>
-    </p:bg>
-    <p:spTree>
-      <p:nvGrpSpPr>
-        <p:cNvPr id="1" name=""/>
-        <p:cNvGrpSpPr/>
-        <p:nvPr/>
-      </p:nvGrpSpPr>
-      <p:grpSpPr>
-        <a:xfrm xmlns:a="http://schemas.openxmlformats.org/drawingml/2006/main"/>
-      </p:grpSpPr>
-      <p:sp>
-        <p:nvSpPr>
-          <p:cNvPr id="2" name="TextBox 1">
-            <a:extLst xmlns:a="http://schemas.openxmlformats.org/drawingml/2006/main">
-              <a:ext uri="{FF2B5EF4-FFF2-40B4-BE49-F238E27FC236}">
-                <a16:creationId xmlns:a16="http://schemas.microsoft.com/office/drawing/2014/main" id="{50172C39-809E-4C35-B0DF-723952D0096E}"/>
-              </a:ext>
-            </a:extLst>
-          </p:cNvPr>
-          <p:cNvSpPr>
-            <a:spLocks xmlns:a="http://schemas.openxmlformats.org/drawingml/2006/main" noGrp="1"/>
-          </p:cNvSpPr>
-          <p:nvPr/>
-        </p:nvSpPr>
-        <p:spPr>
-          <a:xfrm xmlns:a="http://schemas.openxmlformats.org/drawingml/2006/main">
-            <a:off x="822960" y="2103120"/>
-            <a:ext cx="10515600" cy="2114550"/>
-          </a:xfrm>
-          <a:prstGeom xmlns:a="http://schemas.openxmlformats.org/drawingml/2006/main" prst="rect">
-            <a:avLst/>
-          </a:prstGeom>
-          <a:noFill xmlns:a="http://schemas.openxmlformats.org/drawingml/2006/main"/>
-        </p:spPr>
-        <p:txBody>
-          <a:bodyPr xmlns:a="http://schemas.openxmlformats.org/drawingml/2006/main" wrap="square" lIns="0" tIns="0" rIns="0" bIns="0">
-            <a:spAutoFit/>
-          </a:bodyPr>
-          <a:lstStyle xmlns:a="http://schemas.openxmlformats.org/drawingml/2006/main"/>
-          <a:p xmlns:a="http://schemas.openxmlformats.org/drawingml/2006/main">
-            <a:r>
-              <a:rPr sz="1600" b="1" i="0">
-                <a:solidFill>
-                  <a:srgbClr val="FFFFFF"/>
-                </a:solidFill>
-                <a:latin typeface="Arial Black"/>
-                <a:ea typeface="Arial Black"/>
-                <a:cs typeface="Arial Black"/>
-              </a:rPr>
               <a:t>THANK YOU</a:t>
             </a:r>
           </a:p>
-          <a:p xmlns:a="http://schemas.openxmlformats.org/drawingml/2006/main">
+          <a:p>
             <a:pPr>
               <a:spcBef>
                 <a:spcPts val="800"/>
@@ -8502,7 +7133,7 @@
               <a:t>Five days, five practical wins</a:t>
             </a:r>
           </a:p>
-          <a:p xmlns:a="http://schemas.openxmlformats.org/drawingml/2006/main">
+          <a:p>
             <a:pPr>
               <a:spcBef>
                 <a:spcPts val="1400"/>
@@ -8519,218 +7150,6 @@
                 <a:cs typeface="Arial"/>
               </a:rPr>
               <a:t>Watch your inbox for the thank-you email with links, files, and the December cohort.</a:t>
-            </a:r>
-          </a:p>
-        </p:txBody>
-      </p:sp>
-      <p:sp>
-        <p:nvSpPr>
-          <p:cNvPr id="3" name="Chat prompt panel">
-            <a:extLst xmlns:a="http://schemas.openxmlformats.org/drawingml/2006/main">
-              <a:ext uri="{FF2B5EF4-FFF2-40B4-BE49-F238E27FC236}">
-                <a16:creationId xmlns:a16="http://schemas.microsoft.com/office/drawing/2014/main" id="{D315EC76-7C92-4FA5-AA09-728F8B95BE7D}"/>
-              </a:ext>
-            </a:extLst>
-          </p:cNvPr>
-          <p:cNvSpPr>
-            <a:spLocks xmlns:a="http://schemas.openxmlformats.org/drawingml/2006/main" noGrp="1"/>
-          </p:cNvSpPr>
-          <p:nvPr/>
-        </p:nvSpPr>
-        <p:spPr>
-          <a:xfrm xmlns:a="http://schemas.openxmlformats.org/drawingml/2006/main">
-            <a:off x="638175" y="4476750"/>
-            <a:ext cx="10896600" cy="1352550"/>
-          </a:xfrm>
-          <a:prstGeom xmlns:a="http://schemas.openxmlformats.org/drawingml/2006/main" prst="rect">
-            <a:avLst/>
-          </a:prstGeom>
-          <a:solidFill xmlns:a="http://schemas.openxmlformats.org/drawingml/2006/main">
-            <a:srgbClr val="1F2120"/>
-          </a:solidFill>
-          <a:ln xmlns:a="http://schemas.openxmlformats.org/drawingml/2006/main" w="0">
-            <a:noFill/>
-          </a:ln>
-        </p:spPr>
-        <p:txBody>
-          <a:bodyPr xmlns:a="http://schemas.openxmlformats.org/drawingml/2006/main" wrap="square" lIns="0" tIns="0" rIns="0" bIns="0">
-            <a:noAutofit/>
-          </a:bodyPr>
-          <a:lstStyle xmlns:a="http://schemas.openxmlformats.org/drawingml/2006/main"/>
-          <a:p xmlns:a="http://schemas.openxmlformats.org/drawingml/2006/main">
-            <a:r>
-              <a:t/>
-            </a:r>
-          </a:p>
-        </p:txBody>
-      </p:sp>
-      <p:sp>
-        <p:nvSpPr>
-          <p:cNvPr id="4" name="Chat question">
-            <a:extLst xmlns:a="http://schemas.openxmlformats.org/drawingml/2006/main">
-              <a:ext uri="{FF2B5EF4-FFF2-40B4-BE49-F238E27FC236}">
-                <a16:creationId xmlns:a16="http://schemas.microsoft.com/office/drawing/2014/main" id="{722ACA66-F349-4ABB-8407-968C4E7AB228}"/>
-              </a:ext>
-            </a:extLst>
-          </p:cNvPr>
-          <p:cNvSpPr>
-            <a:spLocks xmlns:a="http://schemas.openxmlformats.org/drawingml/2006/main" noGrp="1"/>
-          </p:cNvSpPr>
-          <p:nvPr/>
-        </p:nvSpPr>
-        <p:spPr>
-          <a:xfrm xmlns:a="http://schemas.openxmlformats.org/drawingml/2006/main">
-            <a:off x="857250" y="4619625"/>
-            <a:ext cx="10429875" cy="381000"/>
-          </a:xfrm>
-          <a:prstGeom xmlns:a="http://schemas.openxmlformats.org/drawingml/2006/main" prst="rect">
-            <a:avLst/>
-          </a:prstGeom>
-          <a:noFill xmlns:a="http://schemas.openxmlformats.org/drawingml/2006/main"/>
-          <a:ln xmlns:a="http://schemas.openxmlformats.org/drawingml/2006/main" w="0">
-            <a:noFill/>
-          </a:ln>
-        </p:spPr>
-        <p:txBody>
-          <a:bodyPr xmlns:a="http://schemas.openxmlformats.org/drawingml/2006/main" wrap="square" lIns="0" tIns="0" rIns="0" bIns="0">
-            <a:noAutofit/>
-          </a:bodyPr>
-          <a:lstStyle xmlns:a="http://schemas.openxmlformats.org/drawingml/2006/main"/>
-          <a:p xmlns:a="http://schemas.openxmlformats.org/drawingml/2006/main">
-            <a:pPr>
-              <a:defRPr sz="2100" b="1">
-                <a:solidFill>
-                  <a:srgbClr val="FFFFFF"/>
-                </a:solidFill>
-                <a:latin typeface="Arial"/>
-                <a:ea typeface="Arial"/>
-                <a:cs typeface="Arial"/>
-              </a:defRPr>
-            </a:pPr>
-            <a:r>
-              <a:rPr sz="2100" b="1">
-                <a:solidFill>
-                  <a:srgbClr val="FFFFFF"/>
-                </a:solidFill>
-                <a:latin typeface="Arial"/>
-                <a:ea typeface="Arial"/>
-                <a:cs typeface="Arial"/>
-              </a:rPr>
-              <a:t>Which part should I revisit?</a:t>
-            </a:r>
-          </a:p>
-        </p:txBody>
-      </p:sp>
-      <p:sp>
-        <p:nvSpPr>
-          <p:cNvPr id="5" name="Chat choices">
-            <a:extLst xmlns:a="http://schemas.openxmlformats.org/drawingml/2006/main">
-              <a:ext uri="{FF2B5EF4-FFF2-40B4-BE49-F238E27FC236}">
-                <a16:creationId xmlns:a16="http://schemas.microsoft.com/office/drawing/2014/main" id="{A8D4034A-8BE4-457C-A7CF-EE199840AFC6}"/>
-              </a:ext>
-            </a:extLst>
-          </p:cNvPr>
-          <p:cNvSpPr>
-            <a:spLocks xmlns:a="http://schemas.openxmlformats.org/drawingml/2006/main" noGrp="1"/>
-          </p:cNvSpPr>
-          <p:nvPr/>
-        </p:nvSpPr>
-        <p:spPr>
-          <a:xfrm xmlns:a="http://schemas.openxmlformats.org/drawingml/2006/main">
-            <a:off x="857250" y="5086350"/>
-            <a:ext cx="6858000" cy="419100"/>
-          </a:xfrm>
-          <a:prstGeom xmlns:a="http://schemas.openxmlformats.org/drawingml/2006/main" prst="rect">
-            <a:avLst/>
-          </a:prstGeom>
-          <a:noFill xmlns:a="http://schemas.openxmlformats.org/drawingml/2006/main"/>
-          <a:ln xmlns:a="http://schemas.openxmlformats.org/drawingml/2006/main" w="0">
-            <a:noFill/>
-          </a:ln>
-        </p:spPr>
-        <p:txBody>
-          <a:bodyPr xmlns:a="http://schemas.openxmlformats.org/drawingml/2006/main" wrap="square" lIns="0" tIns="0" rIns="0" bIns="0">
-            <a:noAutofit/>
-          </a:bodyPr>
-          <a:lstStyle xmlns:a="http://schemas.openxmlformats.org/drawingml/2006/main"/>
-          <a:p xmlns:a="http://schemas.openxmlformats.org/drawingml/2006/main">
-            <a:pPr>
-              <a:defRPr sz="2400" b="1">
-                <a:solidFill>
-                  <a:srgbClr val="FFFFFF"/>
-                </a:solidFill>
-                <a:latin typeface="Arial"/>
-                <a:ea typeface="Arial"/>
-                <a:cs typeface="Arial"/>
-              </a:defRPr>
-            </a:pPr>
-            <a:r>
-              <a:rPr sz="2400" b="1">
-                <a:solidFill>
-                  <a:srgbClr val="FFFFFF"/>
-                </a:solidFill>
-                <a:latin typeface="Arial"/>
-                <a:ea typeface="Arial"/>
-                <a:cs typeface="Arial"/>
-              </a:rPr>
-              <a:t>PROMPT / TABLE</a:t>
-            </a:r>
-          </a:p>
-        </p:txBody>
-      </p:sp>
-      <p:sp>
-        <p:nvSpPr>
-          <p:cNvPr id="6" name="Chat instruction">
-            <a:extLst xmlns:a="http://schemas.openxmlformats.org/drawingml/2006/main">
-              <a:ext uri="{FF2B5EF4-FFF2-40B4-BE49-F238E27FC236}">
-                <a16:creationId xmlns:a16="http://schemas.microsoft.com/office/drawing/2014/main" id="{8CBC55DA-C6C6-4F4C-ADC9-1F6DAB1F79EB}"/>
-              </a:ext>
-            </a:extLst>
-          </p:cNvPr>
-          <p:cNvSpPr>
-            <a:spLocks xmlns:a="http://schemas.openxmlformats.org/drawingml/2006/main" noGrp="1"/>
-          </p:cNvSpPr>
-          <p:nvPr/>
-        </p:nvSpPr>
-        <p:spPr>
-          <a:xfrm xmlns:a="http://schemas.openxmlformats.org/drawingml/2006/main">
-            <a:off x="8143875" y="5219700"/>
-            <a:ext cx="3048000" cy="400050"/>
-          </a:xfrm>
-          <a:prstGeom xmlns:a="http://schemas.openxmlformats.org/drawingml/2006/main" prst="rect">
-            <a:avLst/>
-          </a:prstGeom>
-          <a:noFill xmlns:a="http://schemas.openxmlformats.org/drawingml/2006/main"/>
-          <a:ln xmlns:a="http://schemas.openxmlformats.org/drawingml/2006/main" w="0">
-            <a:noFill/>
-          </a:ln>
-        </p:spPr>
-        <p:txBody>
-          <a:bodyPr xmlns:a="http://schemas.openxmlformats.org/drawingml/2006/main" wrap="square" lIns="0" tIns="0" rIns="0" bIns="0">
-            <a:noAutofit/>
-          </a:bodyPr>
-          <a:lstStyle xmlns:a="http://schemas.openxmlformats.org/drawingml/2006/main"/>
-          <a:p xmlns:a="http://schemas.openxmlformats.org/drawingml/2006/main">
-            <a:pPr>
-              <a:defRPr sz="1425" b="0">
-                <a:solidFill>
-                  <a:srgbClr val="FFFFFF"/>
-                </a:solidFill>
-                <a:latin typeface="Arial"/>
-                <a:ea typeface="Arial"/>
-                <a:cs typeface="Arial"/>
-              </a:defRPr>
-            </a:pPr>
-            <a:r>
-              <a:rPr sz="1425" b="0">
-                <a:solidFill>
-                  <a:srgbClr val="FFFFFF"/>
-                </a:solidFill>
-                <a:latin typeface="Arial"/>
-                <a:ea typeface="Arial"/>
-                <a:cs typeface="Arial"/>
-              </a:rPr>
-              <a:t>A full question is welcome too.</a:t>
             </a:r>
           </a:p>
         </p:txBody>
@@ -8742,6 +7161,9 @@
       </p:ext>
     </p:extLst>
   </p:cSld>
+  <p:clrMapOvr>
+    <a:masterClrMapping/>
+  </p:clrMapOvr>
 </p:sld>
 </file>
 
@@ -9010,5 +7432,277 @@
       </a:bgFillStyleLst>
     </a:fmtScheme>
   </a:themeElements>
+  <a:objectDefaults/>
+  <a:extraClrSchemeLst/>
+</a:theme>
+</file>
+
+<file path=ppt/theme/theme2.xml><?xml version="1.0" encoding="utf-8"?>
+<a:theme xmlns:a="http://schemas.openxmlformats.org/drawingml/2006/main" name="Office Theme">
+  <a:themeElements>
+    <a:clrScheme name="Office">
+      <a:dk1>
+        <a:sysClr val="windowText" lastClr="000000"/>
+      </a:dk1>
+      <a:lt1>
+        <a:sysClr val="window" lastClr="FFFFFF"/>
+      </a:lt1>
+      <a:dk2>
+        <a:srgbClr val="1F497D"/>
+      </a:dk2>
+      <a:lt2>
+        <a:srgbClr val="EEECE1"/>
+      </a:lt2>
+      <a:accent1>
+        <a:srgbClr val="4F81BD"/>
+      </a:accent1>
+      <a:accent2>
+        <a:srgbClr val="C0504D"/>
+      </a:accent2>
+      <a:accent3>
+        <a:srgbClr val="9BBB59"/>
+      </a:accent3>
+      <a:accent4>
+        <a:srgbClr val="8064A2"/>
+      </a:accent4>
+      <a:accent5>
+        <a:srgbClr val="4BACC6"/>
+      </a:accent5>
+      <a:accent6>
+        <a:srgbClr val="F79646"/>
+      </a:accent6>
+      <a:hlink>
+        <a:srgbClr val="0000FF"/>
+      </a:hlink>
+      <a:folHlink>
+        <a:srgbClr val="800080"/>
+      </a:folHlink>
+    </a:clrScheme>
+    <a:fontScheme name="Office">
+      <a:majorFont>
+        <a:latin typeface="Calibri"/>
+        <a:ea typeface=""/>
+        <a:cs typeface=""/>
+        <a:font script="Jpan" typeface="ＭＳ Ｐゴシック"/>
+        <a:font script="Hang" typeface="맑은 고딕"/>
+        <a:font script="Hans" typeface="宋体"/>
+        <a:font script="Hant" typeface="新細明體"/>
+        <a:font script="Arab" typeface="Times New Roman"/>
+        <a:font script="Hebr" typeface="Times New Roman"/>
+        <a:font script="Thai" typeface="Angsana New"/>
+        <a:font script="Ethi" typeface="Nyala"/>
+        <a:font script="Beng" typeface="Vrinda"/>
+        <a:font script="Gujr" typeface="Shruti"/>
+        <a:font script="Khmr" typeface="MoolBoran"/>
+        <a:font script="Knda" typeface="Tunga"/>
+        <a:font script="Guru" typeface="Raavi"/>
+        <a:font script="Cans" typeface="Euphemia"/>
+        <a:font script="Cher" typeface="Plantagenet Cherokee"/>
+        <a:font script="Yiii" typeface="Microsoft Yi Baiti"/>
+        <a:font script="Tibt" typeface="Microsoft Himalaya"/>
+        <a:font script="Thaa" typeface="MV Boli"/>
+        <a:font script="Deva" typeface="Mangal"/>
+        <a:font script="Telu" typeface="Gautami"/>
+        <a:font script="Taml" typeface="Latha"/>
+        <a:font script="Syrc" typeface="Estrangelo Edessa"/>
+        <a:font script="Orya" typeface="Kalinga"/>
+        <a:font script="Mlym" typeface="Kartika"/>
+        <a:font script="Laoo" typeface="DokChampa"/>
+        <a:font script="Sinh" typeface="Iskoola Pota"/>
+        <a:font script="Mong" typeface="Mongolian Baiti"/>
+        <a:font script="Viet" typeface="Times New Roman"/>
+        <a:font script="Uigh" typeface="Microsoft Uighur"/>
+        <a:font script="Geor" typeface="Sylfaen"/>
+      </a:majorFont>
+      <a:minorFont>
+        <a:latin typeface="Calibri"/>
+        <a:ea typeface=""/>
+        <a:cs typeface=""/>
+        <a:font script="Jpan" typeface="ＭＳ Ｐゴシック"/>
+        <a:font script="Hang" typeface="맑은 고딕"/>
+        <a:font script="Hans" typeface="宋体"/>
+        <a:font script="Hant" typeface="新細明體"/>
+        <a:font script="Arab" typeface="Arial"/>
+        <a:font script="Hebr" typeface="Arial"/>
+        <a:font script="Thai" typeface="Cordia New"/>
+        <a:font script="Ethi" typeface="Nyala"/>
+        <a:font script="Beng" typeface="Vrinda"/>
+        <a:font script="Gujr" typeface="Shruti"/>
+        <a:font script="Khmr" typeface="DaunPenh"/>
+        <a:font script="Knda" typeface="Tunga"/>
+        <a:font script="Guru" typeface="Raavi"/>
+        <a:font script="Cans" typeface="Euphemia"/>
+        <a:font script="Cher" typeface="Plantagenet Cherokee"/>
+        <a:font script="Yiii" typeface="Microsoft Yi Baiti"/>
+        <a:font script="Tibt" typeface="Microsoft Himalaya"/>
+        <a:font script="Thaa" typeface="MV Boli"/>
+        <a:font script="Deva" typeface="Mangal"/>
+        <a:font script="Telu" typeface="Gautami"/>
+        <a:font script="Taml" typeface="Latha"/>
+        <a:font script="Syrc" typeface="Estrangelo Edessa"/>
+        <a:font script="Orya" typeface="Kalinga"/>
+        <a:font script="Mlym" typeface="Kartika"/>
+        <a:font script="Laoo" typeface="DokChampa"/>
+        <a:font script="Sinh" typeface="Iskoola Pota"/>
+        <a:font script="Mong" typeface="Mongolian Baiti"/>
+        <a:font script="Viet" typeface="Arial"/>
+        <a:font script="Uigh" typeface="Microsoft Uighur"/>
+        <a:font script="Geor" typeface="Sylfaen"/>
+      </a:minorFont>
+    </a:fontScheme>
+    <a:fmtScheme name="Office">
+      <a:fillStyleLst>
+        <a:solidFill>
+          <a:schemeClr val="phClr"/>
+        </a:solidFill>
+        <a:gradFill rotWithShape="1">
+          <a:gsLst>
+            <a:gs pos="0">
+              <a:schemeClr val="phClr">
+                <a:tint val="50000"/>
+                <a:satMod val="300000"/>
+              </a:schemeClr>
+            </a:gs>
+            <a:gs pos="35000">
+              <a:schemeClr val="phClr">
+                <a:tint val="37000"/>
+                <a:satMod val="300000"/>
+              </a:schemeClr>
+            </a:gs>
+            <a:gs pos="100000">
+              <a:schemeClr val="phClr">
+                <a:tint val="15000"/>
+                <a:satMod val="350000"/>
+              </a:schemeClr>
+            </a:gs>
+          </a:gsLst>
+          <a:lin ang="16200000" scaled="1"/>
+        </a:gradFill>
+        <a:gradFill rotWithShape="1">
+          <a:gsLst>
+            <a:gs pos="0">
+              <a:schemeClr val="phClr">
+                <a:tint val="100000"/>
+                <a:shade val="100000"/>
+                <a:satMod val="130000"/>
+              </a:schemeClr>
+            </a:gs>
+            <a:gs pos="100000">
+              <a:schemeClr val="phClr">
+                <a:tint val="50000"/>
+                <a:shade val="100000"/>
+                <a:satMod val="350000"/>
+              </a:schemeClr>
+            </a:gs>
+          </a:gsLst>
+          <a:lin ang="16200000" scaled="0"/>
+        </a:gradFill>
+      </a:fillStyleLst>
+      <a:lnStyleLst>
+        <a:ln w="9525">
+          <a:solidFill>
+            <a:schemeClr val="phClr">
+              <a:shade val="95000"/>
+              <a:satMod val="105000"/>
+            </a:schemeClr>
+          </a:solidFill>
+          <a:prstDash val="solid"/>
+        </a:ln>
+        <a:ln w="25400">
+          <a:solidFill>
+            <a:schemeClr val="phClr"/>
+          </a:solidFill>
+          <a:prstDash val="solid"/>
+        </a:ln>
+        <a:ln w="38100">
+          <a:solidFill>
+            <a:schemeClr val="phClr"/>
+          </a:solidFill>
+          <a:prstDash val="solid"/>
+        </a:ln>
+      </a:lnStyleLst>
+      <a:effectStyleLst>
+        <a:effectStyle>
+          <a:effectLst>
+            <a:outerShdw blurRad="40000" dist="20000" dir="5400000" rotWithShape="0">
+              <a:srgbClr val="000000">
+                <a:alpha val="38000"/>
+              </a:srgbClr>
+            </a:outerShdw>
+          </a:effectLst>
+        </a:effectStyle>
+        <a:effectStyle>
+          <a:effectLst>
+            <a:outerShdw blurRad="40000" dist="23000" dir="5400000" rotWithShape="0">
+              <a:srgbClr val="000000">
+                <a:alpha val="35000"/>
+              </a:srgbClr>
+            </a:outerShdw>
+          </a:effectLst>
+        </a:effectStyle>
+        <a:effectStyle>
+          <a:effectLst>
+            <a:outerShdw blurRad="40000" dist="23000" dir="5400000" rotWithShape="0">
+              <a:srgbClr val="000000">
+                <a:alpha val="35000"/>
+              </a:srgbClr>
+            </a:outerShdw>
+          </a:effectLst>
+        </a:effectStyle>
+      </a:effectStyleLst>
+      <a:bgFillStyleLst>
+        <a:solidFill>
+          <a:schemeClr val="phClr"/>
+        </a:solidFill>
+        <a:gradFill rotWithShape="1">
+          <a:gsLst>
+            <a:gs pos="0">
+              <a:schemeClr val="phClr">
+                <a:tint val="40000"/>
+                <a:satMod val="350000"/>
+              </a:schemeClr>
+            </a:gs>
+            <a:gs pos="40000">
+              <a:schemeClr val="phClr">
+                <a:tint val="45000"/>
+                <a:shade val="99000"/>
+                <a:satMod val="350000"/>
+              </a:schemeClr>
+            </a:gs>
+            <a:gs pos="100000">
+              <a:schemeClr val="phClr">
+                <a:shade val="20000"/>
+                <a:satMod val="255000"/>
+              </a:schemeClr>
+            </a:gs>
+          </a:gsLst>
+          <a:path path="circle">
+            <a:fillToRect l="50000" t="-80000" r="50000" b="180000"/>
+          </a:path>
+        </a:gradFill>
+        <a:gradFill rotWithShape="1">
+          <a:gsLst>
+            <a:gs pos="0">
+              <a:schemeClr val="phClr">
+                <a:tint val="80000"/>
+                <a:satMod val="300000"/>
+              </a:schemeClr>
+            </a:gs>
+            <a:gs pos="100000">
+              <a:schemeClr val="phClr">
+                <a:shade val="30000"/>
+                <a:satMod val="200000"/>
+              </a:schemeClr>
+            </a:gs>
+          </a:gsLst>
+          <a:path path="circle">
+            <a:fillToRect l="50000" t="50000" r="50000" b="50000"/>
+          </a:path>
+        </a:gradFill>
+      </a:bgFillStyleLst>
+    </a:fmtScheme>
+  </a:themeElements>
+  <a:objectDefaults/>
+  <a:extraClrSchemeLst/>
 </a:theme>
 </file>